--- a/material/[SeSAC_YDP_6] 24_React_Props_State.pptx
+++ b/material/[SeSAC_YDP_6] 24_React_Props_State.pptx
@@ -2,7 +2,7 @@
 <file path=ppt/presentation.xml><?xml version="1.0" encoding="utf-8"?>
 <p:presentation xmlns:a="http://schemas.openxmlformats.org/drawingml/2006/main" xmlns:r="http://schemas.openxmlformats.org/officeDocument/2006/relationships" xmlns:p="http://schemas.openxmlformats.org/presentationml/2006/main" saveSubsetFonts="1">
   <p:sldMasterIdLst>
-    <p:sldMasterId id="2147483673" r:id="rId1"/>
+    <p:sldMasterId id="2147483686" r:id="rId1"/>
   </p:sldMasterIdLst>
   <p:notesMasterIdLst>
     <p:notesMasterId r:id="rId20"/>
@@ -217,7 +217,7 @@
           <a:p>
             <a:fld id="{2EF3F159-7250-4DD4-91C2-13B35D56E1AF}" type="datetimeFigureOut">
               <a:rPr lang="ko-KR" altLang="en-US" smtClean="0"/>
-              <a:t>2023-09-26</a:t>
+              <a:t>2024-07-29</a:t>
             </a:fld>
             <a:endParaRPr lang="ko-KR" altLang="en-US"/>
           </a:p>
@@ -696,22 +696,7 @@
           <a:bodyPr/>
           <a:lstStyle/>
           <a:p>
-            <a:r>
-              <a:rPr lang="en-US" altLang="ko-KR" dirty="0"/>
-              <a:t>ex. </a:t>
-            </a:r>
-            <a:r>
-              <a:rPr lang="ko-KR" altLang="en-US" dirty="0" err="1"/>
-              <a:t>다크</a:t>
-            </a:r>
-            <a:r>
-              <a:rPr lang="en-US" altLang="ko-KR" dirty="0"/>
-              <a:t>/</a:t>
-            </a:r>
-            <a:r>
-              <a:rPr lang="ko-KR" altLang="en-US" dirty="0"/>
-              <a:t>라이트 모드</a:t>
-            </a:r>
+            <a:endParaRPr lang="ko-KR" altLang="en-US"/>
           </a:p>
         </p:txBody>
       </p:sp>
@@ -722,7 +707,7 @@
             <a:spLocks noGrp="1"/>
           </p:cNvSpPr>
           <p:nvPr>
-            <p:ph type="sldNum" sz="quarter" idx="5"/>
+            <p:ph type="sldNum" sz="quarter" idx="10"/>
           </p:nvPr>
         </p:nvSpPr>
         <p:spPr/>
@@ -732,7 +717,7 @@
           <a:p>
             <a:fld id="{C09E5BFC-1559-42F1-8940-AB342D56BF02}" type="slidenum">
               <a:rPr lang="ko-KR" altLang="en-US" smtClean="0"/>
-              <a:t>11</a:t>
+              <a:t>4</a:t>
             </a:fld>
             <a:endParaRPr lang="ko-KR" altLang="en-US"/>
           </a:p>
@@ -741,7 +726,7 @@
     </p:spTree>
     <p:extLst>
       <p:ext uri="{BB962C8B-B14F-4D97-AF65-F5344CB8AC3E}">
-        <p14:creationId xmlns:p14="http://schemas.microsoft.com/office/powerpoint/2010/main" val="695242521"/>
+        <p14:creationId xmlns:p14="http://schemas.microsoft.com/office/powerpoint/2010/main" val="667956488"/>
       </p:ext>
     </p:extLst>
   </p:cSld>
@@ -806,7 +791,7 @@
             <a:spLocks noGrp="1"/>
           </p:cNvSpPr>
           <p:nvPr>
-            <p:ph type="sldNum" sz="quarter" idx="5"/>
+            <p:ph type="sldNum" sz="quarter" idx="10"/>
           </p:nvPr>
         </p:nvSpPr>
         <p:spPr/>
@@ -816,7 +801,7 @@
           <a:p>
             <a:fld id="{C09E5BFC-1559-42F1-8940-AB342D56BF02}" type="slidenum">
               <a:rPr lang="ko-KR" altLang="en-US" smtClean="0"/>
-              <a:t>12</a:t>
+              <a:t>9</a:t>
             </a:fld>
             <a:endParaRPr lang="ko-KR" altLang="en-US"/>
           </a:p>
@@ -825,7 +810,7 @@
     </p:spTree>
     <p:extLst>
       <p:ext uri="{BB962C8B-B14F-4D97-AF65-F5344CB8AC3E}">
-        <p14:creationId xmlns:p14="http://schemas.microsoft.com/office/powerpoint/2010/main" val="2229234871"/>
+        <p14:creationId xmlns:p14="http://schemas.microsoft.com/office/powerpoint/2010/main" val="3780183819"/>
       </p:ext>
     </p:extLst>
   </p:cSld>
@@ -879,285 +864,22 @@
           <a:bodyPr/>
           <a:lstStyle/>
           <a:p>
-            <a:pPr marL="0" marR="0" indent="0" algn="l" defTabSz="914400" rtl="0" eaLnBrk="1" fontAlgn="auto" latinLnBrk="1" hangingPunct="1">
-              <a:lnSpc>
-                <a:spcPct val="100000"/>
-              </a:lnSpc>
-              <a:spcBef>
-                <a:spcPts val="0"/>
-              </a:spcBef>
-              <a:spcAft>
-                <a:spcPts val="0"/>
-              </a:spcAft>
-              <a:buClrTx/>
-              <a:buSzTx/>
-              <a:buFontTx/>
-              <a:buNone/>
-              <a:tabLst/>
-              <a:defRPr/>
-            </a:pPr>
-            <a:r>
-              <a:rPr lang="en-US" altLang="ko-KR" dirty="0" smtClean="0"/>
-              <a:t>16.3 </a:t>
-            </a:r>
-            <a:r>
-              <a:rPr lang="ko-KR" altLang="en-US" dirty="0" smtClean="0"/>
-              <a:t>버전 이전 </a:t>
-            </a:r>
-            <a:r>
-              <a:rPr lang="ko-KR" altLang="en-US" dirty="0" smtClean="0"/>
-              <a:t>형태</a:t>
-            </a:r>
-            <a:endParaRPr lang="en-US" altLang="ko-KR" dirty="0" smtClean="0"/>
-          </a:p>
-          <a:p>
-            <a:pPr marL="0" marR="0" indent="0" algn="l" defTabSz="914400" rtl="0" eaLnBrk="1" fontAlgn="auto" latinLnBrk="1" hangingPunct="1">
-              <a:lnSpc>
-                <a:spcPct val="100000"/>
-              </a:lnSpc>
-              <a:spcBef>
-                <a:spcPts val="0"/>
-              </a:spcBef>
-              <a:spcAft>
-                <a:spcPts val="0"/>
-              </a:spcAft>
-              <a:buClrTx/>
-              <a:buSzTx/>
-              <a:buFontTx/>
-              <a:buNone/>
-              <a:tabLst/>
-              <a:defRPr/>
-            </a:pPr>
-            <a:r>
-              <a:rPr lang="en-US" altLang="ko-KR" dirty="0" smtClean="0"/>
-              <a:t>constructor()</a:t>
-            </a:r>
-            <a:r>
-              <a:rPr lang="en-US" altLang="ko-KR" baseline="0" dirty="0" smtClean="0"/>
-              <a:t> : </a:t>
-            </a:r>
-            <a:r>
-              <a:rPr lang="ko-KR" altLang="en-US" baseline="0" dirty="0" err="1" smtClean="0"/>
-              <a:t>생성자</a:t>
-            </a:r>
-            <a:r>
-              <a:rPr lang="en-US" altLang="ko-KR" baseline="0" dirty="0" smtClean="0"/>
-              <a:t>, state </a:t>
-            </a:r>
-            <a:r>
-              <a:rPr lang="ko-KR" altLang="en-US" baseline="0" dirty="0" smtClean="0"/>
-              <a:t>값을 초기화 하거나 메서드를 바인딩 할 때 사용</a:t>
-            </a:r>
-            <a:endParaRPr lang="en-US" altLang="ko-KR" baseline="0" dirty="0" smtClean="0"/>
-          </a:p>
-          <a:p>
-            <a:pPr marL="0" marR="0" indent="0" algn="l" defTabSz="914400" rtl="0" eaLnBrk="1" fontAlgn="auto" latinLnBrk="1" hangingPunct="1">
-              <a:lnSpc>
-                <a:spcPct val="100000"/>
-              </a:lnSpc>
-              <a:spcBef>
-                <a:spcPts val="0"/>
-              </a:spcBef>
-              <a:spcAft>
-                <a:spcPts val="0"/>
-              </a:spcAft>
-              <a:buClrTx/>
-              <a:buSzTx/>
-              <a:buFontTx/>
-              <a:buNone/>
-              <a:tabLst/>
-              <a:defRPr/>
-            </a:pPr>
-            <a:r>
-              <a:rPr lang="ko-KR" altLang="en-US" baseline="0" dirty="0" smtClean="0"/>
-              <a:t>해당 컴포넌트가 마운트 되기 전 호출된다 </a:t>
-            </a:r>
-            <a:r>
-              <a:rPr lang="en-US" altLang="ko-KR" baseline="0" dirty="0" smtClean="0"/>
-              <a:t>(</a:t>
-            </a:r>
-            <a:r>
-              <a:rPr lang="ko-KR" altLang="en-US" baseline="0" dirty="0" smtClean="0"/>
-              <a:t>마운트 </a:t>
-            </a:r>
-            <a:r>
-              <a:rPr lang="en-US" altLang="ko-KR" baseline="0" dirty="0" smtClean="0"/>
-              <a:t>: DOM </a:t>
-            </a:r>
-            <a:r>
-              <a:rPr lang="ko-KR" altLang="en-US" baseline="0" dirty="0" smtClean="0"/>
-              <a:t>객체가 생성되고 브라우저에 나타나는 것을 의미</a:t>
-            </a:r>
-            <a:r>
-              <a:rPr lang="en-US" altLang="ko-KR" baseline="0" dirty="0" smtClean="0"/>
-              <a:t>)</a:t>
-            </a:r>
-          </a:p>
-          <a:p>
-            <a:pPr marL="0" marR="0" indent="0" algn="l" defTabSz="914400" rtl="0" eaLnBrk="1" fontAlgn="auto" latinLnBrk="1" hangingPunct="1">
-              <a:lnSpc>
-                <a:spcPct val="100000"/>
-              </a:lnSpc>
-              <a:spcBef>
-                <a:spcPts val="0"/>
-              </a:spcBef>
-              <a:spcAft>
-                <a:spcPts val="0"/>
-              </a:spcAft>
-              <a:buClrTx/>
-              <a:buSzTx/>
-              <a:buFontTx/>
-              <a:buNone/>
-              <a:tabLst/>
-              <a:defRPr/>
-            </a:pPr>
-            <a:r>
-              <a:rPr lang="en-US" altLang="ko-KR" baseline="0" dirty="0" smtClean="0"/>
-              <a:t>(Mount, Update, </a:t>
-            </a:r>
-            <a:r>
-              <a:rPr lang="en-US" altLang="ko-KR" baseline="0" dirty="0" err="1" smtClean="0"/>
-              <a:t>UnMount</a:t>
-            </a:r>
-            <a:r>
-              <a:rPr lang="en-US" altLang="ko-KR" baseline="0" dirty="0" smtClean="0"/>
-              <a:t>) -&gt; </a:t>
-            </a:r>
-            <a:r>
-              <a:rPr lang="ko-KR" altLang="en-US" baseline="0" dirty="0" smtClean="0"/>
-              <a:t>추후 라이프 사이클 파트에서 다룰 예정</a:t>
-            </a:r>
-            <a:endParaRPr lang="en-US" altLang="ko-KR" baseline="0" dirty="0" smtClean="0"/>
-          </a:p>
-          <a:p>
-            <a:pPr marL="0" marR="0" indent="0" algn="l" defTabSz="914400" rtl="0" eaLnBrk="1" fontAlgn="auto" latinLnBrk="1" hangingPunct="1">
-              <a:lnSpc>
-                <a:spcPct val="100000"/>
-              </a:lnSpc>
-              <a:spcBef>
-                <a:spcPts val="0"/>
-              </a:spcBef>
-              <a:spcAft>
-                <a:spcPts val="0"/>
-              </a:spcAft>
-              <a:buClrTx/>
-              <a:buSzTx/>
-              <a:buFontTx/>
-              <a:buNone/>
-              <a:tabLst/>
-              <a:defRPr/>
-            </a:pPr>
-            <a:r>
-              <a:rPr lang="en-US" altLang="ko-KR" baseline="0" dirty="0" smtClean="0"/>
-              <a:t>----</a:t>
-            </a:r>
-          </a:p>
-          <a:p>
-            <a:pPr marL="0" marR="0" indent="0" algn="l" defTabSz="914400" rtl="0" eaLnBrk="1" fontAlgn="auto" latinLnBrk="1" hangingPunct="1">
-              <a:lnSpc>
-                <a:spcPct val="100000"/>
-              </a:lnSpc>
-              <a:spcBef>
-                <a:spcPts val="0"/>
-              </a:spcBef>
-              <a:spcAft>
-                <a:spcPts val="0"/>
-              </a:spcAft>
-              <a:buClrTx/>
-              <a:buSzTx/>
-              <a:buFontTx/>
-              <a:buNone/>
-              <a:tabLst/>
-              <a:defRPr/>
-            </a:pPr>
-            <a:r>
-              <a:rPr lang="en-US" altLang="ko-KR" dirty="0" smtClean="0"/>
-              <a:t>super() : </a:t>
-            </a:r>
-            <a:r>
-              <a:rPr lang="ko-KR" altLang="en-US" dirty="0" smtClean="0"/>
-              <a:t>부모 클래스 </a:t>
-            </a:r>
-            <a:r>
-              <a:rPr lang="ko-KR" altLang="en-US" dirty="0" err="1" smtClean="0"/>
-              <a:t>생성자</a:t>
-            </a:r>
-            <a:r>
-              <a:rPr lang="ko-KR" altLang="en-US" dirty="0" smtClean="0"/>
-              <a:t> 가리킴</a:t>
-            </a:r>
-            <a:r>
-              <a:rPr lang="en-US" altLang="ko-KR" dirty="0" smtClean="0"/>
-              <a:t>, super(props)</a:t>
-            </a:r>
-            <a:r>
-              <a:rPr lang="ko-KR" altLang="en-US" dirty="0" smtClean="0"/>
-              <a:t>를 </a:t>
-            </a:r>
-            <a:r>
-              <a:rPr lang="ko-KR" altLang="en-US" dirty="0" err="1" smtClean="0"/>
-              <a:t>선언전까지</a:t>
-            </a:r>
-            <a:r>
-              <a:rPr lang="ko-KR" altLang="en-US" dirty="0" smtClean="0"/>
-              <a:t> </a:t>
-            </a:r>
-            <a:r>
-              <a:rPr lang="en-US" altLang="ko-KR" dirty="0" smtClean="0"/>
-              <a:t>constructor</a:t>
-            </a:r>
-            <a:r>
-              <a:rPr lang="ko-KR" altLang="en-US" dirty="0" smtClean="0"/>
-              <a:t>에서 </a:t>
-            </a:r>
-            <a:r>
-              <a:rPr lang="en-US" altLang="ko-KR" dirty="0" smtClean="0"/>
-              <a:t>this</a:t>
-            </a:r>
-            <a:r>
-              <a:rPr lang="en-US" altLang="ko-KR" baseline="0" dirty="0" smtClean="0"/>
-              <a:t> </a:t>
-            </a:r>
-            <a:r>
-              <a:rPr lang="ko-KR" altLang="en-US" baseline="0" dirty="0" smtClean="0"/>
-              <a:t>키워드를 사용할 수 없다</a:t>
-            </a:r>
-            <a:r>
-              <a:rPr lang="en-US" altLang="ko-KR" baseline="0" dirty="0" smtClean="0"/>
-              <a:t>(</a:t>
-            </a:r>
-            <a:r>
-              <a:rPr lang="en-US" altLang="ko-KR" baseline="0" dirty="0" err="1" smtClean="0"/>
-              <a:t>js</a:t>
-            </a:r>
-            <a:r>
-              <a:rPr lang="ko-KR" altLang="en-US" baseline="0" dirty="0" smtClean="0"/>
-              <a:t>에서</a:t>
-            </a:r>
-            <a:r>
-              <a:rPr lang="en-US" altLang="ko-KR" baseline="0" dirty="0" smtClean="0"/>
-              <a:t>)</a:t>
-            </a:r>
-          </a:p>
-          <a:p>
-            <a:pPr marL="0" marR="0" indent="0" algn="l" defTabSz="914400" rtl="0" eaLnBrk="1" fontAlgn="auto" latinLnBrk="1" hangingPunct="1">
-              <a:lnSpc>
-                <a:spcPct val="100000"/>
-              </a:lnSpc>
-              <a:spcBef>
-                <a:spcPts val="0"/>
-              </a:spcBef>
-              <a:spcAft>
-                <a:spcPts val="0"/>
-              </a:spcAft>
-              <a:buClrTx/>
-              <a:buSzTx/>
-              <a:buFontTx/>
-              <a:buNone/>
-              <a:tabLst/>
-              <a:defRPr/>
-            </a:pPr>
-            <a:endParaRPr lang="ko-KR" altLang="en-US" dirty="0" smtClean="0"/>
+            <a:r>
+              <a:rPr lang="en-US" altLang="ko-KR" dirty="0"/>
+              <a:t>ex. </a:t>
+            </a:r>
+            <a:r>
+              <a:rPr lang="ko-KR" altLang="en-US" dirty="0" err="1"/>
+              <a:t>다크</a:t>
+            </a:r>
+            <a:r>
+              <a:rPr lang="en-US" altLang="ko-KR" dirty="0"/>
+              <a:t>/</a:t>
+            </a:r>
+            <a:r>
+              <a:rPr lang="ko-KR" altLang="en-US" dirty="0"/>
+              <a:t>라이트 모드</a:t>
+            </a:r>
           </a:p>
         </p:txBody>
       </p:sp>
@@ -1168,7 +890,7 @@
             <a:spLocks noGrp="1"/>
           </p:cNvSpPr>
           <p:nvPr>
-            <p:ph type="sldNum" sz="quarter" idx="10"/>
+            <p:ph type="sldNum" sz="quarter" idx="5"/>
           </p:nvPr>
         </p:nvSpPr>
         <p:spPr/>
@@ -1178,7 +900,7 @@
           <a:p>
             <a:fld id="{C09E5BFC-1559-42F1-8940-AB342D56BF02}" type="slidenum">
               <a:rPr lang="ko-KR" altLang="en-US" smtClean="0"/>
-              <a:t>13</a:t>
+              <a:t>11</a:t>
             </a:fld>
             <a:endParaRPr lang="ko-KR" altLang="en-US"/>
           </a:p>
@@ -1187,7 +909,7 @@
     </p:spTree>
     <p:extLst>
       <p:ext uri="{BB962C8B-B14F-4D97-AF65-F5344CB8AC3E}">
-        <p14:creationId xmlns:p14="http://schemas.microsoft.com/office/powerpoint/2010/main" val="4203439928"/>
+        <p14:creationId xmlns:p14="http://schemas.microsoft.com/office/powerpoint/2010/main" val="695242521"/>
       </p:ext>
     </p:extLst>
   </p:cSld>
@@ -1252,6 +974,448 @@
             <a:spLocks noGrp="1"/>
           </p:cNvSpPr>
           <p:nvPr>
+            <p:ph type="sldNum" sz="quarter" idx="5"/>
+          </p:nvPr>
+        </p:nvSpPr>
+        <p:spPr/>
+        <p:txBody>
+          <a:bodyPr/>
+          <a:lstStyle/>
+          <a:p>
+            <a:fld id="{C09E5BFC-1559-42F1-8940-AB342D56BF02}" type="slidenum">
+              <a:rPr lang="ko-KR" altLang="en-US" smtClean="0"/>
+              <a:t>12</a:t>
+            </a:fld>
+            <a:endParaRPr lang="ko-KR" altLang="en-US"/>
+          </a:p>
+        </p:txBody>
+      </p:sp>
+    </p:spTree>
+    <p:extLst>
+      <p:ext uri="{BB962C8B-B14F-4D97-AF65-F5344CB8AC3E}">
+        <p14:creationId xmlns:p14="http://schemas.microsoft.com/office/powerpoint/2010/main" val="2229234871"/>
+      </p:ext>
+    </p:extLst>
+  </p:cSld>
+  <p:clrMapOvr>
+    <a:masterClrMapping/>
+  </p:clrMapOvr>
+</p:notes>
+</file>
+
+<file path=ppt/notesSlides/notesSlide7.xml><?xml version="1.0" encoding="utf-8"?>
+<p:notes xmlns:a="http://schemas.openxmlformats.org/drawingml/2006/main" xmlns:r="http://schemas.openxmlformats.org/officeDocument/2006/relationships" xmlns:p="http://schemas.openxmlformats.org/presentationml/2006/main">
+  <p:cSld>
+    <p:spTree>
+      <p:nvGrpSpPr>
+        <p:cNvPr id="1" name=""/>
+        <p:cNvGrpSpPr/>
+        <p:nvPr/>
+      </p:nvGrpSpPr>
+      <p:grpSpPr>
+        <a:xfrm>
+          <a:off x="0" y="0"/>
+          <a:ext cx="0" cy="0"/>
+          <a:chOff x="0" y="0"/>
+          <a:chExt cx="0" cy="0"/>
+        </a:xfrm>
+      </p:grpSpPr>
+      <p:sp>
+        <p:nvSpPr>
+          <p:cNvPr id="2" name="슬라이드 이미지 개체 틀 1"/>
+          <p:cNvSpPr>
+            <a:spLocks noGrp="1" noRot="1" noChangeAspect="1"/>
+          </p:cNvSpPr>
+          <p:nvPr>
+            <p:ph type="sldImg"/>
+          </p:nvPr>
+        </p:nvSpPr>
+        <p:spPr/>
+      </p:sp>
+      <p:sp>
+        <p:nvSpPr>
+          <p:cNvPr id="3" name="슬라이드 노트 개체 틀 2"/>
+          <p:cNvSpPr>
+            <a:spLocks noGrp="1"/>
+          </p:cNvSpPr>
+          <p:nvPr>
+            <p:ph type="body" idx="1"/>
+          </p:nvPr>
+        </p:nvSpPr>
+        <p:spPr/>
+        <p:txBody>
+          <a:bodyPr/>
+          <a:lstStyle/>
+          <a:p>
+            <a:pPr marL="0" marR="0" indent="0" algn="l" defTabSz="914400" rtl="0" eaLnBrk="1" fontAlgn="auto" latinLnBrk="1" hangingPunct="1">
+              <a:lnSpc>
+                <a:spcPct val="100000"/>
+              </a:lnSpc>
+              <a:spcBef>
+                <a:spcPts val="0"/>
+              </a:spcBef>
+              <a:spcAft>
+                <a:spcPts val="0"/>
+              </a:spcAft>
+              <a:buClrTx/>
+              <a:buSzTx/>
+              <a:buFontTx/>
+              <a:buNone/>
+              <a:tabLst/>
+              <a:defRPr/>
+            </a:pPr>
+            <a:r>
+              <a:rPr lang="en-US" altLang="ko-KR" dirty="0" smtClean="0"/>
+              <a:t>16.3 </a:t>
+            </a:r>
+            <a:r>
+              <a:rPr lang="ko-KR" altLang="en-US" dirty="0" smtClean="0"/>
+              <a:t>버전 이전 형태</a:t>
+            </a:r>
+            <a:endParaRPr lang="en-US" altLang="ko-KR" dirty="0" smtClean="0"/>
+          </a:p>
+          <a:p>
+            <a:pPr marL="0" marR="0" indent="0" algn="l" defTabSz="914400" rtl="0" eaLnBrk="1" fontAlgn="auto" latinLnBrk="1" hangingPunct="1">
+              <a:lnSpc>
+                <a:spcPct val="100000"/>
+              </a:lnSpc>
+              <a:spcBef>
+                <a:spcPts val="0"/>
+              </a:spcBef>
+              <a:spcAft>
+                <a:spcPts val="0"/>
+              </a:spcAft>
+              <a:buClrTx/>
+              <a:buSzTx/>
+              <a:buFontTx/>
+              <a:buNone/>
+              <a:tabLst/>
+              <a:defRPr/>
+            </a:pPr>
+            <a:r>
+              <a:rPr lang="en-US" altLang="ko-KR" dirty="0" smtClean="0"/>
+              <a:t>constructor()</a:t>
+            </a:r>
+            <a:r>
+              <a:rPr lang="en-US" altLang="ko-KR" baseline="0" dirty="0" smtClean="0"/>
+              <a:t> : </a:t>
+            </a:r>
+            <a:r>
+              <a:rPr lang="ko-KR" altLang="en-US" baseline="0" dirty="0" err="1" smtClean="0"/>
+              <a:t>생성자</a:t>
+            </a:r>
+            <a:r>
+              <a:rPr lang="en-US" altLang="ko-KR" baseline="0" dirty="0" smtClean="0"/>
+              <a:t>, state </a:t>
+            </a:r>
+            <a:r>
+              <a:rPr lang="ko-KR" altLang="en-US" baseline="0" dirty="0" smtClean="0"/>
+              <a:t>값을 초기화 하거나 메서드를 바인딩 할 때 사용</a:t>
+            </a:r>
+            <a:endParaRPr lang="en-US" altLang="ko-KR" baseline="0" dirty="0" smtClean="0"/>
+          </a:p>
+          <a:p>
+            <a:pPr marL="0" marR="0" indent="0" algn="l" defTabSz="914400" rtl="0" eaLnBrk="1" fontAlgn="auto" latinLnBrk="1" hangingPunct="1">
+              <a:lnSpc>
+                <a:spcPct val="100000"/>
+              </a:lnSpc>
+              <a:spcBef>
+                <a:spcPts val="0"/>
+              </a:spcBef>
+              <a:spcAft>
+                <a:spcPts val="0"/>
+              </a:spcAft>
+              <a:buClrTx/>
+              <a:buSzTx/>
+              <a:buFontTx/>
+              <a:buNone/>
+              <a:tabLst/>
+              <a:defRPr/>
+            </a:pPr>
+            <a:r>
+              <a:rPr lang="ko-KR" altLang="en-US" baseline="0" dirty="0" smtClean="0"/>
+              <a:t>해당 컴포넌트가 마운트 되기 전 호출된다 </a:t>
+            </a:r>
+            <a:r>
+              <a:rPr lang="en-US" altLang="ko-KR" baseline="0" dirty="0" smtClean="0"/>
+              <a:t>(</a:t>
+            </a:r>
+            <a:r>
+              <a:rPr lang="ko-KR" altLang="en-US" baseline="0" dirty="0" smtClean="0"/>
+              <a:t>마운트 </a:t>
+            </a:r>
+            <a:r>
+              <a:rPr lang="en-US" altLang="ko-KR" baseline="0" dirty="0" smtClean="0"/>
+              <a:t>: DOM </a:t>
+            </a:r>
+            <a:r>
+              <a:rPr lang="ko-KR" altLang="en-US" baseline="0" dirty="0" smtClean="0"/>
+              <a:t>객체가 생성되고 브라우저에 나타나는 것을 의미</a:t>
+            </a:r>
+            <a:r>
+              <a:rPr lang="en-US" altLang="ko-KR" baseline="0" dirty="0" smtClean="0"/>
+              <a:t>)</a:t>
+            </a:r>
+          </a:p>
+          <a:p>
+            <a:pPr marL="0" marR="0" indent="0" algn="l" defTabSz="914400" rtl="0" eaLnBrk="1" fontAlgn="auto" latinLnBrk="1" hangingPunct="1">
+              <a:lnSpc>
+                <a:spcPct val="100000"/>
+              </a:lnSpc>
+              <a:spcBef>
+                <a:spcPts val="0"/>
+              </a:spcBef>
+              <a:spcAft>
+                <a:spcPts val="0"/>
+              </a:spcAft>
+              <a:buClrTx/>
+              <a:buSzTx/>
+              <a:buFontTx/>
+              <a:buNone/>
+              <a:tabLst/>
+              <a:defRPr/>
+            </a:pPr>
+            <a:r>
+              <a:rPr lang="en-US" altLang="ko-KR" baseline="0" dirty="0" smtClean="0"/>
+              <a:t>(Mount, Update, </a:t>
+            </a:r>
+            <a:r>
+              <a:rPr lang="en-US" altLang="ko-KR" baseline="0" dirty="0" err="1" smtClean="0"/>
+              <a:t>UnMount</a:t>
+            </a:r>
+            <a:r>
+              <a:rPr lang="en-US" altLang="ko-KR" baseline="0" dirty="0" smtClean="0"/>
+              <a:t>) -&gt; </a:t>
+            </a:r>
+            <a:r>
+              <a:rPr lang="ko-KR" altLang="en-US" baseline="0" dirty="0" smtClean="0"/>
+              <a:t>추후 라이프 사이클 파트에서 다룰 예정</a:t>
+            </a:r>
+            <a:endParaRPr lang="en-US" altLang="ko-KR" baseline="0" dirty="0" smtClean="0"/>
+          </a:p>
+          <a:p>
+            <a:pPr marL="0" marR="0" indent="0" algn="l" defTabSz="914400" rtl="0" eaLnBrk="1" fontAlgn="auto" latinLnBrk="1" hangingPunct="1">
+              <a:lnSpc>
+                <a:spcPct val="100000"/>
+              </a:lnSpc>
+              <a:spcBef>
+                <a:spcPts val="0"/>
+              </a:spcBef>
+              <a:spcAft>
+                <a:spcPts val="0"/>
+              </a:spcAft>
+              <a:buClrTx/>
+              <a:buSzTx/>
+              <a:buFontTx/>
+              <a:buNone/>
+              <a:tabLst/>
+              <a:defRPr/>
+            </a:pPr>
+            <a:r>
+              <a:rPr lang="en-US" altLang="ko-KR" baseline="0" dirty="0" smtClean="0"/>
+              <a:t>----</a:t>
+            </a:r>
+          </a:p>
+          <a:p>
+            <a:pPr marL="0" marR="0" indent="0" algn="l" defTabSz="914400" rtl="0" eaLnBrk="1" fontAlgn="auto" latinLnBrk="1" hangingPunct="1">
+              <a:lnSpc>
+                <a:spcPct val="100000"/>
+              </a:lnSpc>
+              <a:spcBef>
+                <a:spcPts val="0"/>
+              </a:spcBef>
+              <a:spcAft>
+                <a:spcPts val="0"/>
+              </a:spcAft>
+              <a:buClrTx/>
+              <a:buSzTx/>
+              <a:buFontTx/>
+              <a:buNone/>
+              <a:tabLst/>
+              <a:defRPr/>
+            </a:pPr>
+            <a:r>
+              <a:rPr lang="en-US" altLang="ko-KR" dirty="0" smtClean="0"/>
+              <a:t>super() : </a:t>
+            </a:r>
+            <a:r>
+              <a:rPr lang="ko-KR" altLang="en-US" dirty="0" smtClean="0"/>
+              <a:t>부모 클래스 </a:t>
+            </a:r>
+            <a:r>
+              <a:rPr lang="ko-KR" altLang="en-US" dirty="0" err="1" smtClean="0"/>
+              <a:t>생성자</a:t>
+            </a:r>
+            <a:r>
+              <a:rPr lang="ko-KR" altLang="en-US" dirty="0" smtClean="0"/>
+              <a:t> 가리킴</a:t>
+            </a:r>
+            <a:r>
+              <a:rPr lang="en-US" altLang="ko-KR" dirty="0" smtClean="0"/>
+              <a:t>, super(props)</a:t>
+            </a:r>
+            <a:r>
+              <a:rPr lang="ko-KR" altLang="en-US" dirty="0" smtClean="0"/>
+              <a:t>를 </a:t>
+            </a:r>
+            <a:r>
+              <a:rPr lang="ko-KR" altLang="en-US" dirty="0" err="1" smtClean="0"/>
+              <a:t>선언전까지</a:t>
+            </a:r>
+            <a:r>
+              <a:rPr lang="ko-KR" altLang="en-US" dirty="0" smtClean="0"/>
+              <a:t> </a:t>
+            </a:r>
+            <a:r>
+              <a:rPr lang="en-US" altLang="ko-KR" dirty="0" smtClean="0"/>
+              <a:t>constructor</a:t>
+            </a:r>
+            <a:r>
+              <a:rPr lang="ko-KR" altLang="en-US" dirty="0" smtClean="0"/>
+              <a:t>에서 </a:t>
+            </a:r>
+            <a:r>
+              <a:rPr lang="en-US" altLang="ko-KR" dirty="0" smtClean="0"/>
+              <a:t>this</a:t>
+            </a:r>
+            <a:r>
+              <a:rPr lang="en-US" altLang="ko-KR" baseline="0" dirty="0" smtClean="0"/>
+              <a:t> </a:t>
+            </a:r>
+            <a:r>
+              <a:rPr lang="ko-KR" altLang="en-US" baseline="0" dirty="0" smtClean="0"/>
+              <a:t>키워드를 사용할 수 없다</a:t>
+            </a:r>
+            <a:r>
+              <a:rPr lang="en-US" altLang="ko-KR" baseline="0" dirty="0" smtClean="0"/>
+              <a:t>(</a:t>
+            </a:r>
+            <a:r>
+              <a:rPr lang="en-US" altLang="ko-KR" baseline="0" dirty="0" err="1" smtClean="0"/>
+              <a:t>js</a:t>
+            </a:r>
+            <a:r>
+              <a:rPr lang="ko-KR" altLang="en-US" baseline="0" dirty="0" smtClean="0"/>
+              <a:t>에서</a:t>
+            </a:r>
+            <a:r>
+              <a:rPr lang="en-US" altLang="ko-KR" baseline="0" dirty="0" smtClean="0"/>
+              <a:t>)</a:t>
+            </a:r>
+          </a:p>
+          <a:p>
+            <a:pPr marL="0" marR="0" indent="0" algn="l" defTabSz="914400" rtl="0" eaLnBrk="1" fontAlgn="auto" latinLnBrk="1" hangingPunct="1">
+              <a:lnSpc>
+                <a:spcPct val="100000"/>
+              </a:lnSpc>
+              <a:spcBef>
+                <a:spcPts val="0"/>
+              </a:spcBef>
+              <a:spcAft>
+                <a:spcPts val="0"/>
+              </a:spcAft>
+              <a:buClrTx/>
+              <a:buSzTx/>
+              <a:buFontTx/>
+              <a:buNone/>
+              <a:tabLst/>
+              <a:defRPr/>
+            </a:pPr>
+            <a:endParaRPr lang="ko-KR" altLang="en-US" dirty="0" smtClean="0"/>
+          </a:p>
+        </p:txBody>
+      </p:sp>
+      <p:sp>
+        <p:nvSpPr>
+          <p:cNvPr id="4" name="슬라이드 번호 개체 틀 3"/>
+          <p:cNvSpPr>
+            <a:spLocks noGrp="1"/>
+          </p:cNvSpPr>
+          <p:nvPr>
+            <p:ph type="sldNum" sz="quarter" idx="10"/>
+          </p:nvPr>
+        </p:nvSpPr>
+        <p:spPr/>
+        <p:txBody>
+          <a:bodyPr/>
+          <a:lstStyle/>
+          <a:p>
+            <a:fld id="{C09E5BFC-1559-42F1-8940-AB342D56BF02}" type="slidenum">
+              <a:rPr lang="ko-KR" altLang="en-US" smtClean="0"/>
+              <a:t>13</a:t>
+            </a:fld>
+            <a:endParaRPr lang="ko-KR" altLang="en-US"/>
+          </a:p>
+        </p:txBody>
+      </p:sp>
+    </p:spTree>
+    <p:extLst>
+      <p:ext uri="{BB962C8B-B14F-4D97-AF65-F5344CB8AC3E}">
+        <p14:creationId xmlns:p14="http://schemas.microsoft.com/office/powerpoint/2010/main" val="4203439928"/>
+      </p:ext>
+    </p:extLst>
+  </p:cSld>
+  <p:clrMapOvr>
+    <a:masterClrMapping/>
+  </p:clrMapOvr>
+</p:notes>
+</file>
+
+<file path=ppt/notesSlides/notesSlide8.xml><?xml version="1.0" encoding="utf-8"?>
+<p:notes xmlns:a="http://schemas.openxmlformats.org/drawingml/2006/main" xmlns:r="http://schemas.openxmlformats.org/officeDocument/2006/relationships" xmlns:p="http://schemas.openxmlformats.org/presentationml/2006/main">
+  <p:cSld>
+    <p:spTree>
+      <p:nvGrpSpPr>
+        <p:cNvPr id="1" name=""/>
+        <p:cNvGrpSpPr/>
+        <p:nvPr/>
+      </p:nvGrpSpPr>
+      <p:grpSpPr>
+        <a:xfrm>
+          <a:off x="0" y="0"/>
+          <a:ext cx="0" cy="0"/>
+          <a:chOff x="0" y="0"/>
+          <a:chExt cx="0" cy="0"/>
+        </a:xfrm>
+      </p:grpSpPr>
+      <p:sp>
+        <p:nvSpPr>
+          <p:cNvPr id="2" name="슬라이드 이미지 개체 틀 1"/>
+          <p:cNvSpPr>
+            <a:spLocks noGrp="1" noRot="1" noChangeAspect="1"/>
+          </p:cNvSpPr>
+          <p:nvPr>
+            <p:ph type="sldImg"/>
+          </p:nvPr>
+        </p:nvSpPr>
+        <p:spPr/>
+      </p:sp>
+      <p:sp>
+        <p:nvSpPr>
+          <p:cNvPr id="3" name="슬라이드 노트 개체 틀 2"/>
+          <p:cNvSpPr>
+            <a:spLocks noGrp="1"/>
+          </p:cNvSpPr>
+          <p:nvPr>
+            <p:ph type="body" idx="1"/>
+          </p:nvPr>
+        </p:nvSpPr>
+        <p:spPr/>
+        <p:txBody>
+          <a:bodyPr/>
+          <a:lstStyle/>
+          <a:p>
+            <a:endParaRPr lang="ko-KR" altLang="en-US" dirty="0"/>
+          </a:p>
+        </p:txBody>
+      </p:sp>
+      <p:sp>
+        <p:nvSpPr>
+          <p:cNvPr id="4" name="슬라이드 번호 개체 틀 3"/>
+          <p:cNvSpPr>
+            <a:spLocks noGrp="1"/>
+          </p:cNvSpPr>
+          <p:nvPr>
             <p:ph type="sldNum" sz="quarter" idx="10"/>
           </p:nvPr>
         </p:nvSpPr>
@@ -1281,7 +1445,7 @@
 </p:notes>
 </file>
 
-<file path=ppt/notesSlides/notesSlide7.xml><?xml version="1.0" encoding="utf-8"?>
+<file path=ppt/notesSlides/notesSlide9.xml><?xml version="1.0" encoding="utf-8"?>
 <p:notes xmlns:a="http://schemas.openxmlformats.org/drawingml/2006/main" xmlns:r="http://schemas.openxmlformats.org/officeDocument/2006/relationships" xmlns:p="http://schemas.openxmlformats.org/presentationml/2006/main">
   <p:cSld>
     <p:spTree>
@@ -1382,43 +1546,6 @@
           <a:chExt cx="0" cy="0"/>
         </a:xfrm>
       </p:grpSpPr>
-      <p:pic>
-        <p:nvPicPr>
-          <p:cNvPr id="7" name="그림 6" descr="폰트, 텍스트, 로고, 그래픽이(가) 표시된 사진&#10;&#10;자동 생성된 설명">
-            <a:extLst>
-              <a:ext uri="{FF2B5EF4-FFF2-40B4-BE49-F238E27FC236}">
-                <a16:creationId xmlns:a16="http://schemas.microsoft.com/office/drawing/2014/main" id="{01AB1409-DEDF-C824-D8D3-05B260A93BD6}"/>
-              </a:ext>
-            </a:extLst>
-          </p:cNvPr>
-          <p:cNvPicPr>
-            <a:picLocks noChangeAspect="1"/>
-          </p:cNvPicPr>
-          <p:nvPr userDrawn="1"/>
-        </p:nvPicPr>
-        <p:blipFill>
-          <a:blip r:embed="rId2">
-            <a:alphaModFix/>
-            <a:extLst>
-              <a:ext uri="{28A0092B-C50C-407E-A947-70E740481C1C}">
-                <a14:useLocalDpi xmlns:a14="http://schemas.microsoft.com/office/drawing/2010/main" val="0"/>
-              </a:ext>
-            </a:extLst>
-          </a:blip>
-          <a:stretch>
-            <a:fillRect/>
-          </a:stretch>
-        </p:blipFill>
-        <p:spPr>
-          <a:xfrm>
-            <a:off x="118533" y="103811"/>
-            <a:ext cx="4328535" cy="2280805"/>
-          </a:xfrm>
-          <a:prstGeom prst="rect">
-            <a:avLst/>
-          </a:prstGeom>
-        </p:spPr>
-      </p:pic>
       <p:sp>
         <p:nvSpPr>
           <p:cNvPr id="2" name="제목 1">
@@ -1556,7 +1683,7 @@
           <a:p>
             <a:fld id="{0E19CB95-6D28-40F1-9DA3-1BAC5D4B5B4F}" type="datetime6">
               <a:rPr lang="ko-KR" altLang="en-US" smtClean="0"/>
-              <a:t>2023년 9월</a:t>
+              <a:t>2024년 7월</a:t>
             </a:fld>
             <a:endParaRPr lang="ko-KR" altLang="en-US"/>
           </a:p>
@@ -1671,221 +1798,47 @@
           </a:p>
         </p:txBody>
       </p:sp>
-      <p:sp>
-        <p:nvSpPr>
-          <p:cNvPr id="15" name="부제목 2">
-            <a:extLst>
-              <a:ext uri="{FF2B5EF4-FFF2-40B4-BE49-F238E27FC236}">
-                <a16:creationId xmlns:a16="http://schemas.microsoft.com/office/drawing/2014/main" id="{26026682-DE15-5F01-6FA7-8F46F9ABCC2A}"/>
-              </a:ext>
-            </a:extLst>
-          </p:cNvPr>
-          <p:cNvSpPr txBox="1">
-            <a:spLocks/>
-          </p:cNvSpPr>
+      <p:pic>
+        <p:nvPicPr>
+          <p:cNvPr id="5" name="그림 4" descr="그래픽, 그래픽 디자인, 클립아트, 다채로움이(가) 표시된 사진&#10;&#10;자동 생성된 설명">
+            <a:extLst>
+              <a:ext uri="{FF2B5EF4-FFF2-40B4-BE49-F238E27FC236}">
+                <a16:creationId xmlns:a16="http://schemas.microsoft.com/office/drawing/2014/main" id="{BE5A577B-81A7-2FA6-9E57-9DCEC5BF71F7}"/>
+              </a:ext>
+            </a:extLst>
+          </p:cNvPr>
+          <p:cNvPicPr>
+            <a:picLocks noChangeAspect="1"/>
+          </p:cNvPicPr>
           <p:nvPr userDrawn="1"/>
-        </p:nvSpPr>
+        </p:nvPicPr>
+        <p:blipFill>
+          <a:blip r:embed="rId2" cstate="hqprint">
+            <a:alphaModFix amt="20000"/>
+            <a:extLst>
+              <a:ext uri="{28A0092B-C50C-407E-A947-70E740481C1C}">
+                <a14:useLocalDpi xmlns:a14="http://schemas.microsoft.com/office/drawing/2010/main" val="0"/>
+              </a:ext>
+            </a:extLst>
+          </a:blip>
+          <a:stretch>
+            <a:fillRect/>
+          </a:stretch>
+        </p:blipFill>
         <p:spPr>
           <a:xfrm>
-            <a:off x="9110749" y="5933035"/>
-            <a:ext cx="2948515" cy="365125"/>
+            <a:off x="4296000" y="1461146"/>
+            <a:ext cx="3600000" cy="3652155"/>
           </a:xfrm>
           <a:prstGeom prst="rect">
             <a:avLst/>
           </a:prstGeom>
         </p:spPr>
-        <p:txBody>
-          <a:bodyPr vert="horz" lIns="91440" tIns="45720" rIns="91440" bIns="45720" rtlCol="0" anchor="ctr">
-            <a:noAutofit/>
-          </a:bodyPr>
-          <a:lstStyle>
-            <a:lvl1pPr marL="228600" indent="-228600" algn="l" defTabSz="914400" rtl="0" eaLnBrk="1" latinLnBrk="1" hangingPunct="1">
-              <a:lnSpc>
-                <a:spcPct val="90000"/>
-              </a:lnSpc>
-              <a:spcBef>
-                <a:spcPts val="1000"/>
-              </a:spcBef>
-              <a:buFont typeface="Arial" panose="020B0604020202020204" pitchFamily="34" charset="0"/>
-              <a:buChar char="•"/>
-              <a:defRPr sz="2800" kern="1200">
-                <a:solidFill>
-                  <a:schemeClr val="tx1"/>
-                </a:solidFill>
-                <a:latin typeface="+mn-lt"/>
-                <a:ea typeface="+mn-ea"/>
-                <a:cs typeface="+mn-cs"/>
-              </a:defRPr>
-            </a:lvl1pPr>
-            <a:lvl2pPr marL="685800" indent="-228600" algn="l" defTabSz="914400" rtl="0" eaLnBrk="1" latinLnBrk="1" hangingPunct="1">
-              <a:lnSpc>
-                <a:spcPct val="90000"/>
-              </a:lnSpc>
-              <a:spcBef>
-                <a:spcPts val="500"/>
-              </a:spcBef>
-              <a:buFont typeface="Arial" panose="020B0604020202020204" pitchFamily="34" charset="0"/>
-              <a:buChar char="•"/>
-              <a:defRPr sz="2400" kern="1200">
-                <a:solidFill>
-                  <a:schemeClr val="tx1"/>
-                </a:solidFill>
-                <a:latin typeface="+mn-lt"/>
-                <a:ea typeface="+mn-ea"/>
-                <a:cs typeface="+mn-cs"/>
-              </a:defRPr>
-            </a:lvl2pPr>
-            <a:lvl3pPr marL="1143000" indent="-228600" algn="l" defTabSz="914400" rtl="0" eaLnBrk="1" latinLnBrk="1" hangingPunct="1">
-              <a:lnSpc>
-                <a:spcPct val="90000"/>
-              </a:lnSpc>
-              <a:spcBef>
-                <a:spcPts val="500"/>
-              </a:spcBef>
-              <a:buFont typeface="Arial" panose="020B0604020202020204" pitchFamily="34" charset="0"/>
-              <a:buChar char="•"/>
-              <a:defRPr sz="2000" kern="1200">
-                <a:solidFill>
-                  <a:schemeClr val="tx1"/>
-                </a:solidFill>
-                <a:latin typeface="+mn-lt"/>
-                <a:ea typeface="+mn-ea"/>
-                <a:cs typeface="+mn-cs"/>
-              </a:defRPr>
-            </a:lvl3pPr>
-            <a:lvl4pPr marL="1600200" indent="-228600" algn="l" defTabSz="914400" rtl="0" eaLnBrk="1" latinLnBrk="1" hangingPunct="1">
-              <a:lnSpc>
-                <a:spcPct val="90000"/>
-              </a:lnSpc>
-              <a:spcBef>
-                <a:spcPts val="500"/>
-              </a:spcBef>
-              <a:buFont typeface="Arial" panose="020B0604020202020204" pitchFamily="34" charset="0"/>
-              <a:buChar char="•"/>
-              <a:defRPr sz="1800" kern="1200">
-                <a:solidFill>
-                  <a:schemeClr val="tx1"/>
-                </a:solidFill>
-                <a:latin typeface="+mn-lt"/>
-                <a:ea typeface="+mn-ea"/>
-                <a:cs typeface="+mn-cs"/>
-              </a:defRPr>
-            </a:lvl4pPr>
-            <a:lvl5pPr marL="2057400" indent="-228600" algn="l" defTabSz="914400" rtl="0" eaLnBrk="1" latinLnBrk="1" hangingPunct="1">
-              <a:lnSpc>
-                <a:spcPct val="90000"/>
-              </a:lnSpc>
-              <a:spcBef>
-                <a:spcPts val="500"/>
-              </a:spcBef>
-              <a:buFont typeface="Arial" panose="020B0604020202020204" pitchFamily="34" charset="0"/>
-              <a:buChar char="•"/>
-              <a:defRPr sz="1800" kern="1200">
-                <a:solidFill>
-                  <a:schemeClr val="tx1"/>
-                </a:solidFill>
-                <a:latin typeface="+mn-lt"/>
-                <a:ea typeface="+mn-ea"/>
-                <a:cs typeface="+mn-cs"/>
-              </a:defRPr>
-            </a:lvl5pPr>
-            <a:lvl6pPr marL="2514600" indent="-228600" algn="l" defTabSz="914400" rtl="0" eaLnBrk="1" latinLnBrk="1" hangingPunct="1">
-              <a:lnSpc>
-                <a:spcPct val="90000"/>
-              </a:lnSpc>
-              <a:spcBef>
-                <a:spcPts val="500"/>
-              </a:spcBef>
-              <a:buFont typeface="Arial" panose="020B0604020202020204" pitchFamily="34" charset="0"/>
-              <a:buChar char="•"/>
-              <a:defRPr sz="1800" kern="1200">
-                <a:solidFill>
-                  <a:schemeClr val="tx1"/>
-                </a:solidFill>
-                <a:latin typeface="+mn-lt"/>
-                <a:ea typeface="+mn-ea"/>
-                <a:cs typeface="+mn-cs"/>
-              </a:defRPr>
-            </a:lvl6pPr>
-            <a:lvl7pPr marL="2971800" indent="-228600" algn="l" defTabSz="914400" rtl="0" eaLnBrk="1" latinLnBrk="1" hangingPunct="1">
-              <a:lnSpc>
-                <a:spcPct val="90000"/>
-              </a:lnSpc>
-              <a:spcBef>
-                <a:spcPts val="500"/>
-              </a:spcBef>
-              <a:buFont typeface="Arial" panose="020B0604020202020204" pitchFamily="34" charset="0"/>
-              <a:buChar char="•"/>
-              <a:defRPr sz="1800" kern="1200">
-                <a:solidFill>
-                  <a:schemeClr val="tx1"/>
-                </a:solidFill>
-                <a:latin typeface="+mn-lt"/>
-                <a:ea typeface="+mn-ea"/>
-                <a:cs typeface="+mn-cs"/>
-              </a:defRPr>
-            </a:lvl7pPr>
-            <a:lvl8pPr marL="3429000" indent="-228600" algn="l" defTabSz="914400" rtl="0" eaLnBrk="1" latinLnBrk="1" hangingPunct="1">
-              <a:lnSpc>
-                <a:spcPct val="90000"/>
-              </a:lnSpc>
-              <a:spcBef>
-                <a:spcPts val="500"/>
-              </a:spcBef>
-              <a:buFont typeface="Arial" panose="020B0604020202020204" pitchFamily="34" charset="0"/>
-              <a:buChar char="•"/>
-              <a:defRPr sz="1800" kern="1200">
-                <a:solidFill>
-                  <a:schemeClr val="tx1"/>
-                </a:solidFill>
-                <a:latin typeface="+mn-lt"/>
-                <a:ea typeface="+mn-ea"/>
-                <a:cs typeface="+mn-cs"/>
-              </a:defRPr>
-            </a:lvl8pPr>
-            <a:lvl9pPr marL="3886200" indent="-228600" algn="l" defTabSz="914400" rtl="0" eaLnBrk="1" latinLnBrk="1" hangingPunct="1">
-              <a:lnSpc>
-                <a:spcPct val="90000"/>
-              </a:lnSpc>
-              <a:spcBef>
-                <a:spcPts val="500"/>
-              </a:spcBef>
-              <a:buFont typeface="Arial" panose="020B0604020202020204" pitchFamily="34" charset="0"/>
-              <a:buChar char="•"/>
-              <a:defRPr sz="1800" kern="1200">
-                <a:solidFill>
-                  <a:schemeClr val="tx1"/>
-                </a:solidFill>
-                <a:latin typeface="+mn-lt"/>
-                <a:ea typeface="+mn-ea"/>
-                <a:cs typeface="+mn-cs"/>
-              </a:defRPr>
-            </a:lvl9pPr>
-          </a:lstStyle>
-          <a:p>
-            <a:pPr marL="0" indent="0" algn="r">
-              <a:buNone/>
-            </a:pPr>
-            <a:r>
-              <a:rPr lang="en-US" altLang="ko-KR" sz="2000" u="none" dirty="0"/>
-              <a:t>With. </a:t>
-            </a:r>
-            <a:r>
-              <a:rPr lang="ko-KR" altLang="en-US" sz="2000" u="none" dirty="0"/>
-              <a:t>팀 </a:t>
-            </a:r>
-            <a:r>
-              <a:rPr lang="ko-KR" altLang="en-US" sz="2000" u="none" dirty="0" err="1"/>
-              <a:t>뤼쳐드</a:t>
-            </a:r>
-            <a:endParaRPr lang="ko-KR" altLang="en-US" sz="2000" u="none" dirty="0"/>
-          </a:p>
-        </p:txBody>
-      </p:sp>
+      </p:pic>
     </p:spTree>
     <p:extLst>
       <p:ext uri="{BB962C8B-B14F-4D97-AF65-F5344CB8AC3E}">
-        <p14:creationId xmlns:p14="http://schemas.microsoft.com/office/powerpoint/2010/main" val="2104502687"/>
+        <p14:creationId xmlns:p14="http://schemas.microsoft.com/office/powerpoint/2010/main" val="3653629797"/>
       </p:ext>
     </p:extLst>
   </p:cSld>
@@ -1938,12 +1891,12 @@
           <a:bodyPr anchor="b"/>
           <a:lstStyle>
             <a:lvl1pPr>
-              <a:defRPr sz="3200"/>
+              <a:defRPr sz="3200" b="1"/>
             </a:lvl1pPr>
           </a:lstStyle>
           <a:p>
             <a:r>
-              <a:rPr lang="ko-KR" altLang="en-US"/>
+              <a:rPr lang="ko-KR" altLang="en-US" dirty="0"/>
               <a:t>마스터 제목 스타일 편집</a:t>
             </a:r>
           </a:p>
@@ -2110,7 +2063,7 @@
           <a:p>
             <a:fld id="{C4A39A32-5728-48B8-9F9C-437D214CCAF1}" type="datetime6">
               <a:rPr lang="ko-KR" altLang="en-US" smtClean="0"/>
-              <a:t>2023년 9월</a:t>
+              <a:t>2024년 7월</a:t>
             </a:fld>
             <a:endParaRPr lang="ko-KR" altLang="en-US"/>
           </a:p>
@@ -2173,7 +2126,7 @@
     </p:spTree>
     <p:extLst>
       <p:ext uri="{BB962C8B-B14F-4D97-AF65-F5344CB8AC3E}">
-        <p14:creationId xmlns:p14="http://schemas.microsoft.com/office/powerpoint/2010/main" val="3456815718"/>
+        <p14:creationId xmlns:p14="http://schemas.microsoft.com/office/powerpoint/2010/main" val="1142518393"/>
       </p:ext>
     </p:extLst>
   </p:cSld>
@@ -2219,10 +2172,14 @@
         <p:spPr/>
         <p:txBody>
           <a:bodyPr/>
-          <a:lstStyle/>
-          <a:p>
-            <a:r>
-              <a:rPr lang="ko-KR" altLang="en-US"/>
+          <a:lstStyle>
+            <a:lvl1pPr>
+              <a:defRPr b="1"/>
+            </a:lvl1pPr>
+          </a:lstStyle>
+          <a:p>
+            <a:r>
+              <a:rPr lang="ko-KR" altLang="en-US" dirty="0"/>
               <a:t>마스터 제목 스타일 편집</a:t>
             </a:r>
           </a:p>
@@ -2308,7 +2265,7 @@
           <a:p>
             <a:fld id="{3BECC8BA-EBCB-4BF9-8E87-970CE0138376}" type="datetime6">
               <a:rPr lang="ko-KR" altLang="en-US" smtClean="0"/>
-              <a:t>2023년 9월</a:t>
+              <a:t>2024년 7월</a:t>
             </a:fld>
             <a:endParaRPr lang="ko-KR" altLang="en-US"/>
           </a:p>
@@ -2371,7 +2328,7 @@
     </p:spTree>
     <p:extLst>
       <p:ext uri="{BB962C8B-B14F-4D97-AF65-F5344CB8AC3E}">
-        <p14:creationId xmlns:p14="http://schemas.microsoft.com/office/powerpoint/2010/main" val="3602548054"/>
+        <p14:creationId xmlns:p14="http://schemas.microsoft.com/office/powerpoint/2010/main" val="1979642852"/>
       </p:ext>
     </p:extLst>
   </p:cSld>
@@ -2516,7 +2473,7 @@
           <a:p>
             <a:fld id="{7869FA6E-4699-4AC6-B2CB-4E60A58ED7A8}" type="datetime6">
               <a:rPr lang="ko-KR" altLang="en-US" smtClean="0"/>
-              <a:t>2023년 9월</a:t>
+              <a:t>2024년 7월</a:t>
             </a:fld>
             <a:endParaRPr lang="ko-KR" altLang="en-US"/>
           </a:p>
@@ -2579,7 +2536,7 @@
     </p:spTree>
     <p:extLst>
       <p:ext uri="{BB962C8B-B14F-4D97-AF65-F5344CB8AC3E}">
-        <p14:creationId xmlns:p14="http://schemas.microsoft.com/office/powerpoint/2010/main" val="2313786568"/>
+        <p14:creationId xmlns:p14="http://schemas.microsoft.com/office/powerpoint/2010/main" val="4270582214"/>
       </p:ext>
     </p:extLst>
   </p:cSld>
@@ -2629,7 +2586,7 @@
           <a:p>
             <a:fld id="{0E19CB95-6D28-40F1-9DA3-1BAC5D4B5B4F}" type="datetime6">
               <a:rPr lang="ko-KR" altLang="en-US" smtClean="0"/>
-              <a:t>2023년 9월</a:t>
+              <a:t>2024년 7월</a:t>
             </a:fld>
             <a:endParaRPr lang="ko-KR" altLang="en-US"/>
           </a:p>
@@ -2766,7 +2723,7 @@
           </a:bodyPr>
           <a:lstStyle>
             <a:lvl1pPr algn="ctr">
-              <a:defRPr sz="8000" b="0">
+              <a:defRPr sz="8000" b="1">
                 <a:solidFill>
                   <a:srgbClr val="6EC173"/>
                 </a:solidFill>
@@ -2784,7 +2741,7 @@
     </p:spTree>
     <p:extLst>
       <p:ext uri="{BB962C8B-B14F-4D97-AF65-F5344CB8AC3E}">
-        <p14:creationId xmlns:p14="http://schemas.microsoft.com/office/powerpoint/2010/main" val="2608942727"/>
+        <p14:creationId xmlns:p14="http://schemas.microsoft.com/office/powerpoint/2010/main" val="2579510286"/>
       </p:ext>
     </p:extLst>
   </p:cSld>
@@ -2891,7 +2848,7 @@
           <a:p>
             <a:fld id="{3C9CE3CE-253F-4F9D-BA15-C226C8D8501E}" type="datetime6">
               <a:rPr lang="ko-KR" altLang="en-US" smtClean="0"/>
-              <a:t>2023년 9월</a:t>
+              <a:t>2024년 7월</a:t>
             </a:fld>
             <a:endParaRPr lang="ko-KR" altLang="en-US"/>
           </a:p>
@@ -2980,7 +2937,11 @@
           <a:bodyPr vert="horz" lIns="91440" tIns="45720" rIns="91440" bIns="45720" rtlCol="0" anchor="ctr">
             <a:normAutofit/>
           </a:bodyPr>
-          <a:lstStyle/>
+          <a:lstStyle>
+            <a:lvl1pPr>
+              <a:defRPr b="1"/>
+            </a:lvl1pPr>
+          </a:lstStyle>
           <a:p>
             <a:r>
               <a:rPr lang="ko-KR" altLang="en-US" dirty="0"/>
@@ -2992,7 +2953,7 @@
     </p:spTree>
     <p:extLst>
       <p:ext uri="{BB962C8B-B14F-4D97-AF65-F5344CB8AC3E}">
-        <p14:creationId xmlns:p14="http://schemas.microsoft.com/office/powerpoint/2010/main" val="2493143943"/>
+        <p14:creationId xmlns:p14="http://schemas.microsoft.com/office/powerpoint/2010/main" val="2280700379"/>
       </p:ext>
     </p:extLst>
   </p:cSld>
@@ -3204,7 +3165,7 @@
           <a:p>
             <a:fld id="{BE5A7087-D460-46DD-B430-F8D9B9677D08}" type="datetime6">
               <a:rPr lang="ko-KR" altLang="en-US" smtClean="0"/>
-              <a:t>2023년 9월</a:t>
+              <a:t>2024년 7월</a:t>
             </a:fld>
             <a:endParaRPr lang="ko-KR" altLang="en-US"/>
           </a:p>
@@ -3267,7 +3228,7 @@
     </p:spTree>
     <p:extLst>
       <p:ext uri="{BB962C8B-B14F-4D97-AF65-F5344CB8AC3E}">
-        <p14:creationId xmlns:p14="http://schemas.microsoft.com/office/powerpoint/2010/main" val="1559029814"/>
+        <p14:creationId xmlns:p14="http://schemas.microsoft.com/office/powerpoint/2010/main" val="1222484746"/>
       </p:ext>
     </p:extLst>
   </p:cSld>
@@ -3313,10 +3274,14 @@
         <p:spPr/>
         <p:txBody>
           <a:bodyPr/>
-          <a:lstStyle/>
-          <a:p>
-            <a:r>
-              <a:rPr lang="ko-KR" altLang="en-US"/>
+          <a:lstStyle>
+            <a:lvl1pPr>
+              <a:defRPr b="1"/>
+            </a:lvl1pPr>
+          </a:lstStyle>
+          <a:p>
+            <a:r>
+              <a:rPr lang="ko-KR" altLang="en-US" dirty="0"/>
               <a:t>마스터 제목 스타일 편집</a:t>
             </a:r>
           </a:p>
@@ -3469,7 +3434,7 @@
           <a:p>
             <a:fld id="{0581BA25-D675-4234-A003-8449BDEEF18E}" type="datetime6">
               <a:rPr lang="ko-KR" altLang="en-US" smtClean="0"/>
-              <a:t>2023년 9월</a:t>
+              <a:t>2024년 7월</a:t>
             </a:fld>
             <a:endParaRPr lang="ko-KR" altLang="en-US"/>
           </a:p>
@@ -3532,7 +3497,7 @@
     </p:spTree>
     <p:extLst>
       <p:ext uri="{BB962C8B-B14F-4D97-AF65-F5344CB8AC3E}">
-        <p14:creationId xmlns:p14="http://schemas.microsoft.com/office/powerpoint/2010/main" val="947449693"/>
+        <p14:creationId xmlns:p14="http://schemas.microsoft.com/office/powerpoint/2010/main" val="1835236580"/>
       </p:ext>
     </p:extLst>
   </p:cSld>
@@ -3583,10 +3548,14 @@
         </p:spPr>
         <p:txBody>
           <a:bodyPr/>
-          <a:lstStyle/>
-          <a:p>
-            <a:r>
-              <a:rPr lang="ko-KR" altLang="en-US"/>
+          <a:lstStyle>
+            <a:lvl1pPr>
+              <a:defRPr b="1"/>
+            </a:lvl1pPr>
+          </a:lstStyle>
+          <a:p>
+            <a:r>
+              <a:rPr lang="ko-KR" altLang="en-US" dirty="0"/>
               <a:t>마스터 제목 스타일 편집</a:t>
             </a:r>
           </a:p>
@@ -3881,7 +3850,7 @@
           <a:p>
             <a:fld id="{26155C29-A87F-46F0-A24C-6C9F0A4BF6AA}" type="datetime6">
               <a:rPr lang="ko-KR" altLang="en-US" smtClean="0"/>
-              <a:t>2023년 9월</a:t>
+              <a:t>2024년 7월</a:t>
             </a:fld>
             <a:endParaRPr lang="ko-KR" altLang="en-US"/>
           </a:p>
@@ -3944,7 +3913,7 @@
     </p:spTree>
     <p:extLst>
       <p:ext uri="{BB962C8B-B14F-4D97-AF65-F5344CB8AC3E}">
-        <p14:creationId xmlns:p14="http://schemas.microsoft.com/office/powerpoint/2010/main" val="2333661961"/>
+        <p14:creationId xmlns:p14="http://schemas.microsoft.com/office/powerpoint/2010/main" val="3220668969"/>
       </p:ext>
     </p:extLst>
   </p:cSld>
@@ -3990,10 +3959,14 @@
         <p:spPr/>
         <p:txBody>
           <a:bodyPr/>
-          <a:lstStyle/>
-          <a:p>
-            <a:r>
-              <a:rPr lang="ko-KR" altLang="en-US"/>
+          <a:lstStyle>
+            <a:lvl1pPr>
+              <a:defRPr b="1"/>
+            </a:lvl1pPr>
+          </a:lstStyle>
+          <a:p>
+            <a:r>
+              <a:rPr lang="ko-KR" altLang="en-US" dirty="0"/>
               <a:t>마스터 제목 스타일 편집</a:t>
             </a:r>
           </a:p>
@@ -4022,7 +3995,7 @@
           <a:p>
             <a:fld id="{DD2EDD62-8757-43DB-BAE0-460422B548EA}" type="datetime6">
               <a:rPr lang="ko-KR" altLang="en-US" smtClean="0"/>
-              <a:t>2023년 9월</a:t>
+              <a:t>2024년 7월</a:t>
             </a:fld>
             <a:endParaRPr lang="ko-KR" altLang="en-US"/>
           </a:p>
@@ -4085,7 +4058,7 @@
     </p:spTree>
     <p:extLst>
       <p:ext uri="{BB962C8B-B14F-4D97-AF65-F5344CB8AC3E}">
-        <p14:creationId xmlns:p14="http://schemas.microsoft.com/office/powerpoint/2010/main" val="1324141276"/>
+        <p14:creationId xmlns:p14="http://schemas.microsoft.com/office/powerpoint/2010/main" val="723136949"/>
       </p:ext>
     </p:extLst>
   </p:cSld>
@@ -4135,7 +4108,7 @@
           <a:p>
             <a:fld id="{DC6A871B-4800-495F-AC75-93D44C7DEBA5}" type="datetime6">
               <a:rPr lang="ko-KR" altLang="en-US" smtClean="0"/>
-              <a:t>2023년 9월</a:t>
+              <a:t>2024년 7월</a:t>
             </a:fld>
             <a:endParaRPr lang="ko-KR" altLang="en-US"/>
           </a:p>
@@ -4198,7 +4171,7 @@
     </p:spTree>
     <p:extLst>
       <p:ext uri="{BB962C8B-B14F-4D97-AF65-F5344CB8AC3E}">
-        <p14:creationId xmlns:p14="http://schemas.microsoft.com/office/powerpoint/2010/main" val="1014306624"/>
+        <p14:creationId xmlns:p14="http://schemas.microsoft.com/office/powerpoint/2010/main" val="1559128581"/>
       </p:ext>
     </p:extLst>
   </p:cSld>
@@ -4251,12 +4224,12 @@
           <a:bodyPr anchor="b"/>
           <a:lstStyle>
             <a:lvl1pPr>
-              <a:defRPr sz="3200"/>
+              <a:defRPr sz="3200" b="1"/>
             </a:lvl1pPr>
           </a:lstStyle>
           <a:p>
             <a:r>
-              <a:rPr lang="ko-KR" altLang="en-US"/>
+              <a:rPr lang="ko-KR" altLang="en-US" dirty="0"/>
               <a:t>마스터 제목 스타일 편집</a:t>
             </a:r>
           </a:p>
@@ -4446,7 +4419,7 @@
           <a:p>
             <a:fld id="{59605888-30A6-49BB-95E2-DEAE4E5B09E9}" type="datetime6">
               <a:rPr lang="ko-KR" altLang="en-US" smtClean="0"/>
-              <a:t>2023년 9월</a:t>
+              <a:t>2024년 7월</a:t>
             </a:fld>
             <a:endParaRPr lang="ko-KR" altLang="en-US"/>
           </a:p>
@@ -4509,7 +4482,7 @@
     </p:spTree>
     <p:extLst>
       <p:ext uri="{BB962C8B-B14F-4D97-AF65-F5344CB8AC3E}">
-        <p14:creationId xmlns:p14="http://schemas.microsoft.com/office/powerpoint/2010/main" val="2040181567"/>
+        <p14:creationId xmlns:p14="http://schemas.microsoft.com/office/powerpoint/2010/main" val="1326155215"/>
       </p:ext>
     </p:extLst>
   </p:cSld>
@@ -4612,35 +4585,35 @@
           <a:p>
             <a:pPr lvl="0"/>
             <a:r>
-              <a:rPr lang="ko-KR" altLang="en-US"/>
+              <a:rPr lang="ko-KR" altLang="en-US" dirty="0"/>
               <a:t>마스터 텍스트 스타일을 편집하려면 클릭</a:t>
             </a:r>
           </a:p>
           <a:p>
             <a:pPr lvl="1"/>
             <a:r>
-              <a:rPr lang="ko-KR" altLang="en-US"/>
+              <a:rPr lang="ko-KR" altLang="en-US" dirty="0"/>
               <a:t>두 번째 수준</a:t>
             </a:r>
           </a:p>
           <a:p>
             <a:pPr lvl="2"/>
             <a:r>
-              <a:rPr lang="ko-KR" altLang="en-US"/>
+              <a:rPr lang="ko-KR" altLang="en-US" dirty="0"/>
               <a:t>세 번째 수준</a:t>
             </a:r>
           </a:p>
           <a:p>
             <a:pPr lvl="3"/>
             <a:r>
-              <a:rPr lang="ko-KR" altLang="en-US"/>
+              <a:rPr lang="ko-KR" altLang="en-US" dirty="0"/>
               <a:t>네 번째 수준</a:t>
             </a:r>
           </a:p>
           <a:p>
             <a:pPr lvl="4"/>
             <a:r>
-              <a:rPr lang="ko-KR" altLang="en-US"/>
+              <a:rPr lang="ko-KR" altLang="en-US" dirty="0"/>
               <a:t>다섯 번째 수준</a:t>
             </a:r>
           </a:p>
@@ -4687,7 +4660,7 @@
           <a:p>
             <a:fld id="{8691C14A-5735-4A8B-B68B-DEC1DC2A3813}" type="datetime6">
               <a:rPr lang="ko-KR" altLang="en-US" smtClean="0"/>
-              <a:t>2023년 9월</a:t>
+              <a:t>2024년 7월</a:t>
             </a:fld>
             <a:endParaRPr lang="ko-KR" altLang="en-US"/>
           </a:p>
@@ -4839,10 +4812,10 @@
       </p:sp>
       <p:pic>
         <p:nvPicPr>
-          <p:cNvPr id="9" name="그림 8" descr="텍스트, 클립아트이(가) 표시된 사진&#10;&#10;자동 생성된 설명">
-            <a:extLst>
-              <a:ext uri="{FF2B5EF4-FFF2-40B4-BE49-F238E27FC236}">
-                <a16:creationId xmlns:a16="http://schemas.microsoft.com/office/drawing/2014/main" id="{CFFA81A6-6D9A-9C22-6A01-103FCC7108B8}"/>
+          <p:cNvPr id="14" name="그림 13" descr="그래픽, 그래픽 디자인, 폰트, 원이(가) 표시된 사진&#10;&#10;자동 생성된 설명">
+            <a:extLst>
+              <a:ext uri="{FF2B5EF4-FFF2-40B4-BE49-F238E27FC236}">
+                <a16:creationId xmlns:a16="http://schemas.microsoft.com/office/drawing/2014/main" id="{0EB71D7B-83F1-1414-954A-8C79751B7793}"/>
               </a:ext>
             </a:extLst>
           </p:cNvPr>
@@ -4853,7 +4826,6 @@
         </p:nvPicPr>
         <p:blipFill>
           <a:blip r:embed="rId14" cstate="hqprint">
-            <a:alphaModFix/>
             <a:extLst>
               <a:ext uri="{28A0092B-C50C-407E-A947-70E740481C1C}">
                 <a14:useLocalDpi xmlns:a14="http://schemas.microsoft.com/office/drawing/2010/main" val="0"/>
@@ -4866,136 +4838,35 @@
         </p:blipFill>
         <p:spPr>
           <a:xfrm>
-            <a:off x="11044576" y="140110"/>
-            <a:ext cx="1026976" cy="205105"/>
+            <a:off x="10835681" y="96056"/>
+            <a:ext cx="1260000" cy="270857"/>
           </a:xfrm>
           <a:prstGeom prst="rect">
             <a:avLst/>
           </a:prstGeom>
         </p:spPr>
       </p:pic>
-      <p:sp>
-        <p:nvSpPr>
-          <p:cNvPr id="10" name="TextBox 9">
-            <a:extLst>
-              <a:ext uri="{FF2B5EF4-FFF2-40B4-BE49-F238E27FC236}">
-                <a16:creationId xmlns:a16="http://schemas.microsoft.com/office/drawing/2014/main" id="{2E8CEA0B-0194-B9A0-705F-CAB04B3523DA}"/>
-              </a:ext>
-            </a:extLst>
-          </p:cNvPr>
-          <p:cNvSpPr txBox="1"/>
-          <p:nvPr userDrawn="1"/>
-        </p:nvSpPr>
-        <p:spPr>
-          <a:xfrm>
-            <a:off x="10814758" y="104713"/>
-            <a:ext cx="227015" cy="307777"/>
-          </a:xfrm>
-          <a:prstGeom prst="rect">
-            <a:avLst/>
-          </a:prstGeom>
-          <a:noFill/>
-        </p:spPr>
-        <p:txBody>
-          <a:bodyPr wrap="square" rtlCol="0">
-            <a:spAutoFit/>
-          </a:bodyPr>
-          <a:lstStyle/>
-          <a:p>
-            <a:pPr algn="ctr"/>
-            <a:r>
-              <a:rPr lang="en-US" altLang="ko-KR" sz="1400" b="1" dirty="0">
-                <a:solidFill>
-                  <a:schemeClr val="tx1"/>
-                </a:solidFill>
-              </a:rPr>
-              <a:t>X</a:t>
-            </a:r>
-            <a:endParaRPr lang="ko-KR" altLang="en-US" sz="2000" b="1" dirty="0">
-              <a:solidFill>
-                <a:schemeClr val="tx1"/>
-              </a:solidFill>
-            </a:endParaRPr>
-          </a:p>
-        </p:txBody>
-      </p:sp>
-      <p:pic>
-        <p:nvPicPr>
-          <p:cNvPr id="11" name="Picture 4" descr="청년취업사관학교, 새싹(SeSAC) - YouTube">
-            <a:extLst>
-              <a:ext uri="{FF2B5EF4-FFF2-40B4-BE49-F238E27FC236}">
-                <a16:creationId xmlns:a16="http://schemas.microsoft.com/office/drawing/2014/main" id="{AD5D531A-42B5-6D12-7A47-FFEB75D29CB0}"/>
-              </a:ext>
-            </a:extLst>
-          </p:cNvPr>
-          <p:cNvPicPr>
-            <a:picLocks noChangeAspect="1" noChangeArrowheads="1"/>
-          </p:cNvPicPr>
-          <p:nvPr userDrawn="1"/>
-        </p:nvPicPr>
-        <p:blipFill>
-          <a:blip r:embed="rId15" cstate="hqprint">
-            <a:extLst>
-              <a:ext uri="{BEBA8EAE-BF5A-486C-A8C5-ECC9F3942E4B}">
-                <a14:imgProps xmlns:a14="http://schemas.microsoft.com/office/drawing/2010/main">
-                  <a14:imgLayer r:embed="rId16">
-                    <a14:imgEffect>
-                      <a14:backgroundRemoval t="10000" b="90000" l="10000" r="90000"/>
-                    </a14:imgEffect>
-                  </a14:imgLayer>
-                </a14:imgProps>
-              </a:ext>
-              <a:ext uri="{28A0092B-C50C-407E-A947-70E740481C1C}">
-                <a14:useLocalDpi xmlns:a14="http://schemas.microsoft.com/office/drawing/2010/main" val="0"/>
-              </a:ext>
-            </a:extLst>
-          </a:blip>
-          <a:srcRect/>
-          <a:stretch>
-            <a:fillRect/>
-          </a:stretch>
-        </p:blipFill>
-        <p:spPr bwMode="auto">
-          <a:xfrm>
-            <a:off x="10492653" y="54125"/>
-            <a:ext cx="371243" cy="371243"/>
-          </a:xfrm>
-          <a:prstGeom prst="rect">
-            <a:avLst/>
-          </a:prstGeom>
-          <a:noFill/>
-          <a:extLst>
-            <a:ext uri="{909E8E84-426E-40DD-AFC4-6F175D3DCCD1}">
-              <a14:hiddenFill xmlns:a14="http://schemas.microsoft.com/office/drawing/2010/main">
-                <a:solidFill>
-                  <a:srgbClr val="FFFFFF"/>
-                </a:solidFill>
-              </a14:hiddenFill>
-            </a:ext>
-          </a:extLst>
-        </p:spPr>
-      </p:pic>
     </p:spTree>
     <p:extLst>
       <p:ext uri="{BB962C8B-B14F-4D97-AF65-F5344CB8AC3E}">
-        <p14:creationId xmlns:p14="http://schemas.microsoft.com/office/powerpoint/2010/main" val="579173985"/>
+        <p14:creationId xmlns:p14="http://schemas.microsoft.com/office/powerpoint/2010/main" val="3977480480"/>
       </p:ext>
     </p:extLst>
   </p:cSld>
   <p:clrMap bg1="lt1" tx1="dk1" bg2="lt2" tx2="dk2" accent1="accent1" accent2="accent2" accent3="accent3" accent4="accent4" accent5="accent5" accent6="accent6" hlink="hlink" folHlink="folHlink"/>
   <p:sldLayoutIdLst>
-    <p:sldLayoutId id="2147483674" r:id="rId1"/>
-    <p:sldLayoutId id="2147483675" r:id="rId2"/>
-    <p:sldLayoutId id="2147483676" r:id="rId3"/>
-    <p:sldLayoutId id="2147483677" r:id="rId4"/>
-    <p:sldLayoutId id="2147483678" r:id="rId5"/>
-    <p:sldLayoutId id="2147483679" r:id="rId6"/>
-    <p:sldLayoutId id="2147483680" r:id="rId7"/>
-    <p:sldLayoutId id="2147483681" r:id="rId8"/>
-    <p:sldLayoutId id="2147483682" r:id="rId9"/>
-    <p:sldLayoutId id="2147483683" r:id="rId10"/>
-    <p:sldLayoutId id="2147483684" r:id="rId11"/>
-    <p:sldLayoutId id="2147483685" r:id="rId12"/>
+    <p:sldLayoutId id="2147483687" r:id="rId1"/>
+    <p:sldLayoutId id="2147483688" r:id="rId2"/>
+    <p:sldLayoutId id="2147483689" r:id="rId3"/>
+    <p:sldLayoutId id="2147483690" r:id="rId4"/>
+    <p:sldLayoutId id="2147483691" r:id="rId5"/>
+    <p:sldLayoutId id="2147483692" r:id="rId6"/>
+    <p:sldLayoutId id="2147483693" r:id="rId7"/>
+    <p:sldLayoutId id="2147483694" r:id="rId8"/>
+    <p:sldLayoutId id="2147483695" r:id="rId9"/>
+    <p:sldLayoutId id="2147483696" r:id="rId10"/>
+    <p:sldLayoutId id="2147483697" r:id="rId11"/>
+    <p:sldLayoutId id="2147483698" r:id="rId12"/>
   </p:sldLayoutIdLst>
   <p:hf hdr="0" ftr="0"/>
   <p:txStyles>
@@ -5008,7 +4879,7 @@
           <a:spcPct val="0"/>
         </a:spcBef>
         <a:buNone/>
-        <a:defRPr sz="4400" kern="1200">
+        <a:defRPr sz="4400" b="1" kern="1200">
           <a:solidFill>
             <a:schemeClr val="tx1"/>
           </a:solidFill>
@@ -5374,7 +5245,7 @@
           <a:p>
             <a:fld id="{4DA02FB7-A3D0-4BF4-B23F-90A4C3B73A56}" type="datetime6">
               <a:rPr lang="ko-KR" altLang="en-US" smtClean="0"/>
-              <a:t>2023년 9월</a:t>
+              <a:t>2024년 7월</a:t>
             </a:fld>
             <a:endParaRPr lang="ko-KR" altLang="en-US" dirty="0"/>
           </a:p>
@@ -5456,7 +5327,7 @@
           <a:p>
             <a:fld id="{0E19CB95-6D28-40F1-9DA3-1BAC5D4B5B4F}" type="datetime6">
               <a:rPr lang="ko-KR" altLang="en-US" smtClean="0"/>
-              <a:t>2023년 9월</a:t>
+              <a:t>2024년 7월</a:t>
             </a:fld>
             <a:endParaRPr lang="ko-KR" altLang="en-US"/>
           </a:p>
@@ -5540,18 +5411,18 @@
       </p:grpSpPr>
       <p:sp>
         <p:nvSpPr>
-          <p:cNvPr id="2" name="제목 1">
-            <a:extLst>
-              <a:ext uri="{FF2B5EF4-FFF2-40B4-BE49-F238E27FC236}">
-                <a16:creationId xmlns:a16="http://schemas.microsoft.com/office/drawing/2014/main" id="{E11A36B4-A46B-4E8E-E378-EA3A6D84A2C6}"/>
-              </a:ext>
-            </a:extLst>
-          </p:cNvPr>
-          <p:cNvSpPr>
-            <a:spLocks noGrp="1"/>
-          </p:cNvSpPr>
-          <p:nvPr>
-            <p:ph type="title"/>
+          <p:cNvPr id="3" name="내용 개체 틀 2">
+            <a:extLst>
+              <a:ext uri="{FF2B5EF4-FFF2-40B4-BE49-F238E27FC236}">
+                <a16:creationId xmlns:a16="http://schemas.microsoft.com/office/drawing/2014/main" id="{DA4637DE-CA85-54BD-9BB5-8A7EF0E6FC9C}"/>
+              </a:ext>
+            </a:extLst>
+          </p:cNvPr>
+          <p:cNvSpPr>
+            <a:spLocks noGrp="1"/>
+          </p:cNvSpPr>
+          <p:nvPr>
+            <p:ph idx="1"/>
           </p:nvPr>
         </p:nvSpPr>
         <p:spPr/>
@@ -5561,16 +5432,103 @@
           <a:p>
             <a:r>
               <a:rPr lang="en-US" altLang="ko-KR" dirty="0"/>
-              <a:t>state</a:t>
+              <a:t>React</a:t>
             </a:r>
             <a:r>
               <a:rPr lang="ko-KR" altLang="en-US" dirty="0"/>
-              <a:t>란</a:t>
+              <a:t>에서 앱의 유동적인 데이터를 다루기 위한 개체</a:t>
+            </a:r>
+            <a:endParaRPr lang="en-US" altLang="ko-KR" dirty="0"/>
+          </a:p>
+          <a:p>
+            <a:r>
+              <a:rPr lang="ko-KR" altLang="en-US" dirty="0">
+                <a:solidFill>
+                  <a:schemeClr val="accent1"/>
+                </a:solidFill>
+              </a:rPr>
+              <a:t>계속해서 변하는 특정 상태</a:t>
+            </a:r>
+            <a:endParaRPr lang="en-US" altLang="ko-KR" dirty="0">
+              <a:solidFill>
+                <a:schemeClr val="accent1"/>
+              </a:solidFill>
+            </a:endParaRPr>
+          </a:p>
+          <a:p>
+            <a:r>
+              <a:rPr lang="ko-KR" altLang="en-US" dirty="0"/>
+              <a:t>상태에 따라 다른 동작을 함</a:t>
+            </a:r>
+            <a:endParaRPr lang="en-US" altLang="ko-KR" dirty="0"/>
+          </a:p>
+          <a:p>
+            <a:r>
+              <a:rPr lang="ko-KR" altLang="en-US" dirty="0"/>
+              <a:t>왜 사용할까</a:t>
             </a:r>
             <a:r>
               <a:rPr lang="en-US" altLang="ko-KR" dirty="0"/>
               <a:t>?</a:t>
             </a:r>
+          </a:p>
+          <a:p>
+            <a:pPr lvl="1"/>
+            <a:r>
+              <a:rPr lang="en-US" altLang="ko-KR" dirty="0">
+                <a:solidFill>
+                  <a:schemeClr val="accent1"/>
+                </a:solidFill>
+              </a:rPr>
+              <a:t>State</a:t>
+            </a:r>
+            <a:r>
+              <a:rPr lang="ko-KR" altLang="en-US" dirty="0">
+                <a:solidFill>
+                  <a:schemeClr val="accent1"/>
+                </a:solidFill>
+              </a:rPr>
+              <a:t>가 </a:t>
+            </a:r>
+            <a:r>
+              <a:rPr lang="ko-KR" altLang="en-US" dirty="0" err="1">
+                <a:solidFill>
+                  <a:schemeClr val="accent1"/>
+                </a:solidFill>
+              </a:rPr>
+              <a:t>변경될시</a:t>
+            </a:r>
+            <a:r>
+              <a:rPr lang="ko-KR" altLang="en-US" dirty="0">
+                <a:solidFill>
+                  <a:schemeClr val="accent1"/>
+                </a:solidFill>
+              </a:rPr>
+              <a:t> 자동으로 </a:t>
+            </a:r>
+            <a:r>
+              <a:rPr lang="ko-KR" altLang="en-US" dirty="0" err="1">
+                <a:solidFill>
+                  <a:schemeClr val="accent1"/>
+                </a:solidFill>
+              </a:rPr>
+              <a:t>재랜더링</a:t>
+            </a:r>
+            <a:r>
+              <a:rPr lang="ko-KR" altLang="en-US" dirty="0"/>
+              <a:t> 되기 때문</a:t>
+            </a:r>
+            <a:endParaRPr lang="en-US" altLang="ko-KR" dirty="0"/>
+          </a:p>
+          <a:p>
+            <a:pPr lvl="1"/>
+            <a:r>
+              <a:rPr lang="ko-KR" altLang="en-US" dirty="0"/>
+              <a:t>이 점이 변수와 다른 점</a:t>
+            </a:r>
+            <a:endParaRPr lang="en-US" altLang="ko-KR" dirty="0"/>
+          </a:p>
+          <a:p>
             <a:endParaRPr lang="ko-KR" altLang="en-US" dirty="0"/>
           </a:p>
         </p:txBody>
@@ -5598,7 +5556,7 @@
           <a:p>
             <a:fld id="{3CDE9A52-66EB-4C85-B703-18792A161207}" type="datetime6">
               <a:rPr lang="ko-KR" altLang="en-US" smtClean="0"/>
-              <a:t>2023년 9월</a:t>
+              <a:t>2024년 7월</a:t>
             </a:fld>
             <a:endParaRPr lang="ko-KR" altLang="en-US"/>
           </a:p>
@@ -5635,18 +5593,18 @@
       </p:sp>
       <p:sp>
         <p:nvSpPr>
-          <p:cNvPr id="3" name="내용 개체 틀 2">
-            <a:extLst>
-              <a:ext uri="{FF2B5EF4-FFF2-40B4-BE49-F238E27FC236}">
-                <a16:creationId xmlns:a16="http://schemas.microsoft.com/office/drawing/2014/main" id="{DA4637DE-CA85-54BD-9BB5-8A7EF0E6FC9C}"/>
-              </a:ext>
-            </a:extLst>
-          </p:cNvPr>
-          <p:cNvSpPr>
-            <a:spLocks noGrp="1"/>
-          </p:cNvSpPr>
-          <p:nvPr>
-            <p:ph idx="1"/>
+          <p:cNvPr id="2" name="제목 1">
+            <a:extLst>
+              <a:ext uri="{FF2B5EF4-FFF2-40B4-BE49-F238E27FC236}">
+                <a16:creationId xmlns:a16="http://schemas.microsoft.com/office/drawing/2014/main" id="{E11A36B4-A46B-4E8E-E378-EA3A6D84A2C6}"/>
+              </a:ext>
+            </a:extLst>
+          </p:cNvPr>
+          <p:cNvSpPr>
+            <a:spLocks noGrp="1"/>
+          </p:cNvSpPr>
+          <p:nvPr>
+            <p:ph type="title"/>
           </p:nvPr>
         </p:nvSpPr>
         <p:spPr/>
@@ -5656,103 +5614,16 @@
           <a:p>
             <a:r>
               <a:rPr lang="en-US" altLang="ko-KR" dirty="0"/>
-              <a:t>React</a:t>
+              <a:t>state</a:t>
             </a:r>
             <a:r>
               <a:rPr lang="ko-KR" altLang="en-US" dirty="0"/>
-              <a:t>에서 앱의 유동적인 데이터를 다루기 위한 개체</a:t>
-            </a:r>
-            <a:endParaRPr lang="en-US" altLang="ko-KR" dirty="0"/>
-          </a:p>
-          <a:p>
-            <a:r>
-              <a:rPr lang="ko-KR" altLang="en-US" dirty="0">
-                <a:solidFill>
-                  <a:schemeClr val="accent1"/>
-                </a:solidFill>
-              </a:rPr>
-              <a:t>계속해서 변하는 특정 상태</a:t>
-            </a:r>
-            <a:endParaRPr lang="en-US" altLang="ko-KR" dirty="0">
-              <a:solidFill>
-                <a:schemeClr val="accent1"/>
-              </a:solidFill>
-            </a:endParaRPr>
-          </a:p>
-          <a:p>
-            <a:r>
-              <a:rPr lang="ko-KR" altLang="en-US" dirty="0"/>
-              <a:t>상태에 따라 다른 동작을 함</a:t>
-            </a:r>
-            <a:endParaRPr lang="en-US" altLang="ko-KR" dirty="0"/>
-          </a:p>
-          <a:p>
-            <a:r>
-              <a:rPr lang="ko-KR" altLang="en-US" dirty="0"/>
-              <a:t>왜 사용할까</a:t>
+              <a:t>란</a:t>
             </a:r>
             <a:r>
               <a:rPr lang="en-US" altLang="ko-KR" dirty="0"/>
               <a:t>?</a:t>
             </a:r>
-          </a:p>
-          <a:p>
-            <a:pPr lvl="1"/>
-            <a:r>
-              <a:rPr lang="en-US" altLang="ko-KR" dirty="0">
-                <a:solidFill>
-                  <a:schemeClr val="accent1"/>
-                </a:solidFill>
-              </a:rPr>
-              <a:t>State</a:t>
-            </a:r>
-            <a:r>
-              <a:rPr lang="ko-KR" altLang="en-US" dirty="0">
-                <a:solidFill>
-                  <a:schemeClr val="accent1"/>
-                </a:solidFill>
-              </a:rPr>
-              <a:t>가 </a:t>
-            </a:r>
-            <a:r>
-              <a:rPr lang="ko-KR" altLang="en-US" dirty="0" err="1">
-                <a:solidFill>
-                  <a:schemeClr val="accent1"/>
-                </a:solidFill>
-              </a:rPr>
-              <a:t>변경될시</a:t>
-            </a:r>
-            <a:r>
-              <a:rPr lang="ko-KR" altLang="en-US" dirty="0">
-                <a:solidFill>
-                  <a:schemeClr val="accent1"/>
-                </a:solidFill>
-              </a:rPr>
-              <a:t> 자동으로 </a:t>
-            </a:r>
-            <a:r>
-              <a:rPr lang="ko-KR" altLang="en-US" dirty="0" err="1">
-                <a:solidFill>
-                  <a:schemeClr val="accent1"/>
-                </a:solidFill>
-              </a:rPr>
-              <a:t>재랜더링</a:t>
-            </a:r>
-            <a:r>
-              <a:rPr lang="ko-KR" altLang="en-US" dirty="0"/>
-              <a:t> 되기 때문</a:t>
-            </a:r>
-            <a:endParaRPr lang="en-US" altLang="ko-KR" dirty="0"/>
-          </a:p>
-          <a:p>
-            <a:pPr lvl="1"/>
-            <a:r>
-              <a:rPr lang="ko-KR" altLang="en-US" dirty="0"/>
-              <a:t>이 점이 변수와 다른 점</a:t>
-            </a:r>
-            <a:endParaRPr lang="en-US" altLang="ko-KR" dirty="0"/>
-          </a:p>
-          <a:p>
             <a:endParaRPr lang="ko-KR" altLang="en-US" dirty="0"/>
           </a:p>
         </p:txBody>
@@ -5789,30 +5660,304 @@
       </p:grpSpPr>
       <p:sp>
         <p:nvSpPr>
-          <p:cNvPr id="2" name="제목 1">
-            <a:extLst>
-              <a:ext uri="{FF2B5EF4-FFF2-40B4-BE49-F238E27FC236}">
-                <a16:creationId xmlns:a16="http://schemas.microsoft.com/office/drawing/2014/main" id="{E11A36B4-A46B-4E8E-E378-EA3A6D84A2C6}"/>
-              </a:ext>
-            </a:extLst>
-          </p:cNvPr>
-          <p:cNvSpPr>
-            <a:spLocks noGrp="1"/>
-          </p:cNvSpPr>
-          <p:nvPr>
-            <p:ph type="title"/>
-          </p:nvPr>
-        </p:nvSpPr>
-        <p:spPr/>
-        <p:txBody>
-          <a:bodyPr/>
-          <a:lstStyle/>
-          <a:p>
-            <a:r>
-              <a:rPr lang="en-US" altLang="ko-KR" dirty="0"/>
-              <a:t>state vs. props </a:t>
-            </a:r>
-            <a:endParaRPr lang="ko-KR" altLang="en-US" dirty="0"/>
+          <p:cNvPr id="10" name="내용 개체 틀 2">
+            <a:extLst>
+              <a:ext uri="{FF2B5EF4-FFF2-40B4-BE49-F238E27FC236}">
+                <a16:creationId xmlns:a16="http://schemas.microsoft.com/office/drawing/2014/main" id="{8BD993B5-DDCB-CC10-2049-37CD21B2475F}"/>
+              </a:ext>
+            </a:extLst>
+          </p:cNvPr>
+          <p:cNvSpPr>
+            <a:spLocks noGrp="1"/>
+          </p:cNvSpPr>
+          <p:nvPr>
+            <p:ph idx="1"/>
+          </p:nvPr>
+        </p:nvSpPr>
+        <p:spPr>
+          <a:xfrm>
+            <a:off x="354035" y="1388968"/>
+            <a:ext cx="8407470" cy="1835232"/>
+          </a:xfrm>
+        </p:spPr>
+        <p:txBody>
+          <a:bodyPr>
+            <a:normAutofit/>
+          </a:bodyPr>
+          <a:lstStyle/>
+          <a:p>
+            <a:r>
+              <a:rPr lang="en-US" altLang="ko-KR" sz="2000" b="1" dirty="0">
+                <a:solidFill>
+                  <a:schemeClr val="bg1">
+                    <a:lumMod val="50000"/>
+                  </a:schemeClr>
+                </a:solidFill>
+              </a:rPr>
+              <a:t>props</a:t>
+            </a:r>
+            <a:r>
+              <a:rPr lang="en-US" altLang="ko-KR" sz="2000" dirty="0">
+                <a:solidFill>
+                  <a:schemeClr val="bg1">
+                    <a:lumMod val="50000"/>
+                  </a:schemeClr>
+                </a:solidFill>
+              </a:rPr>
+              <a:t>: </a:t>
+            </a:r>
+            <a:r>
+              <a:rPr lang="ko-KR" altLang="en-US" sz="2000" dirty="0">
+                <a:solidFill>
+                  <a:schemeClr val="bg1">
+                    <a:lumMod val="50000"/>
+                  </a:schemeClr>
+                </a:solidFill>
+              </a:rPr>
+              <a:t>부모 컴포넌트에서 자식 컴포넌트에 데이터 전달 시 사용 </a:t>
+            </a:r>
+            <a:r>
+              <a:rPr lang="en-US" altLang="ko-KR" sz="2000" dirty="0">
+                <a:solidFill>
+                  <a:schemeClr val="bg1">
+                    <a:lumMod val="50000"/>
+                  </a:schemeClr>
+                </a:solidFill>
+              </a:rPr>
+              <a:t>(</a:t>
+            </a:r>
+            <a:r>
+              <a:rPr lang="ko-KR" altLang="en-US" sz="2000" dirty="0">
+                <a:solidFill>
+                  <a:schemeClr val="bg1">
+                    <a:lumMod val="50000"/>
+                  </a:schemeClr>
+                </a:solidFill>
+              </a:rPr>
+              <a:t>읽기모드</a:t>
+            </a:r>
+            <a:r>
+              <a:rPr lang="en-US" altLang="ko-KR" sz="2000" dirty="0">
+                <a:solidFill>
+                  <a:schemeClr val="bg1">
+                    <a:lumMod val="50000"/>
+                  </a:schemeClr>
+                </a:solidFill>
+              </a:rPr>
+              <a:t>)</a:t>
+            </a:r>
+          </a:p>
+          <a:p>
+            <a:pPr lvl="1"/>
+            <a:r>
+              <a:rPr lang="en-US" altLang="ko-KR" sz="1600" dirty="0">
+                <a:solidFill>
+                  <a:schemeClr val="bg1">
+                    <a:lumMod val="50000"/>
+                  </a:schemeClr>
+                </a:solidFill>
+              </a:rPr>
+              <a:t>React</a:t>
+            </a:r>
+            <a:r>
+              <a:rPr lang="ko-KR" altLang="en-US" sz="1600" dirty="0">
+                <a:solidFill>
+                  <a:schemeClr val="bg1">
+                    <a:lumMod val="50000"/>
+                  </a:schemeClr>
+                </a:solidFill>
+              </a:rPr>
+              <a:t>는 </a:t>
+            </a:r>
+            <a:r>
+              <a:rPr lang="ko-KR" altLang="en-US" sz="1600" b="1" dirty="0">
+                <a:solidFill>
+                  <a:schemeClr val="bg1">
+                    <a:lumMod val="50000"/>
+                  </a:schemeClr>
+                </a:solidFill>
+              </a:rPr>
+              <a:t>단방향 데이터 흐름</a:t>
+            </a:r>
+            <a:r>
+              <a:rPr lang="en-US" altLang="ko-KR" sz="1600" dirty="0">
+                <a:solidFill>
+                  <a:schemeClr val="bg1">
+                    <a:lumMod val="50000"/>
+                  </a:schemeClr>
+                </a:solidFill>
+              </a:rPr>
+              <a:t>! </a:t>
+            </a:r>
+            <a:r>
+              <a:rPr lang="ko-KR" altLang="en-US" sz="1600" dirty="0">
+                <a:solidFill>
+                  <a:schemeClr val="bg1">
+                    <a:lumMod val="50000"/>
+                  </a:schemeClr>
+                </a:solidFill>
+              </a:rPr>
+              <a:t>기억하시죠</a:t>
+            </a:r>
+            <a:r>
+              <a:rPr lang="en-US" altLang="ko-KR" sz="1600" dirty="0">
+                <a:solidFill>
+                  <a:schemeClr val="bg1">
+                    <a:lumMod val="50000"/>
+                  </a:schemeClr>
+                </a:solidFill>
+              </a:rPr>
+              <a:t>?</a:t>
+            </a:r>
+            <a:r>
+              <a:rPr lang="ko-KR" altLang="en-US" sz="1600" dirty="0">
+                <a:solidFill>
+                  <a:schemeClr val="bg1">
+                    <a:lumMod val="50000"/>
+                  </a:schemeClr>
+                </a:solidFill>
+              </a:rPr>
+              <a:t>😉</a:t>
+            </a:r>
+            <a:endParaRPr lang="en-US" altLang="ko-KR" sz="1600" dirty="0">
+              <a:solidFill>
+                <a:schemeClr val="bg1">
+                  <a:lumMod val="50000"/>
+                </a:schemeClr>
+              </a:solidFill>
+            </a:endParaRPr>
+          </a:p>
+          <a:p>
+            <a:r>
+              <a:rPr lang="en-US" altLang="ko-KR" sz="2000" b="1" dirty="0">
+                <a:solidFill>
+                  <a:schemeClr val="bg1">
+                    <a:lumMod val="50000"/>
+                  </a:schemeClr>
+                </a:solidFill>
+              </a:rPr>
+              <a:t>state</a:t>
+            </a:r>
+            <a:r>
+              <a:rPr lang="en-US" altLang="ko-KR" sz="2000" dirty="0">
+                <a:solidFill>
+                  <a:schemeClr val="bg1">
+                    <a:lumMod val="50000"/>
+                  </a:schemeClr>
+                </a:solidFill>
+              </a:rPr>
+              <a:t>: </a:t>
+            </a:r>
+            <a:r>
+              <a:rPr lang="ko-KR" altLang="en-US" sz="2000" dirty="0">
+                <a:solidFill>
+                  <a:schemeClr val="bg1">
+                    <a:lumMod val="50000"/>
+                  </a:schemeClr>
+                </a:solidFill>
+              </a:rPr>
+              <a:t>특정 컴포넌트가 갖는 상태 </a:t>
+            </a:r>
+            <a:r>
+              <a:rPr lang="en-US" altLang="ko-KR" sz="2000" dirty="0">
+                <a:solidFill>
+                  <a:schemeClr val="bg1">
+                    <a:lumMod val="50000"/>
+                  </a:schemeClr>
+                </a:solidFill>
+              </a:rPr>
+              <a:t>(</a:t>
+            </a:r>
+            <a:r>
+              <a:rPr lang="ko-KR" altLang="en-US" sz="2000" dirty="0">
+                <a:solidFill>
+                  <a:schemeClr val="bg1">
+                    <a:lumMod val="50000"/>
+                  </a:schemeClr>
+                </a:solidFill>
+              </a:rPr>
+              <a:t>값</a:t>
+            </a:r>
+            <a:r>
+              <a:rPr lang="en-US" altLang="ko-KR" sz="2000" dirty="0">
+                <a:solidFill>
+                  <a:schemeClr val="bg1">
+                    <a:lumMod val="50000"/>
+                  </a:schemeClr>
+                </a:solidFill>
+              </a:rPr>
+              <a:t>)</a:t>
+            </a:r>
+          </a:p>
+          <a:p>
+            <a:pPr lvl="1"/>
+            <a:r>
+              <a:rPr lang="ko-KR" altLang="en-US" sz="1600" dirty="0">
+                <a:solidFill>
+                  <a:schemeClr val="bg1">
+                    <a:lumMod val="50000"/>
+                  </a:schemeClr>
+                </a:solidFill>
+              </a:rPr>
+              <a:t>컴포넌트 </a:t>
+            </a:r>
+            <a:r>
+              <a:rPr lang="ko-KR" altLang="en-US" sz="1600" b="1" dirty="0">
+                <a:solidFill>
+                  <a:schemeClr val="bg1">
+                    <a:lumMod val="50000"/>
+                  </a:schemeClr>
+                </a:solidFill>
+              </a:rPr>
+              <a:t>내부에서</a:t>
+            </a:r>
+            <a:r>
+              <a:rPr lang="ko-KR" altLang="en-US" sz="1600" dirty="0">
+                <a:solidFill>
+                  <a:schemeClr val="bg1">
+                    <a:lumMod val="50000"/>
+                  </a:schemeClr>
+                </a:solidFill>
+              </a:rPr>
+              <a:t> 선언되고 </a:t>
+            </a:r>
+            <a:r>
+              <a:rPr lang="ko-KR" altLang="en-US" sz="1600" b="1" dirty="0">
+                <a:solidFill>
+                  <a:schemeClr val="bg1">
+                    <a:lumMod val="50000"/>
+                  </a:schemeClr>
+                </a:solidFill>
+              </a:rPr>
+              <a:t>내부에서</a:t>
+            </a:r>
+            <a:r>
+              <a:rPr lang="ko-KR" altLang="en-US" sz="1600" dirty="0">
+                <a:solidFill>
+                  <a:schemeClr val="bg1">
+                    <a:lumMod val="50000"/>
+                  </a:schemeClr>
+                </a:solidFill>
+              </a:rPr>
+              <a:t> 값을 변경함</a:t>
+            </a:r>
+            <a:r>
+              <a:rPr lang="en-US" altLang="ko-KR" sz="1600" dirty="0">
+                <a:solidFill>
+                  <a:schemeClr val="bg1">
+                    <a:lumMod val="50000"/>
+                  </a:schemeClr>
+                </a:solidFill>
+              </a:rPr>
+              <a:t>!</a:t>
+            </a:r>
+            <a:endParaRPr lang="ko-KR" altLang="en-US" sz="1600" dirty="0">
+              <a:solidFill>
+                <a:schemeClr val="bg1">
+                  <a:lumMod val="50000"/>
+                </a:schemeClr>
+              </a:solidFill>
+            </a:endParaRPr>
           </a:p>
         </p:txBody>
       </p:sp>
@@ -5839,7 +5984,7 @@
           <a:p>
             <a:fld id="{3CDE9A52-66EB-4C85-B703-18792A161207}" type="datetime6">
               <a:rPr lang="ko-KR" altLang="en-US" smtClean="0"/>
-              <a:t>2023년 9월</a:t>
+              <a:t>2024년 7월</a:t>
             </a:fld>
             <a:endParaRPr lang="ko-KR" altLang="en-US"/>
           </a:p>
@@ -5871,6 +6016,35 @@
               <a:t>12</a:t>
             </a:fld>
             <a:endParaRPr lang="ko-KR" altLang="en-US"/>
+          </a:p>
+        </p:txBody>
+      </p:sp>
+      <p:sp>
+        <p:nvSpPr>
+          <p:cNvPr id="2" name="제목 1">
+            <a:extLst>
+              <a:ext uri="{FF2B5EF4-FFF2-40B4-BE49-F238E27FC236}">
+                <a16:creationId xmlns:a16="http://schemas.microsoft.com/office/drawing/2014/main" id="{E11A36B4-A46B-4E8E-E378-EA3A6D84A2C6}"/>
+              </a:ext>
+            </a:extLst>
+          </p:cNvPr>
+          <p:cNvSpPr>
+            <a:spLocks noGrp="1"/>
+          </p:cNvSpPr>
+          <p:nvPr>
+            <p:ph type="title"/>
+          </p:nvPr>
+        </p:nvSpPr>
+        <p:spPr/>
+        <p:txBody>
+          <a:bodyPr/>
+          <a:lstStyle/>
+          <a:p>
+            <a:r>
+              <a:rPr lang="en-US" altLang="ko-KR" dirty="0"/>
+              <a:t>state vs. props </a:t>
+            </a:r>
+            <a:endParaRPr lang="ko-KR" altLang="en-US" dirty="0"/>
           </a:p>
         </p:txBody>
       </p:sp>
@@ -5910,309 +6084,6 @@
           </a:prstGeom>
         </p:spPr>
       </p:pic>
-      <p:sp>
-        <p:nvSpPr>
-          <p:cNvPr id="10" name="내용 개체 틀 2">
-            <a:extLst>
-              <a:ext uri="{FF2B5EF4-FFF2-40B4-BE49-F238E27FC236}">
-                <a16:creationId xmlns:a16="http://schemas.microsoft.com/office/drawing/2014/main" id="{8BD993B5-DDCB-CC10-2049-37CD21B2475F}"/>
-              </a:ext>
-            </a:extLst>
-          </p:cNvPr>
-          <p:cNvSpPr>
-            <a:spLocks noGrp="1"/>
-          </p:cNvSpPr>
-          <p:nvPr>
-            <p:ph idx="1"/>
-          </p:nvPr>
-        </p:nvSpPr>
-        <p:spPr>
-          <a:xfrm>
-            <a:off x="354035" y="1388968"/>
-            <a:ext cx="8407470" cy="1835232"/>
-          </a:xfrm>
-        </p:spPr>
-        <p:txBody>
-          <a:bodyPr>
-            <a:normAutofit/>
-          </a:bodyPr>
-          <a:lstStyle/>
-          <a:p>
-            <a:r>
-              <a:rPr lang="en-US" altLang="ko-KR" sz="2000" b="1" dirty="0">
-                <a:solidFill>
-                  <a:schemeClr val="bg1">
-                    <a:lumMod val="50000"/>
-                  </a:schemeClr>
-                </a:solidFill>
-              </a:rPr>
-              <a:t>props</a:t>
-            </a:r>
-            <a:r>
-              <a:rPr lang="en-US" altLang="ko-KR" sz="2000" dirty="0">
-                <a:solidFill>
-                  <a:schemeClr val="bg1">
-                    <a:lumMod val="50000"/>
-                  </a:schemeClr>
-                </a:solidFill>
-              </a:rPr>
-              <a:t>: </a:t>
-            </a:r>
-            <a:r>
-              <a:rPr lang="ko-KR" altLang="en-US" sz="2000" dirty="0">
-                <a:solidFill>
-                  <a:schemeClr val="bg1">
-                    <a:lumMod val="50000"/>
-                  </a:schemeClr>
-                </a:solidFill>
-              </a:rPr>
-              <a:t>부모 컴포넌트에서 자식 컴포넌트에 데이터 전달 시 사용 </a:t>
-            </a:r>
-            <a:r>
-              <a:rPr lang="en-US" altLang="ko-KR" sz="2000" dirty="0">
-                <a:solidFill>
-                  <a:schemeClr val="bg1">
-                    <a:lumMod val="50000"/>
-                  </a:schemeClr>
-                </a:solidFill>
-              </a:rPr>
-              <a:t>(</a:t>
-            </a:r>
-            <a:r>
-              <a:rPr lang="ko-KR" altLang="en-US" sz="2000" dirty="0">
-                <a:solidFill>
-                  <a:schemeClr val="bg1">
-                    <a:lumMod val="50000"/>
-                  </a:schemeClr>
-                </a:solidFill>
-              </a:rPr>
-              <a:t>읽기모드</a:t>
-            </a:r>
-            <a:r>
-              <a:rPr lang="en-US" altLang="ko-KR" sz="2000" dirty="0">
-                <a:solidFill>
-                  <a:schemeClr val="bg1">
-                    <a:lumMod val="50000"/>
-                  </a:schemeClr>
-                </a:solidFill>
-              </a:rPr>
-              <a:t>)</a:t>
-            </a:r>
-          </a:p>
-          <a:p>
-            <a:pPr lvl="1"/>
-            <a:r>
-              <a:rPr lang="en-US" altLang="ko-KR" sz="1600" dirty="0">
-                <a:solidFill>
-                  <a:schemeClr val="bg1">
-                    <a:lumMod val="50000"/>
-                  </a:schemeClr>
-                </a:solidFill>
-              </a:rPr>
-              <a:t>React</a:t>
-            </a:r>
-            <a:r>
-              <a:rPr lang="ko-KR" altLang="en-US" sz="1600" dirty="0">
-                <a:solidFill>
-                  <a:schemeClr val="bg1">
-                    <a:lumMod val="50000"/>
-                  </a:schemeClr>
-                </a:solidFill>
-              </a:rPr>
-              <a:t>는 </a:t>
-            </a:r>
-            <a:r>
-              <a:rPr lang="ko-KR" altLang="en-US" sz="1600" b="1" dirty="0">
-                <a:solidFill>
-                  <a:schemeClr val="bg1">
-                    <a:lumMod val="50000"/>
-                  </a:schemeClr>
-                </a:solidFill>
-              </a:rPr>
-              <a:t>단방향 데이터 흐름</a:t>
-            </a:r>
-            <a:r>
-              <a:rPr lang="en-US" altLang="ko-KR" sz="1600" dirty="0">
-                <a:solidFill>
-                  <a:schemeClr val="bg1">
-                    <a:lumMod val="50000"/>
-                  </a:schemeClr>
-                </a:solidFill>
-              </a:rPr>
-              <a:t>! </a:t>
-            </a:r>
-            <a:r>
-              <a:rPr lang="ko-KR" altLang="en-US" sz="1600" dirty="0">
-                <a:solidFill>
-                  <a:schemeClr val="bg1">
-                    <a:lumMod val="50000"/>
-                  </a:schemeClr>
-                </a:solidFill>
-              </a:rPr>
-              <a:t>기억하시죠</a:t>
-            </a:r>
-            <a:r>
-              <a:rPr lang="en-US" altLang="ko-KR" sz="1600" dirty="0">
-                <a:solidFill>
-                  <a:schemeClr val="bg1">
-                    <a:lumMod val="50000"/>
-                  </a:schemeClr>
-                </a:solidFill>
-              </a:rPr>
-              <a:t>?</a:t>
-            </a:r>
-            <a:r>
-              <a:rPr lang="ko-KR" altLang="en-US" sz="1600" dirty="0">
-                <a:solidFill>
-                  <a:schemeClr val="bg1">
-                    <a:lumMod val="50000"/>
-                  </a:schemeClr>
-                </a:solidFill>
-              </a:rPr>
-              <a:t>😉</a:t>
-            </a:r>
-            <a:endParaRPr lang="en-US" altLang="ko-KR" sz="1600" dirty="0">
-              <a:solidFill>
-                <a:schemeClr val="bg1">
-                  <a:lumMod val="50000"/>
-                </a:schemeClr>
-              </a:solidFill>
-            </a:endParaRPr>
-          </a:p>
-          <a:p>
-            <a:r>
-              <a:rPr lang="en-US" altLang="ko-KR" sz="2000" b="1" dirty="0">
-                <a:solidFill>
-                  <a:schemeClr val="bg1">
-                    <a:lumMod val="50000"/>
-                  </a:schemeClr>
-                </a:solidFill>
-              </a:rPr>
-              <a:t>state</a:t>
-            </a:r>
-            <a:r>
-              <a:rPr lang="en-US" altLang="ko-KR" sz="2000" dirty="0">
-                <a:solidFill>
-                  <a:schemeClr val="bg1">
-                    <a:lumMod val="50000"/>
-                  </a:schemeClr>
-                </a:solidFill>
-              </a:rPr>
-              <a:t>: </a:t>
-            </a:r>
-            <a:r>
-              <a:rPr lang="ko-KR" altLang="en-US" sz="2000" dirty="0">
-                <a:solidFill>
-                  <a:schemeClr val="bg1">
-                    <a:lumMod val="50000"/>
-                  </a:schemeClr>
-                </a:solidFill>
-              </a:rPr>
-              <a:t>특정 컴포넌트가 갖는 상태 </a:t>
-            </a:r>
-            <a:r>
-              <a:rPr lang="en-US" altLang="ko-KR" sz="2000" dirty="0">
-                <a:solidFill>
-                  <a:schemeClr val="bg1">
-                    <a:lumMod val="50000"/>
-                  </a:schemeClr>
-                </a:solidFill>
-              </a:rPr>
-              <a:t>(</a:t>
-            </a:r>
-            <a:r>
-              <a:rPr lang="ko-KR" altLang="en-US" sz="2000" dirty="0">
-                <a:solidFill>
-                  <a:schemeClr val="bg1">
-                    <a:lumMod val="50000"/>
-                  </a:schemeClr>
-                </a:solidFill>
-              </a:rPr>
-              <a:t>값</a:t>
-            </a:r>
-            <a:r>
-              <a:rPr lang="en-US" altLang="ko-KR" sz="2000" dirty="0">
-                <a:solidFill>
-                  <a:schemeClr val="bg1">
-                    <a:lumMod val="50000"/>
-                  </a:schemeClr>
-                </a:solidFill>
-              </a:rPr>
-              <a:t>)</a:t>
-            </a:r>
-          </a:p>
-          <a:p>
-            <a:pPr lvl="1"/>
-            <a:r>
-              <a:rPr lang="ko-KR" altLang="en-US" sz="1600" dirty="0">
-                <a:solidFill>
-                  <a:schemeClr val="bg1">
-                    <a:lumMod val="50000"/>
-                  </a:schemeClr>
-                </a:solidFill>
-              </a:rPr>
-              <a:t>컴포넌트 </a:t>
-            </a:r>
-            <a:r>
-              <a:rPr lang="ko-KR" altLang="en-US" sz="1600" b="1" dirty="0">
-                <a:solidFill>
-                  <a:schemeClr val="bg1">
-                    <a:lumMod val="50000"/>
-                  </a:schemeClr>
-                </a:solidFill>
-              </a:rPr>
-              <a:t>내부에서</a:t>
-            </a:r>
-            <a:r>
-              <a:rPr lang="ko-KR" altLang="en-US" sz="1600" dirty="0">
-                <a:solidFill>
-                  <a:schemeClr val="bg1">
-                    <a:lumMod val="50000"/>
-                  </a:schemeClr>
-                </a:solidFill>
-              </a:rPr>
-              <a:t> 선언되고 </a:t>
-            </a:r>
-            <a:r>
-              <a:rPr lang="ko-KR" altLang="en-US" sz="1600" b="1" dirty="0">
-                <a:solidFill>
-                  <a:schemeClr val="bg1">
-                    <a:lumMod val="50000"/>
-                  </a:schemeClr>
-                </a:solidFill>
-              </a:rPr>
-              <a:t>내부에서</a:t>
-            </a:r>
-            <a:r>
-              <a:rPr lang="ko-KR" altLang="en-US" sz="1600" dirty="0">
-                <a:solidFill>
-                  <a:schemeClr val="bg1">
-                    <a:lumMod val="50000"/>
-                  </a:schemeClr>
-                </a:solidFill>
-              </a:rPr>
-              <a:t> 값을 변경함</a:t>
-            </a:r>
-            <a:r>
-              <a:rPr lang="en-US" altLang="ko-KR" sz="1600" dirty="0">
-                <a:solidFill>
-                  <a:schemeClr val="bg1">
-                    <a:lumMod val="50000"/>
-                  </a:schemeClr>
-                </a:solidFill>
-              </a:rPr>
-              <a:t>!</a:t>
-            </a:r>
-            <a:endParaRPr lang="ko-KR" altLang="en-US" sz="1600" dirty="0">
-              <a:solidFill>
-                <a:schemeClr val="bg1">
-                  <a:lumMod val="50000"/>
-                </a:schemeClr>
-              </a:solidFill>
-            </a:endParaRPr>
-          </a:p>
-        </p:txBody>
-      </p:sp>
     </p:spTree>
     <p:extLst>
       <p:ext uri="{BB962C8B-B14F-4D97-AF65-F5344CB8AC3E}">
@@ -6297,7 +6168,7 @@
           <a:p>
             <a:fld id="{3C9CE3CE-253F-4F9D-BA15-C226C8D8501E}" type="datetime6">
               <a:rPr lang="ko-KR" altLang="en-US" smtClean="0"/>
-              <a:t>2023년 9월</a:t>
+              <a:t>2024년 7월</a:t>
             </a:fld>
             <a:endParaRPr lang="ko-KR" altLang="en-US"/>
           </a:p>
@@ -6476,7 +6347,7 @@
           <a:p>
             <a:fld id="{3C9CE3CE-253F-4F9D-BA15-C226C8D8501E}" type="datetime6">
               <a:rPr lang="ko-KR" altLang="en-US" smtClean="0"/>
-              <a:t>2023년 9월</a:t>
+              <a:t>2024년 7월</a:t>
             </a:fld>
             <a:endParaRPr lang="ko-KR" altLang="en-US"/>
           </a:p>
@@ -6713,7 +6584,7 @@
           <a:p>
             <a:fld id="{3C9CE3CE-253F-4F9D-BA15-C226C8D8501E}" type="datetime6">
               <a:rPr lang="ko-KR" altLang="en-US" smtClean="0"/>
-              <a:t>2023년 9월</a:t>
+              <a:t>2024년 7월</a:t>
             </a:fld>
             <a:endParaRPr lang="ko-KR" altLang="en-US"/>
           </a:p>
@@ -6813,31 +6684,6 @@
       </p:grpSpPr>
       <p:sp>
         <p:nvSpPr>
-          <p:cNvPr id="2" name="내용 개체 틀 1">
-            <a:extLst>
-              <a:ext uri="{FF2B5EF4-FFF2-40B4-BE49-F238E27FC236}">
-                <a16:creationId xmlns:a16="http://schemas.microsoft.com/office/drawing/2014/main" id="{AB591E8E-0ABF-648F-4E82-06415FF1AB36}"/>
-              </a:ext>
-            </a:extLst>
-          </p:cNvPr>
-          <p:cNvSpPr>
-            <a:spLocks noGrp="1"/>
-          </p:cNvSpPr>
-          <p:nvPr>
-            <p:ph idx="1"/>
-          </p:nvPr>
-        </p:nvSpPr>
-        <p:spPr/>
-        <p:txBody>
-          <a:bodyPr/>
-          <a:lstStyle/>
-          <a:p>
-            <a:endParaRPr lang="ko-KR" altLang="en-US" dirty="0"/>
-          </a:p>
-        </p:txBody>
-      </p:sp>
-      <p:sp>
-        <p:nvSpPr>
           <p:cNvPr id="3" name="날짜 개체 틀 2">
             <a:extLst>
               <a:ext uri="{FF2B5EF4-FFF2-40B4-BE49-F238E27FC236}">
@@ -6859,7 +6705,7 @@
           <a:p>
             <a:fld id="{3C9CE3CE-253F-4F9D-BA15-C226C8D8501E}" type="datetime6">
               <a:rPr lang="ko-KR" altLang="en-US" smtClean="0"/>
-              <a:t>2023년 9월</a:t>
+              <a:t>2024년 7월</a:t>
             </a:fld>
             <a:endParaRPr lang="ko-KR" altLang="en-US"/>
           </a:p>
@@ -7014,7 +6860,7 @@
           <a:p>
             <a:fld id="{3C9CE3CE-253F-4F9D-BA15-C226C8D8501E}" type="datetime6">
               <a:rPr lang="ko-KR" altLang="en-US" smtClean="0"/>
-              <a:t>2023년 9월</a:t>
+              <a:t>2024년 7월</a:t>
             </a:fld>
             <a:endParaRPr lang="ko-KR" altLang="en-US"/>
           </a:p>
@@ -7597,7 +7443,7 @@
         </p:nvSpPr>
         <p:spPr>
           <a:xfrm>
-            <a:off x="9223879" y="1542561"/>
+            <a:off x="9499407" y="1583781"/>
             <a:ext cx="1797181" cy="426800"/>
           </a:xfrm>
           <a:prstGeom prst="rect">
@@ -7709,7 +7555,7 @@
         </p:nvSpPr>
         <p:spPr>
           <a:xfrm>
-            <a:off x="7604849" y="3001208"/>
+            <a:off x="7871905" y="3605727"/>
             <a:ext cx="1053998" cy="360977"/>
           </a:xfrm>
           <a:prstGeom prst="rect">
@@ -7821,8 +7667,8 @@
         </p:nvSpPr>
         <p:spPr>
           <a:xfrm>
-            <a:off x="7604849" y="3389455"/>
-            <a:ext cx="3055629" cy="360978"/>
+            <a:off x="7871905" y="4003201"/>
+            <a:ext cx="3219229" cy="360978"/>
           </a:xfrm>
           <a:prstGeom prst="rect">
             <a:avLst/>
@@ -8248,43 +8094,6 @@
       </p:grpSpPr>
       <p:sp>
         <p:nvSpPr>
-          <p:cNvPr id="2" name="제목 1">
-            <a:extLst>
-              <a:ext uri="{FF2B5EF4-FFF2-40B4-BE49-F238E27FC236}">
-                <a16:creationId xmlns:a16="http://schemas.microsoft.com/office/drawing/2014/main" id="{8250AAEC-7E0B-A789-02BD-F4B3E84A9372}"/>
-              </a:ext>
-            </a:extLst>
-          </p:cNvPr>
-          <p:cNvSpPr>
-            <a:spLocks noGrp="1"/>
-          </p:cNvSpPr>
-          <p:nvPr>
-            <p:ph type="title"/>
-          </p:nvPr>
-        </p:nvSpPr>
-        <p:spPr/>
-        <p:txBody>
-          <a:bodyPr/>
-          <a:lstStyle/>
-          <a:p>
-            <a:r>
-              <a:rPr lang="ko-KR" altLang="en-US" dirty="0"/>
-              <a:t>함수형 컴포넌트의 </a:t>
-            </a:r>
-            <a:r>
-              <a:rPr lang="en-US" altLang="ko-KR" dirty="0" err="1"/>
-              <a:t>useState</a:t>
-            </a:r>
-            <a:r>
-              <a:rPr lang="en-US" altLang="ko-KR" dirty="0"/>
-              <a:t>()</a:t>
-            </a:r>
-            <a:endParaRPr lang="ko-KR" altLang="en-US" dirty="0"/>
-          </a:p>
-        </p:txBody>
-      </p:sp>
-      <p:sp>
-        <p:nvSpPr>
           <p:cNvPr id="4" name="날짜 개체 틀 3">
             <a:extLst>
               <a:ext uri="{FF2B5EF4-FFF2-40B4-BE49-F238E27FC236}">
@@ -8306,7 +8115,7 @@
           <a:p>
             <a:fld id="{2C16E909-BEFD-4A9C-BB36-F9A91296299E}" type="datetime6">
               <a:rPr lang="ko-KR" altLang="en-US" smtClean="0"/>
-              <a:t>2023년 9월</a:t>
+              <a:t>2024년 7월</a:t>
             </a:fld>
             <a:endParaRPr lang="ko-KR" altLang="en-US"/>
           </a:p>
@@ -8338,6 +8147,43 @@
               <a:t>18</a:t>
             </a:fld>
             <a:endParaRPr lang="ko-KR" altLang="en-US"/>
+          </a:p>
+        </p:txBody>
+      </p:sp>
+      <p:sp>
+        <p:nvSpPr>
+          <p:cNvPr id="2" name="제목 1">
+            <a:extLst>
+              <a:ext uri="{FF2B5EF4-FFF2-40B4-BE49-F238E27FC236}">
+                <a16:creationId xmlns:a16="http://schemas.microsoft.com/office/drawing/2014/main" id="{8250AAEC-7E0B-A789-02BD-F4B3E84A9372}"/>
+              </a:ext>
+            </a:extLst>
+          </p:cNvPr>
+          <p:cNvSpPr>
+            <a:spLocks noGrp="1"/>
+          </p:cNvSpPr>
+          <p:nvPr>
+            <p:ph type="title"/>
+          </p:nvPr>
+        </p:nvSpPr>
+        <p:spPr/>
+        <p:txBody>
+          <a:bodyPr/>
+          <a:lstStyle/>
+          <a:p>
+            <a:r>
+              <a:rPr lang="ko-KR" altLang="en-US" dirty="0"/>
+              <a:t>함수형 컴포넌트의 </a:t>
+            </a:r>
+            <a:r>
+              <a:rPr lang="en-US" altLang="ko-KR" dirty="0" err="1"/>
+              <a:t>useState</a:t>
+            </a:r>
+            <a:r>
+              <a:rPr lang="en-US" altLang="ko-KR" dirty="0"/>
+              <a:t>()</a:t>
+            </a:r>
+            <a:endParaRPr lang="ko-KR" altLang="en-US" dirty="0"/>
           </a:p>
         </p:txBody>
       </p:sp>
@@ -8418,7 +8264,7 @@
           <a:p>
             <a:fld id="{0E19CB95-6D28-40F1-9DA3-1BAC5D4B5B4F}" type="datetime6">
               <a:rPr lang="ko-KR" altLang="en-US" smtClean="0"/>
-              <a:t>2023년 9월</a:t>
+              <a:t>2024년 7월</a:t>
             </a:fld>
             <a:endParaRPr lang="ko-KR" altLang="en-US"/>
           </a:p>
@@ -8502,24 +8348,52 @@
       </p:grpSpPr>
       <p:sp>
         <p:nvSpPr>
-          <p:cNvPr id="2" name="제목 1">
-            <a:extLst>
-              <a:ext uri="{FF2B5EF4-FFF2-40B4-BE49-F238E27FC236}">
-                <a16:creationId xmlns:a16="http://schemas.microsoft.com/office/drawing/2014/main" id="{7D5D341A-A4A5-AEF2-4CD5-0AAC35115672}"/>
-              </a:ext>
-            </a:extLst>
-          </p:cNvPr>
-          <p:cNvSpPr>
-            <a:spLocks noGrp="1"/>
-          </p:cNvSpPr>
-          <p:nvPr>
-            <p:ph type="title"/>
-          </p:nvPr>
-        </p:nvSpPr>
-        <p:spPr/>
-        <p:txBody>
-          <a:bodyPr/>
-          <a:lstStyle/>
+          <p:cNvPr id="3" name="내용 개체 틀 2">
+            <a:extLst>
+              <a:ext uri="{FF2B5EF4-FFF2-40B4-BE49-F238E27FC236}">
+                <a16:creationId xmlns:a16="http://schemas.microsoft.com/office/drawing/2014/main" id="{6FA56DB0-EFB4-9A97-9462-05D086070C97}"/>
+              </a:ext>
+            </a:extLst>
+          </p:cNvPr>
+          <p:cNvSpPr>
+            <a:spLocks noGrp="1"/>
+          </p:cNvSpPr>
+          <p:nvPr>
+            <p:ph idx="1"/>
+          </p:nvPr>
+        </p:nvSpPr>
+        <p:spPr>
+          <a:xfrm>
+            <a:off x="838199" y="1549052"/>
+            <a:ext cx="10909152" cy="4351338"/>
+          </a:xfrm>
+        </p:spPr>
+        <p:txBody>
+          <a:bodyPr/>
+          <a:lstStyle/>
+          <a:p>
+            <a:r>
+              <a:rPr lang="en-US" altLang="ko-KR" dirty="0"/>
+              <a:t>properties</a:t>
+            </a:r>
+            <a:r>
+              <a:rPr lang="ko-KR" altLang="en-US" dirty="0"/>
+              <a:t> 를 줄인 표현으로 </a:t>
+            </a:r>
+            <a:r>
+              <a:rPr lang="ko-KR" altLang="en-US" dirty="0">
+                <a:solidFill>
+                  <a:schemeClr val="accent1"/>
+                </a:solidFill>
+              </a:rPr>
+              <a:t>컴포넌트 속성을 설정할 때 사용하는 요소</a:t>
+            </a:r>
+            <a:endParaRPr lang="en-US" altLang="ko-KR" dirty="0">
+              <a:solidFill>
+                <a:schemeClr val="accent1"/>
+              </a:solidFill>
+            </a:endParaRPr>
+          </a:p>
           <a:p>
             <a:r>
               <a:rPr lang="en-US" altLang="ko-KR" dirty="0"/>
@@ -8527,11 +8401,46 @@
             </a:r>
             <a:r>
               <a:rPr lang="ko-KR" altLang="en-US" dirty="0"/>
-              <a:t>란</a:t>
+              <a:t>는 컴포넌트끼리 값을 전달하는 수단</a:t>
+            </a:r>
+            <a:endParaRPr lang="en-US" altLang="ko-KR" dirty="0"/>
+          </a:p>
+          <a:p>
+            <a:r>
+              <a:rPr lang="ko-KR" altLang="en-US" dirty="0">
+                <a:solidFill>
+                  <a:srgbClr val="FF0000"/>
+                </a:solidFill>
+              </a:rPr>
+              <a:t>상위</a:t>
+            </a:r>
+            <a:r>
+              <a:rPr lang="ko-KR" altLang="en-US" dirty="0"/>
+              <a:t> 컴포넌트에서 </a:t>
+            </a:r>
+            <a:r>
+              <a:rPr lang="ko-KR" altLang="en-US" dirty="0">
+                <a:solidFill>
+                  <a:srgbClr val="FF0000"/>
+                </a:solidFill>
+              </a:rPr>
+              <a:t>하위</a:t>
+            </a:r>
+            <a:r>
+              <a:rPr lang="ko-KR" altLang="en-US" dirty="0"/>
+              <a:t> 컴포넌트로 전달 </a:t>
             </a:r>
             <a:r>
               <a:rPr lang="en-US" altLang="ko-KR" dirty="0"/>
-              <a:t>?</a:t>
+              <a:t>(</a:t>
+            </a:r>
+            <a:r>
+              <a:rPr lang="ko-KR" altLang="en-US" dirty="0"/>
+              <a:t>단방향 데이터 흐름</a:t>
+            </a:r>
+            <a:r>
+              <a:rPr lang="en-US" altLang="ko-KR" dirty="0"/>
+              <a:t>)</a:t>
             </a:r>
             <a:endParaRPr lang="ko-KR" altLang="en-US" dirty="0"/>
           </a:p>
@@ -8560,7 +8469,7 @@
           <a:p>
             <a:fld id="{F7A0D294-60EA-4DAA-90A4-E86E9A5EB9AE}" type="datetime6">
               <a:rPr lang="ko-KR" altLang="en-US" smtClean="0"/>
-              <a:t>2023년 9월</a:t>
+              <a:t>2024년 7월</a:t>
             </a:fld>
             <a:endParaRPr lang="ko-KR" altLang="en-US"/>
           </a:p>
@@ -8597,47 +8506,24 @@
       </p:sp>
       <p:sp>
         <p:nvSpPr>
-          <p:cNvPr id="3" name="내용 개체 틀 2">
-            <a:extLst>
-              <a:ext uri="{FF2B5EF4-FFF2-40B4-BE49-F238E27FC236}">
-                <a16:creationId xmlns:a16="http://schemas.microsoft.com/office/drawing/2014/main" id="{6FA56DB0-EFB4-9A97-9462-05D086070C97}"/>
-              </a:ext>
-            </a:extLst>
-          </p:cNvPr>
-          <p:cNvSpPr>
-            <a:spLocks noGrp="1"/>
-          </p:cNvSpPr>
-          <p:nvPr>
-            <p:ph idx="1"/>
-          </p:nvPr>
-        </p:nvSpPr>
-        <p:spPr/>
-        <p:txBody>
-          <a:bodyPr/>
-          <a:lstStyle/>
-          <a:p>
-            <a:r>
-              <a:rPr lang="en-US" altLang="ko-KR" dirty="0"/>
-              <a:t>properties</a:t>
-            </a:r>
-            <a:r>
-              <a:rPr lang="ko-KR" altLang="en-US" dirty="0"/>
-              <a:t> 를 줄인 표현으로 </a:t>
-            </a:r>
-            <a:r>
-              <a:rPr lang="ko-KR" altLang="en-US" dirty="0">
-                <a:solidFill>
-                  <a:schemeClr val="accent1"/>
-                </a:solidFill>
-              </a:rPr>
-              <a:t>컴포넌트 속성을 설정할 때 사용하는 요소</a:t>
-            </a:r>
-            <a:endParaRPr lang="en-US" altLang="ko-KR" dirty="0">
-              <a:solidFill>
-                <a:schemeClr val="accent1"/>
-              </a:solidFill>
-            </a:endParaRPr>
-          </a:p>
+          <p:cNvPr id="2" name="제목 1">
+            <a:extLst>
+              <a:ext uri="{FF2B5EF4-FFF2-40B4-BE49-F238E27FC236}">
+                <a16:creationId xmlns:a16="http://schemas.microsoft.com/office/drawing/2014/main" id="{7D5D341A-A4A5-AEF2-4CD5-0AAC35115672}"/>
+              </a:ext>
+            </a:extLst>
+          </p:cNvPr>
+          <p:cNvSpPr>
+            <a:spLocks noGrp="1"/>
+          </p:cNvSpPr>
+          <p:nvPr>
+            <p:ph type="title"/>
+          </p:nvPr>
+        </p:nvSpPr>
+        <p:spPr/>
+        <p:txBody>
+          <a:bodyPr/>
+          <a:lstStyle/>
           <a:p>
             <a:r>
               <a:rPr lang="en-US" altLang="ko-KR" dirty="0"/>
@@ -8645,46 +8531,11 @@
             </a:r>
             <a:r>
               <a:rPr lang="ko-KR" altLang="en-US" dirty="0"/>
-              <a:t>는 컴포넌트끼리 값을 전달하는 수단</a:t>
-            </a:r>
-            <a:endParaRPr lang="en-US" altLang="ko-KR" dirty="0"/>
-          </a:p>
-          <a:p>
-            <a:r>
-              <a:rPr lang="ko-KR" altLang="en-US" dirty="0">
-                <a:solidFill>
-                  <a:srgbClr val="FF0000"/>
-                </a:solidFill>
-              </a:rPr>
-              <a:t>상위</a:t>
-            </a:r>
-            <a:r>
-              <a:rPr lang="ko-KR" altLang="en-US" dirty="0"/>
-              <a:t> 컴포넌트에서 </a:t>
-            </a:r>
-            <a:r>
-              <a:rPr lang="ko-KR" altLang="en-US" dirty="0">
-                <a:solidFill>
-                  <a:srgbClr val="FF0000"/>
-                </a:solidFill>
-              </a:rPr>
-              <a:t>하위</a:t>
-            </a:r>
-            <a:r>
-              <a:rPr lang="ko-KR" altLang="en-US" dirty="0"/>
-              <a:t> 컴포넌트로 전달 </a:t>
+              <a:t>란</a:t>
             </a:r>
             <a:r>
               <a:rPr lang="en-US" altLang="ko-KR" dirty="0"/>
-              <a:t>(</a:t>
-            </a:r>
-            <a:r>
-              <a:rPr lang="ko-KR" altLang="en-US" dirty="0"/>
-              <a:t>단방향 데이터 흐름</a:t>
-            </a:r>
-            <a:r>
-              <a:rPr lang="en-US" altLang="ko-KR" dirty="0"/>
-              <a:t>)</a:t>
+              <a:t>?</a:t>
             </a:r>
             <a:endParaRPr lang="ko-KR" altLang="en-US" dirty="0"/>
           </a:p>
@@ -8804,33 +8655,70 @@
       </p:grpSpPr>
       <p:sp>
         <p:nvSpPr>
-          <p:cNvPr id="2" name="제목 1">
-            <a:extLst>
-              <a:ext uri="{FF2B5EF4-FFF2-40B4-BE49-F238E27FC236}">
-                <a16:creationId xmlns:a16="http://schemas.microsoft.com/office/drawing/2014/main" id="{BADBC1B1-0301-1639-46FF-900D8EA2CB3E}"/>
-              </a:ext>
-            </a:extLst>
-          </p:cNvPr>
-          <p:cNvSpPr>
-            <a:spLocks noGrp="1"/>
-          </p:cNvSpPr>
-          <p:nvPr>
-            <p:ph type="title"/>
-          </p:nvPr>
-        </p:nvSpPr>
-        <p:spPr/>
+          <p:cNvPr id="3" name="내용 개체 틀 2">
+            <a:extLst>
+              <a:ext uri="{FF2B5EF4-FFF2-40B4-BE49-F238E27FC236}">
+                <a16:creationId xmlns:a16="http://schemas.microsoft.com/office/drawing/2014/main" id="{1574D3CA-D8CF-CA1C-3F4A-998F76A137EB}"/>
+              </a:ext>
+            </a:extLst>
+          </p:cNvPr>
+          <p:cNvSpPr>
+            <a:spLocks noGrp="1"/>
+          </p:cNvSpPr>
+          <p:nvPr>
+            <p:ph idx="1"/>
+          </p:nvPr>
+        </p:nvSpPr>
+        <p:spPr>
+          <a:xfrm>
+            <a:off x="612288" y="1504381"/>
+            <a:ext cx="11070515" cy="4111688"/>
+          </a:xfrm>
+        </p:spPr>
         <p:txBody>
           <a:bodyPr/>
           <a:lstStyle/>
           <a:p>
             <a:r>
               <a:rPr lang="ko-KR" altLang="en-US" dirty="0"/>
-              <a:t>함수형 컴포넌트 </a:t>
+              <a:t>부모 컴포넌트에서 전달한 </a:t>
             </a:r>
             <a:r>
               <a:rPr lang="en-US" altLang="ko-KR" dirty="0"/>
               <a:t>props</a:t>
             </a:r>
+            <a:r>
+              <a:rPr lang="ko-KR" altLang="en-US" dirty="0"/>
+              <a:t>는 함수형 컴포넌트에서 함수의 파라미터로 전달받으며</a:t>
+            </a:r>
+            <a:r>
+              <a:rPr lang="en-US" altLang="ko-KR" dirty="0"/>
+              <a:t>, JSX </a:t>
+            </a:r>
+            <a:r>
+              <a:rPr lang="ko-KR" altLang="en-US" dirty="0"/>
+              <a:t>내부에서 </a:t>
+            </a:r>
+            <a:r>
+              <a:rPr lang="en-US" altLang="ko-KR" dirty="0"/>
+              <a:t>{</a:t>
+            </a:r>
+            <a:r>
+              <a:rPr lang="ko-KR" altLang="en-US" dirty="0"/>
+              <a:t> </a:t>
+            </a:r>
+            <a:r>
+              <a:rPr lang="en-US" altLang="ko-KR" dirty="0"/>
+              <a:t>}</a:t>
+            </a:r>
+            <a:r>
+              <a:rPr lang="ko-KR" altLang="en-US" dirty="0"/>
+              <a:t> 기호로 감싸서 사용한다</a:t>
+            </a:r>
+            <a:r>
+              <a:rPr lang="en-US" altLang="ko-KR" dirty="0"/>
+              <a:t>.</a:t>
+            </a:r>
             <a:endParaRPr lang="ko-KR" altLang="en-US" dirty="0"/>
           </a:p>
         </p:txBody>
@@ -8858,7 +8746,7 @@
           <a:p>
             <a:fld id="{91D2DBD1-6134-4975-8CE7-24ED1E9282F4}" type="datetime6">
               <a:rPr lang="ko-KR" altLang="en-US" smtClean="0"/>
-              <a:t>2023년 9월</a:t>
+              <a:t>2024년 7월</a:t>
             </a:fld>
             <a:endParaRPr lang="ko-KR" altLang="en-US"/>
           </a:p>
@@ -8895,69 +8783,32 @@
       </p:sp>
       <p:sp>
         <p:nvSpPr>
-          <p:cNvPr id="3" name="내용 개체 틀 2">
-            <a:extLst>
-              <a:ext uri="{FF2B5EF4-FFF2-40B4-BE49-F238E27FC236}">
-                <a16:creationId xmlns:a16="http://schemas.microsoft.com/office/drawing/2014/main" id="{1574D3CA-D8CF-CA1C-3F4A-998F76A137EB}"/>
-              </a:ext>
-            </a:extLst>
-          </p:cNvPr>
-          <p:cNvSpPr>
-            <a:spLocks noGrp="1"/>
-          </p:cNvSpPr>
-          <p:nvPr>
-            <p:ph idx="1"/>
-          </p:nvPr>
-        </p:nvSpPr>
-        <p:spPr>
-          <a:xfrm>
-            <a:off x="838200" y="1565213"/>
-            <a:ext cx="10869000" cy="4111688"/>
-          </a:xfrm>
-        </p:spPr>
+          <p:cNvPr id="2" name="제목 1">
+            <a:extLst>
+              <a:ext uri="{FF2B5EF4-FFF2-40B4-BE49-F238E27FC236}">
+                <a16:creationId xmlns:a16="http://schemas.microsoft.com/office/drawing/2014/main" id="{BADBC1B1-0301-1639-46FF-900D8EA2CB3E}"/>
+              </a:ext>
+            </a:extLst>
+          </p:cNvPr>
+          <p:cNvSpPr>
+            <a:spLocks noGrp="1"/>
+          </p:cNvSpPr>
+          <p:nvPr>
+            <p:ph type="title"/>
+          </p:nvPr>
+        </p:nvSpPr>
+        <p:spPr/>
         <p:txBody>
           <a:bodyPr/>
           <a:lstStyle/>
           <a:p>
             <a:r>
               <a:rPr lang="ko-KR" altLang="en-US" dirty="0"/>
-              <a:t>부모 컴포넌트에서 전달한 </a:t>
+              <a:t>함수형 컴포넌트 </a:t>
             </a:r>
             <a:r>
               <a:rPr lang="en-US" altLang="ko-KR" dirty="0"/>
               <a:t>props</a:t>
-            </a:r>
-            <a:r>
-              <a:rPr lang="ko-KR" altLang="en-US" dirty="0"/>
-              <a:t>는 함수형 컴포넌트에서 함수의 파라미터로 전달받으며</a:t>
-            </a:r>
-            <a:r>
-              <a:rPr lang="en-US" altLang="ko-KR" dirty="0"/>
-              <a:t>, JSX </a:t>
-            </a:r>
-            <a:r>
-              <a:rPr lang="ko-KR" altLang="en-US" dirty="0"/>
-              <a:t>내부에서 </a:t>
-            </a:r>
-            <a:r>
-              <a:rPr lang="en-US" altLang="ko-KR" dirty="0"/>
-              <a:t>{</a:t>
-            </a:r>
-            <a:r>
-              <a:rPr lang="ko-KR" altLang="en-US" dirty="0"/>
-              <a:t> </a:t>
-            </a:r>
-            <a:r>
-              <a:rPr lang="en-US" altLang="ko-KR" dirty="0"/>
-              <a:t>}</a:t>
-            </a:r>
-            <a:r>
-              <a:rPr lang="ko-KR" altLang="en-US" dirty="0"/>
-              <a:t> 기호로 감싸서 사용한다</a:t>
-            </a:r>
-            <a:r>
-              <a:rPr lang="en-US" altLang="ko-KR" dirty="0"/>
-              <a:t>.</a:t>
             </a:r>
             <a:endParaRPr lang="ko-KR" altLang="en-US" dirty="0"/>
           </a:p>
@@ -8978,7 +8829,7 @@
           <p:nvPr/>
         </p:nvPicPr>
         <p:blipFill>
-          <a:blip r:embed="rId2"/>
+          <a:blip r:embed="rId3"/>
           <a:stretch>
             <a:fillRect/>
           </a:stretch>
@@ -9008,7 +8859,7 @@
           <p:nvPr/>
         </p:nvPicPr>
         <p:blipFill>
-          <a:blip r:embed="rId3"/>
+          <a:blip r:embed="rId4"/>
           <a:stretch>
             <a:fillRect/>
           </a:stretch>
@@ -9048,7 +8899,7 @@
         </p:spPr>
         <p:txBody>
           <a:bodyPr vert="horz" lIns="91440" tIns="45720" rIns="91440" bIns="45720" rtlCol="0">
-            <a:normAutofit/>
+            <a:normAutofit fontScale="92500"/>
           </a:bodyPr>
           <a:lstStyle>
             <a:lvl1pPr marL="228600" indent="-228600" algn="l" defTabSz="914400" rtl="0" eaLnBrk="1" latinLnBrk="1" hangingPunct="1">
@@ -9294,7 +9145,7 @@
         </p:spPr>
         <p:txBody>
           <a:bodyPr vert="horz" lIns="91440" tIns="45720" rIns="91440" bIns="45720" rtlCol="0">
-            <a:normAutofit/>
+            <a:normAutofit fontScale="92500"/>
           </a:bodyPr>
           <a:lstStyle>
             <a:lvl1pPr marL="228600" indent="-228600" algn="l" defTabSz="914400" rtl="0" eaLnBrk="1" latinLnBrk="1" hangingPunct="1">
@@ -9651,93 +9502,6 @@
       </p:grpSpPr>
       <p:sp>
         <p:nvSpPr>
-          <p:cNvPr id="2" name="제목 1">
-            <a:extLst>
-              <a:ext uri="{FF2B5EF4-FFF2-40B4-BE49-F238E27FC236}">
-                <a16:creationId xmlns:a16="http://schemas.microsoft.com/office/drawing/2014/main" id="{34D0F6FF-64A1-A9C5-F4FD-75F1A69D365E}"/>
-              </a:ext>
-            </a:extLst>
-          </p:cNvPr>
-          <p:cNvSpPr>
-            <a:spLocks noGrp="1"/>
-          </p:cNvSpPr>
-          <p:nvPr>
-            <p:ph type="title"/>
-          </p:nvPr>
-        </p:nvSpPr>
-        <p:spPr/>
-        <p:txBody>
-          <a:bodyPr/>
-          <a:lstStyle/>
-          <a:p>
-            <a:r>
-              <a:rPr lang="en-US" altLang="ko-KR" dirty="0" err="1"/>
-              <a:t>defaultProps</a:t>
-            </a:r>
-            <a:endParaRPr lang="ko-KR" altLang="en-US" dirty="0"/>
-          </a:p>
-        </p:txBody>
-      </p:sp>
-      <p:sp>
-        <p:nvSpPr>
-          <p:cNvPr id="4" name="날짜 개체 틀 3">
-            <a:extLst>
-              <a:ext uri="{FF2B5EF4-FFF2-40B4-BE49-F238E27FC236}">
-                <a16:creationId xmlns:a16="http://schemas.microsoft.com/office/drawing/2014/main" id="{EA7801AE-74C7-21CB-361E-D40FEB501E09}"/>
-              </a:ext>
-            </a:extLst>
-          </p:cNvPr>
-          <p:cNvSpPr>
-            <a:spLocks noGrp="1"/>
-          </p:cNvSpPr>
-          <p:nvPr>
-            <p:ph type="dt" sz="half" idx="10"/>
-          </p:nvPr>
-        </p:nvSpPr>
-        <p:spPr/>
-        <p:txBody>
-          <a:bodyPr/>
-          <a:lstStyle/>
-          <a:p>
-            <a:fld id="{4E92E807-52C8-4999-93D3-9678270AD8FA}" type="datetime6">
-              <a:rPr lang="ko-KR" altLang="en-US" smtClean="0"/>
-              <a:t>2023년 9월</a:t>
-            </a:fld>
-            <a:endParaRPr lang="ko-KR" altLang="en-US"/>
-          </a:p>
-        </p:txBody>
-      </p:sp>
-      <p:sp>
-        <p:nvSpPr>
-          <p:cNvPr id="5" name="슬라이드 번호 개체 틀 4">
-            <a:extLst>
-              <a:ext uri="{FF2B5EF4-FFF2-40B4-BE49-F238E27FC236}">
-                <a16:creationId xmlns:a16="http://schemas.microsoft.com/office/drawing/2014/main" id="{5AD298C9-B8AB-36D5-4E0A-1B37A301C002}"/>
-              </a:ext>
-            </a:extLst>
-          </p:cNvPr>
-          <p:cNvSpPr>
-            <a:spLocks noGrp="1"/>
-          </p:cNvSpPr>
-          <p:nvPr>
-            <p:ph type="sldNum" sz="quarter" idx="12"/>
-          </p:nvPr>
-        </p:nvSpPr>
-        <p:spPr/>
-        <p:txBody>
-          <a:bodyPr/>
-          <a:lstStyle/>
-          <a:p>
-            <a:fld id="{083A2CE0-18CD-4102-B738-4ACFF9E68BA4}" type="slidenum">
-              <a:rPr lang="ko-KR" altLang="en-US" smtClean="0"/>
-              <a:t>5</a:t>
-            </a:fld>
-            <a:endParaRPr lang="ko-KR" altLang="en-US"/>
-          </a:p>
-        </p:txBody>
-      </p:sp>
-      <p:sp>
-        <p:nvSpPr>
           <p:cNvPr id="3" name="내용 개체 틀 2">
             <a:extLst>
               <a:ext uri="{FF2B5EF4-FFF2-40B4-BE49-F238E27FC236}">
@@ -9790,6 +9554,93 @@
               <a:rPr lang="ko-KR" altLang="en-US" dirty="0"/>
               <a:t>를 설정하는 것</a:t>
             </a:r>
+          </a:p>
+        </p:txBody>
+      </p:sp>
+      <p:sp>
+        <p:nvSpPr>
+          <p:cNvPr id="4" name="날짜 개체 틀 3">
+            <a:extLst>
+              <a:ext uri="{FF2B5EF4-FFF2-40B4-BE49-F238E27FC236}">
+                <a16:creationId xmlns:a16="http://schemas.microsoft.com/office/drawing/2014/main" id="{EA7801AE-74C7-21CB-361E-D40FEB501E09}"/>
+              </a:ext>
+            </a:extLst>
+          </p:cNvPr>
+          <p:cNvSpPr>
+            <a:spLocks noGrp="1"/>
+          </p:cNvSpPr>
+          <p:nvPr>
+            <p:ph type="dt" sz="half" idx="10"/>
+          </p:nvPr>
+        </p:nvSpPr>
+        <p:spPr/>
+        <p:txBody>
+          <a:bodyPr/>
+          <a:lstStyle/>
+          <a:p>
+            <a:fld id="{4E92E807-52C8-4999-93D3-9678270AD8FA}" type="datetime6">
+              <a:rPr lang="ko-KR" altLang="en-US" smtClean="0"/>
+              <a:t>2024년 7월</a:t>
+            </a:fld>
+            <a:endParaRPr lang="ko-KR" altLang="en-US"/>
+          </a:p>
+        </p:txBody>
+      </p:sp>
+      <p:sp>
+        <p:nvSpPr>
+          <p:cNvPr id="5" name="슬라이드 번호 개체 틀 4">
+            <a:extLst>
+              <a:ext uri="{FF2B5EF4-FFF2-40B4-BE49-F238E27FC236}">
+                <a16:creationId xmlns:a16="http://schemas.microsoft.com/office/drawing/2014/main" id="{5AD298C9-B8AB-36D5-4E0A-1B37A301C002}"/>
+              </a:ext>
+            </a:extLst>
+          </p:cNvPr>
+          <p:cNvSpPr>
+            <a:spLocks noGrp="1"/>
+          </p:cNvSpPr>
+          <p:nvPr>
+            <p:ph type="sldNum" sz="quarter" idx="12"/>
+          </p:nvPr>
+        </p:nvSpPr>
+        <p:spPr/>
+        <p:txBody>
+          <a:bodyPr/>
+          <a:lstStyle/>
+          <a:p>
+            <a:fld id="{083A2CE0-18CD-4102-B738-4ACFF9E68BA4}" type="slidenum">
+              <a:rPr lang="ko-KR" altLang="en-US" smtClean="0"/>
+              <a:t>5</a:t>
+            </a:fld>
+            <a:endParaRPr lang="ko-KR" altLang="en-US"/>
+          </a:p>
+        </p:txBody>
+      </p:sp>
+      <p:sp>
+        <p:nvSpPr>
+          <p:cNvPr id="2" name="제목 1">
+            <a:extLst>
+              <a:ext uri="{FF2B5EF4-FFF2-40B4-BE49-F238E27FC236}">
+                <a16:creationId xmlns:a16="http://schemas.microsoft.com/office/drawing/2014/main" id="{34D0F6FF-64A1-A9C5-F4FD-75F1A69D365E}"/>
+              </a:ext>
+            </a:extLst>
+          </p:cNvPr>
+          <p:cNvSpPr>
+            <a:spLocks noGrp="1"/>
+          </p:cNvSpPr>
+          <p:nvPr>
+            <p:ph type="title"/>
+          </p:nvPr>
+        </p:nvSpPr>
+        <p:spPr/>
+        <p:txBody>
+          <a:bodyPr/>
+          <a:lstStyle/>
+          <a:p>
+            <a:r>
+              <a:rPr lang="en-US" altLang="ko-KR" dirty="0" err="1"/>
+              <a:t>defaultProps</a:t>
+            </a:r>
+            <a:endParaRPr lang="ko-KR" altLang="en-US" dirty="0"/>
           </a:p>
         </p:txBody>
       </p:sp>
@@ -10147,7 +9998,7 @@
         </p:nvSpPr>
         <p:spPr>
           <a:xfrm>
-            <a:off x="4737840" y="5800559"/>
+            <a:off x="4482005" y="5739144"/>
             <a:ext cx="3867614" cy="437819"/>
           </a:xfrm>
           <a:prstGeom prst="rect">
@@ -10389,30 +10240,34 @@
       </p:grpSpPr>
       <p:sp>
         <p:nvSpPr>
-          <p:cNvPr id="2" name="제목 1">
-            <a:extLst>
-              <a:ext uri="{FF2B5EF4-FFF2-40B4-BE49-F238E27FC236}">
-                <a16:creationId xmlns:a16="http://schemas.microsoft.com/office/drawing/2014/main" id="{07B9E0F2-1D61-CB69-8491-8498FD5737C6}"/>
-              </a:ext>
-            </a:extLst>
-          </p:cNvPr>
-          <p:cNvSpPr>
-            <a:spLocks noGrp="1"/>
-          </p:cNvSpPr>
-          <p:nvPr>
-            <p:ph type="title"/>
-          </p:nvPr>
-        </p:nvSpPr>
-        <p:spPr/>
-        <p:txBody>
-          <a:bodyPr/>
-          <a:lstStyle/>
-          <a:p>
-            <a:r>
-              <a:rPr lang="en-US" altLang="ko-KR" dirty="0" err="1"/>
-              <a:t>props.children</a:t>
-            </a:r>
-            <a:endParaRPr lang="ko-KR" altLang="en-US" dirty="0"/>
+          <p:cNvPr id="3" name="내용 개체 틀 2">
+            <a:extLst>
+              <a:ext uri="{FF2B5EF4-FFF2-40B4-BE49-F238E27FC236}">
+                <a16:creationId xmlns:a16="http://schemas.microsoft.com/office/drawing/2014/main" id="{0BE78717-14C8-E4F8-75F1-F1234CB9F0EF}"/>
+              </a:ext>
+            </a:extLst>
+          </p:cNvPr>
+          <p:cNvSpPr>
+            <a:spLocks noGrp="1"/>
+          </p:cNvSpPr>
+          <p:nvPr>
+            <p:ph idx="1"/>
+          </p:nvPr>
+        </p:nvSpPr>
+        <p:spPr>
+          <a:xfrm>
+            <a:off x="803763" y="1328545"/>
+            <a:ext cx="10515600" cy="4611750"/>
+          </a:xfrm>
+        </p:spPr>
+        <p:txBody>
+          <a:bodyPr/>
+          <a:lstStyle/>
+          <a:p>
+            <a:r>
+              <a:rPr lang="ko-KR" altLang="en-US" dirty="0"/>
+              <a:t>부모 컴포넌트에서 자식 컴포넌트를 호출할 때 태그 사이에 작성한 문자열</a:t>
+            </a:r>
           </a:p>
         </p:txBody>
       </p:sp>
@@ -10439,7 +10294,7 @@
           <a:p>
             <a:fld id="{EE8F6701-635E-4B4D-8246-F6CD3AE14CBE}" type="datetime6">
               <a:rPr lang="ko-KR" altLang="en-US" smtClean="0"/>
-              <a:t>2023년 9월</a:t>
+              <a:t>2024년 7월</a:t>
             </a:fld>
             <a:endParaRPr lang="ko-KR" altLang="en-US"/>
           </a:p>
@@ -10476,34 +10331,30 @@
       </p:sp>
       <p:sp>
         <p:nvSpPr>
-          <p:cNvPr id="3" name="내용 개체 틀 2">
-            <a:extLst>
-              <a:ext uri="{FF2B5EF4-FFF2-40B4-BE49-F238E27FC236}">
-                <a16:creationId xmlns:a16="http://schemas.microsoft.com/office/drawing/2014/main" id="{0BE78717-14C8-E4F8-75F1-F1234CB9F0EF}"/>
-              </a:ext>
-            </a:extLst>
-          </p:cNvPr>
-          <p:cNvSpPr>
-            <a:spLocks noGrp="1"/>
-          </p:cNvSpPr>
-          <p:nvPr>
-            <p:ph idx="1"/>
-          </p:nvPr>
-        </p:nvSpPr>
-        <p:spPr>
-          <a:xfrm>
-            <a:off x="838200" y="1565213"/>
-            <a:ext cx="10515600" cy="4611750"/>
-          </a:xfrm>
-        </p:spPr>
-        <p:txBody>
-          <a:bodyPr/>
-          <a:lstStyle/>
-          <a:p>
-            <a:r>
-              <a:rPr lang="ko-KR" altLang="en-US" dirty="0"/>
-              <a:t>부모 컴포넌트에서 자식 컴포넌트를 호출할 때 태그 사이에 작성한 문자열</a:t>
-            </a:r>
+          <p:cNvPr id="2" name="제목 1">
+            <a:extLst>
+              <a:ext uri="{FF2B5EF4-FFF2-40B4-BE49-F238E27FC236}">
+                <a16:creationId xmlns:a16="http://schemas.microsoft.com/office/drawing/2014/main" id="{07B9E0F2-1D61-CB69-8491-8498FD5737C6}"/>
+              </a:ext>
+            </a:extLst>
+          </p:cNvPr>
+          <p:cNvSpPr>
+            <a:spLocks noGrp="1"/>
+          </p:cNvSpPr>
+          <p:nvPr>
+            <p:ph type="title"/>
+          </p:nvPr>
+        </p:nvSpPr>
+        <p:spPr/>
+        <p:txBody>
+          <a:bodyPr/>
+          <a:lstStyle/>
+          <a:p>
+            <a:r>
+              <a:rPr lang="en-US" altLang="ko-KR" dirty="0" err="1"/>
+              <a:t>props.children</a:t>
+            </a:r>
+            <a:endParaRPr lang="ko-KR" altLang="en-US" dirty="0"/>
           </a:p>
         </p:txBody>
       </p:sp>
@@ -11155,93 +11006,6 @@
       </p:grpSpPr>
       <p:sp>
         <p:nvSpPr>
-          <p:cNvPr id="2" name="제목 1">
-            <a:extLst>
-              <a:ext uri="{FF2B5EF4-FFF2-40B4-BE49-F238E27FC236}">
-                <a16:creationId xmlns:a16="http://schemas.microsoft.com/office/drawing/2014/main" id="{A3620784-E4F5-8D73-C265-4AB027BD271B}"/>
-              </a:ext>
-            </a:extLst>
-          </p:cNvPr>
-          <p:cNvSpPr>
-            <a:spLocks noGrp="1"/>
-          </p:cNvSpPr>
-          <p:nvPr>
-            <p:ph type="title"/>
-          </p:nvPr>
-        </p:nvSpPr>
-        <p:spPr/>
-        <p:txBody>
-          <a:bodyPr/>
-          <a:lstStyle/>
-          <a:p>
-            <a:r>
-              <a:rPr lang="en-US" altLang="ko-KR" dirty="0" err="1"/>
-              <a:t>propTypes</a:t>
-            </a:r>
-            <a:endParaRPr lang="ko-KR" altLang="en-US" dirty="0"/>
-          </a:p>
-        </p:txBody>
-      </p:sp>
-      <p:sp>
-        <p:nvSpPr>
-          <p:cNvPr id="4" name="날짜 개체 틀 3">
-            <a:extLst>
-              <a:ext uri="{FF2B5EF4-FFF2-40B4-BE49-F238E27FC236}">
-                <a16:creationId xmlns:a16="http://schemas.microsoft.com/office/drawing/2014/main" id="{A3927CF3-AEB6-3834-F3BC-884DE699DCE9}"/>
-              </a:ext>
-            </a:extLst>
-          </p:cNvPr>
-          <p:cNvSpPr>
-            <a:spLocks noGrp="1"/>
-          </p:cNvSpPr>
-          <p:nvPr>
-            <p:ph type="dt" sz="half" idx="10"/>
-          </p:nvPr>
-        </p:nvSpPr>
-        <p:spPr/>
-        <p:txBody>
-          <a:bodyPr/>
-          <a:lstStyle/>
-          <a:p>
-            <a:fld id="{87980AA1-5246-4A25-BE32-94BE467B109F}" type="datetime6">
-              <a:rPr lang="ko-KR" altLang="en-US" smtClean="0"/>
-              <a:t>2023년 9월</a:t>
-            </a:fld>
-            <a:endParaRPr lang="ko-KR" altLang="en-US"/>
-          </a:p>
-        </p:txBody>
-      </p:sp>
-      <p:sp>
-        <p:nvSpPr>
-          <p:cNvPr id="5" name="슬라이드 번호 개체 틀 4">
-            <a:extLst>
-              <a:ext uri="{FF2B5EF4-FFF2-40B4-BE49-F238E27FC236}">
-                <a16:creationId xmlns:a16="http://schemas.microsoft.com/office/drawing/2014/main" id="{F8E01E7F-761C-AAB6-93BA-ABA9F0CCD944}"/>
-              </a:ext>
-            </a:extLst>
-          </p:cNvPr>
-          <p:cNvSpPr>
-            <a:spLocks noGrp="1"/>
-          </p:cNvSpPr>
-          <p:nvPr>
-            <p:ph type="sldNum" sz="quarter" idx="12"/>
-          </p:nvPr>
-        </p:nvSpPr>
-        <p:spPr/>
-        <p:txBody>
-          <a:bodyPr/>
-          <a:lstStyle/>
-          <a:p>
-            <a:fld id="{083A2CE0-18CD-4102-B738-4ACFF9E68BA4}" type="slidenum">
-              <a:rPr lang="ko-KR" altLang="en-US" smtClean="0"/>
-              <a:t>7</a:t>
-            </a:fld>
-            <a:endParaRPr lang="ko-KR" altLang="en-US"/>
-          </a:p>
-        </p:txBody>
-      </p:sp>
-      <p:sp>
-        <p:nvSpPr>
           <p:cNvPr id="3" name="내용 개체 틀 2">
             <a:extLst>
               <a:ext uri="{FF2B5EF4-FFF2-40B4-BE49-F238E27FC236}">
@@ -11355,6 +11119,93 @@
             <a:r>
               <a:rPr lang="en-US" altLang="ko-KR" dirty="0"/>
               <a:t>.</a:t>
+            </a:r>
+            <a:endParaRPr lang="ko-KR" altLang="en-US" dirty="0"/>
+          </a:p>
+        </p:txBody>
+      </p:sp>
+      <p:sp>
+        <p:nvSpPr>
+          <p:cNvPr id="4" name="날짜 개체 틀 3">
+            <a:extLst>
+              <a:ext uri="{FF2B5EF4-FFF2-40B4-BE49-F238E27FC236}">
+                <a16:creationId xmlns:a16="http://schemas.microsoft.com/office/drawing/2014/main" id="{A3927CF3-AEB6-3834-F3BC-884DE699DCE9}"/>
+              </a:ext>
+            </a:extLst>
+          </p:cNvPr>
+          <p:cNvSpPr>
+            <a:spLocks noGrp="1"/>
+          </p:cNvSpPr>
+          <p:nvPr>
+            <p:ph type="dt" sz="half" idx="10"/>
+          </p:nvPr>
+        </p:nvSpPr>
+        <p:spPr/>
+        <p:txBody>
+          <a:bodyPr/>
+          <a:lstStyle/>
+          <a:p>
+            <a:fld id="{87980AA1-5246-4A25-BE32-94BE467B109F}" type="datetime6">
+              <a:rPr lang="ko-KR" altLang="en-US" smtClean="0"/>
+              <a:t>2024년 7월</a:t>
+            </a:fld>
+            <a:endParaRPr lang="ko-KR" altLang="en-US"/>
+          </a:p>
+        </p:txBody>
+      </p:sp>
+      <p:sp>
+        <p:nvSpPr>
+          <p:cNvPr id="5" name="슬라이드 번호 개체 틀 4">
+            <a:extLst>
+              <a:ext uri="{FF2B5EF4-FFF2-40B4-BE49-F238E27FC236}">
+                <a16:creationId xmlns:a16="http://schemas.microsoft.com/office/drawing/2014/main" id="{F8E01E7F-761C-AAB6-93BA-ABA9F0CCD944}"/>
+              </a:ext>
+            </a:extLst>
+          </p:cNvPr>
+          <p:cNvSpPr>
+            <a:spLocks noGrp="1"/>
+          </p:cNvSpPr>
+          <p:nvPr>
+            <p:ph type="sldNum" sz="quarter" idx="12"/>
+          </p:nvPr>
+        </p:nvSpPr>
+        <p:spPr/>
+        <p:txBody>
+          <a:bodyPr/>
+          <a:lstStyle/>
+          <a:p>
+            <a:fld id="{083A2CE0-18CD-4102-B738-4ACFF9E68BA4}" type="slidenum">
+              <a:rPr lang="ko-KR" altLang="en-US" smtClean="0"/>
+              <a:t>7</a:t>
+            </a:fld>
+            <a:endParaRPr lang="ko-KR" altLang="en-US"/>
+          </a:p>
+        </p:txBody>
+      </p:sp>
+      <p:sp>
+        <p:nvSpPr>
+          <p:cNvPr id="2" name="제목 1">
+            <a:extLst>
+              <a:ext uri="{FF2B5EF4-FFF2-40B4-BE49-F238E27FC236}">
+                <a16:creationId xmlns:a16="http://schemas.microsoft.com/office/drawing/2014/main" id="{A3620784-E4F5-8D73-C265-4AB027BD271B}"/>
+              </a:ext>
+            </a:extLst>
+          </p:cNvPr>
+          <p:cNvSpPr>
+            <a:spLocks noGrp="1"/>
+          </p:cNvSpPr>
+          <p:nvPr>
+            <p:ph type="title"/>
+          </p:nvPr>
+        </p:nvSpPr>
+        <p:spPr/>
+        <p:txBody>
+          <a:bodyPr/>
+          <a:lstStyle/>
+          <a:p>
+            <a:r>
+              <a:rPr lang="en-US" altLang="ko-KR" dirty="0" err="1"/>
+              <a:t>propTypes</a:t>
             </a:r>
             <a:endParaRPr lang="ko-KR" altLang="en-US" dirty="0"/>
           </a:p>
@@ -11382,7 +11233,7 @@
         </p:blipFill>
         <p:spPr>
           <a:xfrm>
-            <a:off x="6184900" y="3461451"/>
+            <a:off x="6380033" y="4086177"/>
             <a:ext cx="5222308" cy="481597"/>
           </a:xfrm>
           <a:prstGeom prst="rect">
@@ -11412,7 +11263,7 @@
         </p:blipFill>
         <p:spPr>
           <a:xfrm>
-            <a:off x="5794634" y="4121135"/>
+            <a:off x="5989767" y="4745861"/>
             <a:ext cx="5612574" cy="1555766"/>
           </a:xfrm>
           <a:prstGeom prst="rect">
@@ -11452,39 +11303,6 @@
       </p:grpSpPr>
       <p:sp>
         <p:nvSpPr>
-          <p:cNvPr id="2" name="제목 1">
-            <a:extLst>
-              <a:ext uri="{FF2B5EF4-FFF2-40B4-BE49-F238E27FC236}">
-                <a16:creationId xmlns:a16="http://schemas.microsoft.com/office/drawing/2014/main" id="{53B37166-FF69-0EA9-719E-4F992CA77E92}"/>
-              </a:ext>
-            </a:extLst>
-          </p:cNvPr>
-          <p:cNvSpPr>
-            <a:spLocks noGrp="1"/>
-          </p:cNvSpPr>
-          <p:nvPr>
-            <p:ph type="title"/>
-          </p:nvPr>
-        </p:nvSpPr>
-        <p:spPr/>
-        <p:txBody>
-          <a:bodyPr/>
-          <a:lstStyle/>
-          <a:p>
-            <a:r>
-              <a:rPr lang="ko-KR" altLang="en-US" dirty="0"/>
-              <a:t>클래스형 컴포넌트 </a:t>
-            </a:r>
-            <a:r>
-              <a:rPr lang="en-US" altLang="ko-KR" dirty="0"/>
-              <a:t>props</a:t>
-            </a:r>
-            <a:endParaRPr lang="ko-KR" altLang="en-US" dirty="0"/>
-          </a:p>
-        </p:txBody>
-      </p:sp>
-      <p:sp>
-        <p:nvSpPr>
           <p:cNvPr id="4" name="날짜 개체 틀 3">
             <a:extLst>
               <a:ext uri="{FF2B5EF4-FFF2-40B4-BE49-F238E27FC236}">
@@ -11506,7 +11324,7 @@
           <a:p>
             <a:fld id="{E49C6C9C-69B7-4FA3-B533-50D416C4BDB3}" type="datetime6">
               <a:rPr lang="ko-KR" altLang="en-US" smtClean="0"/>
-              <a:t>2023년 9월</a:t>
+              <a:t>2024년 7월</a:t>
             </a:fld>
             <a:endParaRPr lang="ko-KR" altLang="en-US"/>
           </a:p>
@@ -11538,6 +11356,39 @@
               <a:t>8</a:t>
             </a:fld>
             <a:endParaRPr lang="ko-KR" altLang="en-US"/>
+          </a:p>
+        </p:txBody>
+      </p:sp>
+      <p:sp>
+        <p:nvSpPr>
+          <p:cNvPr id="2" name="제목 1">
+            <a:extLst>
+              <a:ext uri="{FF2B5EF4-FFF2-40B4-BE49-F238E27FC236}">
+                <a16:creationId xmlns:a16="http://schemas.microsoft.com/office/drawing/2014/main" id="{53B37166-FF69-0EA9-719E-4F992CA77E92}"/>
+              </a:ext>
+            </a:extLst>
+          </p:cNvPr>
+          <p:cNvSpPr>
+            <a:spLocks noGrp="1"/>
+          </p:cNvSpPr>
+          <p:nvPr>
+            <p:ph type="title"/>
+          </p:nvPr>
+        </p:nvSpPr>
+        <p:spPr/>
+        <p:txBody>
+          <a:bodyPr/>
+          <a:lstStyle/>
+          <a:p>
+            <a:r>
+              <a:rPr lang="ko-KR" altLang="en-US" dirty="0"/>
+              <a:t>클래스형 컴포넌트 </a:t>
+            </a:r>
+            <a:r>
+              <a:rPr lang="en-US" altLang="ko-KR" dirty="0"/>
+              <a:t>props</a:t>
+            </a:r>
+            <a:endParaRPr lang="ko-KR" altLang="en-US" dirty="0"/>
           </a:p>
         </p:txBody>
       </p:sp>
@@ -11601,39 +11452,35 @@
           <a:chExt cx="0" cy="0"/>
         </a:xfrm>
       </p:grpSpPr>
-      <p:sp>
-        <p:nvSpPr>
-          <p:cNvPr id="2" name="제목 1">
-            <a:extLst>
-              <a:ext uri="{FF2B5EF4-FFF2-40B4-BE49-F238E27FC236}">
-                <a16:creationId xmlns:a16="http://schemas.microsoft.com/office/drawing/2014/main" id="{146BCE33-E9CF-3E40-0A85-9333A76C679A}"/>
-              </a:ext>
-            </a:extLst>
-          </p:cNvPr>
-          <p:cNvSpPr>
-            <a:spLocks noGrp="1"/>
-          </p:cNvSpPr>
-          <p:nvPr>
-            <p:ph type="title"/>
-          </p:nvPr>
-        </p:nvSpPr>
-        <p:spPr/>
-        <p:txBody>
-          <a:bodyPr/>
-          <a:lstStyle/>
-          <a:p>
-            <a:r>
-              <a:rPr lang="ko-KR" altLang="en-US" dirty="0"/>
-              <a:t>클래스형 컴포넌트 </a:t>
-            </a:r>
-            <a:r>
-              <a:rPr lang="en-US" altLang="ko-KR" dirty="0"/>
-              <a:t>props</a:t>
-            </a:r>
-            <a:endParaRPr lang="ko-KR" altLang="en-US" dirty="0"/>
-          </a:p>
-        </p:txBody>
-      </p:sp>
+      <p:pic>
+        <p:nvPicPr>
+          <p:cNvPr id="8" name="내용 개체 틀 7">
+            <a:extLst>
+              <a:ext uri="{FF2B5EF4-FFF2-40B4-BE49-F238E27FC236}">
+                <a16:creationId xmlns:a16="http://schemas.microsoft.com/office/drawing/2014/main" id="{FFB727CA-1CAF-5823-2284-A8E3E380ECFF}"/>
+              </a:ext>
+            </a:extLst>
+          </p:cNvPr>
+          <p:cNvPicPr>
+            <a:picLocks noGrp="1" noChangeAspect="1"/>
+          </p:cNvPicPr>
+          <p:nvPr>
+            <p:ph idx="1"/>
+          </p:nvPr>
+        </p:nvPicPr>
+        <p:blipFill>
+          <a:blip r:embed="rId3"/>
+          <a:stretch>
+            <a:fillRect/>
+          </a:stretch>
+        </p:blipFill>
+        <p:spPr>
+          <a:xfrm>
+            <a:off x="4505103" y="3153450"/>
+            <a:ext cx="3181794" cy="1695687"/>
+          </a:xfrm>
+        </p:spPr>
+      </p:pic>
       <p:sp>
         <p:nvSpPr>
           <p:cNvPr id="4" name="날짜 개체 틀 3">
@@ -11657,7 +11504,7 @@
           <a:p>
             <a:fld id="{164C2489-C217-46DD-AED2-42AF67716448}" type="datetime6">
               <a:rPr lang="ko-KR" altLang="en-US" smtClean="0"/>
-              <a:t>2023년 9월</a:t>
+              <a:t>2024년 7월</a:t>
             </a:fld>
             <a:endParaRPr lang="ko-KR" altLang="en-US"/>
           </a:p>
@@ -11689,6 +11536,39 @@
               <a:t>9</a:t>
             </a:fld>
             <a:endParaRPr lang="ko-KR" altLang="en-US"/>
+          </a:p>
+        </p:txBody>
+      </p:sp>
+      <p:sp>
+        <p:nvSpPr>
+          <p:cNvPr id="2" name="제목 1">
+            <a:extLst>
+              <a:ext uri="{FF2B5EF4-FFF2-40B4-BE49-F238E27FC236}">
+                <a16:creationId xmlns:a16="http://schemas.microsoft.com/office/drawing/2014/main" id="{146BCE33-E9CF-3E40-0A85-9333A76C679A}"/>
+              </a:ext>
+            </a:extLst>
+          </p:cNvPr>
+          <p:cNvSpPr>
+            <a:spLocks noGrp="1"/>
+          </p:cNvSpPr>
+          <p:nvPr>
+            <p:ph type="title"/>
+          </p:nvPr>
+        </p:nvSpPr>
+        <p:spPr/>
+        <p:txBody>
+          <a:bodyPr/>
+          <a:lstStyle/>
+          <a:p>
+            <a:r>
+              <a:rPr lang="ko-KR" altLang="en-US" dirty="0"/>
+              <a:t>클래스형 컴포넌트 </a:t>
+            </a:r>
+            <a:r>
+              <a:rPr lang="en-US" altLang="ko-KR" dirty="0"/>
+              <a:t>props</a:t>
+            </a:r>
+            <a:endParaRPr lang="ko-KR" altLang="en-US" dirty="0"/>
           </a:p>
         </p:txBody>
       </p:sp>
@@ -11707,7 +11587,7 @@
           <p:nvPr/>
         </p:nvPicPr>
         <p:blipFill>
-          <a:blip r:embed="rId2"/>
+          <a:blip r:embed="rId4"/>
           <a:stretch>
             <a:fillRect/>
           </a:stretch>
@@ -11722,50 +11602,21 @@
           </a:prstGeom>
         </p:spPr>
       </p:pic>
-      <p:pic>
-        <p:nvPicPr>
-          <p:cNvPr id="8" name="내용 개체 틀 7">
-            <a:extLst>
-              <a:ext uri="{FF2B5EF4-FFF2-40B4-BE49-F238E27FC236}">
-                <a16:creationId xmlns:a16="http://schemas.microsoft.com/office/drawing/2014/main" id="{FFB727CA-1CAF-5823-2284-A8E3E380ECFF}"/>
-              </a:ext>
-            </a:extLst>
-          </p:cNvPr>
-          <p:cNvPicPr>
-            <a:picLocks noGrp="1" noChangeAspect="1"/>
-          </p:cNvPicPr>
-          <p:nvPr>
-            <p:ph idx="1"/>
-          </p:nvPr>
-        </p:nvPicPr>
-        <p:blipFill>
-          <a:blip r:embed="rId3"/>
-          <a:stretch>
-            <a:fillRect/>
-          </a:stretch>
-        </p:blipFill>
+      <p:sp>
+        <p:nvSpPr>
+          <p:cNvPr id="9" name="TextBox 8">
+            <a:extLst>
+              <a:ext uri="{FF2B5EF4-FFF2-40B4-BE49-F238E27FC236}">
+                <a16:creationId xmlns:a16="http://schemas.microsoft.com/office/drawing/2014/main" id="{7980C486-84EE-046F-C5DE-9E265F204471}"/>
+              </a:ext>
+            </a:extLst>
+          </p:cNvPr>
+          <p:cNvSpPr txBox="1"/>
+          <p:nvPr/>
+        </p:nvSpPr>
         <p:spPr>
           <a:xfrm>
-            <a:off x="6756529" y="3764944"/>
-            <a:ext cx="4776428" cy="2545522"/>
-          </a:xfrm>
-        </p:spPr>
-      </p:pic>
-      <p:sp>
-        <p:nvSpPr>
-          <p:cNvPr id="9" name="TextBox 8">
-            <a:extLst>
-              <a:ext uri="{FF2B5EF4-FFF2-40B4-BE49-F238E27FC236}">
-                <a16:creationId xmlns:a16="http://schemas.microsoft.com/office/drawing/2014/main" id="{7980C486-84EE-046F-C5DE-9E265F204471}"/>
-              </a:ext>
-            </a:extLst>
-          </p:cNvPr>
-          <p:cNvSpPr txBox="1"/>
-          <p:nvPr/>
-        </p:nvSpPr>
-        <p:spPr>
-          <a:xfrm>
-            <a:off x="5509588" y="4253631"/>
+            <a:off x="4505103" y="3764944"/>
             <a:ext cx="1039067" cy="1015663"/>
           </a:xfrm>
           <a:prstGeom prst="rect">
@@ -11809,7 +11660,7 @@
 </file>
 
 <file path=ppt/theme/theme1.xml><?xml version="1.0" encoding="utf-8"?>
-<a:theme xmlns:a="http://schemas.openxmlformats.org/drawingml/2006/main" name="1_Office 테마">
+<a:theme xmlns:a="http://schemas.openxmlformats.org/drawingml/2006/main" name="3_Office 테마">
   <a:themeElements>
     <a:clrScheme name="코딩온_새싹">
       <a:dk1>
@@ -11849,15 +11700,15 @@
         <a:srgbClr val="954F72"/>
       </a:folHlink>
     </a:clrScheme>
-    <a:fontScheme name="코딩온">
+    <a:fontScheme name="Pretendard GOV">
       <a:majorFont>
-        <a:latin typeface="메이플스토리"/>
-        <a:ea typeface="메이플스토리"/>
+        <a:latin typeface="Pretendard GOV"/>
+        <a:ea typeface="Pretendard GOV"/>
         <a:cs typeface=""/>
       </a:majorFont>
       <a:minorFont>
-        <a:latin typeface="메이플스토리"/>
-        <a:ea typeface="메이플스토리"/>
+        <a:latin typeface="Pretendard GOV"/>
+        <a:ea typeface="Pretendard GOV"/>
         <a:cs typeface=""/>
       </a:minorFont>
     </a:fontScheme>

--- a/material/[SeSAC_YDP_6] 24_React_Props_State.pptx
+++ b/material/[SeSAC_YDP_6] 24_React_Props_State.pptx
@@ -568,6 +568,532 @@
 </p:notes>
 </file>
 
+<file path=ppt/notesSlides/notesSlide10.xml><?xml version="1.0" encoding="utf-8"?>
+<p:notes xmlns:a="http://schemas.openxmlformats.org/drawingml/2006/main" xmlns:r="http://schemas.openxmlformats.org/officeDocument/2006/relationships" xmlns:p="http://schemas.openxmlformats.org/presentationml/2006/main">
+  <p:cSld>
+    <p:spTree>
+      <p:nvGrpSpPr>
+        <p:cNvPr id="1" name=""/>
+        <p:cNvGrpSpPr/>
+        <p:nvPr/>
+      </p:nvGrpSpPr>
+      <p:grpSpPr>
+        <a:xfrm>
+          <a:off x="0" y="0"/>
+          <a:ext cx="0" cy="0"/>
+          <a:chOff x="0" y="0"/>
+          <a:chExt cx="0" cy="0"/>
+        </a:xfrm>
+      </p:grpSpPr>
+      <p:sp>
+        <p:nvSpPr>
+          <p:cNvPr id="2" name="슬라이드 이미지 개체 틀 1"/>
+          <p:cNvSpPr>
+            <a:spLocks noGrp="1" noRot="1" noChangeAspect="1"/>
+          </p:cNvSpPr>
+          <p:nvPr>
+            <p:ph type="sldImg"/>
+          </p:nvPr>
+        </p:nvSpPr>
+        <p:spPr/>
+      </p:sp>
+      <p:sp>
+        <p:nvSpPr>
+          <p:cNvPr id="3" name="슬라이드 노트 개체 틀 2"/>
+          <p:cNvSpPr>
+            <a:spLocks noGrp="1"/>
+          </p:cNvSpPr>
+          <p:nvPr>
+            <p:ph type="body" idx="1"/>
+          </p:nvPr>
+        </p:nvSpPr>
+        <p:spPr/>
+        <p:txBody>
+          <a:bodyPr/>
+          <a:lstStyle/>
+          <a:p>
+            <a:pPr marL="0" marR="0" indent="0" algn="l" defTabSz="914400" rtl="0" eaLnBrk="1" fontAlgn="auto" latinLnBrk="1" hangingPunct="1">
+              <a:lnSpc>
+                <a:spcPct val="100000"/>
+              </a:lnSpc>
+              <a:spcBef>
+                <a:spcPts val="0"/>
+              </a:spcBef>
+              <a:spcAft>
+                <a:spcPts val="0"/>
+              </a:spcAft>
+              <a:buClrTx/>
+              <a:buSzTx/>
+              <a:buFontTx/>
+              <a:buNone/>
+              <a:tabLst/>
+              <a:defRPr/>
+            </a:pPr>
+            <a:r>
+              <a:rPr lang="en-US" altLang="ko-KR" dirty="0"/>
+              <a:t>16.3 </a:t>
+            </a:r>
+            <a:r>
+              <a:rPr lang="ko-KR" altLang="en-US" dirty="0"/>
+              <a:t>버전 이전 형태</a:t>
+            </a:r>
+            <a:endParaRPr lang="en-US" altLang="ko-KR" dirty="0"/>
+          </a:p>
+          <a:p>
+            <a:pPr marL="0" marR="0" indent="0" algn="l" defTabSz="914400" rtl="0" eaLnBrk="1" fontAlgn="auto" latinLnBrk="1" hangingPunct="1">
+              <a:lnSpc>
+                <a:spcPct val="100000"/>
+              </a:lnSpc>
+              <a:spcBef>
+                <a:spcPts val="0"/>
+              </a:spcBef>
+              <a:spcAft>
+                <a:spcPts val="0"/>
+              </a:spcAft>
+              <a:buClrTx/>
+              <a:buSzTx/>
+              <a:buFontTx/>
+              <a:buNone/>
+              <a:tabLst/>
+              <a:defRPr/>
+            </a:pPr>
+            <a:r>
+              <a:rPr lang="en-US" altLang="ko-KR" dirty="0"/>
+              <a:t>constructor()</a:t>
+            </a:r>
+            <a:r>
+              <a:rPr lang="en-US" altLang="ko-KR" baseline="0" dirty="0"/>
+              <a:t> : </a:t>
+            </a:r>
+            <a:r>
+              <a:rPr lang="ko-KR" altLang="en-US" baseline="0" dirty="0" err="1"/>
+              <a:t>생성자</a:t>
+            </a:r>
+            <a:r>
+              <a:rPr lang="en-US" altLang="ko-KR" baseline="0" dirty="0"/>
+              <a:t>, state </a:t>
+            </a:r>
+            <a:r>
+              <a:rPr lang="ko-KR" altLang="en-US" baseline="0" dirty="0"/>
+              <a:t>값을 초기화 하거나 메서드를 바인딩 할 때 사용</a:t>
+            </a:r>
+            <a:endParaRPr lang="en-US" altLang="ko-KR" baseline="0" dirty="0"/>
+          </a:p>
+          <a:p>
+            <a:pPr marL="0" marR="0" indent="0" algn="l" defTabSz="914400" rtl="0" eaLnBrk="1" fontAlgn="auto" latinLnBrk="1" hangingPunct="1">
+              <a:lnSpc>
+                <a:spcPct val="100000"/>
+              </a:lnSpc>
+              <a:spcBef>
+                <a:spcPts val="0"/>
+              </a:spcBef>
+              <a:spcAft>
+                <a:spcPts val="0"/>
+              </a:spcAft>
+              <a:buClrTx/>
+              <a:buSzTx/>
+              <a:buFontTx/>
+              <a:buNone/>
+              <a:tabLst/>
+              <a:defRPr/>
+            </a:pPr>
+            <a:r>
+              <a:rPr lang="ko-KR" altLang="en-US" baseline="0" dirty="0"/>
+              <a:t>해당 컴포넌트가 마운트 되기 전 호출된다 </a:t>
+            </a:r>
+            <a:r>
+              <a:rPr lang="en-US" altLang="ko-KR" baseline="0" dirty="0"/>
+              <a:t>(</a:t>
+            </a:r>
+            <a:r>
+              <a:rPr lang="ko-KR" altLang="en-US" baseline="0" dirty="0"/>
+              <a:t>마운트 </a:t>
+            </a:r>
+            <a:r>
+              <a:rPr lang="en-US" altLang="ko-KR" baseline="0" dirty="0"/>
+              <a:t>: DOM </a:t>
+            </a:r>
+            <a:r>
+              <a:rPr lang="ko-KR" altLang="en-US" baseline="0" dirty="0"/>
+              <a:t>객체가 생성되고 브라우저에 나타나는 것을 의미</a:t>
+            </a:r>
+            <a:r>
+              <a:rPr lang="en-US" altLang="ko-KR" baseline="0" dirty="0"/>
+              <a:t>)</a:t>
+            </a:r>
+          </a:p>
+          <a:p>
+            <a:pPr marL="0" marR="0" indent="0" algn="l" defTabSz="914400" rtl="0" eaLnBrk="1" fontAlgn="auto" latinLnBrk="1" hangingPunct="1">
+              <a:lnSpc>
+                <a:spcPct val="100000"/>
+              </a:lnSpc>
+              <a:spcBef>
+                <a:spcPts val="0"/>
+              </a:spcBef>
+              <a:spcAft>
+                <a:spcPts val="0"/>
+              </a:spcAft>
+              <a:buClrTx/>
+              <a:buSzTx/>
+              <a:buFontTx/>
+              <a:buNone/>
+              <a:tabLst/>
+              <a:defRPr/>
+            </a:pPr>
+            <a:r>
+              <a:rPr lang="en-US" altLang="ko-KR" baseline="0" dirty="0"/>
+              <a:t>(Mount, Update, </a:t>
+            </a:r>
+            <a:r>
+              <a:rPr lang="en-US" altLang="ko-KR" baseline="0" dirty="0" err="1"/>
+              <a:t>UnMount</a:t>
+            </a:r>
+            <a:r>
+              <a:rPr lang="en-US" altLang="ko-KR" baseline="0" dirty="0"/>
+              <a:t>) -&gt; </a:t>
+            </a:r>
+            <a:r>
+              <a:rPr lang="ko-KR" altLang="en-US" baseline="0" dirty="0"/>
+              <a:t>추후 라이프 사이클 파트에서 다룰 예정</a:t>
+            </a:r>
+            <a:endParaRPr lang="en-US" altLang="ko-KR" baseline="0" dirty="0"/>
+          </a:p>
+          <a:p>
+            <a:pPr marL="0" marR="0" indent="0" algn="l" defTabSz="914400" rtl="0" eaLnBrk="1" fontAlgn="auto" latinLnBrk="1" hangingPunct="1">
+              <a:lnSpc>
+                <a:spcPct val="100000"/>
+              </a:lnSpc>
+              <a:spcBef>
+                <a:spcPts val="0"/>
+              </a:spcBef>
+              <a:spcAft>
+                <a:spcPts val="0"/>
+              </a:spcAft>
+              <a:buClrTx/>
+              <a:buSzTx/>
+              <a:buFontTx/>
+              <a:buNone/>
+              <a:tabLst/>
+              <a:defRPr/>
+            </a:pPr>
+            <a:r>
+              <a:rPr lang="en-US" altLang="ko-KR" baseline="0" dirty="0"/>
+              <a:t>----</a:t>
+            </a:r>
+          </a:p>
+          <a:p>
+            <a:pPr marL="0" marR="0" indent="0" algn="l" defTabSz="914400" rtl="0" eaLnBrk="1" fontAlgn="auto" latinLnBrk="1" hangingPunct="1">
+              <a:lnSpc>
+                <a:spcPct val="100000"/>
+              </a:lnSpc>
+              <a:spcBef>
+                <a:spcPts val="0"/>
+              </a:spcBef>
+              <a:spcAft>
+                <a:spcPts val="0"/>
+              </a:spcAft>
+              <a:buClrTx/>
+              <a:buSzTx/>
+              <a:buFontTx/>
+              <a:buNone/>
+              <a:tabLst/>
+              <a:defRPr/>
+            </a:pPr>
+            <a:r>
+              <a:rPr lang="en-US" altLang="ko-KR" dirty="0"/>
+              <a:t>super() : </a:t>
+            </a:r>
+            <a:r>
+              <a:rPr lang="ko-KR" altLang="en-US" dirty="0"/>
+              <a:t>부모 클래스 </a:t>
+            </a:r>
+            <a:r>
+              <a:rPr lang="ko-KR" altLang="en-US" dirty="0" err="1"/>
+              <a:t>생성자</a:t>
+            </a:r>
+            <a:r>
+              <a:rPr lang="ko-KR" altLang="en-US" dirty="0"/>
+              <a:t> 가리킴</a:t>
+            </a:r>
+            <a:r>
+              <a:rPr lang="en-US" altLang="ko-KR" dirty="0"/>
+              <a:t>, super(props)</a:t>
+            </a:r>
+            <a:r>
+              <a:rPr lang="ko-KR" altLang="en-US" dirty="0"/>
+              <a:t>를 </a:t>
+            </a:r>
+            <a:r>
+              <a:rPr lang="ko-KR" altLang="en-US" dirty="0" err="1"/>
+              <a:t>선언전까지</a:t>
+            </a:r>
+            <a:r>
+              <a:rPr lang="ko-KR" altLang="en-US" dirty="0"/>
+              <a:t> </a:t>
+            </a:r>
+            <a:r>
+              <a:rPr lang="en-US" altLang="ko-KR" dirty="0"/>
+              <a:t>constructor</a:t>
+            </a:r>
+            <a:r>
+              <a:rPr lang="ko-KR" altLang="en-US" dirty="0"/>
+              <a:t>에서 </a:t>
+            </a:r>
+            <a:r>
+              <a:rPr lang="en-US" altLang="ko-KR" dirty="0"/>
+              <a:t>this</a:t>
+            </a:r>
+            <a:r>
+              <a:rPr lang="en-US" altLang="ko-KR" baseline="0" dirty="0"/>
+              <a:t> </a:t>
+            </a:r>
+            <a:r>
+              <a:rPr lang="ko-KR" altLang="en-US" baseline="0" dirty="0"/>
+              <a:t>키워드를 사용할 수 없다</a:t>
+            </a:r>
+            <a:r>
+              <a:rPr lang="en-US" altLang="ko-KR" baseline="0" dirty="0"/>
+              <a:t>(</a:t>
+            </a:r>
+            <a:r>
+              <a:rPr lang="en-US" altLang="ko-KR" baseline="0" dirty="0" err="1"/>
+              <a:t>js</a:t>
+            </a:r>
+            <a:r>
+              <a:rPr lang="ko-KR" altLang="en-US" baseline="0" dirty="0"/>
+              <a:t>에서</a:t>
+            </a:r>
+            <a:r>
+              <a:rPr lang="en-US" altLang="ko-KR" baseline="0" dirty="0"/>
+              <a:t>)</a:t>
+            </a:r>
+          </a:p>
+          <a:p>
+            <a:pPr marL="0" marR="0" indent="0" algn="l" defTabSz="914400" rtl="0" eaLnBrk="1" fontAlgn="auto" latinLnBrk="1" hangingPunct="1">
+              <a:lnSpc>
+                <a:spcPct val="100000"/>
+              </a:lnSpc>
+              <a:spcBef>
+                <a:spcPts val="0"/>
+              </a:spcBef>
+              <a:spcAft>
+                <a:spcPts val="0"/>
+              </a:spcAft>
+              <a:buClrTx/>
+              <a:buSzTx/>
+              <a:buFontTx/>
+              <a:buNone/>
+              <a:tabLst/>
+              <a:defRPr/>
+            </a:pPr>
+            <a:endParaRPr lang="ko-KR" altLang="en-US" dirty="0"/>
+          </a:p>
+        </p:txBody>
+      </p:sp>
+      <p:sp>
+        <p:nvSpPr>
+          <p:cNvPr id="4" name="슬라이드 번호 개체 틀 3"/>
+          <p:cNvSpPr>
+            <a:spLocks noGrp="1"/>
+          </p:cNvSpPr>
+          <p:nvPr>
+            <p:ph type="sldNum" sz="quarter" idx="10"/>
+          </p:nvPr>
+        </p:nvSpPr>
+        <p:spPr/>
+        <p:txBody>
+          <a:bodyPr/>
+          <a:lstStyle/>
+          <a:p>
+            <a:fld id="{C09E5BFC-1559-42F1-8940-AB342D56BF02}" type="slidenum">
+              <a:rPr lang="ko-KR" altLang="en-US" smtClean="0"/>
+              <a:t>13</a:t>
+            </a:fld>
+            <a:endParaRPr lang="ko-KR" altLang="en-US"/>
+          </a:p>
+        </p:txBody>
+      </p:sp>
+    </p:spTree>
+    <p:extLst>
+      <p:ext uri="{BB962C8B-B14F-4D97-AF65-F5344CB8AC3E}">
+        <p14:creationId xmlns:p14="http://schemas.microsoft.com/office/powerpoint/2010/main" val="4203439928"/>
+      </p:ext>
+    </p:extLst>
+  </p:cSld>
+  <p:clrMapOvr>
+    <a:masterClrMapping/>
+  </p:clrMapOvr>
+</p:notes>
+</file>
+
+<file path=ppt/notesSlides/notesSlide11.xml><?xml version="1.0" encoding="utf-8"?>
+<p:notes xmlns:a="http://schemas.openxmlformats.org/drawingml/2006/main" xmlns:r="http://schemas.openxmlformats.org/officeDocument/2006/relationships" xmlns:p="http://schemas.openxmlformats.org/presentationml/2006/main">
+  <p:cSld>
+    <p:spTree>
+      <p:nvGrpSpPr>
+        <p:cNvPr id="1" name=""/>
+        <p:cNvGrpSpPr/>
+        <p:nvPr/>
+      </p:nvGrpSpPr>
+      <p:grpSpPr>
+        <a:xfrm>
+          <a:off x="0" y="0"/>
+          <a:ext cx="0" cy="0"/>
+          <a:chOff x="0" y="0"/>
+          <a:chExt cx="0" cy="0"/>
+        </a:xfrm>
+      </p:grpSpPr>
+      <p:sp>
+        <p:nvSpPr>
+          <p:cNvPr id="2" name="슬라이드 이미지 개체 틀 1"/>
+          <p:cNvSpPr>
+            <a:spLocks noGrp="1" noRot="1" noChangeAspect="1"/>
+          </p:cNvSpPr>
+          <p:nvPr>
+            <p:ph type="sldImg"/>
+          </p:nvPr>
+        </p:nvSpPr>
+        <p:spPr/>
+      </p:sp>
+      <p:sp>
+        <p:nvSpPr>
+          <p:cNvPr id="3" name="슬라이드 노트 개체 틀 2"/>
+          <p:cNvSpPr>
+            <a:spLocks noGrp="1"/>
+          </p:cNvSpPr>
+          <p:nvPr>
+            <p:ph type="body" idx="1"/>
+          </p:nvPr>
+        </p:nvSpPr>
+        <p:spPr/>
+        <p:txBody>
+          <a:bodyPr/>
+          <a:lstStyle/>
+          <a:p>
+            <a:endParaRPr lang="ko-KR" altLang="en-US" dirty="0"/>
+          </a:p>
+        </p:txBody>
+      </p:sp>
+      <p:sp>
+        <p:nvSpPr>
+          <p:cNvPr id="4" name="슬라이드 번호 개체 틀 3"/>
+          <p:cNvSpPr>
+            <a:spLocks noGrp="1"/>
+          </p:cNvSpPr>
+          <p:nvPr>
+            <p:ph type="sldNum" sz="quarter" idx="10"/>
+          </p:nvPr>
+        </p:nvSpPr>
+        <p:spPr/>
+        <p:txBody>
+          <a:bodyPr/>
+          <a:lstStyle/>
+          <a:p>
+            <a:fld id="{C09E5BFC-1559-42F1-8940-AB342D56BF02}" type="slidenum">
+              <a:rPr lang="ko-KR" altLang="en-US" smtClean="0"/>
+              <a:t>14</a:t>
+            </a:fld>
+            <a:endParaRPr lang="ko-KR" altLang="en-US"/>
+          </a:p>
+        </p:txBody>
+      </p:sp>
+    </p:spTree>
+    <p:extLst>
+      <p:ext uri="{BB962C8B-B14F-4D97-AF65-F5344CB8AC3E}">
+        <p14:creationId xmlns:p14="http://schemas.microsoft.com/office/powerpoint/2010/main" val="2729950675"/>
+      </p:ext>
+    </p:extLst>
+  </p:cSld>
+  <p:clrMapOvr>
+    <a:masterClrMapping/>
+  </p:clrMapOvr>
+</p:notes>
+</file>
+
+<file path=ppt/notesSlides/notesSlide12.xml><?xml version="1.0" encoding="utf-8"?>
+<p:notes xmlns:a="http://schemas.openxmlformats.org/drawingml/2006/main" xmlns:r="http://schemas.openxmlformats.org/officeDocument/2006/relationships" xmlns:p="http://schemas.openxmlformats.org/presentationml/2006/main">
+  <p:cSld>
+    <p:spTree>
+      <p:nvGrpSpPr>
+        <p:cNvPr id="1" name=""/>
+        <p:cNvGrpSpPr/>
+        <p:nvPr/>
+      </p:nvGrpSpPr>
+      <p:grpSpPr>
+        <a:xfrm>
+          <a:off x="0" y="0"/>
+          <a:ext cx="0" cy="0"/>
+          <a:chOff x="0" y="0"/>
+          <a:chExt cx="0" cy="0"/>
+        </a:xfrm>
+      </p:grpSpPr>
+      <p:sp>
+        <p:nvSpPr>
+          <p:cNvPr id="2" name="슬라이드 이미지 개체 틀 1"/>
+          <p:cNvSpPr>
+            <a:spLocks noGrp="1" noRot="1" noChangeAspect="1"/>
+          </p:cNvSpPr>
+          <p:nvPr>
+            <p:ph type="sldImg"/>
+          </p:nvPr>
+        </p:nvSpPr>
+        <p:spPr/>
+      </p:sp>
+      <p:sp>
+        <p:nvSpPr>
+          <p:cNvPr id="3" name="슬라이드 노트 개체 틀 2"/>
+          <p:cNvSpPr>
+            <a:spLocks noGrp="1"/>
+          </p:cNvSpPr>
+          <p:nvPr>
+            <p:ph type="body" idx="1"/>
+          </p:nvPr>
+        </p:nvSpPr>
+        <p:spPr/>
+        <p:txBody>
+          <a:bodyPr/>
+          <a:lstStyle/>
+          <a:p>
+            <a:endParaRPr lang="ko-KR" altLang="en-US" dirty="0"/>
+          </a:p>
+        </p:txBody>
+      </p:sp>
+      <p:sp>
+        <p:nvSpPr>
+          <p:cNvPr id="4" name="슬라이드 번호 개체 틀 3"/>
+          <p:cNvSpPr>
+            <a:spLocks noGrp="1"/>
+          </p:cNvSpPr>
+          <p:nvPr>
+            <p:ph type="sldNum" sz="quarter" idx="5"/>
+          </p:nvPr>
+        </p:nvSpPr>
+        <p:spPr/>
+        <p:txBody>
+          <a:bodyPr/>
+          <a:lstStyle/>
+          <a:p>
+            <a:fld id="{C09E5BFC-1559-42F1-8940-AB342D56BF02}" type="slidenum">
+              <a:rPr lang="ko-KR" altLang="en-US" smtClean="0"/>
+              <a:t>18</a:t>
+            </a:fld>
+            <a:endParaRPr lang="ko-KR" altLang="en-US"/>
+          </a:p>
+        </p:txBody>
+      </p:sp>
+    </p:spTree>
+    <p:extLst>
+      <p:ext uri="{BB962C8B-B14F-4D97-AF65-F5344CB8AC3E}">
+        <p14:creationId xmlns:p14="http://schemas.microsoft.com/office/powerpoint/2010/main" val="2666424229"/>
+      </p:ext>
+    </p:extLst>
+  </p:cSld>
+  <p:clrMapOvr>
+    <a:masterClrMapping/>
+  </p:clrMapOvr>
+</p:notes>
+</file>
+
 <file path=ppt/notesSlides/notesSlide2.xml><?xml version="1.0" encoding="utf-8"?>
 <p:notes xmlns:a="http://schemas.openxmlformats.org/drawingml/2006/main" xmlns:r="http://schemas.openxmlformats.org/officeDocument/2006/relationships" xmlns:p="http://schemas.openxmlformats.org/presentationml/2006/main">
   <p:cSld>
@@ -696,7 +1222,218 @@
           <a:bodyPr/>
           <a:lstStyle/>
           <a:p>
-            <a:endParaRPr lang="ko-KR" altLang="en-US"/>
+            <a:r>
+              <a:rPr lang="ko-KR" altLang="en-US" dirty="0"/>
+              <a:t>부모 </a:t>
+            </a:r>
+            <a:r>
+              <a:rPr lang="en-US" altLang="ko-KR" dirty="0"/>
+              <a:t>-&gt; </a:t>
+            </a:r>
+            <a:r>
+              <a:rPr lang="ko-KR" altLang="en-US" dirty="0"/>
+              <a:t>자식</a:t>
+            </a:r>
+            <a:r>
+              <a:rPr lang="en-US" altLang="ko-KR" dirty="0"/>
+              <a:t>.</a:t>
+            </a:r>
+          </a:p>
+          <a:p>
+            <a:r>
+              <a:rPr lang="ko-KR" altLang="en-US" dirty="0"/>
+              <a:t>부모에서 </a:t>
+            </a:r>
+            <a:r>
+              <a:rPr lang="en-US" altLang="ko-KR" dirty="0"/>
+              <a:t>state (</a:t>
+            </a:r>
+            <a:r>
+              <a:rPr lang="ko-KR" altLang="en-US" dirty="0"/>
+              <a:t>변수</a:t>
+            </a:r>
+            <a:r>
+              <a:rPr lang="en-US" altLang="ko-KR" dirty="0"/>
+              <a:t>) </a:t>
+            </a:r>
+            <a:r>
+              <a:rPr lang="ko-KR" altLang="en-US" dirty="0"/>
+              <a:t>자식으로 보내줘서 사용 가능</a:t>
+            </a:r>
+            <a:r>
+              <a:rPr lang="en-US" altLang="ko-KR" dirty="0"/>
+              <a:t>.</a:t>
+            </a:r>
+          </a:p>
+          <a:p>
+            <a:r>
+              <a:rPr lang="ko-KR" altLang="en-US" dirty="0"/>
+              <a:t>이러면 자식이 부모가 가지고 있던 </a:t>
+            </a:r>
+            <a:r>
+              <a:rPr lang="en-US" altLang="ko-KR" dirty="0"/>
+              <a:t>State</a:t>
+            </a:r>
+            <a:r>
+              <a:rPr lang="ko-KR" altLang="en-US" dirty="0"/>
+              <a:t>를 사용 가능</a:t>
+            </a:r>
+            <a:endParaRPr lang="en-US" altLang="ko-KR" dirty="0"/>
+          </a:p>
+          <a:p>
+            <a:endParaRPr lang="en-US" altLang="ko-KR" dirty="0"/>
+          </a:p>
+          <a:p>
+            <a:r>
+              <a:rPr lang="en-US" altLang="ko-KR" dirty="0"/>
+              <a:t>// props </a:t>
+            </a:r>
+            <a:r>
+              <a:rPr lang="ko-KR" altLang="en-US" dirty="0"/>
+              <a:t>사용 방법</a:t>
+            </a:r>
+            <a:r>
+              <a:rPr lang="en-US" altLang="ko-KR" dirty="0"/>
+              <a:t>.</a:t>
+            </a:r>
+          </a:p>
+          <a:p>
+            <a:endParaRPr lang="en-US" altLang="ko-KR" dirty="0"/>
+          </a:p>
+          <a:p>
+            <a:r>
+              <a:rPr lang="ko-KR" altLang="en-US" dirty="0"/>
+              <a:t>부모가 자식한테 </a:t>
+            </a:r>
+            <a:r>
+              <a:rPr lang="ko-KR" altLang="en-US" dirty="0" err="1"/>
+              <a:t>줄거임</a:t>
+            </a:r>
+            <a:r>
+              <a:rPr lang="en-US" altLang="ko-KR" dirty="0"/>
+              <a:t>.</a:t>
+            </a:r>
+          </a:p>
+          <a:p>
+            <a:endParaRPr lang="en-US" altLang="ko-KR" dirty="0"/>
+          </a:p>
+          <a:p>
+            <a:r>
+              <a:rPr lang="en-US" altLang="ko-KR" dirty="0"/>
+              <a:t>1. </a:t>
+            </a:r>
+            <a:r>
+              <a:rPr lang="ko-KR" altLang="en-US" dirty="0"/>
+              <a:t>부모 쪽에 </a:t>
+            </a:r>
+            <a:r>
+              <a:rPr lang="en-US" altLang="ko-KR" dirty="0"/>
+              <a:t>&lt;</a:t>
+            </a:r>
+            <a:r>
+              <a:rPr lang="en-US" altLang="ko-KR" dirty="0" err="1"/>
+              <a:t>Fution</a:t>
+            </a:r>
+            <a:r>
+              <a:rPr lang="en-US" altLang="ko-KR" dirty="0"/>
+              <a:t> </a:t>
+            </a:r>
+            <a:r>
+              <a:rPr lang="ko-KR" altLang="en-US" dirty="0"/>
+              <a:t>작명</a:t>
+            </a:r>
+            <a:r>
+              <a:rPr lang="en-US" altLang="ko-KR" dirty="0"/>
+              <a:t>={</a:t>
+            </a:r>
+            <a:r>
+              <a:rPr lang="ko-KR" altLang="en-US" dirty="0" err="1"/>
+              <a:t>줄내용</a:t>
+            </a:r>
+            <a:r>
+              <a:rPr lang="en-US" altLang="ko-KR" dirty="0"/>
+              <a:t>}/&gt;</a:t>
+            </a:r>
+          </a:p>
+          <a:p>
+            <a:endParaRPr lang="en-US" altLang="ko-KR" dirty="0"/>
+          </a:p>
+          <a:p>
+            <a:r>
+              <a:rPr lang="en-US" altLang="ko-KR" dirty="0"/>
+              <a:t>2. </a:t>
+            </a:r>
+            <a:r>
+              <a:rPr lang="ko-KR" altLang="en-US" dirty="0"/>
+              <a:t>자식 쪽에 </a:t>
+            </a:r>
+            <a:r>
+              <a:rPr lang="en-US" altLang="ko-KR" dirty="0" err="1"/>
+              <a:t>Fution</a:t>
+            </a:r>
+            <a:r>
+              <a:rPr lang="en-US" altLang="ko-KR" dirty="0"/>
+              <a:t>(props){</a:t>
+            </a:r>
+          </a:p>
+          <a:p>
+            <a:r>
+              <a:rPr lang="en-US" altLang="ko-KR" dirty="0"/>
+              <a:t>  &lt;h1&gt;props.</a:t>
+            </a:r>
+            <a:r>
+              <a:rPr lang="ko-KR" altLang="en-US" dirty="0"/>
+              <a:t>작명</a:t>
+            </a:r>
+            <a:r>
+              <a:rPr lang="en-US" altLang="ko-KR" dirty="0"/>
+              <a:t>&lt;/h1&gt;</a:t>
+            </a:r>
+          </a:p>
+          <a:p>
+            <a:r>
+              <a:rPr lang="en-US" altLang="ko-KR" dirty="0"/>
+              <a:t>}</a:t>
+            </a:r>
+          </a:p>
+          <a:p>
+            <a:endParaRPr lang="en-US" altLang="ko-KR" dirty="0"/>
+          </a:p>
+          <a:p>
+            <a:r>
+              <a:rPr lang="en-US" altLang="ko-KR" dirty="0"/>
+              <a:t>**</a:t>
+            </a:r>
+            <a:r>
+              <a:rPr lang="ko-KR" altLang="en-US" dirty="0"/>
+              <a:t>보통 귀찮아서 작명을 내용과 같게 작성한다</a:t>
+            </a:r>
+            <a:r>
+              <a:rPr lang="en-US" altLang="ko-KR" dirty="0"/>
+              <a:t>.</a:t>
+            </a:r>
+          </a:p>
+          <a:p>
+            <a:endParaRPr lang="en-US" altLang="ko-KR" dirty="0"/>
+          </a:p>
+          <a:p>
+            <a:pPr marL="228600" indent="-228600">
+              <a:buAutoNum type="arabicPeriod"/>
+            </a:pPr>
+            <a:r>
+              <a:rPr lang="ko-KR" altLang="en-US" dirty="0"/>
+              <a:t>패륜전송 금지</a:t>
+            </a:r>
+            <a:r>
+              <a:rPr lang="en-US" altLang="ko-KR" dirty="0"/>
+              <a:t>.</a:t>
+            </a:r>
+          </a:p>
+          <a:p>
+            <a:pPr marL="228600" indent="-228600">
+              <a:buAutoNum type="arabicPeriod"/>
+            </a:pPr>
+            <a:endParaRPr lang="ko-KR" altLang="en-US" dirty="0"/>
           </a:p>
         </p:txBody>
       </p:sp>
@@ -780,7 +1517,7 @@
           <a:bodyPr/>
           <a:lstStyle/>
           <a:p>
-            <a:endParaRPr lang="ko-KR" altLang="en-US" dirty="0"/>
+            <a:endParaRPr lang="ko-KR" altLang="en-US"/>
           </a:p>
         </p:txBody>
       </p:sp>
@@ -791,7 +1528,7 @@
             <a:spLocks noGrp="1"/>
           </p:cNvSpPr>
           <p:nvPr>
-            <p:ph type="sldNum" sz="quarter" idx="10"/>
+            <p:ph type="sldNum" sz="quarter" idx="5"/>
           </p:nvPr>
         </p:nvSpPr>
         <p:spPr/>
@@ -801,7 +1538,7 @@
           <a:p>
             <a:fld id="{C09E5BFC-1559-42F1-8940-AB342D56BF02}" type="slidenum">
               <a:rPr lang="ko-KR" altLang="en-US" smtClean="0"/>
-              <a:t>9</a:t>
+              <a:t>5</a:t>
             </a:fld>
             <a:endParaRPr lang="ko-KR" altLang="en-US"/>
           </a:p>
@@ -810,7 +1547,7 @@
     </p:spTree>
     <p:extLst>
       <p:ext uri="{BB962C8B-B14F-4D97-AF65-F5344CB8AC3E}">
-        <p14:creationId xmlns:p14="http://schemas.microsoft.com/office/powerpoint/2010/main" val="3780183819"/>
+        <p14:creationId xmlns:p14="http://schemas.microsoft.com/office/powerpoint/2010/main" val="1167679839"/>
       </p:ext>
     </p:extLst>
   </p:cSld>
@@ -864,22 +1601,7 @@
           <a:bodyPr/>
           <a:lstStyle/>
           <a:p>
-            <a:r>
-              <a:rPr lang="en-US" altLang="ko-KR" dirty="0"/>
-              <a:t>ex. </a:t>
-            </a:r>
-            <a:r>
-              <a:rPr lang="ko-KR" altLang="en-US" dirty="0" err="1"/>
-              <a:t>다크</a:t>
-            </a:r>
-            <a:r>
-              <a:rPr lang="en-US" altLang="ko-KR" dirty="0"/>
-              <a:t>/</a:t>
-            </a:r>
-            <a:r>
-              <a:rPr lang="ko-KR" altLang="en-US" dirty="0"/>
-              <a:t>라이트 모드</a:t>
-            </a:r>
+            <a:endParaRPr lang="ko-KR" altLang="en-US" dirty="0"/>
           </a:p>
         </p:txBody>
       </p:sp>
@@ -900,7 +1622,7 @@
           <a:p>
             <a:fld id="{C09E5BFC-1559-42F1-8940-AB342D56BF02}" type="slidenum">
               <a:rPr lang="ko-KR" altLang="en-US" smtClean="0"/>
-              <a:t>11</a:t>
+              <a:t>6</a:t>
             </a:fld>
             <a:endParaRPr lang="ko-KR" altLang="en-US"/>
           </a:p>
@@ -909,7 +1631,7 @@
     </p:spTree>
     <p:extLst>
       <p:ext uri="{BB962C8B-B14F-4D97-AF65-F5344CB8AC3E}">
-        <p14:creationId xmlns:p14="http://schemas.microsoft.com/office/powerpoint/2010/main" val="695242521"/>
+        <p14:creationId xmlns:p14="http://schemas.microsoft.com/office/powerpoint/2010/main" val="975169865"/>
       </p:ext>
     </p:extLst>
   </p:cSld>
@@ -963,6 +1685,33 @@
           <a:bodyPr/>
           <a:lstStyle/>
           <a:p>
+            <a:r>
+              <a:rPr lang="en-US" altLang="ko-KR" dirty="0"/>
+              <a:t>props</a:t>
+            </a:r>
+            <a:r>
+              <a:rPr lang="ko-KR" altLang="en-US" dirty="0"/>
+              <a:t>에 대한 유형 검사</a:t>
+            </a:r>
+            <a:r>
+              <a:rPr lang="en-US" altLang="ko-KR" dirty="0"/>
+              <a:t>(type-checking)</a:t>
+            </a:r>
+            <a:r>
+              <a:rPr lang="ko-KR" altLang="en-US" dirty="0"/>
+              <a:t>를 수행하는 데 사용되는 도구</a:t>
+            </a:r>
+            <a:endParaRPr lang="en-US" altLang="ko-KR" dirty="0"/>
+          </a:p>
+          <a:p>
+            <a:r>
+              <a:rPr lang="ko-KR" altLang="en-US" dirty="0"/>
+              <a:t>느슨한 언어</a:t>
+            </a:r>
+            <a:r>
+              <a:rPr lang="en-US" altLang="ko-KR" dirty="0"/>
+              <a:t>!</a:t>
+            </a:r>
             <a:endParaRPr lang="ko-KR" altLang="en-US" dirty="0"/>
           </a:p>
         </p:txBody>
@@ -984,7 +1733,7 @@
           <a:p>
             <a:fld id="{C09E5BFC-1559-42F1-8940-AB342D56BF02}" type="slidenum">
               <a:rPr lang="ko-KR" altLang="en-US" smtClean="0"/>
-              <a:t>12</a:t>
+              <a:t>7</a:t>
             </a:fld>
             <a:endParaRPr lang="ko-KR" altLang="en-US"/>
           </a:p>
@@ -993,7 +1742,7 @@
     </p:spTree>
     <p:extLst>
       <p:ext uri="{BB962C8B-B14F-4D97-AF65-F5344CB8AC3E}">
-        <p14:creationId xmlns:p14="http://schemas.microsoft.com/office/powerpoint/2010/main" val="2229234871"/>
+        <p14:creationId xmlns:p14="http://schemas.microsoft.com/office/powerpoint/2010/main" val="2379176957"/>
       </p:ext>
     </p:extLst>
   </p:cSld>
@@ -1047,281 +1796,7 @@
           <a:bodyPr/>
           <a:lstStyle/>
           <a:p>
-            <a:pPr marL="0" marR="0" indent="0" algn="l" defTabSz="914400" rtl="0" eaLnBrk="1" fontAlgn="auto" latinLnBrk="1" hangingPunct="1">
-              <a:lnSpc>
-                <a:spcPct val="100000"/>
-              </a:lnSpc>
-              <a:spcBef>
-                <a:spcPts val="0"/>
-              </a:spcBef>
-              <a:spcAft>
-                <a:spcPts val="0"/>
-              </a:spcAft>
-              <a:buClrTx/>
-              <a:buSzTx/>
-              <a:buFontTx/>
-              <a:buNone/>
-              <a:tabLst/>
-              <a:defRPr/>
-            </a:pPr>
-            <a:r>
-              <a:rPr lang="en-US" altLang="ko-KR" dirty="0" smtClean="0"/>
-              <a:t>16.3 </a:t>
-            </a:r>
-            <a:r>
-              <a:rPr lang="ko-KR" altLang="en-US" dirty="0" smtClean="0"/>
-              <a:t>버전 이전 형태</a:t>
-            </a:r>
-            <a:endParaRPr lang="en-US" altLang="ko-KR" dirty="0" smtClean="0"/>
-          </a:p>
-          <a:p>
-            <a:pPr marL="0" marR="0" indent="0" algn="l" defTabSz="914400" rtl="0" eaLnBrk="1" fontAlgn="auto" latinLnBrk="1" hangingPunct="1">
-              <a:lnSpc>
-                <a:spcPct val="100000"/>
-              </a:lnSpc>
-              <a:spcBef>
-                <a:spcPts val="0"/>
-              </a:spcBef>
-              <a:spcAft>
-                <a:spcPts val="0"/>
-              </a:spcAft>
-              <a:buClrTx/>
-              <a:buSzTx/>
-              <a:buFontTx/>
-              <a:buNone/>
-              <a:tabLst/>
-              <a:defRPr/>
-            </a:pPr>
-            <a:r>
-              <a:rPr lang="en-US" altLang="ko-KR" dirty="0" smtClean="0"/>
-              <a:t>constructor()</a:t>
-            </a:r>
-            <a:r>
-              <a:rPr lang="en-US" altLang="ko-KR" baseline="0" dirty="0" smtClean="0"/>
-              <a:t> : </a:t>
-            </a:r>
-            <a:r>
-              <a:rPr lang="ko-KR" altLang="en-US" baseline="0" dirty="0" err="1" smtClean="0"/>
-              <a:t>생성자</a:t>
-            </a:r>
-            <a:r>
-              <a:rPr lang="en-US" altLang="ko-KR" baseline="0" dirty="0" smtClean="0"/>
-              <a:t>, state </a:t>
-            </a:r>
-            <a:r>
-              <a:rPr lang="ko-KR" altLang="en-US" baseline="0" dirty="0" smtClean="0"/>
-              <a:t>값을 초기화 하거나 메서드를 바인딩 할 때 사용</a:t>
-            </a:r>
-            <a:endParaRPr lang="en-US" altLang="ko-KR" baseline="0" dirty="0" smtClean="0"/>
-          </a:p>
-          <a:p>
-            <a:pPr marL="0" marR="0" indent="0" algn="l" defTabSz="914400" rtl="0" eaLnBrk="1" fontAlgn="auto" latinLnBrk="1" hangingPunct="1">
-              <a:lnSpc>
-                <a:spcPct val="100000"/>
-              </a:lnSpc>
-              <a:spcBef>
-                <a:spcPts val="0"/>
-              </a:spcBef>
-              <a:spcAft>
-                <a:spcPts val="0"/>
-              </a:spcAft>
-              <a:buClrTx/>
-              <a:buSzTx/>
-              <a:buFontTx/>
-              <a:buNone/>
-              <a:tabLst/>
-              <a:defRPr/>
-            </a:pPr>
-            <a:r>
-              <a:rPr lang="ko-KR" altLang="en-US" baseline="0" dirty="0" smtClean="0"/>
-              <a:t>해당 컴포넌트가 마운트 되기 전 호출된다 </a:t>
-            </a:r>
-            <a:r>
-              <a:rPr lang="en-US" altLang="ko-KR" baseline="0" dirty="0" smtClean="0"/>
-              <a:t>(</a:t>
-            </a:r>
-            <a:r>
-              <a:rPr lang="ko-KR" altLang="en-US" baseline="0" dirty="0" smtClean="0"/>
-              <a:t>마운트 </a:t>
-            </a:r>
-            <a:r>
-              <a:rPr lang="en-US" altLang="ko-KR" baseline="0" dirty="0" smtClean="0"/>
-              <a:t>: DOM </a:t>
-            </a:r>
-            <a:r>
-              <a:rPr lang="ko-KR" altLang="en-US" baseline="0" dirty="0" smtClean="0"/>
-              <a:t>객체가 생성되고 브라우저에 나타나는 것을 의미</a:t>
-            </a:r>
-            <a:r>
-              <a:rPr lang="en-US" altLang="ko-KR" baseline="0" dirty="0" smtClean="0"/>
-              <a:t>)</a:t>
-            </a:r>
-          </a:p>
-          <a:p>
-            <a:pPr marL="0" marR="0" indent="0" algn="l" defTabSz="914400" rtl="0" eaLnBrk="1" fontAlgn="auto" latinLnBrk="1" hangingPunct="1">
-              <a:lnSpc>
-                <a:spcPct val="100000"/>
-              </a:lnSpc>
-              <a:spcBef>
-                <a:spcPts val="0"/>
-              </a:spcBef>
-              <a:spcAft>
-                <a:spcPts val="0"/>
-              </a:spcAft>
-              <a:buClrTx/>
-              <a:buSzTx/>
-              <a:buFontTx/>
-              <a:buNone/>
-              <a:tabLst/>
-              <a:defRPr/>
-            </a:pPr>
-            <a:r>
-              <a:rPr lang="en-US" altLang="ko-KR" baseline="0" dirty="0" smtClean="0"/>
-              <a:t>(Mount, Update, </a:t>
-            </a:r>
-            <a:r>
-              <a:rPr lang="en-US" altLang="ko-KR" baseline="0" dirty="0" err="1" smtClean="0"/>
-              <a:t>UnMount</a:t>
-            </a:r>
-            <a:r>
-              <a:rPr lang="en-US" altLang="ko-KR" baseline="0" dirty="0" smtClean="0"/>
-              <a:t>) -&gt; </a:t>
-            </a:r>
-            <a:r>
-              <a:rPr lang="ko-KR" altLang="en-US" baseline="0" dirty="0" smtClean="0"/>
-              <a:t>추후 라이프 사이클 파트에서 다룰 예정</a:t>
-            </a:r>
-            <a:endParaRPr lang="en-US" altLang="ko-KR" baseline="0" dirty="0" smtClean="0"/>
-          </a:p>
-          <a:p>
-            <a:pPr marL="0" marR="0" indent="0" algn="l" defTabSz="914400" rtl="0" eaLnBrk="1" fontAlgn="auto" latinLnBrk="1" hangingPunct="1">
-              <a:lnSpc>
-                <a:spcPct val="100000"/>
-              </a:lnSpc>
-              <a:spcBef>
-                <a:spcPts val="0"/>
-              </a:spcBef>
-              <a:spcAft>
-                <a:spcPts val="0"/>
-              </a:spcAft>
-              <a:buClrTx/>
-              <a:buSzTx/>
-              <a:buFontTx/>
-              <a:buNone/>
-              <a:tabLst/>
-              <a:defRPr/>
-            </a:pPr>
-            <a:r>
-              <a:rPr lang="en-US" altLang="ko-KR" baseline="0" dirty="0" smtClean="0"/>
-              <a:t>----</a:t>
-            </a:r>
-          </a:p>
-          <a:p>
-            <a:pPr marL="0" marR="0" indent="0" algn="l" defTabSz="914400" rtl="0" eaLnBrk="1" fontAlgn="auto" latinLnBrk="1" hangingPunct="1">
-              <a:lnSpc>
-                <a:spcPct val="100000"/>
-              </a:lnSpc>
-              <a:spcBef>
-                <a:spcPts val="0"/>
-              </a:spcBef>
-              <a:spcAft>
-                <a:spcPts val="0"/>
-              </a:spcAft>
-              <a:buClrTx/>
-              <a:buSzTx/>
-              <a:buFontTx/>
-              <a:buNone/>
-              <a:tabLst/>
-              <a:defRPr/>
-            </a:pPr>
-            <a:r>
-              <a:rPr lang="en-US" altLang="ko-KR" dirty="0" smtClean="0"/>
-              <a:t>super() : </a:t>
-            </a:r>
-            <a:r>
-              <a:rPr lang="ko-KR" altLang="en-US" dirty="0" smtClean="0"/>
-              <a:t>부모 클래스 </a:t>
-            </a:r>
-            <a:r>
-              <a:rPr lang="ko-KR" altLang="en-US" dirty="0" err="1" smtClean="0"/>
-              <a:t>생성자</a:t>
-            </a:r>
-            <a:r>
-              <a:rPr lang="ko-KR" altLang="en-US" dirty="0" smtClean="0"/>
-              <a:t> 가리킴</a:t>
-            </a:r>
-            <a:r>
-              <a:rPr lang="en-US" altLang="ko-KR" dirty="0" smtClean="0"/>
-              <a:t>, super(props)</a:t>
-            </a:r>
-            <a:r>
-              <a:rPr lang="ko-KR" altLang="en-US" dirty="0" smtClean="0"/>
-              <a:t>를 </a:t>
-            </a:r>
-            <a:r>
-              <a:rPr lang="ko-KR" altLang="en-US" dirty="0" err="1" smtClean="0"/>
-              <a:t>선언전까지</a:t>
-            </a:r>
-            <a:r>
-              <a:rPr lang="ko-KR" altLang="en-US" dirty="0" smtClean="0"/>
-              <a:t> </a:t>
-            </a:r>
-            <a:r>
-              <a:rPr lang="en-US" altLang="ko-KR" dirty="0" smtClean="0"/>
-              <a:t>constructor</a:t>
-            </a:r>
-            <a:r>
-              <a:rPr lang="ko-KR" altLang="en-US" dirty="0" smtClean="0"/>
-              <a:t>에서 </a:t>
-            </a:r>
-            <a:r>
-              <a:rPr lang="en-US" altLang="ko-KR" dirty="0" smtClean="0"/>
-              <a:t>this</a:t>
-            </a:r>
-            <a:r>
-              <a:rPr lang="en-US" altLang="ko-KR" baseline="0" dirty="0" smtClean="0"/>
-              <a:t> </a:t>
-            </a:r>
-            <a:r>
-              <a:rPr lang="ko-KR" altLang="en-US" baseline="0" dirty="0" smtClean="0"/>
-              <a:t>키워드를 사용할 수 없다</a:t>
-            </a:r>
-            <a:r>
-              <a:rPr lang="en-US" altLang="ko-KR" baseline="0" dirty="0" smtClean="0"/>
-              <a:t>(</a:t>
-            </a:r>
-            <a:r>
-              <a:rPr lang="en-US" altLang="ko-KR" baseline="0" dirty="0" err="1" smtClean="0"/>
-              <a:t>js</a:t>
-            </a:r>
-            <a:r>
-              <a:rPr lang="ko-KR" altLang="en-US" baseline="0" dirty="0" smtClean="0"/>
-              <a:t>에서</a:t>
-            </a:r>
-            <a:r>
-              <a:rPr lang="en-US" altLang="ko-KR" baseline="0" dirty="0" smtClean="0"/>
-              <a:t>)</a:t>
-            </a:r>
-          </a:p>
-          <a:p>
-            <a:pPr marL="0" marR="0" indent="0" algn="l" defTabSz="914400" rtl="0" eaLnBrk="1" fontAlgn="auto" latinLnBrk="1" hangingPunct="1">
-              <a:lnSpc>
-                <a:spcPct val="100000"/>
-              </a:lnSpc>
-              <a:spcBef>
-                <a:spcPts val="0"/>
-              </a:spcBef>
-              <a:spcAft>
-                <a:spcPts val="0"/>
-              </a:spcAft>
-              <a:buClrTx/>
-              <a:buSzTx/>
-              <a:buFontTx/>
-              <a:buNone/>
-              <a:tabLst/>
-              <a:defRPr/>
-            </a:pPr>
-            <a:endParaRPr lang="ko-KR" altLang="en-US" dirty="0" smtClean="0"/>
+            <a:endParaRPr lang="ko-KR" altLang="en-US" dirty="0"/>
           </a:p>
         </p:txBody>
       </p:sp>
@@ -1342,7 +1817,7 @@
           <a:p>
             <a:fld id="{C09E5BFC-1559-42F1-8940-AB342D56BF02}" type="slidenum">
               <a:rPr lang="ko-KR" altLang="en-US" smtClean="0"/>
-              <a:t>13</a:t>
+              <a:t>9</a:t>
             </a:fld>
             <a:endParaRPr lang="ko-KR" altLang="en-US"/>
           </a:p>
@@ -1351,7 +1826,7 @@
     </p:spTree>
     <p:extLst>
       <p:ext uri="{BB962C8B-B14F-4D97-AF65-F5344CB8AC3E}">
-        <p14:creationId xmlns:p14="http://schemas.microsoft.com/office/powerpoint/2010/main" val="4203439928"/>
+        <p14:creationId xmlns:p14="http://schemas.microsoft.com/office/powerpoint/2010/main" val="3780183819"/>
       </p:ext>
     </p:extLst>
   </p:cSld>
@@ -1405,7 +1880,22 @@
           <a:bodyPr/>
           <a:lstStyle/>
           <a:p>
-            <a:endParaRPr lang="ko-KR" altLang="en-US" dirty="0"/>
+            <a:r>
+              <a:rPr lang="en-US" altLang="ko-KR" dirty="0"/>
+              <a:t>ex. </a:t>
+            </a:r>
+            <a:r>
+              <a:rPr lang="ko-KR" altLang="en-US" dirty="0" err="1"/>
+              <a:t>다크</a:t>
+            </a:r>
+            <a:r>
+              <a:rPr lang="en-US" altLang="ko-KR" dirty="0"/>
+              <a:t>/</a:t>
+            </a:r>
+            <a:r>
+              <a:rPr lang="ko-KR" altLang="en-US" dirty="0"/>
+              <a:t>라이트 모드</a:t>
+            </a:r>
           </a:p>
         </p:txBody>
       </p:sp>
@@ -1416,7 +1906,7 @@
             <a:spLocks noGrp="1"/>
           </p:cNvSpPr>
           <p:nvPr>
-            <p:ph type="sldNum" sz="quarter" idx="10"/>
+            <p:ph type="sldNum" sz="quarter" idx="5"/>
           </p:nvPr>
         </p:nvSpPr>
         <p:spPr/>
@@ -1426,7 +1916,7 @@
           <a:p>
             <a:fld id="{C09E5BFC-1559-42F1-8940-AB342D56BF02}" type="slidenum">
               <a:rPr lang="ko-KR" altLang="en-US" smtClean="0"/>
-              <a:t>14</a:t>
+              <a:t>11</a:t>
             </a:fld>
             <a:endParaRPr lang="ko-KR" altLang="en-US"/>
           </a:p>
@@ -1435,7 +1925,7 @@
     </p:spTree>
     <p:extLst>
       <p:ext uri="{BB962C8B-B14F-4D97-AF65-F5344CB8AC3E}">
-        <p14:creationId xmlns:p14="http://schemas.microsoft.com/office/powerpoint/2010/main" val="2729950675"/>
+        <p14:creationId xmlns:p14="http://schemas.microsoft.com/office/powerpoint/2010/main" val="695242521"/>
       </p:ext>
     </p:extLst>
   </p:cSld>
@@ -1510,7 +2000,7 @@
           <a:p>
             <a:fld id="{C09E5BFC-1559-42F1-8940-AB342D56BF02}" type="slidenum">
               <a:rPr lang="ko-KR" altLang="en-US" smtClean="0"/>
-              <a:t>18</a:t>
+              <a:t>12</a:t>
             </a:fld>
             <a:endParaRPr lang="ko-KR" altLang="en-US"/>
           </a:p>
@@ -1519,7 +2009,7 @@
     </p:spTree>
     <p:extLst>
       <p:ext uri="{BB962C8B-B14F-4D97-AF65-F5344CB8AC3E}">
-        <p14:creationId xmlns:p14="http://schemas.microsoft.com/office/powerpoint/2010/main" val="2666424229"/>
+        <p14:creationId xmlns:p14="http://schemas.microsoft.com/office/powerpoint/2010/main" val="2229234871"/>
       </p:ext>
     </p:extLst>
   </p:cSld>
@@ -8010,16 +8500,6 @@
               </a:rPr>
               <a:t> ]</a:t>
             </a:r>
-            <a:r>
-              <a:rPr lang="en-US" altLang="ko-KR" sz="2000" dirty="0">
-                <a:solidFill>
-                  <a:schemeClr val="bg1">
-                    <a:lumMod val="50000"/>
-                  </a:schemeClr>
-                </a:solidFill>
-              </a:rPr>
-              <a:t/>
-            </a:r>
             <a:br>
               <a:rPr lang="en-US" altLang="ko-KR" sz="2000" dirty="0">
                 <a:solidFill>
@@ -9659,7 +10139,7 @@
           <p:nvPr/>
         </p:nvPicPr>
         <p:blipFill>
-          <a:blip r:embed="rId2"/>
+          <a:blip r:embed="rId3"/>
           <a:stretch>
             <a:fillRect/>
           </a:stretch>
@@ -9689,7 +10169,7 @@
           <p:nvPr/>
         </p:nvPicPr>
         <p:blipFill>
-          <a:blip r:embed="rId3"/>
+          <a:blip r:embed="rId4"/>
           <a:stretch>
             <a:fillRect/>
           </a:stretch>
@@ -10373,7 +10853,7 @@
           <p:nvPr/>
         </p:nvPicPr>
         <p:blipFill>
-          <a:blip r:embed="rId2"/>
+          <a:blip r:embed="rId3"/>
           <a:stretch>
             <a:fillRect/>
           </a:stretch>
@@ -10403,7 +10883,7 @@
           <p:nvPr/>
         </p:nvPicPr>
         <p:blipFill>
-          <a:blip r:embed="rId3"/>
+          <a:blip r:embed="rId4"/>
           <a:stretch>
             <a:fillRect/>
           </a:stretch>
@@ -11226,7 +11706,7 @@
           <p:nvPr/>
         </p:nvPicPr>
         <p:blipFill>
-          <a:blip r:embed="rId2"/>
+          <a:blip r:embed="rId3"/>
           <a:stretch>
             <a:fillRect/>
           </a:stretch>
@@ -11256,7 +11736,7 @@
           <p:nvPr/>
         </p:nvPicPr>
         <p:blipFill>
-          <a:blip r:embed="rId3"/>
+          <a:blip r:embed="rId4"/>
           <a:stretch>
             <a:fillRect/>
           </a:stretch>

--- a/material/[SeSAC_YDP_6] 24_React_Props_State.pptx
+++ b/material/[SeSAC_YDP_6] 24_React_Props_State.pptx
@@ -7933,7 +7933,7 @@
         </p:nvSpPr>
         <p:spPr>
           <a:xfrm>
-            <a:off x="9499407" y="1583781"/>
+            <a:off x="9114283" y="1567890"/>
             <a:ext cx="1797181" cy="426800"/>
           </a:xfrm>
           <a:prstGeom prst="rect">
@@ -8045,7 +8045,7 @@
         </p:nvSpPr>
         <p:spPr>
           <a:xfrm>
-            <a:off x="7871905" y="3605727"/>
+            <a:off x="7604276" y="3034869"/>
             <a:ext cx="1053998" cy="360977"/>
           </a:xfrm>
           <a:prstGeom prst="rect">
@@ -8157,7 +8157,7 @@
         </p:nvSpPr>
         <p:spPr>
           <a:xfrm>
-            <a:off x="7871905" y="4003201"/>
+            <a:off x="7601171" y="3363420"/>
             <a:ext cx="3219229" cy="360978"/>
           </a:xfrm>
           <a:prstGeom prst="rect">

--- a/material/[SeSAC_YDP_6] 24_React_Props_State.pptx
+++ b/material/[SeSAC_YDP_6] 24_React_Props_State.pptx
@@ -5,7 +5,7 @@
     <p:sldMasterId id="2147483686" r:id="rId1"/>
   </p:sldMasterIdLst>
   <p:notesMasterIdLst>
-    <p:notesMasterId r:id="rId20"/>
+    <p:notesMasterId r:id="rId23"/>
   </p:notesMasterIdLst>
   <p:sldIdLst>
     <p:sldId id="256" r:id="rId2"/>
@@ -17,15 +17,18 @@
     <p:sldId id="594" r:id="rId8"/>
     <p:sldId id="595" r:id="rId9"/>
     <p:sldId id="596" r:id="rId10"/>
-    <p:sldId id="261" r:id="rId11"/>
-    <p:sldId id="597" r:id="rId12"/>
-    <p:sldId id="610" r:id="rId13"/>
-    <p:sldId id="598" r:id="rId14"/>
-    <p:sldId id="599" r:id="rId15"/>
-    <p:sldId id="600" r:id="rId16"/>
-    <p:sldId id="601" r:id="rId17"/>
-    <p:sldId id="602" r:id="rId18"/>
-    <p:sldId id="609" r:id="rId19"/>
+    <p:sldId id="492" r:id="rId11"/>
+    <p:sldId id="611" r:id="rId12"/>
+    <p:sldId id="261" r:id="rId13"/>
+    <p:sldId id="597" r:id="rId14"/>
+    <p:sldId id="610" r:id="rId15"/>
+    <p:sldId id="598" r:id="rId16"/>
+    <p:sldId id="599" r:id="rId17"/>
+    <p:sldId id="600" r:id="rId18"/>
+    <p:sldId id="601" r:id="rId19"/>
+    <p:sldId id="602" r:id="rId20"/>
+    <p:sldId id="609" r:id="rId21"/>
+    <p:sldId id="612" r:id="rId22"/>
   </p:sldIdLst>
   <p:sldSz cx="12192000" cy="6858000"/>
   <p:notesSz cx="6858000" cy="9144000"/>
@@ -217,7 +220,7 @@
           <a:p>
             <a:fld id="{2EF3F159-7250-4DD4-91C2-13B35D56E1AF}" type="datetimeFigureOut">
               <a:rPr lang="ko-KR" altLang="en-US" smtClean="0"/>
-              <a:t>2024-07-29</a:t>
+              <a:t>2024-08-01</a:t>
             </a:fld>
             <a:endParaRPr lang="ko-KR" altLang="en-US"/>
           </a:p>
@@ -612,281 +615,78 @@
           <a:bodyPr/>
           <a:lstStyle/>
           <a:p>
-            <a:pPr marL="0" marR="0" indent="0" algn="l" defTabSz="914400" rtl="0" eaLnBrk="1" fontAlgn="auto" latinLnBrk="1" hangingPunct="1">
-              <a:lnSpc>
-                <a:spcPct val="100000"/>
-              </a:lnSpc>
-              <a:spcBef>
-                <a:spcPts val="0"/>
-              </a:spcBef>
-              <a:spcAft>
-                <a:spcPts val="0"/>
-              </a:spcAft>
-              <a:buClrTx/>
-              <a:buSzTx/>
-              <a:buFontTx/>
-              <a:buNone/>
-              <a:tabLst/>
-              <a:defRPr/>
-            </a:pPr>
             <a:r>
               <a:rPr lang="en-US" altLang="ko-KR" dirty="0"/>
-              <a:t>16.3 </a:t>
+              <a:t>ex. </a:t>
+            </a:r>
+            <a:r>
+              <a:rPr lang="ko-KR" altLang="en-US" dirty="0" err="1"/>
+              <a:t>다크</a:t>
+            </a:r>
+            <a:r>
+              <a:rPr lang="en-US" altLang="ko-KR" dirty="0"/>
+              <a:t>/</a:t>
             </a:r>
             <a:r>
               <a:rPr lang="ko-KR" altLang="en-US" dirty="0"/>
-              <a:t>버전 이전 형태</a:t>
+              <a:t>라이트 모드</a:t>
             </a:r>
             <a:endParaRPr lang="en-US" altLang="ko-KR" dirty="0"/>
           </a:p>
           <a:p>
-            <a:pPr marL="0" marR="0" indent="0" algn="l" defTabSz="914400" rtl="0" eaLnBrk="1" fontAlgn="auto" latinLnBrk="1" hangingPunct="1">
-              <a:lnSpc>
-                <a:spcPct val="100000"/>
-              </a:lnSpc>
-              <a:spcBef>
-                <a:spcPts val="0"/>
-              </a:spcBef>
-              <a:spcAft>
-                <a:spcPts val="0"/>
-              </a:spcAft>
-              <a:buClrTx/>
-              <a:buSzTx/>
-              <a:buFontTx/>
-              <a:buNone/>
-              <a:tabLst/>
-              <a:defRPr/>
-            </a:pPr>
+            <a:endParaRPr lang="en-US" altLang="ko-KR" dirty="0"/>
+          </a:p>
+          <a:p>
             <a:r>
               <a:rPr lang="en-US" altLang="ko-KR" dirty="0"/>
-              <a:t>constructor()</a:t>
-            </a:r>
-            <a:r>
-              <a:rPr lang="en-US" altLang="ko-KR" baseline="0" dirty="0"/>
-              <a:t> : </a:t>
-            </a:r>
-            <a:r>
-              <a:rPr lang="ko-KR" altLang="en-US" baseline="0" dirty="0" err="1"/>
-              <a:t>생성자</a:t>
-            </a:r>
-            <a:r>
-              <a:rPr lang="en-US" altLang="ko-KR" baseline="0" dirty="0"/>
-              <a:t>, state </a:t>
-            </a:r>
-            <a:r>
-              <a:rPr lang="ko-KR" altLang="en-US" baseline="0" dirty="0"/>
-              <a:t>값을 초기화 하거나 메서드를 바인딩 할 때 사용</a:t>
-            </a:r>
-            <a:endParaRPr lang="en-US" altLang="ko-KR" baseline="0" dirty="0"/>
-          </a:p>
-          <a:p>
-            <a:pPr marL="0" marR="0" indent="0" algn="l" defTabSz="914400" rtl="0" eaLnBrk="1" fontAlgn="auto" latinLnBrk="1" hangingPunct="1">
-              <a:lnSpc>
-                <a:spcPct val="100000"/>
-              </a:lnSpc>
-              <a:spcBef>
-                <a:spcPts val="0"/>
-              </a:spcBef>
-              <a:spcAft>
-                <a:spcPts val="0"/>
-              </a:spcAft>
-              <a:buClrTx/>
-              <a:buSzTx/>
-              <a:buFontTx/>
-              <a:buNone/>
-              <a:tabLst/>
-              <a:defRPr/>
-            </a:pPr>
-            <a:r>
-              <a:rPr lang="ko-KR" altLang="en-US" baseline="0" dirty="0"/>
-              <a:t>해당 컴포넌트가 마운트 되기 전 호출된다 </a:t>
-            </a:r>
-            <a:r>
-              <a:rPr lang="en-US" altLang="ko-KR" baseline="0" dirty="0"/>
-              <a:t>(</a:t>
-            </a:r>
-            <a:r>
-              <a:rPr lang="ko-KR" altLang="en-US" baseline="0" dirty="0"/>
-              <a:t>마운트 </a:t>
-            </a:r>
-            <a:r>
-              <a:rPr lang="en-US" altLang="ko-KR" baseline="0" dirty="0"/>
-              <a:t>: DOM </a:t>
-            </a:r>
-            <a:r>
-              <a:rPr lang="ko-KR" altLang="en-US" baseline="0" dirty="0"/>
-              <a:t>객체가 생성되고 브라우저에 나타나는 것을 의미</a:t>
-            </a:r>
-            <a:r>
-              <a:rPr lang="en-US" altLang="ko-KR" baseline="0" dirty="0"/>
-              <a:t>)</a:t>
-            </a:r>
-          </a:p>
-          <a:p>
-            <a:pPr marL="0" marR="0" indent="0" algn="l" defTabSz="914400" rtl="0" eaLnBrk="1" fontAlgn="auto" latinLnBrk="1" hangingPunct="1">
-              <a:lnSpc>
-                <a:spcPct val="100000"/>
-              </a:lnSpc>
-              <a:spcBef>
-                <a:spcPts val="0"/>
-              </a:spcBef>
-              <a:spcAft>
-                <a:spcPts val="0"/>
-              </a:spcAft>
-              <a:buClrTx/>
-              <a:buSzTx/>
-              <a:buFontTx/>
-              <a:buNone/>
-              <a:tabLst/>
-              <a:defRPr/>
-            </a:pPr>
-            <a:r>
-              <a:rPr lang="en-US" altLang="ko-KR" baseline="0" dirty="0"/>
-              <a:t>(Mount, Update, </a:t>
-            </a:r>
-            <a:r>
-              <a:rPr lang="en-US" altLang="ko-KR" baseline="0" dirty="0" err="1"/>
-              <a:t>UnMount</a:t>
-            </a:r>
-            <a:r>
-              <a:rPr lang="en-US" altLang="ko-KR" baseline="0" dirty="0"/>
-              <a:t>) -&gt; </a:t>
-            </a:r>
-            <a:r>
-              <a:rPr lang="ko-KR" altLang="en-US" baseline="0" dirty="0"/>
-              <a:t>추후 라이프 사이클 파트에서 다룰 예정</a:t>
-            </a:r>
-            <a:endParaRPr lang="en-US" altLang="ko-KR" baseline="0" dirty="0"/>
-          </a:p>
-          <a:p>
-            <a:pPr marL="0" marR="0" indent="0" algn="l" defTabSz="914400" rtl="0" eaLnBrk="1" fontAlgn="auto" latinLnBrk="1" hangingPunct="1">
-              <a:lnSpc>
-                <a:spcPct val="100000"/>
-              </a:lnSpc>
-              <a:spcBef>
-                <a:spcPts val="0"/>
-              </a:spcBef>
-              <a:spcAft>
-                <a:spcPts val="0"/>
-              </a:spcAft>
-              <a:buClrTx/>
-              <a:buSzTx/>
-              <a:buFontTx/>
-              <a:buNone/>
-              <a:tabLst/>
-              <a:defRPr/>
-            </a:pPr>
-            <a:r>
-              <a:rPr lang="en-US" altLang="ko-KR" baseline="0" dirty="0"/>
-              <a:t>----</a:t>
-            </a:r>
-          </a:p>
-          <a:p>
-            <a:pPr marL="0" marR="0" indent="0" algn="l" defTabSz="914400" rtl="0" eaLnBrk="1" fontAlgn="auto" latinLnBrk="1" hangingPunct="1">
-              <a:lnSpc>
-                <a:spcPct val="100000"/>
-              </a:lnSpc>
-              <a:spcBef>
-                <a:spcPts val="0"/>
-              </a:spcBef>
-              <a:spcAft>
-                <a:spcPts val="0"/>
-              </a:spcAft>
-              <a:buClrTx/>
-              <a:buSzTx/>
-              <a:buFontTx/>
-              <a:buNone/>
-              <a:tabLst/>
-              <a:defRPr/>
-            </a:pPr>
+              <a:t>State</a:t>
+            </a:r>
+            <a:r>
+              <a:rPr lang="ko-KR" altLang="en-US" dirty="0"/>
+              <a:t>가 변경되면</a:t>
+            </a:r>
             <a:r>
               <a:rPr lang="en-US" altLang="ko-KR" dirty="0"/>
-              <a:t>super() : </a:t>
+              <a:t>, </a:t>
             </a:r>
             <a:r>
               <a:rPr lang="ko-KR" altLang="en-US" dirty="0"/>
-              <a:t>부모 클래스 </a:t>
+              <a:t>컴포넌트는 </a:t>
             </a:r>
             <a:r>
               <a:rPr lang="ko-KR" altLang="en-US" dirty="0" err="1"/>
-              <a:t>생성자</a:t>
+              <a:t>리렌더링</a:t>
             </a:r>
             <a:r>
               <a:rPr lang="ko-KR" altLang="en-US" dirty="0"/>
-              <a:t> 가리킴</a:t>
+              <a:t> 됩니다</a:t>
             </a:r>
             <a:r>
               <a:rPr lang="en-US" altLang="ko-KR" dirty="0"/>
-              <a:t>, super(props)</a:t>
+              <a:t>.</a:t>
+            </a:r>
+          </a:p>
+          <a:p>
+            <a:r>
+              <a:rPr lang="en-US" altLang="ko-KR" dirty="0"/>
+              <a:t>-</a:t>
             </a:r>
             <a:r>
               <a:rPr lang="ko-KR" altLang="en-US" dirty="0"/>
-              <a:t>를 </a:t>
+              <a:t> 이 점이 </a:t>
             </a:r>
             <a:r>
               <a:rPr lang="ko-KR" altLang="en-US" dirty="0" err="1"/>
-              <a:t>선언전까지</a:t>
+              <a:t>변수랑</a:t>
             </a:r>
             <a:r>
               <a:rPr lang="ko-KR" altLang="en-US" dirty="0"/>
-              <a:t> </a:t>
+              <a:t> 다른 것이다</a:t>
             </a:r>
             <a:r>
               <a:rPr lang="en-US" altLang="ko-KR" dirty="0"/>
-              <a:t>constructor</a:t>
-            </a:r>
-            <a:r>
-              <a:rPr lang="ko-KR" altLang="en-US" dirty="0"/>
-              <a:t>에서 </a:t>
-            </a:r>
-            <a:r>
-              <a:rPr lang="en-US" altLang="ko-KR" dirty="0"/>
-              <a:t>this</a:t>
-            </a:r>
-            <a:r>
-              <a:rPr lang="en-US" altLang="ko-KR" baseline="0" dirty="0"/>
-              <a:t> </a:t>
-            </a:r>
-            <a:r>
-              <a:rPr lang="ko-KR" altLang="en-US" baseline="0" dirty="0"/>
-              <a:t>키워드를 사용할 수 없다</a:t>
-            </a:r>
-            <a:r>
-              <a:rPr lang="en-US" altLang="ko-KR" baseline="0" dirty="0"/>
-              <a:t>(</a:t>
-            </a:r>
-            <a:r>
-              <a:rPr lang="en-US" altLang="ko-KR" baseline="0" dirty="0" err="1"/>
-              <a:t>js</a:t>
-            </a:r>
-            <a:r>
-              <a:rPr lang="ko-KR" altLang="en-US" baseline="0" dirty="0"/>
-              <a:t>에서</a:t>
-            </a:r>
-            <a:r>
-              <a:rPr lang="en-US" altLang="ko-KR" baseline="0" dirty="0"/>
-              <a:t>)</a:t>
-            </a:r>
-          </a:p>
-          <a:p>
-            <a:pPr marL="0" marR="0" indent="0" algn="l" defTabSz="914400" rtl="0" eaLnBrk="1" fontAlgn="auto" latinLnBrk="1" hangingPunct="1">
-              <a:lnSpc>
-                <a:spcPct val="100000"/>
-              </a:lnSpc>
-              <a:spcBef>
-                <a:spcPts val="0"/>
-              </a:spcBef>
-              <a:spcAft>
-                <a:spcPts val="0"/>
-              </a:spcAft>
-              <a:buClrTx/>
-              <a:buSzTx/>
-              <a:buFontTx/>
-              <a:buNone/>
-              <a:tabLst/>
-              <a:defRPr/>
-            </a:pPr>
-            <a:endParaRPr lang="ko-KR" altLang="en-US" dirty="0"/>
+              <a:t>.</a:t>
+            </a:r>
           </a:p>
         </p:txBody>
       </p:sp>
@@ -897,7 +697,7 @@
             <a:spLocks noGrp="1"/>
           </p:cNvSpPr>
           <p:nvPr>
-            <p:ph type="sldNum" sz="quarter" idx="10"/>
+            <p:ph type="sldNum" sz="quarter" idx="5"/>
           </p:nvPr>
         </p:nvSpPr>
         <p:spPr/>
@@ -916,7 +716,7 @@
     </p:spTree>
     <p:extLst>
       <p:ext uri="{BB962C8B-B14F-4D97-AF65-F5344CB8AC3E}">
-        <p14:creationId xmlns:p14="http://schemas.microsoft.com/office/powerpoint/2010/main" val="4203439928"/>
+        <p14:creationId xmlns:p14="http://schemas.microsoft.com/office/powerpoint/2010/main" val="695242521"/>
       </p:ext>
     </p:extLst>
   </p:cSld>
@@ -981,7 +781,7 @@
             <a:spLocks noGrp="1"/>
           </p:cNvSpPr>
           <p:nvPr>
-            <p:ph type="sldNum" sz="quarter" idx="10"/>
+            <p:ph type="sldNum" sz="quarter" idx="5"/>
           </p:nvPr>
         </p:nvSpPr>
         <p:spPr/>
@@ -1000,7 +800,7 @@
     </p:spTree>
     <p:extLst>
       <p:ext uri="{BB962C8B-B14F-4D97-AF65-F5344CB8AC3E}">
-        <p14:creationId xmlns:p14="http://schemas.microsoft.com/office/powerpoint/2010/main" val="2729950675"/>
+        <p14:creationId xmlns:p14="http://schemas.microsoft.com/office/powerpoint/2010/main" val="2229234871"/>
       </p:ext>
     </p:extLst>
   </p:cSld>
@@ -1054,6 +854,280 @@
           <a:bodyPr/>
           <a:lstStyle/>
           <a:p>
+            <a:pPr marL="0" marR="0" indent="0" algn="l" defTabSz="914400" rtl="0" eaLnBrk="1" fontAlgn="auto" latinLnBrk="1" hangingPunct="1">
+              <a:lnSpc>
+                <a:spcPct val="100000"/>
+              </a:lnSpc>
+              <a:spcBef>
+                <a:spcPts val="0"/>
+              </a:spcBef>
+              <a:spcAft>
+                <a:spcPts val="0"/>
+              </a:spcAft>
+              <a:buClrTx/>
+              <a:buSzTx/>
+              <a:buFontTx/>
+              <a:buNone/>
+              <a:tabLst/>
+              <a:defRPr/>
+            </a:pPr>
+            <a:r>
+              <a:rPr lang="en-US" altLang="ko-KR" dirty="0"/>
+              <a:t>16.3 </a:t>
+            </a:r>
+            <a:r>
+              <a:rPr lang="ko-KR" altLang="en-US" dirty="0"/>
+              <a:t>버전 이전 형태</a:t>
+            </a:r>
+            <a:endParaRPr lang="en-US" altLang="ko-KR" dirty="0"/>
+          </a:p>
+          <a:p>
+            <a:pPr marL="0" marR="0" indent="0" algn="l" defTabSz="914400" rtl="0" eaLnBrk="1" fontAlgn="auto" latinLnBrk="1" hangingPunct="1">
+              <a:lnSpc>
+                <a:spcPct val="100000"/>
+              </a:lnSpc>
+              <a:spcBef>
+                <a:spcPts val="0"/>
+              </a:spcBef>
+              <a:spcAft>
+                <a:spcPts val="0"/>
+              </a:spcAft>
+              <a:buClrTx/>
+              <a:buSzTx/>
+              <a:buFontTx/>
+              <a:buNone/>
+              <a:tabLst/>
+              <a:defRPr/>
+            </a:pPr>
+            <a:r>
+              <a:rPr lang="en-US" altLang="ko-KR" dirty="0"/>
+              <a:t>constructor()</a:t>
+            </a:r>
+            <a:r>
+              <a:rPr lang="en-US" altLang="ko-KR" baseline="0" dirty="0"/>
+              <a:t> : </a:t>
+            </a:r>
+            <a:r>
+              <a:rPr lang="ko-KR" altLang="en-US" baseline="0" dirty="0" err="1"/>
+              <a:t>생성자</a:t>
+            </a:r>
+            <a:r>
+              <a:rPr lang="en-US" altLang="ko-KR" baseline="0" dirty="0"/>
+              <a:t>, state </a:t>
+            </a:r>
+            <a:r>
+              <a:rPr lang="ko-KR" altLang="en-US" baseline="0" dirty="0"/>
+              <a:t>값을 초기화 하거나 메서드를 바인딩 할 때 사용</a:t>
+            </a:r>
+            <a:endParaRPr lang="en-US" altLang="ko-KR" baseline="0" dirty="0"/>
+          </a:p>
+          <a:p>
+            <a:pPr marL="0" marR="0" indent="0" algn="l" defTabSz="914400" rtl="0" eaLnBrk="1" fontAlgn="auto" latinLnBrk="1" hangingPunct="1">
+              <a:lnSpc>
+                <a:spcPct val="100000"/>
+              </a:lnSpc>
+              <a:spcBef>
+                <a:spcPts val="0"/>
+              </a:spcBef>
+              <a:spcAft>
+                <a:spcPts val="0"/>
+              </a:spcAft>
+              <a:buClrTx/>
+              <a:buSzTx/>
+              <a:buFontTx/>
+              <a:buNone/>
+              <a:tabLst/>
+              <a:defRPr/>
+            </a:pPr>
+            <a:r>
+              <a:rPr lang="ko-KR" altLang="en-US" baseline="0" dirty="0"/>
+              <a:t>해당 컴포넌트가 마운트 되기 전 호출된다 </a:t>
+            </a:r>
+            <a:r>
+              <a:rPr lang="en-US" altLang="ko-KR" baseline="0" dirty="0"/>
+              <a:t>(</a:t>
+            </a:r>
+            <a:r>
+              <a:rPr lang="ko-KR" altLang="en-US" baseline="0" dirty="0"/>
+              <a:t>마운트 </a:t>
+            </a:r>
+            <a:r>
+              <a:rPr lang="en-US" altLang="ko-KR" baseline="0" dirty="0"/>
+              <a:t>: DOM </a:t>
+            </a:r>
+            <a:r>
+              <a:rPr lang="ko-KR" altLang="en-US" baseline="0" dirty="0"/>
+              <a:t>객체가 생성되고 브라우저에 나타나는 것을 의미</a:t>
+            </a:r>
+            <a:r>
+              <a:rPr lang="en-US" altLang="ko-KR" baseline="0" dirty="0"/>
+              <a:t>)</a:t>
+            </a:r>
+          </a:p>
+          <a:p>
+            <a:pPr marL="0" marR="0" indent="0" algn="l" defTabSz="914400" rtl="0" eaLnBrk="1" fontAlgn="auto" latinLnBrk="1" hangingPunct="1">
+              <a:lnSpc>
+                <a:spcPct val="100000"/>
+              </a:lnSpc>
+              <a:spcBef>
+                <a:spcPts val="0"/>
+              </a:spcBef>
+              <a:spcAft>
+                <a:spcPts val="0"/>
+              </a:spcAft>
+              <a:buClrTx/>
+              <a:buSzTx/>
+              <a:buFontTx/>
+              <a:buNone/>
+              <a:tabLst/>
+              <a:defRPr/>
+            </a:pPr>
+            <a:r>
+              <a:rPr lang="en-US" altLang="ko-KR" baseline="0" dirty="0"/>
+              <a:t>(Mount, Update, </a:t>
+            </a:r>
+            <a:r>
+              <a:rPr lang="en-US" altLang="ko-KR" baseline="0" dirty="0" err="1"/>
+              <a:t>UnMount</a:t>
+            </a:r>
+            <a:r>
+              <a:rPr lang="en-US" altLang="ko-KR" baseline="0" dirty="0"/>
+              <a:t>) -&gt; </a:t>
+            </a:r>
+            <a:r>
+              <a:rPr lang="ko-KR" altLang="en-US" baseline="0" dirty="0"/>
+              <a:t>추후 라이프 사이클 파트에서 다룰 예정</a:t>
+            </a:r>
+            <a:endParaRPr lang="en-US" altLang="ko-KR" baseline="0" dirty="0"/>
+          </a:p>
+          <a:p>
+            <a:pPr marL="0" marR="0" indent="0" algn="l" defTabSz="914400" rtl="0" eaLnBrk="1" fontAlgn="auto" latinLnBrk="1" hangingPunct="1">
+              <a:lnSpc>
+                <a:spcPct val="100000"/>
+              </a:lnSpc>
+              <a:spcBef>
+                <a:spcPts val="0"/>
+              </a:spcBef>
+              <a:spcAft>
+                <a:spcPts val="0"/>
+              </a:spcAft>
+              <a:buClrTx/>
+              <a:buSzTx/>
+              <a:buFontTx/>
+              <a:buNone/>
+              <a:tabLst/>
+              <a:defRPr/>
+            </a:pPr>
+            <a:r>
+              <a:rPr lang="en-US" altLang="ko-KR" baseline="0" dirty="0"/>
+              <a:t>----</a:t>
+            </a:r>
+          </a:p>
+          <a:p>
+            <a:pPr marL="0" marR="0" indent="0" algn="l" defTabSz="914400" rtl="0" eaLnBrk="1" fontAlgn="auto" latinLnBrk="1" hangingPunct="1">
+              <a:lnSpc>
+                <a:spcPct val="100000"/>
+              </a:lnSpc>
+              <a:spcBef>
+                <a:spcPts val="0"/>
+              </a:spcBef>
+              <a:spcAft>
+                <a:spcPts val="0"/>
+              </a:spcAft>
+              <a:buClrTx/>
+              <a:buSzTx/>
+              <a:buFontTx/>
+              <a:buNone/>
+              <a:tabLst/>
+              <a:defRPr/>
+            </a:pPr>
+            <a:r>
+              <a:rPr lang="en-US" altLang="ko-KR" dirty="0"/>
+              <a:t>super() : </a:t>
+            </a:r>
+            <a:r>
+              <a:rPr lang="ko-KR" altLang="en-US" dirty="0"/>
+              <a:t>부모 클래스 </a:t>
+            </a:r>
+            <a:r>
+              <a:rPr lang="ko-KR" altLang="en-US" dirty="0" err="1"/>
+              <a:t>생성자</a:t>
+            </a:r>
+            <a:r>
+              <a:rPr lang="ko-KR" altLang="en-US" dirty="0"/>
+              <a:t> 가리킴</a:t>
+            </a:r>
+            <a:r>
+              <a:rPr lang="en-US" altLang="ko-KR" dirty="0"/>
+              <a:t>, super(props)</a:t>
+            </a:r>
+            <a:r>
+              <a:rPr lang="ko-KR" altLang="en-US" dirty="0"/>
+              <a:t>를 </a:t>
+            </a:r>
+            <a:r>
+              <a:rPr lang="ko-KR" altLang="en-US" dirty="0" err="1"/>
+              <a:t>선언전까지</a:t>
+            </a:r>
+            <a:r>
+              <a:rPr lang="ko-KR" altLang="en-US" dirty="0"/>
+              <a:t> </a:t>
+            </a:r>
+            <a:r>
+              <a:rPr lang="en-US" altLang="ko-KR" dirty="0"/>
+              <a:t>constructor</a:t>
+            </a:r>
+            <a:r>
+              <a:rPr lang="ko-KR" altLang="en-US" dirty="0"/>
+              <a:t>에서 </a:t>
+            </a:r>
+            <a:r>
+              <a:rPr lang="en-US" altLang="ko-KR" dirty="0"/>
+              <a:t>this</a:t>
+            </a:r>
+            <a:r>
+              <a:rPr lang="en-US" altLang="ko-KR" baseline="0" dirty="0"/>
+              <a:t> </a:t>
+            </a:r>
+            <a:r>
+              <a:rPr lang="ko-KR" altLang="en-US" baseline="0" dirty="0"/>
+              <a:t>키워드를 사용할 수 없다</a:t>
+            </a:r>
+            <a:r>
+              <a:rPr lang="en-US" altLang="ko-KR" baseline="0" dirty="0"/>
+              <a:t>(</a:t>
+            </a:r>
+            <a:r>
+              <a:rPr lang="en-US" altLang="ko-KR" baseline="0" dirty="0" err="1"/>
+              <a:t>js</a:t>
+            </a:r>
+            <a:r>
+              <a:rPr lang="ko-KR" altLang="en-US" baseline="0" dirty="0"/>
+              <a:t>에서</a:t>
+            </a:r>
+            <a:r>
+              <a:rPr lang="en-US" altLang="ko-KR" baseline="0" dirty="0"/>
+              <a:t>)</a:t>
+            </a:r>
+          </a:p>
+          <a:p>
+            <a:pPr marL="0" marR="0" indent="0" algn="l" defTabSz="914400" rtl="0" eaLnBrk="1" fontAlgn="auto" latinLnBrk="1" hangingPunct="1">
+              <a:lnSpc>
+                <a:spcPct val="100000"/>
+              </a:lnSpc>
+              <a:spcBef>
+                <a:spcPts val="0"/>
+              </a:spcBef>
+              <a:spcAft>
+                <a:spcPts val="0"/>
+              </a:spcAft>
+              <a:buClrTx/>
+              <a:buSzTx/>
+              <a:buFontTx/>
+              <a:buNone/>
+              <a:tabLst/>
+              <a:defRPr/>
+            </a:pPr>
             <a:endParaRPr lang="ko-KR" altLang="en-US" dirty="0"/>
           </a:p>
         </p:txBody>
@@ -1065,7 +1139,7 @@
             <a:spLocks noGrp="1"/>
           </p:cNvSpPr>
           <p:nvPr>
-            <p:ph type="sldNum" sz="quarter" idx="5"/>
+            <p:ph type="sldNum" sz="quarter" idx="10"/>
           </p:nvPr>
         </p:nvSpPr>
         <p:spPr/>
@@ -1075,7 +1149,175 @@
           <a:p>
             <a:fld id="{C09E5BFC-1559-42F1-8940-AB342D56BF02}" type="slidenum">
               <a:rPr lang="ko-KR" altLang="en-US" smtClean="0"/>
-              <a:t>18</a:t>
+              <a:t>15</a:t>
+            </a:fld>
+            <a:endParaRPr lang="ko-KR" altLang="en-US"/>
+          </a:p>
+        </p:txBody>
+      </p:sp>
+    </p:spTree>
+    <p:extLst>
+      <p:ext uri="{BB962C8B-B14F-4D97-AF65-F5344CB8AC3E}">
+        <p14:creationId xmlns:p14="http://schemas.microsoft.com/office/powerpoint/2010/main" val="4203439928"/>
+      </p:ext>
+    </p:extLst>
+  </p:cSld>
+  <p:clrMapOvr>
+    <a:masterClrMapping/>
+  </p:clrMapOvr>
+</p:notes>
+</file>
+
+<file path=ppt/notesSlides/notesSlide13.xml><?xml version="1.0" encoding="utf-8"?>
+<p:notes xmlns:a="http://schemas.openxmlformats.org/drawingml/2006/main" xmlns:r="http://schemas.openxmlformats.org/officeDocument/2006/relationships" xmlns:p="http://schemas.openxmlformats.org/presentationml/2006/main">
+  <p:cSld>
+    <p:spTree>
+      <p:nvGrpSpPr>
+        <p:cNvPr id="1" name=""/>
+        <p:cNvGrpSpPr/>
+        <p:nvPr/>
+      </p:nvGrpSpPr>
+      <p:grpSpPr>
+        <a:xfrm>
+          <a:off x="0" y="0"/>
+          <a:ext cx="0" cy="0"/>
+          <a:chOff x="0" y="0"/>
+          <a:chExt cx="0" cy="0"/>
+        </a:xfrm>
+      </p:grpSpPr>
+      <p:sp>
+        <p:nvSpPr>
+          <p:cNvPr id="2" name="슬라이드 이미지 개체 틀 1"/>
+          <p:cNvSpPr>
+            <a:spLocks noGrp="1" noRot="1" noChangeAspect="1"/>
+          </p:cNvSpPr>
+          <p:nvPr>
+            <p:ph type="sldImg"/>
+          </p:nvPr>
+        </p:nvSpPr>
+        <p:spPr/>
+      </p:sp>
+      <p:sp>
+        <p:nvSpPr>
+          <p:cNvPr id="3" name="슬라이드 노트 개체 틀 2"/>
+          <p:cNvSpPr>
+            <a:spLocks noGrp="1"/>
+          </p:cNvSpPr>
+          <p:nvPr>
+            <p:ph type="body" idx="1"/>
+          </p:nvPr>
+        </p:nvSpPr>
+        <p:spPr/>
+        <p:txBody>
+          <a:bodyPr/>
+          <a:lstStyle/>
+          <a:p>
+            <a:endParaRPr lang="ko-KR" altLang="en-US" dirty="0"/>
+          </a:p>
+        </p:txBody>
+      </p:sp>
+      <p:sp>
+        <p:nvSpPr>
+          <p:cNvPr id="4" name="슬라이드 번호 개체 틀 3"/>
+          <p:cNvSpPr>
+            <a:spLocks noGrp="1"/>
+          </p:cNvSpPr>
+          <p:nvPr>
+            <p:ph type="sldNum" sz="quarter" idx="10"/>
+          </p:nvPr>
+        </p:nvSpPr>
+        <p:spPr/>
+        <p:txBody>
+          <a:bodyPr/>
+          <a:lstStyle/>
+          <a:p>
+            <a:fld id="{C09E5BFC-1559-42F1-8940-AB342D56BF02}" type="slidenum">
+              <a:rPr lang="ko-KR" altLang="en-US" smtClean="0"/>
+              <a:t>16</a:t>
+            </a:fld>
+            <a:endParaRPr lang="ko-KR" altLang="en-US"/>
+          </a:p>
+        </p:txBody>
+      </p:sp>
+    </p:spTree>
+    <p:extLst>
+      <p:ext uri="{BB962C8B-B14F-4D97-AF65-F5344CB8AC3E}">
+        <p14:creationId xmlns:p14="http://schemas.microsoft.com/office/powerpoint/2010/main" val="2729950675"/>
+      </p:ext>
+    </p:extLst>
+  </p:cSld>
+  <p:clrMapOvr>
+    <a:masterClrMapping/>
+  </p:clrMapOvr>
+</p:notes>
+</file>
+
+<file path=ppt/notesSlides/notesSlide14.xml><?xml version="1.0" encoding="utf-8"?>
+<p:notes xmlns:a="http://schemas.openxmlformats.org/drawingml/2006/main" xmlns:r="http://schemas.openxmlformats.org/officeDocument/2006/relationships" xmlns:p="http://schemas.openxmlformats.org/presentationml/2006/main">
+  <p:cSld>
+    <p:spTree>
+      <p:nvGrpSpPr>
+        <p:cNvPr id="1" name=""/>
+        <p:cNvGrpSpPr/>
+        <p:nvPr/>
+      </p:nvGrpSpPr>
+      <p:grpSpPr>
+        <a:xfrm>
+          <a:off x="0" y="0"/>
+          <a:ext cx="0" cy="0"/>
+          <a:chOff x="0" y="0"/>
+          <a:chExt cx="0" cy="0"/>
+        </a:xfrm>
+      </p:grpSpPr>
+      <p:sp>
+        <p:nvSpPr>
+          <p:cNvPr id="2" name="슬라이드 이미지 개체 틀 1"/>
+          <p:cNvSpPr>
+            <a:spLocks noGrp="1" noRot="1" noChangeAspect="1"/>
+          </p:cNvSpPr>
+          <p:nvPr>
+            <p:ph type="sldImg"/>
+          </p:nvPr>
+        </p:nvSpPr>
+        <p:spPr/>
+      </p:sp>
+      <p:sp>
+        <p:nvSpPr>
+          <p:cNvPr id="3" name="슬라이드 노트 개체 틀 2"/>
+          <p:cNvSpPr>
+            <a:spLocks noGrp="1"/>
+          </p:cNvSpPr>
+          <p:nvPr>
+            <p:ph type="body" idx="1"/>
+          </p:nvPr>
+        </p:nvSpPr>
+        <p:spPr/>
+        <p:txBody>
+          <a:bodyPr/>
+          <a:lstStyle/>
+          <a:p>
+            <a:endParaRPr lang="ko-KR" altLang="en-US" dirty="0"/>
+          </a:p>
+        </p:txBody>
+      </p:sp>
+      <p:sp>
+        <p:nvSpPr>
+          <p:cNvPr id="4" name="슬라이드 번호 개체 틀 3"/>
+          <p:cNvSpPr>
+            <a:spLocks noGrp="1"/>
+          </p:cNvSpPr>
+          <p:nvPr>
+            <p:ph type="sldNum" sz="quarter" idx="5"/>
+          </p:nvPr>
+        </p:nvSpPr>
+        <p:spPr/>
+        <p:txBody>
+          <a:bodyPr/>
+          <a:lstStyle/>
+          <a:p>
+            <a:fld id="{C09E5BFC-1559-42F1-8940-AB342D56BF02}" type="slidenum">
+              <a:rPr lang="ko-KR" altLang="en-US" smtClean="0"/>
+              <a:t>20</a:t>
             </a:fld>
             <a:endParaRPr lang="ko-KR" altLang="en-US"/>
           </a:p>
@@ -1085,6 +1327,90 @@
     <p:extLst>
       <p:ext uri="{BB962C8B-B14F-4D97-AF65-F5344CB8AC3E}">
         <p14:creationId xmlns:p14="http://schemas.microsoft.com/office/powerpoint/2010/main" val="2666424229"/>
+      </p:ext>
+    </p:extLst>
+  </p:cSld>
+  <p:clrMapOvr>
+    <a:masterClrMapping/>
+  </p:clrMapOvr>
+</p:notes>
+</file>
+
+<file path=ppt/notesSlides/notesSlide15.xml><?xml version="1.0" encoding="utf-8"?>
+<p:notes xmlns:a="http://schemas.openxmlformats.org/drawingml/2006/main" xmlns:r="http://schemas.openxmlformats.org/officeDocument/2006/relationships" xmlns:p="http://schemas.openxmlformats.org/presentationml/2006/main">
+  <p:cSld>
+    <p:spTree>
+      <p:nvGrpSpPr>
+        <p:cNvPr id="1" name=""/>
+        <p:cNvGrpSpPr/>
+        <p:nvPr/>
+      </p:nvGrpSpPr>
+      <p:grpSpPr>
+        <a:xfrm>
+          <a:off x="0" y="0"/>
+          <a:ext cx="0" cy="0"/>
+          <a:chOff x="0" y="0"/>
+          <a:chExt cx="0" cy="0"/>
+        </a:xfrm>
+      </p:grpSpPr>
+      <p:sp>
+        <p:nvSpPr>
+          <p:cNvPr id="2" name="슬라이드 이미지 개체 틀 1"/>
+          <p:cNvSpPr>
+            <a:spLocks noGrp="1" noRot="1" noChangeAspect="1"/>
+          </p:cNvSpPr>
+          <p:nvPr>
+            <p:ph type="sldImg"/>
+          </p:nvPr>
+        </p:nvSpPr>
+        <p:spPr/>
+      </p:sp>
+      <p:sp>
+        <p:nvSpPr>
+          <p:cNvPr id="3" name="슬라이드 노트 개체 틀 2"/>
+          <p:cNvSpPr>
+            <a:spLocks noGrp="1"/>
+          </p:cNvSpPr>
+          <p:nvPr>
+            <p:ph type="body" idx="1"/>
+          </p:nvPr>
+        </p:nvSpPr>
+        <p:spPr/>
+        <p:txBody>
+          <a:bodyPr/>
+          <a:lstStyle/>
+          <a:p>
+            <a:endParaRPr lang="en-US" altLang="ko-KR" dirty="0"/>
+          </a:p>
+        </p:txBody>
+      </p:sp>
+      <p:sp>
+        <p:nvSpPr>
+          <p:cNvPr id="4" name="슬라이드 번호 개체 틀 3"/>
+          <p:cNvSpPr>
+            <a:spLocks noGrp="1"/>
+          </p:cNvSpPr>
+          <p:nvPr>
+            <p:ph type="sldNum" sz="quarter" idx="5"/>
+          </p:nvPr>
+        </p:nvSpPr>
+        <p:spPr/>
+        <p:txBody>
+          <a:bodyPr/>
+          <a:lstStyle/>
+          <a:p>
+            <a:fld id="{C09E5BFC-1559-42F1-8940-AB342D56BF02}" type="slidenum">
+              <a:rPr lang="ko-KR" altLang="en-US" smtClean="0"/>
+              <a:t>21</a:t>
+            </a:fld>
+            <a:endParaRPr lang="ko-KR" altLang="en-US"/>
+          </a:p>
+        </p:txBody>
+      </p:sp>
+    </p:spTree>
+    <p:extLst>
+      <p:ext uri="{BB962C8B-B14F-4D97-AF65-F5344CB8AC3E}">
+        <p14:creationId xmlns:p14="http://schemas.microsoft.com/office/powerpoint/2010/main" val="1938036156"/>
       </p:ext>
     </p:extLst>
   </p:cSld>
@@ -1880,22 +2206,7 @@
           <a:bodyPr/>
           <a:lstStyle/>
           <a:p>
-            <a:r>
-              <a:rPr lang="en-US" altLang="ko-KR" dirty="0"/>
-              <a:t>ex. </a:t>
-            </a:r>
-            <a:r>
-              <a:rPr lang="ko-KR" altLang="en-US" dirty="0" err="1"/>
-              <a:t>다크</a:t>
-            </a:r>
-            <a:r>
-              <a:rPr lang="en-US" altLang="ko-KR" dirty="0"/>
-              <a:t>/</a:t>
-            </a:r>
-            <a:r>
-              <a:rPr lang="ko-KR" altLang="en-US" dirty="0"/>
-              <a:t>라이트 모드</a:t>
-            </a:r>
+            <a:endParaRPr lang="en-US" altLang="ko-KR" dirty="0"/>
           </a:p>
         </p:txBody>
       </p:sp>
@@ -1916,7 +2227,7 @@
           <a:p>
             <a:fld id="{C09E5BFC-1559-42F1-8940-AB342D56BF02}" type="slidenum">
               <a:rPr lang="ko-KR" altLang="en-US" smtClean="0"/>
-              <a:t>11</a:t>
+              <a:t>10</a:t>
             </a:fld>
             <a:endParaRPr lang="ko-KR" altLang="en-US"/>
           </a:p>
@@ -1925,7 +2236,7 @@
     </p:spTree>
     <p:extLst>
       <p:ext uri="{BB962C8B-B14F-4D97-AF65-F5344CB8AC3E}">
-        <p14:creationId xmlns:p14="http://schemas.microsoft.com/office/powerpoint/2010/main" val="695242521"/>
+        <p14:creationId xmlns:p14="http://schemas.microsoft.com/office/powerpoint/2010/main" val="2691871518"/>
       </p:ext>
     </p:extLst>
   </p:cSld>
@@ -1979,7 +2290,7 @@
           <a:bodyPr/>
           <a:lstStyle/>
           <a:p>
-            <a:endParaRPr lang="ko-KR" altLang="en-US" dirty="0"/>
+            <a:endParaRPr lang="en-US" altLang="ko-KR" dirty="0"/>
           </a:p>
         </p:txBody>
       </p:sp>
@@ -2000,7 +2311,7 @@
           <a:p>
             <a:fld id="{C09E5BFC-1559-42F1-8940-AB342D56BF02}" type="slidenum">
               <a:rPr lang="ko-KR" altLang="en-US" smtClean="0"/>
-              <a:t>12</a:t>
+              <a:t>11</a:t>
             </a:fld>
             <a:endParaRPr lang="ko-KR" altLang="en-US"/>
           </a:p>
@@ -2009,7 +2320,7 @@
     </p:spTree>
     <p:extLst>
       <p:ext uri="{BB962C8B-B14F-4D97-AF65-F5344CB8AC3E}">
-        <p14:creationId xmlns:p14="http://schemas.microsoft.com/office/powerpoint/2010/main" val="2229234871"/>
+        <p14:creationId xmlns:p14="http://schemas.microsoft.com/office/powerpoint/2010/main" val="2653180429"/>
       </p:ext>
     </p:extLst>
   </p:cSld>
@@ -2173,7 +2484,7 @@
           <a:p>
             <a:fld id="{0E19CB95-6D28-40F1-9DA3-1BAC5D4B5B4F}" type="datetime6">
               <a:rPr lang="ko-KR" altLang="en-US" smtClean="0"/>
-              <a:t>2024년 7월</a:t>
+              <a:t>2024년 8월</a:t>
             </a:fld>
             <a:endParaRPr lang="ko-KR" altLang="en-US"/>
           </a:p>
@@ -2553,7 +2864,7 @@
           <a:p>
             <a:fld id="{C4A39A32-5728-48B8-9F9C-437D214CCAF1}" type="datetime6">
               <a:rPr lang="ko-KR" altLang="en-US" smtClean="0"/>
-              <a:t>2024년 7월</a:t>
+              <a:t>2024년 8월</a:t>
             </a:fld>
             <a:endParaRPr lang="ko-KR" altLang="en-US"/>
           </a:p>
@@ -2755,7 +3066,7 @@
           <a:p>
             <a:fld id="{3BECC8BA-EBCB-4BF9-8E87-970CE0138376}" type="datetime6">
               <a:rPr lang="ko-KR" altLang="en-US" smtClean="0"/>
-              <a:t>2024년 7월</a:t>
+              <a:t>2024년 8월</a:t>
             </a:fld>
             <a:endParaRPr lang="ko-KR" altLang="en-US"/>
           </a:p>
@@ -2963,7 +3274,7 @@
           <a:p>
             <a:fld id="{7869FA6E-4699-4AC6-B2CB-4E60A58ED7A8}" type="datetime6">
               <a:rPr lang="ko-KR" altLang="en-US" smtClean="0"/>
-              <a:t>2024년 7월</a:t>
+              <a:t>2024년 8월</a:t>
             </a:fld>
             <a:endParaRPr lang="ko-KR" altLang="en-US"/>
           </a:p>
@@ -3076,7 +3387,7 @@
           <a:p>
             <a:fld id="{0E19CB95-6D28-40F1-9DA3-1BAC5D4B5B4F}" type="datetime6">
               <a:rPr lang="ko-KR" altLang="en-US" smtClean="0"/>
-              <a:t>2024년 7월</a:t>
+              <a:t>2024년 8월</a:t>
             </a:fld>
             <a:endParaRPr lang="ko-KR" altLang="en-US"/>
           </a:p>
@@ -3338,7 +3649,7 @@
           <a:p>
             <a:fld id="{3C9CE3CE-253F-4F9D-BA15-C226C8D8501E}" type="datetime6">
               <a:rPr lang="ko-KR" altLang="en-US" smtClean="0"/>
-              <a:t>2024년 7월</a:t>
+              <a:t>2024년 8월</a:t>
             </a:fld>
             <a:endParaRPr lang="ko-KR" altLang="en-US"/>
           </a:p>
@@ -3655,7 +3966,7 @@
           <a:p>
             <a:fld id="{BE5A7087-D460-46DD-B430-F8D9B9677D08}" type="datetime6">
               <a:rPr lang="ko-KR" altLang="en-US" smtClean="0"/>
-              <a:t>2024년 7월</a:t>
+              <a:t>2024년 8월</a:t>
             </a:fld>
             <a:endParaRPr lang="ko-KR" altLang="en-US"/>
           </a:p>
@@ -3924,7 +4235,7 @@
           <a:p>
             <a:fld id="{0581BA25-D675-4234-A003-8449BDEEF18E}" type="datetime6">
               <a:rPr lang="ko-KR" altLang="en-US" smtClean="0"/>
-              <a:t>2024년 7월</a:t>
+              <a:t>2024년 8월</a:t>
             </a:fld>
             <a:endParaRPr lang="ko-KR" altLang="en-US"/>
           </a:p>
@@ -4340,7 +4651,7 @@
           <a:p>
             <a:fld id="{26155C29-A87F-46F0-A24C-6C9F0A4BF6AA}" type="datetime6">
               <a:rPr lang="ko-KR" altLang="en-US" smtClean="0"/>
-              <a:t>2024년 7월</a:t>
+              <a:t>2024년 8월</a:t>
             </a:fld>
             <a:endParaRPr lang="ko-KR" altLang="en-US"/>
           </a:p>
@@ -4485,7 +4796,7 @@
           <a:p>
             <a:fld id="{DD2EDD62-8757-43DB-BAE0-460422B548EA}" type="datetime6">
               <a:rPr lang="ko-KR" altLang="en-US" smtClean="0"/>
-              <a:t>2024년 7월</a:t>
+              <a:t>2024년 8월</a:t>
             </a:fld>
             <a:endParaRPr lang="ko-KR" altLang="en-US"/>
           </a:p>
@@ -4598,7 +4909,7 @@
           <a:p>
             <a:fld id="{DC6A871B-4800-495F-AC75-93D44C7DEBA5}" type="datetime6">
               <a:rPr lang="ko-KR" altLang="en-US" smtClean="0"/>
-              <a:t>2024년 7월</a:t>
+              <a:t>2024년 8월</a:t>
             </a:fld>
             <a:endParaRPr lang="ko-KR" altLang="en-US"/>
           </a:p>
@@ -4909,7 +5220,7 @@
           <a:p>
             <a:fld id="{59605888-30A6-49BB-95E2-DEAE4E5B09E9}" type="datetime6">
               <a:rPr lang="ko-KR" altLang="en-US" smtClean="0"/>
-              <a:t>2024년 7월</a:t>
+              <a:t>2024년 8월</a:t>
             </a:fld>
             <a:endParaRPr lang="ko-KR" altLang="en-US"/>
           </a:p>
@@ -5150,7 +5461,7 @@
           <a:p>
             <a:fld id="{8691C14A-5735-4A8B-B68B-DEC1DC2A3813}" type="datetime6">
               <a:rPr lang="ko-KR" altLang="en-US" smtClean="0"/>
-              <a:t>2024년 7월</a:t>
+              <a:t>2024년 8월</a:t>
             </a:fld>
             <a:endParaRPr lang="ko-KR" altLang="en-US"/>
           </a:p>
@@ -5735,7 +6046,7 @@
           <a:p>
             <a:fld id="{4DA02FB7-A3D0-4BF4-B23F-90A4C3B73A56}" type="datetime6">
               <a:rPr lang="ko-KR" altLang="en-US" smtClean="0"/>
-              <a:t>2024년 7월</a:t>
+              <a:t>2024년 8월</a:t>
             </a:fld>
             <a:endParaRPr lang="ko-KR" altLang="en-US" dirty="0"/>
           </a:p>
@@ -5802,7 +6113,54 @@
       </p:grpSpPr>
       <p:sp>
         <p:nvSpPr>
-          <p:cNvPr id="2" name="날짜 개체 틀 1"/>
+          <p:cNvPr id="13" name="내용 개체 틀 2">
+            <a:extLst>
+              <a:ext uri="{FF2B5EF4-FFF2-40B4-BE49-F238E27FC236}">
+                <a16:creationId xmlns:a16="http://schemas.microsoft.com/office/drawing/2014/main" id="{847FD532-7F61-A001-537F-B970BD821AF3}"/>
+              </a:ext>
+            </a:extLst>
+          </p:cNvPr>
+          <p:cNvSpPr>
+            <a:spLocks noGrp="1"/>
+          </p:cNvSpPr>
+          <p:nvPr>
+            <p:ph idx="1"/>
+          </p:nvPr>
+        </p:nvSpPr>
+        <p:spPr>
+          <a:xfrm>
+            <a:off x="510988" y="1328391"/>
+            <a:ext cx="11260802" cy="5328442"/>
+          </a:xfrm>
+        </p:spPr>
+        <p:txBody>
+          <a:bodyPr>
+            <a:normAutofit/>
+          </a:bodyPr>
+          <a:lstStyle/>
+          <a:p>
+            <a:endParaRPr lang="en-US" altLang="ko-KR" dirty="0"/>
+          </a:p>
+          <a:p>
+            <a:pPr marL="0" indent="0">
+              <a:buNone/>
+            </a:pPr>
+            <a:endParaRPr lang="en-US" altLang="ko-KR" dirty="0"/>
+          </a:p>
+          <a:p>
+            <a:endParaRPr lang="en-US" altLang="ko-KR" dirty="0"/>
+          </a:p>
+        </p:txBody>
+      </p:sp>
+      <p:sp>
+        <p:nvSpPr>
+          <p:cNvPr id="4" name="날짜 개체 틀 3">
+            <a:extLst>
+              <a:ext uri="{FF2B5EF4-FFF2-40B4-BE49-F238E27FC236}">
+                <a16:creationId xmlns:a16="http://schemas.microsoft.com/office/drawing/2014/main" id="{A695DDE5-0A39-A366-4CFE-A283911999CD}"/>
+              </a:ext>
+            </a:extLst>
+          </p:cNvPr>
           <p:cNvSpPr>
             <a:spLocks noGrp="1"/>
           </p:cNvSpPr>
@@ -5815,9 +6173,9 @@
           <a:bodyPr/>
           <a:lstStyle/>
           <a:p>
-            <a:fld id="{0E19CB95-6D28-40F1-9DA3-1BAC5D4B5B4F}" type="datetime6">
+            <a:fld id="{0F78D9C4-20C1-4B15-A116-16DC77AD9A1E}" type="datetime1">
               <a:rPr lang="ko-KR" altLang="en-US" smtClean="0"/>
-              <a:t>2024년 7월</a:t>
+              <a:t>2024-08-01</a:t>
             </a:fld>
             <a:endParaRPr lang="ko-KR" altLang="en-US"/>
           </a:p>
@@ -5825,7 +6183,13 @@
       </p:sp>
       <p:sp>
         <p:nvSpPr>
-          <p:cNvPr id="3" name="슬라이드 번호 개체 틀 2"/>
+          <p:cNvPr id="5" name="슬라이드 번호 개체 틀 4">
+            <a:extLst>
+              <a:ext uri="{FF2B5EF4-FFF2-40B4-BE49-F238E27FC236}">
+                <a16:creationId xmlns:a16="http://schemas.microsoft.com/office/drawing/2014/main" id="{5E040F43-60A7-C50D-1F5B-F984054F2D7C}"/>
+              </a:ext>
+            </a:extLst>
+          </p:cNvPr>
           <p:cNvSpPr>
             <a:spLocks noGrp="1"/>
           </p:cNvSpPr>
@@ -5848,7 +6212,13 @@
       </p:sp>
       <p:sp>
         <p:nvSpPr>
-          <p:cNvPr id="4" name="제목 3"/>
+          <p:cNvPr id="2" name="제목 1">
+            <a:extLst>
+              <a:ext uri="{FF2B5EF4-FFF2-40B4-BE49-F238E27FC236}">
+                <a16:creationId xmlns:a16="http://schemas.microsoft.com/office/drawing/2014/main" id="{5FAC57F5-99D7-9C46-B6C1-D16224151FE9}"/>
+              </a:ext>
+            </a:extLst>
+          </p:cNvPr>
           <p:cNvSpPr>
             <a:spLocks noGrp="1"/>
           </p:cNvSpPr>
@@ -5862,17 +6232,443 @@
           <a:lstStyle/>
           <a:p>
             <a:r>
+              <a:rPr lang="ko-KR" altLang="en-US" dirty="0">
+                <a:solidFill>
+                  <a:srgbClr val="6EC173"/>
+                </a:solidFill>
+              </a:rPr>
+              <a:t>실습</a:t>
+            </a:r>
+            <a:r>
+              <a:rPr lang="en-US" altLang="ko-KR" dirty="0">
+                <a:solidFill>
+                  <a:srgbClr val="6EC173"/>
+                </a:solidFill>
+              </a:rPr>
+              <a:t>.  </a:t>
+            </a:r>
+            <a:r>
               <a:rPr lang="en-US" altLang="ko-KR" dirty="0"/>
-              <a:t>State</a:t>
-            </a:r>
-            <a:endParaRPr lang="ko-KR" altLang="en-US" dirty="0"/>
+              <a:t> JSX </a:t>
+            </a:r>
+            <a:r>
+              <a:rPr lang="ko-KR" altLang="en-US" dirty="0"/>
+              <a:t>실습</a:t>
+            </a:r>
+          </a:p>
+        </p:txBody>
+      </p:sp>
+      <p:sp>
+        <p:nvSpPr>
+          <p:cNvPr id="6" name="내용 개체 틀 1">
+            <a:extLst>
+              <a:ext uri="{FF2B5EF4-FFF2-40B4-BE49-F238E27FC236}">
+                <a16:creationId xmlns:a16="http://schemas.microsoft.com/office/drawing/2014/main" id="{70C2BA37-BE91-39C4-AC08-0E8A1052E2F7}"/>
+              </a:ext>
+            </a:extLst>
+          </p:cNvPr>
+          <p:cNvSpPr txBox="1">
+            <a:spLocks/>
+          </p:cNvSpPr>
+          <p:nvPr/>
+        </p:nvSpPr>
+        <p:spPr>
+          <a:xfrm>
+            <a:off x="838200" y="1825625"/>
+            <a:ext cx="10515600" cy="4351338"/>
+          </a:xfrm>
+          <a:prstGeom prst="rect">
+            <a:avLst/>
+          </a:prstGeom>
+        </p:spPr>
+        <p:txBody>
+          <a:bodyPr vert="horz" lIns="91440" tIns="45720" rIns="91440" bIns="45720" rtlCol="0">
+            <a:normAutofit/>
+          </a:bodyPr>
+          <a:lstStyle>
+            <a:lvl1pPr marL="228600" indent="-228600" algn="l" defTabSz="914400" rtl="0" eaLnBrk="1" latinLnBrk="1" hangingPunct="1">
+              <a:lnSpc>
+                <a:spcPct val="90000"/>
+              </a:lnSpc>
+              <a:spcBef>
+                <a:spcPts val="1000"/>
+              </a:spcBef>
+              <a:buFont typeface="Arial" panose="020B0604020202020204" pitchFamily="34" charset="0"/>
+              <a:buChar char="•"/>
+              <a:defRPr sz="2800" kern="1200">
+                <a:solidFill>
+                  <a:schemeClr val="tx1"/>
+                </a:solidFill>
+                <a:latin typeface="+mn-lt"/>
+                <a:ea typeface="+mn-ea"/>
+                <a:cs typeface="+mn-cs"/>
+              </a:defRPr>
+            </a:lvl1pPr>
+            <a:lvl2pPr marL="685800" indent="-228600" algn="l" defTabSz="914400" rtl="0" eaLnBrk="1" latinLnBrk="1" hangingPunct="1">
+              <a:lnSpc>
+                <a:spcPct val="90000"/>
+              </a:lnSpc>
+              <a:spcBef>
+                <a:spcPts val="500"/>
+              </a:spcBef>
+              <a:buFont typeface="Arial" panose="020B0604020202020204" pitchFamily="34" charset="0"/>
+              <a:buChar char="•"/>
+              <a:defRPr sz="2400" kern="1200">
+                <a:solidFill>
+                  <a:schemeClr val="tx1"/>
+                </a:solidFill>
+                <a:latin typeface="+mn-lt"/>
+                <a:ea typeface="+mn-ea"/>
+                <a:cs typeface="+mn-cs"/>
+              </a:defRPr>
+            </a:lvl2pPr>
+            <a:lvl3pPr marL="1143000" indent="-228600" algn="l" defTabSz="914400" rtl="0" eaLnBrk="1" latinLnBrk="1" hangingPunct="1">
+              <a:lnSpc>
+                <a:spcPct val="90000"/>
+              </a:lnSpc>
+              <a:spcBef>
+                <a:spcPts val="500"/>
+              </a:spcBef>
+              <a:buFont typeface="Arial" panose="020B0604020202020204" pitchFamily="34" charset="0"/>
+              <a:buChar char="•"/>
+              <a:defRPr sz="2000" kern="1200">
+                <a:solidFill>
+                  <a:schemeClr val="tx1"/>
+                </a:solidFill>
+                <a:latin typeface="+mn-lt"/>
+                <a:ea typeface="+mn-ea"/>
+                <a:cs typeface="+mn-cs"/>
+              </a:defRPr>
+            </a:lvl3pPr>
+            <a:lvl4pPr marL="1600200" indent="-228600" algn="l" defTabSz="914400" rtl="0" eaLnBrk="1" latinLnBrk="1" hangingPunct="1">
+              <a:lnSpc>
+                <a:spcPct val="90000"/>
+              </a:lnSpc>
+              <a:spcBef>
+                <a:spcPts val="500"/>
+              </a:spcBef>
+              <a:buFont typeface="Arial" panose="020B0604020202020204" pitchFamily="34" charset="0"/>
+              <a:buChar char="•"/>
+              <a:defRPr sz="1800" kern="1200">
+                <a:solidFill>
+                  <a:schemeClr val="tx1"/>
+                </a:solidFill>
+                <a:latin typeface="+mn-lt"/>
+                <a:ea typeface="+mn-ea"/>
+                <a:cs typeface="+mn-cs"/>
+              </a:defRPr>
+            </a:lvl4pPr>
+            <a:lvl5pPr marL="2057400" indent="-228600" algn="l" defTabSz="914400" rtl="0" eaLnBrk="1" latinLnBrk="1" hangingPunct="1">
+              <a:lnSpc>
+                <a:spcPct val="90000"/>
+              </a:lnSpc>
+              <a:spcBef>
+                <a:spcPts val="500"/>
+              </a:spcBef>
+              <a:buFont typeface="Arial" panose="020B0604020202020204" pitchFamily="34" charset="0"/>
+              <a:buChar char="•"/>
+              <a:defRPr sz="1800" kern="1200">
+                <a:solidFill>
+                  <a:schemeClr val="tx1"/>
+                </a:solidFill>
+                <a:latin typeface="+mn-lt"/>
+                <a:ea typeface="+mn-ea"/>
+                <a:cs typeface="+mn-cs"/>
+              </a:defRPr>
+            </a:lvl5pPr>
+            <a:lvl6pPr marL="2514600" indent="-228600" algn="l" defTabSz="914400" rtl="0" eaLnBrk="1" latinLnBrk="1" hangingPunct="1">
+              <a:lnSpc>
+                <a:spcPct val="90000"/>
+              </a:lnSpc>
+              <a:spcBef>
+                <a:spcPts val="500"/>
+              </a:spcBef>
+              <a:buFont typeface="Arial" panose="020B0604020202020204" pitchFamily="34" charset="0"/>
+              <a:buChar char="•"/>
+              <a:defRPr sz="1800" kern="1200">
+                <a:solidFill>
+                  <a:schemeClr val="tx1"/>
+                </a:solidFill>
+                <a:latin typeface="+mn-lt"/>
+                <a:ea typeface="+mn-ea"/>
+                <a:cs typeface="+mn-cs"/>
+              </a:defRPr>
+            </a:lvl6pPr>
+            <a:lvl7pPr marL="2971800" indent="-228600" algn="l" defTabSz="914400" rtl="0" eaLnBrk="1" latinLnBrk="1" hangingPunct="1">
+              <a:lnSpc>
+                <a:spcPct val="90000"/>
+              </a:lnSpc>
+              <a:spcBef>
+                <a:spcPts val="500"/>
+              </a:spcBef>
+              <a:buFont typeface="Arial" panose="020B0604020202020204" pitchFamily="34" charset="0"/>
+              <a:buChar char="•"/>
+              <a:defRPr sz="1800" kern="1200">
+                <a:solidFill>
+                  <a:schemeClr val="tx1"/>
+                </a:solidFill>
+                <a:latin typeface="+mn-lt"/>
+                <a:ea typeface="+mn-ea"/>
+                <a:cs typeface="+mn-cs"/>
+              </a:defRPr>
+            </a:lvl7pPr>
+            <a:lvl8pPr marL="3429000" indent="-228600" algn="l" defTabSz="914400" rtl="0" eaLnBrk="1" latinLnBrk="1" hangingPunct="1">
+              <a:lnSpc>
+                <a:spcPct val="90000"/>
+              </a:lnSpc>
+              <a:spcBef>
+                <a:spcPts val="500"/>
+              </a:spcBef>
+              <a:buFont typeface="Arial" panose="020B0604020202020204" pitchFamily="34" charset="0"/>
+              <a:buChar char="•"/>
+              <a:defRPr sz="1800" kern="1200">
+                <a:solidFill>
+                  <a:schemeClr val="tx1"/>
+                </a:solidFill>
+                <a:latin typeface="+mn-lt"/>
+                <a:ea typeface="+mn-ea"/>
+                <a:cs typeface="+mn-cs"/>
+              </a:defRPr>
+            </a:lvl8pPr>
+            <a:lvl9pPr marL="3886200" indent="-228600" algn="l" defTabSz="914400" rtl="0" eaLnBrk="1" latinLnBrk="1" hangingPunct="1">
+              <a:lnSpc>
+                <a:spcPct val="90000"/>
+              </a:lnSpc>
+              <a:spcBef>
+                <a:spcPts val="500"/>
+              </a:spcBef>
+              <a:buFont typeface="Arial" panose="020B0604020202020204" pitchFamily="34" charset="0"/>
+              <a:buChar char="•"/>
+              <a:defRPr sz="1800" kern="1200">
+                <a:solidFill>
+                  <a:schemeClr val="tx1"/>
+                </a:solidFill>
+                <a:latin typeface="+mn-lt"/>
+                <a:ea typeface="+mn-ea"/>
+                <a:cs typeface="+mn-cs"/>
+              </a:defRPr>
+            </a:lvl9pPr>
+          </a:lstStyle>
+          <a:p>
+            <a:pPr marL="457200" lvl="1" indent="0">
+              <a:buFont typeface="Arial" panose="020B0604020202020204" pitchFamily="34" charset="0"/>
+              <a:buNone/>
+            </a:pPr>
+            <a:endParaRPr lang="en-US" altLang="ko-KR" dirty="0">
+              <a:solidFill>
+                <a:srgbClr val="212529"/>
+              </a:solidFill>
+              <a:latin typeface="+mn-ea"/>
+            </a:endParaRPr>
+          </a:p>
+          <a:p>
+            <a:pPr marL="457200" lvl="1" indent="0">
+              <a:buFont typeface="Arial" panose="020B0604020202020204" pitchFamily="34" charset="0"/>
+              <a:buNone/>
+            </a:pPr>
+            <a:endParaRPr lang="en-US" altLang="ko-KR" dirty="0">
+              <a:solidFill>
+                <a:srgbClr val="212529"/>
+              </a:solidFill>
+              <a:latin typeface="+mn-ea"/>
+            </a:endParaRPr>
+          </a:p>
+          <a:p>
+            <a:r>
+              <a:rPr lang="en-US" altLang="ko-KR" b="1" dirty="0">
+                <a:solidFill>
+                  <a:srgbClr val="212529"/>
+                </a:solidFill>
+                <a:latin typeface="+mn-ea"/>
+              </a:rPr>
+              <a:t>[</a:t>
+            </a:r>
+            <a:r>
+              <a:rPr lang="ko-KR" altLang="en-US" b="1" dirty="0" err="1">
+                <a:solidFill>
+                  <a:srgbClr val="212529"/>
+                </a:solidFill>
+                <a:latin typeface="+mn-ea"/>
+              </a:rPr>
+              <a:t>코딩온</a:t>
+            </a:r>
+            <a:r>
+              <a:rPr lang="en-US" altLang="ko-KR" b="1" dirty="0">
+                <a:solidFill>
+                  <a:srgbClr val="212529"/>
+                </a:solidFill>
+                <a:latin typeface="+mn-ea"/>
+              </a:rPr>
+              <a:t>] React </a:t>
+            </a:r>
+            <a:r>
+              <a:rPr lang="ko-KR" altLang="en-US" b="1" dirty="0">
+                <a:solidFill>
+                  <a:srgbClr val="212529"/>
+                </a:solidFill>
+                <a:latin typeface="+mn-ea"/>
+              </a:rPr>
+              <a:t>실습 </a:t>
+            </a:r>
+            <a:r>
+              <a:rPr lang="ko-KR" altLang="en-US" dirty="0">
+                <a:solidFill>
+                  <a:srgbClr val="212529"/>
+                </a:solidFill>
+                <a:latin typeface="+mn-ea"/>
+              </a:rPr>
+              <a:t>강의 클릭</a:t>
+            </a:r>
+            <a:br>
+              <a:rPr lang="en-US" altLang="ko-KR" dirty="0">
+                <a:solidFill>
+                  <a:srgbClr val="212529"/>
+                </a:solidFill>
+                <a:latin typeface="+mn-ea"/>
+              </a:rPr>
+            </a:br>
+            <a:endParaRPr lang="en-US" altLang="ko-KR" dirty="0">
+              <a:solidFill>
+                <a:srgbClr val="212529"/>
+              </a:solidFill>
+              <a:latin typeface="+mn-ea"/>
+            </a:endParaRPr>
+          </a:p>
+          <a:p>
+            <a:pPr lvl="1"/>
+            <a:r>
+              <a:rPr lang="ko-KR" altLang="en-US" sz="2800" b="1" dirty="0">
+                <a:solidFill>
+                  <a:srgbClr val="212529"/>
+                </a:solidFill>
+                <a:latin typeface="+mn-ea"/>
+              </a:rPr>
+              <a:t>➡ </a:t>
+            </a:r>
+            <a:r>
+              <a:rPr lang="en-US" altLang="ko-KR" sz="2800" b="1" dirty="0">
+                <a:solidFill>
+                  <a:srgbClr val="212529"/>
+                </a:solidFill>
+                <a:latin typeface="+mn-ea"/>
+              </a:rPr>
+              <a:t>[</a:t>
+            </a:r>
+            <a:r>
+              <a:rPr lang="en-US" altLang="ko-KR" sz="2800" b="1" dirty="0" err="1">
+                <a:solidFill>
+                  <a:srgbClr val="212529"/>
+                </a:solidFill>
+                <a:latin typeface="+mn-ea"/>
+              </a:rPr>
+              <a:t>jsx</a:t>
+            </a:r>
+            <a:r>
+              <a:rPr lang="ko-KR" altLang="en-US" sz="2800" b="1" dirty="0">
+                <a:solidFill>
+                  <a:srgbClr val="212529"/>
+                </a:solidFill>
+                <a:latin typeface="+mn-ea"/>
+              </a:rPr>
+              <a:t> 실습</a:t>
+            </a:r>
+            <a:r>
+              <a:rPr lang="en-US" altLang="ko-KR" sz="2800" b="1" dirty="0">
+                <a:solidFill>
+                  <a:srgbClr val="212529"/>
+                </a:solidFill>
+                <a:latin typeface="+mn-ea"/>
+              </a:rPr>
+              <a:t>]</a:t>
+            </a:r>
+            <a:r>
+              <a:rPr lang="en-US" altLang="ko-KR" sz="2800" dirty="0">
+                <a:solidFill>
+                  <a:srgbClr val="212529"/>
+                </a:solidFill>
+                <a:latin typeface="+mn-ea"/>
+              </a:rPr>
+              <a:t> </a:t>
+            </a:r>
+            <a:r>
+              <a:rPr lang="ko-KR" altLang="en-US" sz="2800" dirty="0">
+                <a:solidFill>
+                  <a:srgbClr val="212529"/>
+                </a:solidFill>
+                <a:latin typeface="+mn-ea"/>
+              </a:rPr>
+              <a:t>커리큘럼 클릭</a:t>
+            </a:r>
+            <a:endParaRPr lang="en-US" altLang="ko-KR" sz="2800" dirty="0">
+              <a:solidFill>
+                <a:srgbClr val="212529"/>
+              </a:solidFill>
+              <a:latin typeface="+mn-ea"/>
+            </a:endParaRPr>
+          </a:p>
+          <a:p>
+            <a:pPr lvl="1"/>
+            <a:r>
+              <a:rPr lang="ko-KR" altLang="en-US" sz="2800" b="1" dirty="0">
+                <a:solidFill>
+                  <a:srgbClr val="212529"/>
+                </a:solidFill>
+                <a:latin typeface="+mn-ea"/>
+              </a:rPr>
+              <a:t>➡ </a:t>
+            </a:r>
+            <a:r>
+              <a:rPr lang="en-US" altLang="ko-KR" sz="2800" b="1" dirty="0">
+                <a:solidFill>
+                  <a:schemeClr val="accent1"/>
+                </a:solidFill>
+                <a:latin typeface="+mn-ea"/>
+              </a:rPr>
+              <a:t>[1~4</a:t>
+            </a:r>
+            <a:r>
+              <a:rPr lang="ko-KR" altLang="en-US" sz="2800" b="1" dirty="0">
+                <a:solidFill>
+                  <a:schemeClr val="accent1"/>
+                </a:solidFill>
+                <a:latin typeface="+mn-ea"/>
+              </a:rPr>
+              <a:t>번 문제</a:t>
+            </a:r>
+            <a:r>
+              <a:rPr lang="en-US" altLang="ko-KR" sz="2800" b="1" dirty="0">
+                <a:solidFill>
+                  <a:schemeClr val="accent1"/>
+                </a:solidFill>
+                <a:latin typeface="+mn-ea"/>
+              </a:rPr>
+              <a:t>]</a:t>
+            </a:r>
+            <a:r>
+              <a:rPr lang="en-US" altLang="ko-KR" sz="2800" dirty="0">
+                <a:solidFill>
+                  <a:schemeClr val="accent1"/>
+                </a:solidFill>
+                <a:latin typeface="+mn-ea"/>
+              </a:rPr>
+              <a:t> </a:t>
+            </a:r>
+            <a:r>
+              <a:rPr lang="ko-KR" altLang="en-US" sz="2800" dirty="0">
+                <a:solidFill>
+                  <a:srgbClr val="212529"/>
+                </a:solidFill>
+                <a:latin typeface="+mn-ea"/>
+              </a:rPr>
+              <a:t> 진행</a:t>
+            </a:r>
           </a:p>
         </p:txBody>
       </p:sp>
     </p:spTree>
     <p:extLst>
       <p:ext uri="{BB962C8B-B14F-4D97-AF65-F5344CB8AC3E}">
-        <p14:creationId xmlns:p14="http://schemas.microsoft.com/office/powerpoint/2010/main" val="3256277222"/>
+        <p14:creationId xmlns:p14="http://schemas.microsoft.com/office/powerpoint/2010/main" val="259966667"/>
       </p:ext>
     </p:extLst>
   </p:cSld>
@@ -5901,10 +6697,10 @@
       </p:grpSpPr>
       <p:sp>
         <p:nvSpPr>
-          <p:cNvPr id="3" name="내용 개체 틀 2">
-            <a:extLst>
-              <a:ext uri="{FF2B5EF4-FFF2-40B4-BE49-F238E27FC236}">
-                <a16:creationId xmlns:a16="http://schemas.microsoft.com/office/drawing/2014/main" id="{DA4637DE-CA85-54BD-9BB5-8A7EF0E6FC9C}"/>
+          <p:cNvPr id="13" name="내용 개체 틀 2">
+            <a:extLst>
+              <a:ext uri="{FF2B5EF4-FFF2-40B4-BE49-F238E27FC236}">
+                <a16:creationId xmlns:a16="http://schemas.microsoft.com/office/drawing/2014/main" id="{847FD532-7F61-A001-537F-B970BD821AF3}"/>
               </a:ext>
             </a:extLst>
           </p:cNvPr>
@@ -5915,112 +6711,29 @@
             <p:ph idx="1"/>
           </p:nvPr>
         </p:nvSpPr>
-        <p:spPr/>
-        <p:txBody>
-          <a:bodyPr/>
-          <a:lstStyle/>
-          <a:p>
-            <a:r>
-              <a:rPr lang="en-US" altLang="ko-KR" dirty="0"/>
-              <a:t>React</a:t>
-            </a:r>
-            <a:r>
-              <a:rPr lang="ko-KR" altLang="en-US" dirty="0"/>
-              <a:t>에서 앱의 유동적인 데이터를 다루기 위한 개체</a:t>
-            </a:r>
+        <p:spPr>
+          <a:xfrm>
+            <a:off x="510988" y="1328391"/>
+            <a:ext cx="11260802" cy="5328442"/>
+          </a:xfrm>
+        </p:spPr>
+        <p:txBody>
+          <a:bodyPr>
+            <a:normAutofit/>
+          </a:bodyPr>
+          <a:lstStyle/>
+          <a:p>
             <a:endParaRPr lang="en-US" altLang="ko-KR" dirty="0"/>
           </a:p>
           <a:p>
-            <a:r>
-              <a:rPr lang="ko-KR" altLang="en-US" dirty="0">
-                <a:solidFill>
-                  <a:schemeClr val="accent1"/>
-                </a:solidFill>
-              </a:rPr>
-              <a:t>계속해서 변하는 특정 상태</a:t>
-            </a:r>
-            <a:endParaRPr lang="en-US" altLang="ko-KR" dirty="0">
-              <a:solidFill>
-                <a:schemeClr val="accent1"/>
-              </a:solidFill>
-            </a:endParaRPr>
-          </a:p>
-          <a:p>
-            <a:r>
-              <a:rPr lang="ko-KR" altLang="en-US" dirty="0"/>
-              <a:t>상태에 따라 다른 동작을 함</a:t>
-            </a:r>
+            <a:pPr marL="0" indent="0">
+              <a:buNone/>
+            </a:pPr>
             <a:endParaRPr lang="en-US" altLang="ko-KR" dirty="0"/>
           </a:p>
           <a:p>
-            <a:r>
-              <a:rPr lang="ko-KR" altLang="en-US" dirty="0"/>
-              <a:t>왜 사용할까</a:t>
-            </a:r>
-            <a:r>
-              <a:rPr lang="en-US" altLang="ko-KR" dirty="0"/>
-              <a:t>?</a:t>
-            </a:r>
-          </a:p>
-          <a:p>
-            <a:pPr lvl="1"/>
-            <a:r>
-              <a:rPr lang="en-US" altLang="ko-KR" dirty="0">
-                <a:solidFill>
-                  <a:schemeClr val="accent1"/>
-                </a:solidFill>
-              </a:rPr>
-              <a:t>State</a:t>
-            </a:r>
-            <a:r>
-              <a:rPr lang="ko-KR" altLang="en-US" dirty="0">
-                <a:solidFill>
-                  <a:schemeClr val="accent1"/>
-                </a:solidFill>
-              </a:rPr>
-              <a:t>가 </a:t>
-            </a:r>
-            <a:r>
-              <a:rPr lang="ko-KR" altLang="en-US" dirty="0" err="1">
-                <a:solidFill>
-                  <a:schemeClr val="accent1"/>
-                </a:solidFill>
-              </a:rPr>
-              <a:t>변경될시</a:t>
-            </a:r>
-            <a:r>
-              <a:rPr lang="ko-KR" altLang="en-US" dirty="0">
-                <a:solidFill>
-                  <a:schemeClr val="accent1"/>
-                </a:solidFill>
-              </a:rPr>
-              <a:t> 자동으로 </a:t>
-            </a:r>
-            <a:r>
-              <a:rPr lang="ko-KR" altLang="en-US" dirty="0" err="1">
-                <a:solidFill>
-                  <a:schemeClr val="accent1"/>
-                </a:solidFill>
-              </a:rPr>
-              <a:t>재랜더링</a:t>
-            </a:r>
-            <a:r>
-              <a:rPr lang="ko-KR" altLang="en-US" dirty="0"/>
-              <a:t> 되기 때문</a:t>
-            </a:r>
             <a:endParaRPr lang="en-US" altLang="ko-KR" dirty="0"/>
           </a:p>
-          <a:p>
-            <a:pPr lvl="1"/>
-            <a:r>
-              <a:rPr lang="ko-KR" altLang="en-US" dirty="0"/>
-              <a:t>이 점이 변수와 다른 점</a:t>
-            </a:r>
-            <a:endParaRPr lang="en-US" altLang="ko-KR" dirty="0"/>
-          </a:p>
-          <a:p>
-            <a:endParaRPr lang="ko-KR" altLang="en-US" dirty="0"/>
-          </a:p>
         </p:txBody>
       </p:sp>
       <p:sp>
@@ -6028,7 +6741,7 @@
           <p:cNvPr id="4" name="날짜 개체 틀 3">
             <a:extLst>
               <a:ext uri="{FF2B5EF4-FFF2-40B4-BE49-F238E27FC236}">
-                <a16:creationId xmlns:a16="http://schemas.microsoft.com/office/drawing/2014/main" id="{9FBA535A-322E-1646-CF09-63873BF8C515}"/>
+                <a16:creationId xmlns:a16="http://schemas.microsoft.com/office/drawing/2014/main" id="{A695DDE5-0A39-A366-4CFE-A283911999CD}"/>
               </a:ext>
             </a:extLst>
           </p:cNvPr>
@@ -6044,9 +6757,9 @@
           <a:bodyPr/>
           <a:lstStyle/>
           <a:p>
-            <a:fld id="{3CDE9A52-66EB-4C85-B703-18792A161207}" type="datetime6">
+            <a:fld id="{0F78D9C4-20C1-4B15-A116-16DC77AD9A1E}" type="datetime1">
               <a:rPr lang="ko-KR" altLang="en-US" smtClean="0"/>
-              <a:t>2024년 7월</a:t>
+              <a:t>2024-08-01</a:t>
             </a:fld>
             <a:endParaRPr lang="ko-KR" altLang="en-US"/>
           </a:p>
@@ -6057,7 +6770,7 @@
           <p:cNvPr id="5" name="슬라이드 번호 개체 틀 4">
             <a:extLst>
               <a:ext uri="{FF2B5EF4-FFF2-40B4-BE49-F238E27FC236}">
-                <a16:creationId xmlns:a16="http://schemas.microsoft.com/office/drawing/2014/main" id="{E7066AF9-BB3C-686E-909F-CE3BE0BF5FCA}"/>
+                <a16:creationId xmlns:a16="http://schemas.microsoft.com/office/drawing/2014/main" id="{5E040F43-60A7-C50D-1F5B-F984054F2D7C}"/>
               </a:ext>
             </a:extLst>
           </p:cNvPr>
@@ -6086,7 +6799,7 @@
           <p:cNvPr id="2" name="제목 1">
             <a:extLst>
               <a:ext uri="{FF2B5EF4-FFF2-40B4-BE49-F238E27FC236}">
-                <a16:creationId xmlns:a16="http://schemas.microsoft.com/office/drawing/2014/main" id="{E11A36B4-A46B-4E8E-E378-EA3A6D84A2C6}"/>
+                <a16:creationId xmlns:a16="http://schemas.microsoft.com/office/drawing/2014/main" id="{5FAC57F5-99D7-9C46-B6C1-D16224151FE9}"/>
               </a:ext>
             </a:extLst>
           </p:cNvPr>
@@ -6103,25 +6816,434 @@
           <a:lstStyle/>
           <a:p>
             <a:r>
+              <a:rPr lang="ko-KR" altLang="en-US" dirty="0">
+                <a:solidFill>
+                  <a:srgbClr val="6EC173"/>
+                </a:solidFill>
+              </a:rPr>
+              <a:t>실습</a:t>
+            </a:r>
+            <a:r>
+              <a:rPr lang="en-US" altLang="ko-KR" dirty="0">
+                <a:solidFill>
+                  <a:srgbClr val="6EC173"/>
+                </a:solidFill>
+              </a:rPr>
+              <a:t>.  </a:t>
+            </a:r>
+            <a:r>
               <a:rPr lang="en-US" altLang="ko-KR" dirty="0"/>
-              <a:t>state</a:t>
+              <a:t> Props </a:t>
             </a:r>
             <a:r>
               <a:rPr lang="ko-KR" altLang="en-US" dirty="0"/>
-              <a:t>란</a:t>
-            </a:r>
-            <a:r>
-              <a:rPr lang="en-US" altLang="ko-KR" dirty="0"/>
-              <a:t>?</a:t>
-            </a:r>
-            <a:endParaRPr lang="ko-KR" altLang="en-US" dirty="0"/>
+              <a:t>실습</a:t>
+            </a:r>
+          </a:p>
+        </p:txBody>
+      </p:sp>
+      <p:sp>
+        <p:nvSpPr>
+          <p:cNvPr id="6" name="내용 개체 틀 1">
+            <a:extLst>
+              <a:ext uri="{FF2B5EF4-FFF2-40B4-BE49-F238E27FC236}">
+                <a16:creationId xmlns:a16="http://schemas.microsoft.com/office/drawing/2014/main" id="{70C2BA37-BE91-39C4-AC08-0E8A1052E2F7}"/>
+              </a:ext>
+            </a:extLst>
+          </p:cNvPr>
+          <p:cNvSpPr txBox="1">
+            <a:spLocks/>
+          </p:cNvSpPr>
+          <p:nvPr/>
+        </p:nvSpPr>
+        <p:spPr>
+          <a:xfrm>
+            <a:off x="838200" y="1825625"/>
+            <a:ext cx="10515600" cy="4351338"/>
+          </a:xfrm>
+          <a:prstGeom prst="rect">
+            <a:avLst/>
+          </a:prstGeom>
+        </p:spPr>
+        <p:txBody>
+          <a:bodyPr vert="horz" lIns="91440" tIns="45720" rIns="91440" bIns="45720" rtlCol="0">
+            <a:normAutofit/>
+          </a:bodyPr>
+          <a:lstStyle>
+            <a:lvl1pPr marL="228600" indent="-228600" algn="l" defTabSz="914400" rtl="0" eaLnBrk="1" latinLnBrk="1" hangingPunct="1">
+              <a:lnSpc>
+                <a:spcPct val="90000"/>
+              </a:lnSpc>
+              <a:spcBef>
+                <a:spcPts val="1000"/>
+              </a:spcBef>
+              <a:buFont typeface="Arial" panose="020B0604020202020204" pitchFamily="34" charset="0"/>
+              <a:buChar char="•"/>
+              <a:defRPr sz="2800" kern="1200">
+                <a:solidFill>
+                  <a:schemeClr val="tx1"/>
+                </a:solidFill>
+                <a:latin typeface="+mn-lt"/>
+                <a:ea typeface="+mn-ea"/>
+                <a:cs typeface="+mn-cs"/>
+              </a:defRPr>
+            </a:lvl1pPr>
+            <a:lvl2pPr marL="685800" indent="-228600" algn="l" defTabSz="914400" rtl="0" eaLnBrk="1" latinLnBrk="1" hangingPunct="1">
+              <a:lnSpc>
+                <a:spcPct val="90000"/>
+              </a:lnSpc>
+              <a:spcBef>
+                <a:spcPts val="500"/>
+              </a:spcBef>
+              <a:buFont typeface="Arial" panose="020B0604020202020204" pitchFamily="34" charset="0"/>
+              <a:buChar char="•"/>
+              <a:defRPr sz="2400" kern="1200">
+                <a:solidFill>
+                  <a:schemeClr val="tx1"/>
+                </a:solidFill>
+                <a:latin typeface="+mn-lt"/>
+                <a:ea typeface="+mn-ea"/>
+                <a:cs typeface="+mn-cs"/>
+              </a:defRPr>
+            </a:lvl2pPr>
+            <a:lvl3pPr marL="1143000" indent="-228600" algn="l" defTabSz="914400" rtl="0" eaLnBrk="1" latinLnBrk="1" hangingPunct="1">
+              <a:lnSpc>
+                <a:spcPct val="90000"/>
+              </a:lnSpc>
+              <a:spcBef>
+                <a:spcPts val="500"/>
+              </a:spcBef>
+              <a:buFont typeface="Arial" panose="020B0604020202020204" pitchFamily="34" charset="0"/>
+              <a:buChar char="•"/>
+              <a:defRPr sz="2000" kern="1200">
+                <a:solidFill>
+                  <a:schemeClr val="tx1"/>
+                </a:solidFill>
+                <a:latin typeface="+mn-lt"/>
+                <a:ea typeface="+mn-ea"/>
+                <a:cs typeface="+mn-cs"/>
+              </a:defRPr>
+            </a:lvl3pPr>
+            <a:lvl4pPr marL="1600200" indent="-228600" algn="l" defTabSz="914400" rtl="0" eaLnBrk="1" latinLnBrk="1" hangingPunct="1">
+              <a:lnSpc>
+                <a:spcPct val="90000"/>
+              </a:lnSpc>
+              <a:spcBef>
+                <a:spcPts val="500"/>
+              </a:spcBef>
+              <a:buFont typeface="Arial" panose="020B0604020202020204" pitchFamily="34" charset="0"/>
+              <a:buChar char="•"/>
+              <a:defRPr sz="1800" kern="1200">
+                <a:solidFill>
+                  <a:schemeClr val="tx1"/>
+                </a:solidFill>
+                <a:latin typeface="+mn-lt"/>
+                <a:ea typeface="+mn-ea"/>
+                <a:cs typeface="+mn-cs"/>
+              </a:defRPr>
+            </a:lvl4pPr>
+            <a:lvl5pPr marL="2057400" indent="-228600" algn="l" defTabSz="914400" rtl="0" eaLnBrk="1" latinLnBrk="1" hangingPunct="1">
+              <a:lnSpc>
+                <a:spcPct val="90000"/>
+              </a:lnSpc>
+              <a:spcBef>
+                <a:spcPts val="500"/>
+              </a:spcBef>
+              <a:buFont typeface="Arial" panose="020B0604020202020204" pitchFamily="34" charset="0"/>
+              <a:buChar char="•"/>
+              <a:defRPr sz="1800" kern="1200">
+                <a:solidFill>
+                  <a:schemeClr val="tx1"/>
+                </a:solidFill>
+                <a:latin typeface="+mn-lt"/>
+                <a:ea typeface="+mn-ea"/>
+                <a:cs typeface="+mn-cs"/>
+              </a:defRPr>
+            </a:lvl5pPr>
+            <a:lvl6pPr marL="2514600" indent="-228600" algn="l" defTabSz="914400" rtl="0" eaLnBrk="1" latinLnBrk="1" hangingPunct="1">
+              <a:lnSpc>
+                <a:spcPct val="90000"/>
+              </a:lnSpc>
+              <a:spcBef>
+                <a:spcPts val="500"/>
+              </a:spcBef>
+              <a:buFont typeface="Arial" panose="020B0604020202020204" pitchFamily="34" charset="0"/>
+              <a:buChar char="•"/>
+              <a:defRPr sz="1800" kern="1200">
+                <a:solidFill>
+                  <a:schemeClr val="tx1"/>
+                </a:solidFill>
+                <a:latin typeface="+mn-lt"/>
+                <a:ea typeface="+mn-ea"/>
+                <a:cs typeface="+mn-cs"/>
+              </a:defRPr>
+            </a:lvl6pPr>
+            <a:lvl7pPr marL="2971800" indent="-228600" algn="l" defTabSz="914400" rtl="0" eaLnBrk="1" latinLnBrk="1" hangingPunct="1">
+              <a:lnSpc>
+                <a:spcPct val="90000"/>
+              </a:lnSpc>
+              <a:spcBef>
+                <a:spcPts val="500"/>
+              </a:spcBef>
+              <a:buFont typeface="Arial" panose="020B0604020202020204" pitchFamily="34" charset="0"/>
+              <a:buChar char="•"/>
+              <a:defRPr sz="1800" kern="1200">
+                <a:solidFill>
+                  <a:schemeClr val="tx1"/>
+                </a:solidFill>
+                <a:latin typeface="+mn-lt"/>
+                <a:ea typeface="+mn-ea"/>
+                <a:cs typeface="+mn-cs"/>
+              </a:defRPr>
+            </a:lvl7pPr>
+            <a:lvl8pPr marL="3429000" indent="-228600" algn="l" defTabSz="914400" rtl="0" eaLnBrk="1" latinLnBrk="1" hangingPunct="1">
+              <a:lnSpc>
+                <a:spcPct val="90000"/>
+              </a:lnSpc>
+              <a:spcBef>
+                <a:spcPts val="500"/>
+              </a:spcBef>
+              <a:buFont typeface="Arial" panose="020B0604020202020204" pitchFamily="34" charset="0"/>
+              <a:buChar char="•"/>
+              <a:defRPr sz="1800" kern="1200">
+                <a:solidFill>
+                  <a:schemeClr val="tx1"/>
+                </a:solidFill>
+                <a:latin typeface="+mn-lt"/>
+                <a:ea typeface="+mn-ea"/>
+                <a:cs typeface="+mn-cs"/>
+              </a:defRPr>
+            </a:lvl8pPr>
+            <a:lvl9pPr marL="3886200" indent="-228600" algn="l" defTabSz="914400" rtl="0" eaLnBrk="1" latinLnBrk="1" hangingPunct="1">
+              <a:lnSpc>
+                <a:spcPct val="90000"/>
+              </a:lnSpc>
+              <a:spcBef>
+                <a:spcPts val="500"/>
+              </a:spcBef>
+              <a:buFont typeface="Arial" panose="020B0604020202020204" pitchFamily="34" charset="0"/>
+              <a:buChar char="•"/>
+              <a:defRPr sz="1800" kern="1200">
+                <a:solidFill>
+                  <a:schemeClr val="tx1"/>
+                </a:solidFill>
+                <a:latin typeface="+mn-lt"/>
+                <a:ea typeface="+mn-ea"/>
+                <a:cs typeface="+mn-cs"/>
+              </a:defRPr>
+            </a:lvl9pPr>
+          </a:lstStyle>
+          <a:p>
+            <a:pPr marL="457200" lvl="1" indent="0">
+              <a:buFont typeface="Arial" panose="020B0604020202020204" pitchFamily="34" charset="0"/>
+              <a:buNone/>
+            </a:pPr>
+            <a:endParaRPr lang="en-US" altLang="ko-KR" dirty="0">
+              <a:solidFill>
+                <a:srgbClr val="212529"/>
+              </a:solidFill>
+              <a:latin typeface="+mn-ea"/>
+            </a:endParaRPr>
+          </a:p>
+          <a:p>
+            <a:pPr marL="457200" lvl="1" indent="0">
+              <a:buFont typeface="Arial" panose="020B0604020202020204" pitchFamily="34" charset="0"/>
+              <a:buNone/>
+            </a:pPr>
+            <a:endParaRPr lang="en-US" altLang="ko-KR" dirty="0">
+              <a:solidFill>
+                <a:srgbClr val="212529"/>
+              </a:solidFill>
+              <a:latin typeface="+mn-ea"/>
+            </a:endParaRPr>
+          </a:p>
+          <a:p>
+            <a:r>
+              <a:rPr lang="en-US" altLang="ko-KR" b="1" dirty="0">
+                <a:solidFill>
+                  <a:srgbClr val="212529"/>
+                </a:solidFill>
+                <a:latin typeface="+mn-ea"/>
+              </a:rPr>
+              <a:t>[</a:t>
+            </a:r>
+            <a:r>
+              <a:rPr lang="ko-KR" altLang="en-US" b="1" dirty="0" err="1">
+                <a:solidFill>
+                  <a:srgbClr val="212529"/>
+                </a:solidFill>
+                <a:latin typeface="+mn-ea"/>
+              </a:rPr>
+              <a:t>코딩온</a:t>
+            </a:r>
+            <a:r>
+              <a:rPr lang="en-US" altLang="ko-KR" b="1" dirty="0">
+                <a:solidFill>
+                  <a:srgbClr val="212529"/>
+                </a:solidFill>
+                <a:latin typeface="+mn-ea"/>
+              </a:rPr>
+              <a:t>] React </a:t>
+            </a:r>
+            <a:r>
+              <a:rPr lang="ko-KR" altLang="en-US" b="1" dirty="0">
+                <a:solidFill>
+                  <a:srgbClr val="212529"/>
+                </a:solidFill>
+                <a:latin typeface="+mn-ea"/>
+              </a:rPr>
+              <a:t>실습 </a:t>
+            </a:r>
+            <a:r>
+              <a:rPr lang="ko-KR" altLang="en-US" dirty="0">
+                <a:solidFill>
+                  <a:srgbClr val="212529"/>
+                </a:solidFill>
+                <a:latin typeface="+mn-ea"/>
+              </a:rPr>
+              <a:t>강의 클릭</a:t>
+            </a:r>
+            <a:br>
+              <a:rPr lang="en-US" altLang="ko-KR" dirty="0">
+                <a:solidFill>
+                  <a:srgbClr val="212529"/>
+                </a:solidFill>
+                <a:latin typeface="+mn-ea"/>
+              </a:rPr>
+            </a:br>
+            <a:endParaRPr lang="en-US" altLang="ko-KR" dirty="0">
+              <a:solidFill>
+                <a:srgbClr val="212529"/>
+              </a:solidFill>
+              <a:latin typeface="+mn-ea"/>
+            </a:endParaRPr>
+          </a:p>
+          <a:p>
+            <a:pPr lvl="1"/>
+            <a:r>
+              <a:rPr lang="ko-KR" altLang="en-US" sz="2800" b="1" dirty="0">
+                <a:solidFill>
+                  <a:srgbClr val="212529"/>
+                </a:solidFill>
+                <a:latin typeface="+mn-ea"/>
+              </a:rPr>
+              <a:t>➡ </a:t>
+            </a:r>
+            <a:r>
+              <a:rPr lang="en-US" altLang="ko-KR" sz="2800" b="1" dirty="0">
+                <a:solidFill>
+                  <a:srgbClr val="212529"/>
+                </a:solidFill>
+                <a:latin typeface="+mn-ea"/>
+              </a:rPr>
+              <a:t>[Props</a:t>
+            </a:r>
+            <a:r>
+              <a:rPr lang="ko-KR" altLang="en-US" sz="2800" b="1" dirty="0">
+                <a:solidFill>
+                  <a:srgbClr val="212529"/>
+                </a:solidFill>
+                <a:latin typeface="+mn-ea"/>
+              </a:rPr>
+              <a:t> 실습</a:t>
+            </a:r>
+            <a:r>
+              <a:rPr lang="en-US" altLang="ko-KR" sz="2800" b="1" dirty="0">
+                <a:solidFill>
+                  <a:srgbClr val="212529"/>
+                </a:solidFill>
+                <a:latin typeface="+mn-ea"/>
+              </a:rPr>
+              <a:t>]</a:t>
+            </a:r>
+            <a:r>
+              <a:rPr lang="en-US" altLang="ko-KR" sz="2800" dirty="0">
+                <a:solidFill>
+                  <a:srgbClr val="212529"/>
+                </a:solidFill>
+                <a:latin typeface="+mn-ea"/>
+              </a:rPr>
+              <a:t> </a:t>
+            </a:r>
+            <a:r>
+              <a:rPr lang="ko-KR" altLang="en-US" sz="2800" dirty="0">
+                <a:solidFill>
+                  <a:srgbClr val="212529"/>
+                </a:solidFill>
+                <a:latin typeface="+mn-ea"/>
+              </a:rPr>
+              <a:t>커리큘럼 클릭</a:t>
+            </a:r>
+            <a:endParaRPr lang="en-US" altLang="ko-KR" sz="2800" dirty="0">
+              <a:solidFill>
+                <a:srgbClr val="212529"/>
+              </a:solidFill>
+              <a:latin typeface="+mn-ea"/>
+            </a:endParaRPr>
+          </a:p>
+          <a:p>
+            <a:pPr lvl="1"/>
+            <a:r>
+              <a:rPr lang="ko-KR" altLang="en-US" sz="2800" b="1" dirty="0">
+                <a:solidFill>
+                  <a:srgbClr val="212529"/>
+                </a:solidFill>
+                <a:latin typeface="+mn-ea"/>
+              </a:rPr>
+              <a:t>➡ </a:t>
+            </a:r>
+            <a:r>
+              <a:rPr lang="en-US" altLang="ko-KR" sz="2800" b="1" dirty="0">
+                <a:solidFill>
+                  <a:schemeClr val="accent1"/>
+                </a:solidFill>
+                <a:latin typeface="+mn-ea"/>
+              </a:rPr>
+              <a:t>[1~3</a:t>
+            </a:r>
+            <a:r>
+              <a:rPr lang="ko-KR" altLang="en-US" sz="2800" b="1" dirty="0">
+                <a:solidFill>
+                  <a:schemeClr val="accent1"/>
+                </a:solidFill>
+                <a:latin typeface="+mn-ea"/>
+              </a:rPr>
+              <a:t>번 문제</a:t>
+            </a:r>
+            <a:r>
+              <a:rPr lang="en-US" altLang="ko-KR" sz="2800" b="1" dirty="0">
+                <a:solidFill>
+                  <a:schemeClr val="accent1"/>
+                </a:solidFill>
+                <a:latin typeface="+mn-ea"/>
+              </a:rPr>
+              <a:t>]</a:t>
+            </a:r>
+            <a:r>
+              <a:rPr lang="en-US" altLang="ko-KR" sz="2800" dirty="0">
+                <a:solidFill>
+                  <a:schemeClr val="accent1"/>
+                </a:solidFill>
+                <a:latin typeface="+mn-ea"/>
+              </a:rPr>
+              <a:t> </a:t>
+            </a:r>
+            <a:r>
+              <a:rPr lang="ko-KR" altLang="en-US" sz="2800" dirty="0">
+                <a:solidFill>
+                  <a:srgbClr val="212529"/>
+                </a:solidFill>
+                <a:latin typeface="+mn-ea"/>
+              </a:rPr>
+              <a:t> 진행</a:t>
+            </a:r>
           </a:p>
         </p:txBody>
       </p:sp>
     </p:spTree>
     <p:extLst>
       <p:ext uri="{BB962C8B-B14F-4D97-AF65-F5344CB8AC3E}">
-        <p14:creationId xmlns:p14="http://schemas.microsoft.com/office/powerpoint/2010/main" val="2485974318"/>
+        <p14:creationId xmlns:p14="http://schemas.microsoft.com/office/powerpoint/2010/main" val="34690611"/>
       </p:ext>
     </p:extLst>
   </p:cSld>
@@ -6150,6 +7272,354 @@
       </p:grpSpPr>
       <p:sp>
         <p:nvSpPr>
+          <p:cNvPr id="2" name="날짜 개체 틀 1"/>
+          <p:cNvSpPr>
+            <a:spLocks noGrp="1"/>
+          </p:cNvSpPr>
+          <p:nvPr>
+            <p:ph type="dt" sz="half" idx="10"/>
+          </p:nvPr>
+        </p:nvSpPr>
+        <p:spPr/>
+        <p:txBody>
+          <a:bodyPr/>
+          <a:lstStyle/>
+          <a:p>
+            <a:fld id="{0E19CB95-6D28-40F1-9DA3-1BAC5D4B5B4F}" type="datetime6">
+              <a:rPr lang="ko-KR" altLang="en-US" smtClean="0"/>
+              <a:t>2024년 8월</a:t>
+            </a:fld>
+            <a:endParaRPr lang="ko-KR" altLang="en-US"/>
+          </a:p>
+        </p:txBody>
+      </p:sp>
+      <p:sp>
+        <p:nvSpPr>
+          <p:cNvPr id="3" name="슬라이드 번호 개체 틀 2"/>
+          <p:cNvSpPr>
+            <a:spLocks noGrp="1"/>
+          </p:cNvSpPr>
+          <p:nvPr>
+            <p:ph type="sldNum" sz="quarter" idx="12"/>
+          </p:nvPr>
+        </p:nvSpPr>
+        <p:spPr/>
+        <p:txBody>
+          <a:bodyPr/>
+          <a:lstStyle/>
+          <a:p>
+            <a:fld id="{083A2CE0-18CD-4102-B738-4ACFF9E68BA4}" type="slidenum">
+              <a:rPr lang="ko-KR" altLang="en-US" smtClean="0"/>
+              <a:t>12</a:t>
+            </a:fld>
+            <a:endParaRPr lang="ko-KR" altLang="en-US"/>
+          </a:p>
+        </p:txBody>
+      </p:sp>
+      <p:sp>
+        <p:nvSpPr>
+          <p:cNvPr id="4" name="제목 3"/>
+          <p:cNvSpPr>
+            <a:spLocks noGrp="1"/>
+          </p:cNvSpPr>
+          <p:nvPr>
+            <p:ph type="title"/>
+          </p:nvPr>
+        </p:nvSpPr>
+        <p:spPr/>
+        <p:txBody>
+          <a:bodyPr/>
+          <a:lstStyle/>
+          <a:p>
+            <a:r>
+              <a:rPr lang="en-US" altLang="ko-KR" dirty="0"/>
+              <a:t>State</a:t>
+            </a:r>
+            <a:endParaRPr lang="ko-KR" altLang="en-US" dirty="0"/>
+          </a:p>
+        </p:txBody>
+      </p:sp>
+    </p:spTree>
+    <p:extLst>
+      <p:ext uri="{BB962C8B-B14F-4D97-AF65-F5344CB8AC3E}">
+        <p14:creationId xmlns:p14="http://schemas.microsoft.com/office/powerpoint/2010/main" val="3256277222"/>
+      </p:ext>
+    </p:extLst>
+  </p:cSld>
+  <p:clrMapOvr>
+    <a:masterClrMapping/>
+  </p:clrMapOvr>
+</p:sld>
+</file>
+
+<file path=ppt/slides/slide13.xml><?xml version="1.0" encoding="utf-8"?>
+<p:sld xmlns:a="http://schemas.openxmlformats.org/drawingml/2006/main" xmlns:r="http://schemas.openxmlformats.org/officeDocument/2006/relationships" xmlns:p="http://schemas.openxmlformats.org/presentationml/2006/main">
+  <p:cSld>
+    <p:spTree>
+      <p:nvGrpSpPr>
+        <p:cNvPr id="1" name=""/>
+        <p:cNvGrpSpPr/>
+        <p:nvPr/>
+      </p:nvGrpSpPr>
+      <p:grpSpPr>
+        <a:xfrm>
+          <a:off x="0" y="0"/>
+          <a:ext cx="0" cy="0"/>
+          <a:chOff x="0" y="0"/>
+          <a:chExt cx="0" cy="0"/>
+        </a:xfrm>
+      </p:grpSpPr>
+      <p:sp>
+        <p:nvSpPr>
+          <p:cNvPr id="3" name="내용 개체 틀 2">
+            <a:extLst>
+              <a:ext uri="{FF2B5EF4-FFF2-40B4-BE49-F238E27FC236}">
+                <a16:creationId xmlns:a16="http://schemas.microsoft.com/office/drawing/2014/main" id="{DA4637DE-CA85-54BD-9BB5-8A7EF0E6FC9C}"/>
+              </a:ext>
+            </a:extLst>
+          </p:cNvPr>
+          <p:cNvSpPr>
+            <a:spLocks noGrp="1"/>
+          </p:cNvSpPr>
+          <p:nvPr>
+            <p:ph idx="1"/>
+          </p:nvPr>
+        </p:nvSpPr>
+        <p:spPr/>
+        <p:txBody>
+          <a:bodyPr/>
+          <a:lstStyle/>
+          <a:p>
+            <a:r>
+              <a:rPr lang="en-US" altLang="ko-KR" dirty="0"/>
+              <a:t>React</a:t>
+            </a:r>
+            <a:r>
+              <a:rPr lang="ko-KR" altLang="en-US" dirty="0"/>
+              <a:t>에서 앱의 유동적인 데이터를 다루기 위한 개체</a:t>
+            </a:r>
+            <a:endParaRPr lang="en-US" altLang="ko-KR" dirty="0"/>
+          </a:p>
+          <a:p>
+            <a:r>
+              <a:rPr lang="ko-KR" altLang="en-US" dirty="0">
+                <a:solidFill>
+                  <a:schemeClr val="accent1"/>
+                </a:solidFill>
+              </a:rPr>
+              <a:t>계속해서 변하는 특정 상태</a:t>
+            </a:r>
+            <a:endParaRPr lang="en-US" altLang="ko-KR" dirty="0">
+              <a:solidFill>
+                <a:schemeClr val="accent1"/>
+              </a:solidFill>
+            </a:endParaRPr>
+          </a:p>
+          <a:p>
+            <a:r>
+              <a:rPr lang="ko-KR" altLang="en-US" dirty="0"/>
+              <a:t>상태에 따라 다른 동작을 함</a:t>
+            </a:r>
+            <a:endParaRPr lang="en-US" altLang="ko-KR" dirty="0"/>
+          </a:p>
+          <a:p>
+            <a:r>
+              <a:rPr lang="ko-KR" altLang="en-US" dirty="0"/>
+              <a:t>왜 사용할까</a:t>
+            </a:r>
+            <a:r>
+              <a:rPr lang="en-US" altLang="ko-KR" dirty="0"/>
+              <a:t>?</a:t>
+            </a:r>
+          </a:p>
+          <a:p>
+            <a:pPr lvl="1"/>
+            <a:r>
+              <a:rPr lang="en-US" altLang="ko-KR" dirty="0">
+                <a:solidFill>
+                  <a:schemeClr val="accent1"/>
+                </a:solidFill>
+              </a:rPr>
+              <a:t>State</a:t>
+            </a:r>
+            <a:r>
+              <a:rPr lang="ko-KR" altLang="en-US" dirty="0">
+                <a:solidFill>
+                  <a:schemeClr val="accent1"/>
+                </a:solidFill>
+              </a:rPr>
+              <a:t>가 </a:t>
+            </a:r>
+            <a:r>
+              <a:rPr lang="ko-KR" altLang="en-US" dirty="0" err="1">
+                <a:solidFill>
+                  <a:schemeClr val="accent1"/>
+                </a:solidFill>
+              </a:rPr>
+              <a:t>변경될시</a:t>
+            </a:r>
+            <a:r>
+              <a:rPr lang="ko-KR" altLang="en-US" dirty="0">
+                <a:solidFill>
+                  <a:schemeClr val="accent1"/>
+                </a:solidFill>
+              </a:rPr>
+              <a:t> 자동으로 </a:t>
+            </a:r>
+            <a:r>
+              <a:rPr lang="ko-KR" altLang="en-US" dirty="0" err="1">
+                <a:solidFill>
+                  <a:schemeClr val="accent1"/>
+                </a:solidFill>
+              </a:rPr>
+              <a:t>재랜더링</a:t>
+            </a:r>
+            <a:r>
+              <a:rPr lang="ko-KR" altLang="en-US" dirty="0"/>
+              <a:t> 되기 때문</a:t>
+            </a:r>
+            <a:endParaRPr lang="en-US" altLang="ko-KR" dirty="0"/>
+          </a:p>
+          <a:p>
+            <a:pPr lvl="1"/>
+            <a:r>
+              <a:rPr lang="ko-KR" altLang="en-US" dirty="0"/>
+              <a:t>이 점이 변수와 다른 점</a:t>
+            </a:r>
+            <a:endParaRPr lang="en-US" altLang="ko-KR" dirty="0"/>
+          </a:p>
+          <a:p>
+            <a:endParaRPr lang="ko-KR" altLang="en-US" dirty="0"/>
+          </a:p>
+        </p:txBody>
+      </p:sp>
+      <p:sp>
+        <p:nvSpPr>
+          <p:cNvPr id="4" name="날짜 개체 틀 3">
+            <a:extLst>
+              <a:ext uri="{FF2B5EF4-FFF2-40B4-BE49-F238E27FC236}">
+                <a16:creationId xmlns:a16="http://schemas.microsoft.com/office/drawing/2014/main" id="{9FBA535A-322E-1646-CF09-63873BF8C515}"/>
+              </a:ext>
+            </a:extLst>
+          </p:cNvPr>
+          <p:cNvSpPr>
+            <a:spLocks noGrp="1"/>
+          </p:cNvSpPr>
+          <p:nvPr>
+            <p:ph type="dt" sz="half" idx="10"/>
+          </p:nvPr>
+        </p:nvSpPr>
+        <p:spPr/>
+        <p:txBody>
+          <a:bodyPr/>
+          <a:lstStyle/>
+          <a:p>
+            <a:fld id="{3CDE9A52-66EB-4C85-B703-18792A161207}" type="datetime6">
+              <a:rPr lang="ko-KR" altLang="en-US" smtClean="0"/>
+              <a:t>2024년 8월</a:t>
+            </a:fld>
+            <a:endParaRPr lang="ko-KR" altLang="en-US"/>
+          </a:p>
+        </p:txBody>
+      </p:sp>
+      <p:sp>
+        <p:nvSpPr>
+          <p:cNvPr id="5" name="슬라이드 번호 개체 틀 4">
+            <a:extLst>
+              <a:ext uri="{FF2B5EF4-FFF2-40B4-BE49-F238E27FC236}">
+                <a16:creationId xmlns:a16="http://schemas.microsoft.com/office/drawing/2014/main" id="{E7066AF9-BB3C-686E-909F-CE3BE0BF5FCA}"/>
+              </a:ext>
+            </a:extLst>
+          </p:cNvPr>
+          <p:cNvSpPr>
+            <a:spLocks noGrp="1"/>
+          </p:cNvSpPr>
+          <p:nvPr>
+            <p:ph type="sldNum" sz="quarter" idx="12"/>
+          </p:nvPr>
+        </p:nvSpPr>
+        <p:spPr/>
+        <p:txBody>
+          <a:bodyPr/>
+          <a:lstStyle/>
+          <a:p>
+            <a:fld id="{083A2CE0-18CD-4102-B738-4ACFF9E68BA4}" type="slidenum">
+              <a:rPr lang="ko-KR" altLang="en-US" smtClean="0"/>
+              <a:t>13</a:t>
+            </a:fld>
+            <a:endParaRPr lang="ko-KR" altLang="en-US"/>
+          </a:p>
+        </p:txBody>
+      </p:sp>
+      <p:sp>
+        <p:nvSpPr>
+          <p:cNvPr id="2" name="제목 1">
+            <a:extLst>
+              <a:ext uri="{FF2B5EF4-FFF2-40B4-BE49-F238E27FC236}">
+                <a16:creationId xmlns:a16="http://schemas.microsoft.com/office/drawing/2014/main" id="{E11A36B4-A46B-4E8E-E378-EA3A6D84A2C6}"/>
+              </a:ext>
+            </a:extLst>
+          </p:cNvPr>
+          <p:cNvSpPr>
+            <a:spLocks noGrp="1"/>
+          </p:cNvSpPr>
+          <p:nvPr>
+            <p:ph type="title"/>
+          </p:nvPr>
+        </p:nvSpPr>
+        <p:spPr/>
+        <p:txBody>
+          <a:bodyPr/>
+          <a:lstStyle/>
+          <a:p>
+            <a:r>
+              <a:rPr lang="en-US" altLang="ko-KR" dirty="0"/>
+              <a:t>state</a:t>
+            </a:r>
+            <a:r>
+              <a:rPr lang="ko-KR" altLang="en-US" dirty="0"/>
+              <a:t>란</a:t>
+            </a:r>
+            <a:r>
+              <a:rPr lang="en-US" altLang="ko-KR" dirty="0"/>
+              <a:t>?</a:t>
+            </a:r>
+            <a:endParaRPr lang="ko-KR" altLang="en-US" dirty="0"/>
+          </a:p>
+        </p:txBody>
+      </p:sp>
+    </p:spTree>
+    <p:extLst>
+      <p:ext uri="{BB962C8B-B14F-4D97-AF65-F5344CB8AC3E}">
+        <p14:creationId xmlns:p14="http://schemas.microsoft.com/office/powerpoint/2010/main" val="2485974318"/>
+      </p:ext>
+    </p:extLst>
+  </p:cSld>
+  <p:clrMapOvr>
+    <a:masterClrMapping/>
+  </p:clrMapOvr>
+</p:sld>
+</file>
+
+<file path=ppt/slides/slide14.xml><?xml version="1.0" encoding="utf-8"?>
+<p:sld xmlns:a="http://schemas.openxmlformats.org/drawingml/2006/main" xmlns:r="http://schemas.openxmlformats.org/officeDocument/2006/relationships" xmlns:p="http://schemas.openxmlformats.org/presentationml/2006/main">
+  <p:cSld>
+    <p:spTree>
+      <p:nvGrpSpPr>
+        <p:cNvPr id="1" name=""/>
+        <p:cNvGrpSpPr/>
+        <p:nvPr/>
+      </p:nvGrpSpPr>
+      <p:grpSpPr>
+        <a:xfrm>
+          <a:off x="0" y="0"/>
+          <a:ext cx="0" cy="0"/>
+          <a:chOff x="0" y="0"/>
+          <a:chExt cx="0" cy="0"/>
+        </a:xfrm>
+      </p:grpSpPr>
+      <p:sp>
+        <p:nvSpPr>
           <p:cNvPr id="10" name="내용 개체 틀 2">
             <a:extLst>
               <a:ext uri="{FF2B5EF4-FFF2-40B4-BE49-F238E27FC236}">
@@ -6474,7 +7944,7 @@
           <a:p>
             <a:fld id="{3CDE9A52-66EB-4C85-B703-18792A161207}" type="datetime6">
               <a:rPr lang="ko-KR" altLang="en-US" smtClean="0"/>
-              <a:t>2024년 7월</a:t>
+              <a:t>2024년 8월</a:t>
             </a:fld>
             <a:endParaRPr lang="ko-KR" altLang="en-US"/>
           </a:p>
@@ -6503,7 +7973,7 @@
           <a:p>
             <a:fld id="{083A2CE0-18CD-4102-B738-4ACFF9E68BA4}" type="slidenum">
               <a:rPr lang="ko-KR" altLang="en-US" smtClean="0"/>
-              <a:t>12</a:t>
+              <a:t>14</a:t>
             </a:fld>
             <a:endParaRPr lang="ko-KR" altLang="en-US"/>
           </a:p>
@@ -6587,7 +8057,7 @@
 </p:sld>
 </file>
 
-<file path=ppt/slides/slide13.xml><?xml version="1.0" encoding="utf-8"?>
+<file path=ppt/slides/slide15.xml><?xml version="1.0" encoding="utf-8"?>
 <p:sld xmlns:a="http://schemas.openxmlformats.org/drawingml/2006/main" xmlns:r="http://schemas.openxmlformats.org/officeDocument/2006/relationships" xmlns:p="http://schemas.openxmlformats.org/presentationml/2006/main">
   <p:cSld>
     <p:spTree>
@@ -6658,7 +8128,7 @@
           <a:p>
             <a:fld id="{3C9CE3CE-253F-4F9D-BA15-C226C8D8501E}" type="datetime6">
               <a:rPr lang="ko-KR" altLang="en-US" smtClean="0"/>
-              <a:t>2024년 7월</a:t>
+              <a:t>2024년 8월</a:t>
             </a:fld>
             <a:endParaRPr lang="ko-KR" altLang="en-US"/>
           </a:p>
@@ -6687,7 +8157,7 @@
           <a:p>
             <a:fld id="{083A2CE0-18CD-4102-B738-4ACFF9E68BA4}" type="slidenum">
               <a:rPr lang="ko-KR" altLang="en-US" smtClean="0"/>
-              <a:t>13</a:t>
+              <a:t>15</a:t>
             </a:fld>
             <a:endParaRPr lang="ko-KR" altLang="en-US"/>
           </a:p>
@@ -6769,7 +8239,7 @@
 </p:sld>
 </file>
 
-<file path=ppt/slides/slide14.xml><?xml version="1.0" encoding="utf-8"?>
+<file path=ppt/slides/slide16.xml><?xml version="1.0" encoding="utf-8"?>
 <p:sld xmlns:a="http://schemas.openxmlformats.org/drawingml/2006/main" xmlns:r="http://schemas.openxmlformats.org/officeDocument/2006/relationships" xmlns:p="http://schemas.openxmlformats.org/presentationml/2006/main">
   <p:cSld>
     <p:spTree>
@@ -6837,7 +8307,7 @@
           <a:p>
             <a:fld id="{3C9CE3CE-253F-4F9D-BA15-C226C8D8501E}" type="datetime6">
               <a:rPr lang="ko-KR" altLang="en-US" smtClean="0"/>
-              <a:t>2024년 7월</a:t>
+              <a:t>2024년 8월</a:t>
             </a:fld>
             <a:endParaRPr lang="ko-KR" altLang="en-US"/>
           </a:p>
@@ -6866,7 +8336,7 @@
           <a:p>
             <a:fld id="{083A2CE0-18CD-4102-B738-4ACFF9E68BA4}" type="slidenum">
               <a:rPr lang="ko-KR" altLang="en-US" smtClean="0"/>
-              <a:t>14</a:t>
+              <a:t>16</a:t>
             </a:fld>
             <a:endParaRPr lang="ko-KR" altLang="en-US"/>
           </a:p>
@@ -6948,7 +8418,7 @@
 </p:sld>
 </file>
 
-<file path=ppt/slides/slide15.xml><?xml version="1.0" encoding="utf-8"?>
+<file path=ppt/slides/slide17.xml><?xml version="1.0" encoding="utf-8"?>
 <p:sld xmlns:a="http://schemas.openxmlformats.org/drawingml/2006/main" xmlns:r="http://schemas.openxmlformats.org/officeDocument/2006/relationships" xmlns:p="http://schemas.openxmlformats.org/presentationml/2006/main">
   <p:cSld>
     <p:spTree>
@@ -7074,7 +8544,7 @@
           <a:p>
             <a:fld id="{3C9CE3CE-253F-4F9D-BA15-C226C8D8501E}" type="datetime6">
               <a:rPr lang="ko-KR" altLang="en-US" smtClean="0"/>
-              <a:t>2024년 7월</a:t>
+              <a:t>2024년 8월</a:t>
             </a:fld>
             <a:endParaRPr lang="ko-KR" altLang="en-US"/>
           </a:p>
@@ -7103,7 +8573,7 @@
           <a:p>
             <a:fld id="{083A2CE0-18CD-4102-B738-4ACFF9E68BA4}" type="slidenum">
               <a:rPr lang="ko-KR" altLang="en-US" smtClean="0"/>
-              <a:t>15</a:t>
+              <a:t>17</a:t>
             </a:fld>
             <a:endParaRPr lang="ko-KR" altLang="en-US"/>
           </a:p>
@@ -7155,7 +8625,7 @@
 </p:sld>
 </file>
 
-<file path=ppt/slides/slide16.xml><?xml version="1.0" encoding="utf-8"?>
+<file path=ppt/slides/slide18.xml><?xml version="1.0" encoding="utf-8"?>
 <p:sld xmlns:a="http://schemas.openxmlformats.org/drawingml/2006/main" xmlns:r="http://schemas.openxmlformats.org/officeDocument/2006/relationships" xmlns:p="http://schemas.openxmlformats.org/presentationml/2006/main">
   <p:cSld>
     <p:spTree>
@@ -7195,7 +8665,7 @@
           <a:p>
             <a:fld id="{3C9CE3CE-253F-4F9D-BA15-C226C8D8501E}" type="datetime6">
               <a:rPr lang="ko-KR" altLang="en-US" smtClean="0"/>
-              <a:t>2024년 7월</a:t>
+              <a:t>2024년 8월</a:t>
             </a:fld>
             <a:endParaRPr lang="ko-KR" altLang="en-US"/>
           </a:p>
@@ -7224,7 +8694,7 @@
           <a:p>
             <a:fld id="{083A2CE0-18CD-4102-B738-4ACFF9E68BA4}" type="slidenum">
               <a:rPr lang="ko-KR" altLang="en-US" smtClean="0"/>
-              <a:t>16</a:t>
+              <a:t>18</a:t>
             </a:fld>
             <a:endParaRPr lang="ko-KR" altLang="en-US"/>
           </a:p>
@@ -7310,7 +8780,7 @@
 </p:sld>
 </file>
 
-<file path=ppt/slides/slide17.xml><?xml version="1.0" encoding="utf-8"?>
+<file path=ppt/slides/slide19.xml><?xml version="1.0" encoding="utf-8"?>
 <p:sld xmlns:a="http://schemas.openxmlformats.org/drawingml/2006/main" xmlns:r="http://schemas.openxmlformats.org/officeDocument/2006/relationships" xmlns:p="http://schemas.openxmlformats.org/presentationml/2006/main">
   <p:cSld>
     <p:spTree>
@@ -7350,7 +8820,7 @@
           <a:p>
             <a:fld id="{3C9CE3CE-253F-4F9D-BA15-C226C8D8501E}" type="datetime6">
               <a:rPr lang="ko-KR" altLang="en-US" smtClean="0"/>
-              <a:t>2024년 7월</a:t>
+              <a:t>2024년 8월</a:t>
             </a:fld>
             <a:endParaRPr lang="ko-KR" altLang="en-US"/>
           </a:p>
@@ -7379,7 +8849,7 @@
           <a:p>
             <a:fld id="{083A2CE0-18CD-4102-B738-4ACFF9E68BA4}" type="slidenum">
               <a:rPr lang="ko-KR" altLang="en-US" smtClean="0"/>
-              <a:t>17</a:t>
+              <a:t>19</a:t>
             </a:fld>
             <a:endParaRPr lang="ko-KR" altLang="en-US"/>
           </a:p>
@@ -8555,7 +10025,7 @@
 </p:sld>
 </file>
 
-<file path=ppt/slides/slide18.xml><?xml version="1.0" encoding="utf-8"?>
+<file path=ppt/slides/slide2.xml><?xml version="1.0" encoding="utf-8"?>
 <p:sld xmlns:a="http://schemas.openxmlformats.org/drawingml/2006/main" xmlns:r="http://schemas.openxmlformats.org/officeDocument/2006/relationships" xmlns:p="http://schemas.openxmlformats.org/presentationml/2006/main">
   <p:cSld>
     <p:spTree>
@@ -8574,6 +10044,105 @@
       </p:grpSpPr>
       <p:sp>
         <p:nvSpPr>
+          <p:cNvPr id="2" name="날짜 개체 틀 1"/>
+          <p:cNvSpPr>
+            <a:spLocks noGrp="1"/>
+          </p:cNvSpPr>
+          <p:nvPr>
+            <p:ph type="dt" sz="half" idx="10"/>
+          </p:nvPr>
+        </p:nvSpPr>
+        <p:spPr/>
+        <p:txBody>
+          <a:bodyPr/>
+          <a:lstStyle/>
+          <a:p>
+            <a:fld id="{0E19CB95-6D28-40F1-9DA3-1BAC5D4B5B4F}" type="datetime6">
+              <a:rPr lang="ko-KR" altLang="en-US" smtClean="0"/>
+              <a:t>2024년 8월</a:t>
+            </a:fld>
+            <a:endParaRPr lang="ko-KR" altLang="en-US"/>
+          </a:p>
+        </p:txBody>
+      </p:sp>
+      <p:sp>
+        <p:nvSpPr>
+          <p:cNvPr id="3" name="슬라이드 번호 개체 틀 2"/>
+          <p:cNvSpPr>
+            <a:spLocks noGrp="1"/>
+          </p:cNvSpPr>
+          <p:nvPr>
+            <p:ph type="sldNum" sz="quarter" idx="12"/>
+          </p:nvPr>
+        </p:nvSpPr>
+        <p:spPr/>
+        <p:txBody>
+          <a:bodyPr/>
+          <a:lstStyle/>
+          <a:p>
+            <a:fld id="{083A2CE0-18CD-4102-B738-4ACFF9E68BA4}" type="slidenum">
+              <a:rPr lang="ko-KR" altLang="en-US" smtClean="0"/>
+              <a:t>2</a:t>
+            </a:fld>
+            <a:endParaRPr lang="ko-KR" altLang="en-US"/>
+          </a:p>
+        </p:txBody>
+      </p:sp>
+      <p:sp>
+        <p:nvSpPr>
+          <p:cNvPr id="4" name="제목 3"/>
+          <p:cNvSpPr>
+            <a:spLocks noGrp="1"/>
+          </p:cNvSpPr>
+          <p:nvPr>
+            <p:ph type="title"/>
+          </p:nvPr>
+        </p:nvSpPr>
+        <p:spPr/>
+        <p:txBody>
+          <a:bodyPr/>
+          <a:lstStyle/>
+          <a:p>
+            <a:r>
+              <a:rPr lang="en-US" altLang="ko-KR" dirty="0"/>
+              <a:t>Props</a:t>
+            </a:r>
+            <a:endParaRPr lang="ko-KR" altLang="en-US" dirty="0"/>
+          </a:p>
+        </p:txBody>
+      </p:sp>
+    </p:spTree>
+    <p:extLst>
+      <p:ext uri="{BB962C8B-B14F-4D97-AF65-F5344CB8AC3E}">
+        <p14:creationId xmlns:p14="http://schemas.microsoft.com/office/powerpoint/2010/main" val="2393120294"/>
+      </p:ext>
+    </p:extLst>
+  </p:cSld>
+  <p:clrMapOvr>
+    <a:masterClrMapping/>
+  </p:clrMapOvr>
+</p:sld>
+</file>
+
+<file path=ppt/slides/slide20.xml><?xml version="1.0" encoding="utf-8"?>
+<p:sld xmlns:a="http://schemas.openxmlformats.org/drawingml/2006/main" xmlns:r="http://schemas.openxmlformats.org/officeDocument/2006/relationships" xmlns:p="http://schemas.openxmlformats.org/presentationml/2006/main">
+  <p:cSld>
+    <p:spTree>
+      <p:nvGrpSpPr>
+        <p:cNvPr id="1" name=""/>
+        <p:cNvGrpSpPr/>
+        <p:nvPr/>
+      </p:nvGrpSpPr>
+      <p:grpSpPr>
+        <a:xfrm>
+          <a:off x="0" y="0"/>
+          <a:ext cx="0" cy="0"/>
+          <a:chOff x="0" y="0"/>
+          <a:chExt cx="0" cy="0"/>
+        </a:xfrm>
+      </p:grpSpPr>
+      <p:sp>
+        <p:nvSpPr>
           <p:cNvPr id="4" name="날짜 개체 틀 3">
             <a:extLst>
               <a:ext uri="{FF2B5EF4-FFF2-40B4-BE49-F238E27FC236}">
@@ -8595,7 +10164,7 @@
           <a:p>
             <a:fld id="{2C16E909-BEFD-4A9C-BB36-F9A91296299E}" type="datetime6">
               <a:rPr lang="ko-KR" altLang="en-US" smtClean="0"/>
-              <a:t>2024년 7월</a:t>
+              <a:t>2024년 8월</a:t>
             </a:fld>
             <a:endParaRPr lang="ko-KR" altLang="en-US"/>
           </a:p>
@@ -8624,7 +10193,7 @@
           <a:p>
             <a:fld id="{083A2CE0-18CD-4102-B738-4ACFF9E68BA4}" type="slidenum">
               <a:rPr lang="ko-KR" altLang="en-US" smtClean="0"/>
-              <a:t>18</a:t>
+              <a:t>20</a:t>
             </a:fld>
             <a:endParaRPr lang="ko-KR" altLang="en-US"/>
           </a:p>
@@ -8710,7 +10279,7 @@
 </p:sld>
 </file>
 
-<file path=ppt/slides/slide2.xml><?xml version="1.0" encoding="utf-8"?>
+<file path=ppt/slides/slide21.xml><?xml version="1.0" encoding="utf-8"?>
 <p:sld xmlns:a="http://schemas.openxmlformats.org/drawingml/2006/main" xmlns:r="http://schemas.openxmlformats.org/officeDocument/2006/relationships" xmlns:p="http://schemas.openxmlformats.org/presentationml/2006/main">
   <p:cSld>
     <p:spTree>
@@ -8729,7 +10298,54 @@
       </p:grpSpPr>
       <p:sp>
         <p:nvSpPr>
-          <p:cNvPr id="2" name="날짜 개체 틀 1"/>
+          <p:cNvPr id="13" name="내용 개체 틀 2">
+            <a:extLst>
+              <a:ext uri="{FF2B5EF4-FFF2-40B4-BE49-F238E27FC236}">
+                <a16:creationId xmlns:a16="http://schemas.microsoft.com/office/drawing/2014/main" id="{847FD532-7F61-A001-537F-B970BD821AF3}"/>
+              </a:ext>
+            </a:extLst>
+          </p:cNvPr>
+          <p:cNvSpPr>
+            <a:spLocks noGrp="1"/>
+          </p:cNvSpPr>
+          <p:nvPr>
+            <p:ph idx="1"/>
+          </p:nvPr>
+        </p:nvSpPr>
+        <p:spPr>
+          <a:xfrm>
+            <a:off x="510988" y="1328391"/>
+            <a:ext cx="11260802" cy="5328442"/>
+          </a:xfrm>
+        </p:spPr>
+        <p:txBody>
+          <a:bodyPr>
+            <a:normAutofit/>
+          </a:bodyPr>
+          <a:lstStyle/>
+          <a:p>
+            <a:endParaRPr lang="en-US" altLang="ko-KR" dirty="0"/>
+          </a:p>
+          <a:p>
+            <a:pPr marL="0" indent="0">
+              <a:buNone/>
+            </a:pPr>
+            <a:endParaRPr lang="en-US" altLang="ko-KR" dirty="0"/>
+          </a:p>
+          <a:p>
+            <a:endParaRPr lang="en-US" altLang="ko-KR" dirty="0"/>
+          </a:p>
+        </p:txBody>
+      </p:sp>
+      <p:sp>
+        <p:nvSpPr>
+          <p:cNvPr id="4" name="날짜 개체 틀 3">
+            <a:extLst>
+              <a:ext uri="{FF2B5EF4-FFF2-40B4-BE49-F238E27FC236}">
+                <a16:creationId xmlns:a16="http://schemas.microsoft.com/office/drawing/2014/main" id="{A695DDE5-0A39-A366-4CFE-A283911999CD}"/>
+              </a:ext>
+            </a:extLst>
+          </p:cNvPr>
           <p:cNvSpPr>
             <a:spLocks noGrp="1"/>
           </p:cNvSpPr>
@@ -8742,9 +10358,9 @@
           <a:bodyPr/>
           <a:lstStyle/>
           <a:p>
-            <a:fld id="{0E19CB95-6D28-40F1-9DA3-1BAC5D4B5B4F}" type="datetime6">
+            <a:fld id="{0F78D9C4-20C1-4B15-A116-16DC77AD9A1E}" type="datetime1">
               <a:rPr lang="ko-KR" altLang="en-US" smtClean="0"/>
-              <a:t>2024년 7월</a:t>
+              <a:t>2024-08-01</a:t>
             </a:fld>
             <a:endParaRPr lang="ko-KR" altLang="en-US"/>
           </a:p>
@@ -8752,7 +10368,13 @@
       </p:sp>
       <p:sp>
         <p:nvSpPr>
-          <p:cNvPr id="3" name="슬라이드 번호 개체 틀 2"/>
+          <p:cNvPr id="5" name="슬라이드 번호 개체 틀 4">
+            <a:extLst>
+              <a:ext uri="{FF2B5EF4-FFF2-40B4-BE49-F238E27FC236}">
+                <a16:creationId xmlns:a16="http://schemas.microsoft.com/office/drawing/2014/main" id="{5E040F43-60A7-C50D-1F5B-F984054F2D7C}"/>
+              </a:ext>
+            </a:extLst>
+          </p:cNvPr>
           <p:cNvSpPr>
             <a:spLocks noGrp="1"/>
           </p:cNvSpPr>
@@ -8767,7 +10389,7 @@
           <a:p>
             <a:fld id="{083A2CE0-18CD-4102-B738-4ACFF9E68BA4}" type="slidenum">
               <a:rPr lang="ko-KR" altLang="en-US" smtClean="0"/>
-              <a:t>2</a:t>
+              <a:t>21</a:t>
             </a:fld>
             <a:endParaRPr lang="ko-KR" altLang="en-US"/>
           </a:p>
@@ -8775,7 +10397,13 @@
       </p:sp>
       <p:sp>
         <p:nvSpPr>
-          <p:cNvPr id="4" name="제목 3"/>
+          <p:cNvPr id="2" name="제목 1">
+            <a:extLst>
+              <a:ext uri="{FF2B5EF4-FFF2-40B4-BE49-F238E27FC236}">
+                <a16:creationId xmlns:a16="http://schemas.microsoft.com/office/drawing/2014/main" id="{5FAC57F5-99D7-9C46-B6C1-D16224151FE9}"/>
+              </a:ext>
+            </a:extLst>
+          </p:cNvPr>
           <p:cNvSpPr>
             <a:spLocks noGrp="1"/>
           </p:cNvSpPr>
@@ -8789,17 +10417,434 @@
           <a:lstStyle/>
           <a:p>
             <a:r>
+              <a:rPr lang="ko-KR" altLang="en-US" dirty="0">
+                <a:solidFill>
+                  <a:srgbClr val="6EC173"/>
+                </a:solidFill>
+              </a:rPr>
+              <a:t>실습</a:t>
+            </a:r>
+            <a:r>
+              <a:rPr lang="en-US" altLang="ko-KR" dirty="0">
+                <a:solidFill>
+                  <a:srgbClr val="6EC173"/>
+                </a:solidFill>
+              </a:rPr>
+              <a:t>.  </a:t>
+            </a:r>
+            <a:r>
               <a:rPr lang="en-US" altLang="ko-KR" dirty="0"/>
-              <a:t>Props</a:t>
-            </a:r>
-            <a:endParaRPr lang="ko-KR" altLang="en-US" dirty="0"/>
+              <a:t> State </a:t>
+            </a:r>
+            <a:r>
+              <a:rPr lang="ko-KR" altLang="en-US" dirty="0"/>
+              <a:t>실습</a:t>
+            </a:r>
+          </a:p>
+        </p:txBody>
+      </p:sp>
+      <p:sp>
+        <p:nvSpPr>
+          <p:cNvPr id="6" name="내용 개체 틀 1">
+            <a:extLst>
+              <a:ext uri="{FF2B5EF4-FFF2-40B4-BE49-F238E27FC236}">
+                <a16:creationId xmlns:a16="http://schemas.microsoft.com/office/drawing/2014/main" id="{70C2BA37-BE91-39C4-AC08-0E8A1052E2F7}"/>
+              </a:ext>
+            </a:extLst>
+          </p:cNvPr>
+          <p:cNvSpPr txBox="1">
+            <a:spLocks/>
+          </p:cNvSpPr>
+          <p:nvPr/>
+        </p:nvSpPr>
+        <p:spPr>
+          <a:xfrm>
+            <a:off x="838200" y="1825625"/>
+            <a:ext cx="10515600" cy="4351338"/>
+          </a:xfrm>
+          <a:prstGeom prst="rect">
+            <a:avLst/>
+          </a:prstGeom>
+        </p:spPr>
+        <p:txBody>
+          <a:bodyPr vert="horz" lIns="91440" tIns="45720" rIns="91440" bIns="45720" rtlCol="0">
+            <a:normAutofit/>
+          </a:bodyPr>
+          <a:lstStyle>
+            <a:lvl1pPr marL="228600" indent="-228600" algn="l" defTabSz="914400" rtl="0" eaLnBrk="1" latinLnBrk="1" hangingPunct="1">
+              <a:lnSpc>
+                <a:spcPct val="90000"/>
+              </a:lnSpc>
+              <a:spcBef>
+                <a:spcPts val="1000"/>
+              </a:spcBef>
+              <a:buFont typeface="Arial" panose="020B0604020202020204" pitchFamily="34" charset="0"/>
+              <a:buChar char="•"/>
+              <a:defRPr sz="2800" kern="1200">
+                <a:solidFill>
+                  <a:schemeClr val="tx1"/>
+                </a:solidFill>
+                <a:latin typeface="+mn-lt"/>
+                <a:ea typeface="+mn-ea"/>
+                <a:cs typeface="+mn-cs"/>
+              </a:defRPr>
+            </a:lvl1pPr>
+            <a:lvl2pPr marL="685800" indent="-228600" algn="l" defTabSz="914400" rtl="0" eaLnBrk="1" latinLnBrk="1" hangingPunct="1">
+              <a:lnSpc>
+                <a:spcPct val="90000"/>
+              </a:lnSpc>
+              <a:spcBef>
+                <a:spcPts val="500"/>
+              </a:spcBef>
+              <a:buFont typeface="Arial" panose="020B0604020202020204" pitchFamily="34" charset="0"/>
+              <a:buChar char="•"/>
+              <a:defRPr sz="2400" kern="1200">
+                <a:solidFill>
+                  <a:schemeClr val="tx1"/>
+                </a:solidFill>
+                <a:latin typeface="+mn-lt"/>
+                <a:ea typeface="+mn-ea"/>
+                <a:cs typeface="+mn-cs"/>
+              </a:defRPr>
+            </a:lvl2pPr>
+            <a:lvl3pPr marL="1143000" indent="-228600" algn="l" defTabSz="914400" rtl="0" eaLnBrk="1" latinLnBrk="1" hangingPunct="1">
+              <a:lnSpc>
+                <a:spcPct val="90000"/>
+              </a:lnSpc>
+              <a:spcBef>
+                <a:spcPts val="500"/>
+              </a:spcBef>
+              <a:buFont typeface="Arial" panose="020B0604020202020204" pitchFamily="34" charset="0"/>
+              <a:buChar char="•"/>
+              <a:defRPr sz="2000" kern="1200">
+                <a:solidFill>
+                  <a:schemeClr val="tx1"/>
+                </a:solidFill>
+                <a:latin typeface="+mn-lt"/>
+                <a:ea typeface="+mn-ea"/>
+                <a:cs typeface="+mn-cs"/>
+              </a:defRPr>
+            </a:lvl3pPr>
+            <a:lvl4pPr marL="1600200" indent="-228600" algn="l" defTabSz="914400" rtl="0" eaLnBrk="1" latinLnBrk="1" hangingPunct="1">
+              <a:lnSpc>
+                <a:spcPct val="90000"/>
+              </a:lnSpc>
+              <a:spcBef>
+                <a:spcPts val="500"/>
+              </a:spcBef>
+              <a:buFont typeface="Arial" panose="020B0604020202020204" pitchFamily="34" charset="0"/>
+              <a:buChar char="•"/>
+              <a:defRPr sz="1800" kern="1200">
+                <a:solidFill>
+                  <a:schemeClr val="tx1"/>
+                </a:solidFill>
+                <a:latin typeface="+mn-lt"/>
+                <a:ea typeface="+mn-ea"/>
+                <a:cs typeface="+mn-cs"/>
+              </a:defRPr>
+            </a:lvl4pPr>
+            <a:lvl5pPr marL="2057400" indent="-228600" algn="l" defTabSz="914400" rtl="0" eaLnBrk="1" latinLnBrk="1" hangingPunct="1">
+              <a:lnSpc>
+                <a:spcPct val="90000"/>
+              </a:lnSpc>
+              <a:spcBef>
+                <a:spcPts val="500"/>
+              </a:spcBef>
+              <a:buFont typeface="Arial" panose="020B0604020202020204" pitchFamily="34" charset="0"/>
+              <a:buChar char="•"/>
+              <a:defRPr sz="1800" kern="1200">
+                <a:solidFill>
+                  <a:schemeClr val="tx1"/>
+                </a:solidFill>
+                <a:latin typeface="+mn-lt"/>
+                <a:ea typeface="+mn-ea"/>
+                <a:cs typeface="+mn-cs"/>
+              </a:defRPr>
+            </a:lvl5pPr>
+            <a:lvl6pPr marL="2514600" indent="-228600" algn="l" defTabSz="914400" rtl="0" eaLnBrk="1" latinLnBrk="1" hangingPunct="1">
+              <a:lnSpc>
+                <a:spcPct val="90000"/>
+              </a:lnSpc>
+              <a:spcBef>
+                <a:spcPts val="500"/>
+              </a:spcBef>
+              <a:buFont typeface="Arial" panose="020B0604020202020204" pitchFamily="34" charset="0"/>
+              <a:buChar char="•"/>
+              <a:defRPr sz="1800" kern="1200">
+                <a:solidFill>
+                  <a:schemeClr val="tx1"/>
+                </a:solidFill>
+                <a:latin typeface="+mn-lt"/>
+                <a:ea typeface="+mn-ea"/>
+                <a:cs typeface="+mn-cs"/>
+              </a:defRPr>
+            </a:lvl6pPr>
+            <a:lvl7pPr marL="2971800" indent="-228600" algn="l" defTabSz="914400" rtl="0" eaLnBrk="1" latinLnBrk="1" hangingPunct="1">
+              <a:lnSpc>
+                <a:spcPct val="90000"/>
+              </a:lnSpc>
+              <a:spcBef>
+                <a:spcPts val="500"/>
+              </a:spcBef>
+              <a:buFont typeface="Arial" panose="020B0604020202020204" pitchFamily="34" charset="0"/>
+              <a:buChar char="•"/>
+              <a:defRPr sz="1800" kern="1200">
+                <a:solidFill>
+                  <a:schemeClr val="tx1"/>
+                </a:solidFill>
+                <a:latin typeface="+mn-lt"/>
+                <a:ea typeface="+mn-ea"/>
+                <a:cs typeface="+mn-cs"/>
+              </a:defRPr>
+            </a:lvl7pPr>
+            <a:lvl8pPr marL="3429000" indent="-228600" algn="l" defTabSz="914400" rtl="0" eaLnBrk="1" latinLnBrk="1" hangingPunct="1">
+              <a:lnSpc>
+                <a:spcPct val="90000"/>
+              </a:lnSpc>
+              <a:spcBef>
+                <a:spcPts val="500"/>
+              </a:spcBef>
+              <a:buFont typeface="Arial" panose="020B0604020202020204" pitchFamily="34" charset="0"/>
+              <a:buChar char="•"/>
+              <a:defRPr sz="1800" kern="1200">
+                <a:solidFill>
+                  <a:schemeClr val="tx1"/>
+                </a:solidFill>
+                <a:latin typeface="+mn-lt"/>
+                <a:ea typeface="+mn-ea"/>
+                <a:cs typeface="+mn-cs"/>
+              </a:defRPr>
+            </a:lvl8pPr>
+            <a:lvl9pPr marL="3886200" indent="-228600" algn="l" defTabSz="914400" rtl="0" eaLnBrk="1" latinLnBrk="1" hangingPunct="1">
+              <a:lnSpc>
+                <a:spcPct val="90000"/>
+              </a:lnSpc>
+              <a:spcBef>
+                <a:spcPts val="500"/>
+              </a:spcBef>
+              <a:buFont typeface="Arial" panose="020B0604020202020204" pitchFamily="34" charset="0"/>
+              <a:buChar char="•"/>
+              <a:defRPr sz="1800" kern="1200">
+                <a:solidFill>
+                  <a:schemeClr val="tx1"/>
+                </a:solidFill>
+                <a:latin typeface="+mn-lt"/>
+                <a:ea typeface="+mn-ea"/>
+                <a:cs typeface="+mn-cs"/>
+              </a:defRPr>
+            </a:lvl9pPr>
+          </a:lstStyle>
+          <a:p>
+            <a:pPr marL="457200" lvl="1" indent="0">
+              <a:buFont typeface="Arial" panose="020B0604020202020204" pitchFamily="34" charset="0"/>
+              <a:buNone/>
+            </a:pPr>
+            <a:endParaRPr lang="en-US" altLang="ko-KR" dirty="0">
+              <a:solidFill>
+                <a:srgbClr val="212529"/>
+              </a:solidFill>
+              <a:latin typeface="+mn-ea"/>
+            </a:endParaRPr>
+          </a:p>
+          <a:p>
+            <a:pPr marL="457200" lvl="1" indent="0">
+              <a:buFont typeface="Arial" panose="020B0604020202020204" pitchFamily="34" charset="0"/>
+              <a:buNone/>
+            </a:pPr>
+            <a:endParaRPr lang="en-US" altLang="ko-KR" dirty="0">
+              <a:solidFill>
+                <a:srgbClr val="212529"/>
+              </a:solidFill>
+              <a:latin typeface="+mn-ea"/>
+            </a:endParaRPr>
+          </a:p>
+          <a:p>
+            <a:r>
+              <a:rPr lang="en-US" altLang="ko-KR" b="1" dirty="0">
+                <a:solidFill>
+                  <a:srgbClr val="212529"/>
+                </a:solidFill>
+                <a:latin typeface="+mn-ea"/>
+              </a:rPr>
+              <a:t>[</a:t>
+            </a:r>
+            <a:r>
+              <a:rPr lang="ko-KR" altLang="en-US" b="1" dirty="0" err="1">
+                <a:solidFill>
+                  <a:srgbClr val="212529"/>
+                </a:solidFill>
+                <a:latin typeface="+mn-ea"/>
+              </a:rPr>
+              <a:t>코딩온</a:t>
+            </a:r>
+            <a:r>
+              <a:rPr lang="en-US" altLang="ko-KR" b="1" dirty="0">
+                <a:solidFill>
+                  <a:srgbClr val="212529"/>
+                </a:solidFill>
+                <a:latin typeface="+mn-ea"/>
+              </a:rPr>
+              <a:t>] React </a:t>
+            </a:r>
+            <a:r>
+              <a:rPr lang="ko-KR" altLang="en-US" b="1" dirty="0">
+                <a:solidFill>
+                  <a:srgbClr val="212529"/>
+                </a:solidFill>
+                <a:latin typeface="+mn-ea"/>
+              </a:rPr>
+              <a:t>실습 </a:t>
+            </a:r>
+            <a:r>
+              <a:rPr lang="ko-KR" altLang="en-US" dirty="0">
+                <a:solidFill>
+                  <a:srgbClr val="212529"/>
+                </a:solidFill>
+                <a:latin typeface="+mn-ea"/>
+              </a:rPr>
+              <a:t>강의 클릭</a:t>
+            </a:r>
+            <a:br>
+              <a:rPr lang="en-US" altLang="ko-KR" dirty="0">
+                <a:solidFill>
+                  <a:srgbClr val="212529"/>
+                </a:solidFill>
+                <a:latin typeface="+mn-ea"/>
+              </a:rPr>
+            </a:br>
+            <a:endParaRPr lang="en-US" altLang="ko-KR" dirty="0">
+              <a:solidFill>
+                <a:srgbClr val="212529"/>
+              </a:solidFill>
+              <a:latin typeface="+mn-ea"/>
+            </a:endParaRPr>
+          </a:p>
+          <a:p>
+            <a:pPr lvl="1"/>
+            <a:r>
+              <a:rPr lang="ko-KR" altLang="en-US" sz="2800" b="1" dirty="0">
+                <a:solidFill>
+                  <a:srgbClr val="212529"/>
+                </a:solidFill>
+                <a:latin typeface="+mn-ea"/>
+              </a:rPr>
+              <a:t>➡ </a:t>
+            </a:r>
+            <a:r>
+              <a:rPr lang="en-US" altLang="ko-KR" sz="2800" b="1" dirty="0">
+                <a:solidFill>
+                  <a:srgbClr val="212529"/>
+                </a:solidFill>
+                <a:latin typeface="+mn-ea"/>
+              </a:rPr>
+              <a:t>[State</a:t>
+            </a:r>
+            <a:r>
+              <a:rPr lang="ko-KR" altLang="en-US" sz="2800" b="1" dirty="0">
+                <a:solidFill>
+                  <a:srgbClr val="212529"/>
+                </a:solidFill>
+                <a:latin typeface="+mn-ea"/>
+              </a:rPr>
+              <a:t> 실습</a:t>
+            </a:r>
+            <a:r>
+              <a:rPr lang="en-US" altLang="ko-KR" sz="2800" b="1" dirty="0">
+                <a:solidFill>
+                  <a:srgbClr val="212529"/>
+                </a:solidFill>
+                <a:latin typeface="+mn-ea"/>
+              </a:rPr>
+              <a:t>]</a:t>
+            </a:r>
+            <a:r>
+              <a:rPr lang="en-US" altLang="ko-KR" sz="2800" dirty="0">
+                <a:solidFill>
+                  <a:srgbClr val="212529"/>
+                </a:solidFill>
+                <a:latin typeface="+mn-ea"/>
+              </a:rPr>
+              <a:t> </a:t>
+            </a:r>
+            <a:r>
+              <a:rPr lang="ko-KR" altLang="en-US" sz="2800" dirty="0">
+                <a:solidFill>
+                  <a:srgbClr val="212529"/>
+                </a:solidFill>
+                <a:latin typeface="+mn-ea"/>
+              </a:rPr>
+              <a:t>커리큘럼 클릭</a:t>
+            </a:r>
+            <a:endParaRPr lang="en-US" altLang="ko-KR" sz="2800" dirty="0">
+              <a:solidFill>
+                <a:srgbClr val="212529"/>
+              </a:solidFill>
+              <a:latin typeface="+mn-ea"/>
+            </a:endParaRPr>
+          </a:p>
+          <a:p>
+            <a:pPr lvl="1"/>
+            <a:r>
+              <a:rPr lang="ko-KR" altLang="en-US" sz="2800" b="1" dirty="0">
+                <a:solidFill>
+                  <a:srgbClr val="212529"/>
+                </a:solidFill>
+                <a:latin typeface="+mn-ea"/>
+              </a:rPr>
+              <a:t>➡ </a:t>
+            </a:r>
+            <a:r>
+              <a:rPr lang="en-US" altLang="ko-KR" sz="2800" b="1" dirty="0">
+                <a:solidFill>
+                  <a:schemeClr val="accent1"/>
+                </a:solidFill>
+                <a:latin typeface="+mn-ea"/>
+              </a:rPr>
+              <a:t>[1~2</a:t>
+            </a:r>
+            <a:r>
+              <a:rPr lang="ko-KR" altLang="en-US" sz="2800" b="1" dirty="0">
+                <a:solidFill>
+                  <a:schemeClr val="accent1"/>
+                </a:solidFill>
+                <a:latin typeface="+mn-ea"/>
+              </a:rPr>
+              <a:t>번 문제</a:t>
+            </a:r>
+            <a:r>
+              <a:rPr lang="en-US" altLang="ko-KR" sz="2800" b="1" dirty="0">
+                <a:solidFill>
+                  <a:schemeClr val="accent1"/>
+                </a:solidFill>
+                <a:latin typeface="+mn-ea"/>
+              </a:rPr>
+              <a:t>]</a:t>
+            </a:r>
+            <a:r>
+              <a:rPr lang="en-US" altLang="ko-KR" sz="2800" dirty="0">
+                <a:solidFill>
+                  <a:schemeClr val="accent1"/>
+                </a:solidFill>
+                <a:latin typeface="+mn-ea"/>
+              </a:rPr>
+              <a:t> </a:t>
+            </a:r>
+            <a:r>
+              <a:rPr lang="ko-KR" altLang="en-US" sz="2800" dirty="0">
+                <a:solidFill>
+                  <a:srgbClr val="212529"/>
+                </a:solidFill>
+                <a:latin typeface="+mn-ea"/>
+              </a:rPr>
+              <a:t> 진행</a:t>
+            </a:r>
           </a:p>
         </p:txBody>
       </p:sp>
     </p:spTree>
     <p:extLst>
       <p:ext uri="{BB962C8B-B14F-4D97-AF65-F5344CB8AC3E}">
-        <p14:creationId xmlns:p14="http://schemas.microsoft.com/office/powerpoint/2010/main" val="2393120294"/>
+        <p14:creationId xmlns:p14="http://schemas.microsoft.com/office/powerpoint/2010/main" val="2482701262"/>
       </p:ext>
     </p:extLst>
   </p:cSld>
@@ -8949,7 +10994,7 @@
           <a:p>
             <a:fld id="{F7A0D294-60EA-4DAA-90A4-E86E9A5EB9AE}" type="datetime6">
               <a:rPr lang="ko-KR" altLang="en-US" smtClean="0"/>
-              <a:t>2024년 7월</a:t>
+              <a:t>2024년 8월</a:t>
             </a:fld>
             <a:endParaRPr lang="ko-KR" altLang="en-US"/>
           </a:p>
@@ -9226,7 +11271,7 @@
           <a:p>
             <a:fld id="{91D2DBD1-6134-4975-8CE7-24ED1E9282F4}" type="datetime6">
               <a:rPr lang="ko-KR" altLang="en-US" smtClean="0"/>
-              <a:t>2024년 7월</a:t>
+              <a:t>2024년 8월</a:t>
             </a:fld>
             <a:endParaRPr lang="ko-KR" altLang="en-US"/>
           </a:p>
@@ -9379,7 +11424,7 @@
         </p:spPr>
         <p:txBody>
           <a:bodyPr vert="horz" lIns="91440" tIns="45720" rIns="91440" bIns="45720" rtlCol="0">
-            <a:normAutofit fontScale="92500"/>
+            <a:normAutofit/>
           </a:bodyPr>
           <a:lstStyle>
             <a:lvl1pPr marL="228600" indent="-228600" algn="l" defTabSz="914400" rtl="0" eaLnBrk="1" latinLnBrk="1" hangingPunct="1">
@@ -9625,7 +11670,7 @@
         </p:spPr>
         <p:txBody>
           <a:bodyPr vert="horz" lIns="91440" tIns="45720" rIns="91440" bIns="45720" rtlCol="0">
-            <a:normAutofit fontScale="92500"/>
+            <a:normAutofit/>
           </a:bodyPr>
           <a:lstStyle>
             <a:lvl1pPr marL="228600" indent="-228600" algn="l" defTabSz="914400" rtl="0" eaLnBrk="1" latinLnBrk="1" hangingPunct="1">
@@ -10060,7 +12105,7 @@
           <a:p>
             <a:fld id="{4E92E807-52C8-4999-93D3-9678270AD8FA}" type="datetime6">
               <a:rPr lang="ko-KR" altLang="en-US" smtClean="0"/>
-              <a:t>2024년 7월</a:t>
+              <a:t>2024년 8월</a:t>
             </a:fld>
             <a:endParaRPr lang="ko-KR" altLang="en-US"/>
           </a:p>
@@ -10774,7 +12819,7 @@
           <a:p>
             <a:fld id="{EE8F6701-635E-4B4D-8246-F6CD3AE14CBE}" type="datetime6">
               <a:rPr lang="ko-KR" altLang="en-US" smtClean="0"/>
-              <a:t>2024년 7월</a:t>
+              <a:t>2024년 8월</a:t>
             </a:fld>
             <a:endParaRPr lang="ko-KR" altLang="en-US"/>
           </a:p>
@@ -11627,7 +13672,7 @@
           <a:p>
             <a:fld id="{87980AA1-5246-4A25-BE32-94BE467B109F}" type="datetime6">
               <a:rPr lang="ko-KR" altLang="en-US" smtClean="0"/>
-              <a:t>2024년 7월</a:t>
+              <a:t>2024년 8월</a:t>
             </a:fld>
             <a:endParaRPr lang="ko-KR" altLang="en-US"/>
           </a:p>
@@ -11804,7 +13849,7 @@
           <a:p>
             <a:fld id="{E49C6C9C-69B7-4FA3-B533-50D416C4BDB3}" type="datetime6">
               <a:rPr lang="ko-KR" altLang="en-US" smtClean="0"/>
-              <a:t>2024년 7월</a:t>
+              <a:t>2024년 8월</a:t>
             </a:fld>
             <a:endParaRPr lang="ko-KR" altLang="en-US"/>
           </a:p>
@@ -11984,7 +14029,7 @@
           <a:p>
             <a:fld id="{164C2489-C217-46DD-AED2-42AF67716448}" type="datetime6">
               <a:rPr lang="ko-KR" altLang="en-US" smtClean="0"/>
-              <a:t>2024년 7월</a:t>
+              <a:t>2024년 8월</a:t>
             </a:fld>
             <a:endParaRPr lang="ko-KR" altLang="en-US"/>
           </a:p>

--- a/material/[SeSAC_YDP_6] 24_React_Props_State.pptx
+++ b/material/[SeSAC_YDP_6] 24_React_Props_State.pptx
@@ -220,7 +220,7 @@
           <a:p>
             <a:fld id="{2EF3F159-7250-4DD4-91C2-13B35D56E1AF}" type="datetimeFigureOut">
               <a:rPr lang="ko-KR" altLang="en-US" smtClean="0"/>
-              <a:t>2024-08-01</a:t>
+              <a:t>2024-08-04</a:t>
             </a:fld>
             <a:endParaRPr lang="ko-KR" altLang="en-US"/>
           </a:p>
@@ -634,46 +634,88 @@
             <a:endParaRPr lang="en-US" altLang="ko-KR" dirty="0"/>
           </a:p>
           <a:p>
+            <a:pPr marL="171450" indent="-171450">
+              <a:buFontTx/>
+              <a:buChar char="-"/>
+            </a:pPr>
+            <a:endParaRPr lang="en-US" altLang="ko-KR" baseline="0" dirty="0" smtClean="0"/>
+          </a:p>
+          <a:p>
+            <a:pPr marL="171450" indent="-171450">
+              <a:buFontTx/>
+              <a:buChar char="-"/>
+            </a:pPr>
+            <a:endParaRPr lang="en-US" altLang="ko-KR" dirty="0" smtClean="0"/>
+          </a:p>
+          <a:p>
+            <a:pPr marL="0" indent="0">
+              <a:buFontTx/>
+              <a:buNone/>
+            </a:pPr>
+            <a:r>
+              <a:rPr lang="en-US" altLang="ko-KR" dirty="0" smtClean="0"/>
+              <a:t>-Why?</a:t>
+            </a:r>
+            <a:r>
+              <a:rPr lang="en-US" altLang="ko-KR" baseline="0" dirty="0" smtClean="0"/>
+              <a:t> State</a:t>
+            </a:r>
+            <a:r>
+              <a:rPr lang="ko-KR" altLang="en-US" baseline="0" dirty="0" smtClean="0"/>
+              <a:t>를 사용해야 하는 이유</a:t>
+            </a:r>
+            <a:r>
+              <a:rPr lang="en-US" altLang="ko-KR" baseline="0" dirty="0" smtClean="0"/>
+              <a:t>?</a:t>
+            </a:r>
+            <a:endParaRPr lang="en-US" altLang="ko-KR" dirty="0" smtClean="0"/>
+          </a:p>
+          <a:p>
             <a:endParaRPr lang="en-US" altLang="ko-KR" dirty="0"/>
           </a:p>
           <a:p>
             <a:r>
-              <a:rPr lang="en-US" altLang="ko-KR" dirty="0"/>
+              <a:rPr lang="en-US" altLang="ko-KR" dirty="0" smtClean="0"/>
               <a:t>State</a:t>
             </a:r>
             <a:r>
+              <a:rPr lang="ko-KR" altLang="en-US" dirty="0" smtClean="0"/>
+              <a:t>는 컴포넌트가 유지하는 데이터</a:t>
+            </a:r>
+            <a:r>
+              <a:rPr lang="en-US" altLang="ko-KR" dirty="0" smtClean="0"/>
+              <a:t>, </a:t>
+            </a:r>
+            <a:r>
+              <a:rPr lang="ko-KR" altLang="en-US" dirty="0" smtClean="0"/>
+              <a:t>변경될 때마다 컴포넌트가 다시 </a:t>
+            </a:r>
+            <a:r>
+              <a:rPr lang="ko-KR" altLang="en-US" dirty="0" err="1" smtClean="0"/>
+              <a:t>재랜더링되어</a:t>
+            </a:r>
+            <a:r>
+              <a:rPr lang="ko-KR" altLang="en-US" dirty="0" smtClean="0"/>
+              <a:t> 사용자에게 최신 상태를 보여줌</a:t>
+            </a:r>
+            <a:r>
+              <a:rPr lang="en-US" altLang="ko-KR" dirty="0" smtClean="0"/>
+              <a:t>.</a:t>
+            </a:r>
+            <a:endParaRPr lang="en-US" altLang="ko-KR" dirty="0"/>
+          </a:p>
+          <a:p>
+            <a:pPr marL="171450" indent="-171450">
+              <a:buFontTx/>
+              <a:buChar char="-"/>
+            </a:pPr>
+            <a:r>
+              <a:rPr lang="ko-KR" altLang="en-US" dirty="0" smtClean="0"/>
+              <a:t>이 </a:t>
+            </a:r>
+            <a:r>
               <a:rPr lang="ko-KR" altLang="en-US" dirty="0"/>
-              <a:t>가 변경되면</a:t>
-            </a:r>
-            <a:r>
-              <a:rPr lang="en-US" altLang="ko-KR" dirty="0"/>
-              <a:t>, </a:t>
-            </a:r>
-            <a:r>
-              <a:rPr lang="ko-KR" altLang="en-US" dirty="0"/>
-              <a:t>컴포넌트는 </a:t>
-            </a:r>
-            <a:r>
-              <a:rPr lang="ko-KR" altLang="en-US" dirty="0" err="1"/>
-              <a:t>리렌더링</a:t>
-            </a:r>
-            <a:r>
-              <a:rPr lang="ko-KR" altLang="en-US" dirty="0"/>
-              <a:t> 됩니다</a:t>
-            </a:r>
-            <a:r>
-              <a:rPr lang="en-US" altLang="ko-KR" dirty="0"/>
-              <a:t>.</a:t>
-            </a:r>
-          </a:p>
-          <a:p>
-            <a:r>
-              <a:rPr lang="en-US" altLang="ko-KR" dirty="0"/>
-              <a:t>-</a:t>
-            </a:r>
-            <a:r>
-              <a:rPr lang="ko-KR" altLang="en-US" dirty="0"/>
-              <a:t> 이 점이 </a:t>
+              <a:t>점이 </a:t>
             </a:r>
             <a:r>
               <a:rPr lang="ko-KR" altLang="en-US" dirty="0" err="1"/>
@@ -684,9 +726,109 @@
               <a:t> 다른 것이다</a:t>
             </a:r>
             <a:r>
-              <a:rPr lang="en-US" altLang="ko-KR" dirty="0"/>
+              <a:rPr lang="en-US" altLang="ko-KR" dirty="0" smtClean="0"/>
               <a:t>.</a:t>
             </a:r>
+          </a:p>
+          <a:p>
+            <a:pPr marL="171450" indent="-171450">
+              <a:buFontTx/>
+              <a:buChar char="-"/>
+            </a:pPr>
+            <a:r>
+              <a:rPr lang="en-US" altLang="ko-KR" dirty="0" smtClean="0"/>
+              <a:t>Virtual DOM –</a:t>
+            </a:r>
+            <a:r>
+              <a:rPr lang="en-US" altLang="ko-KR" baseline="0" dirty="0" smtClean="0"/>
+              <a:t> </a:t>
+            </a:r>
+            <a:r>
+              <a:rPr lang="ko-KR" altLang="en-US" baseline="0" dirty="0" smtClean="0"/>
+              <a:t>변한 부분만 바꿔서 적용</a:t>
+            </a:r>
+            <a:r>
+              <a:rPr lang="en-US" altLang="ko-KR" baseline="0" dirty="0" smtClean="0"/>
+              <a:t>.</a:t>
+            </a:r>
+          </a:p>
+          <a:p>
+            <a:pPr marL="171450" indent="-171450">
+              <a:buFontTx/>
+              <a:buChar char="-"/>
+            </a:pPr>
+            <a:endParaRPr lang="en-US" altLang="ko-KR" baseline="0" dirty="0" smtClean="0"/>
+          </a:p>
+          <a:p>
+            <a:pPr marL="0" indent="0">
+              <a:buFontTx/>
+              <a:buNone/>
+            </a:pPr>
+            <a:r>
+              <a:rPr lang="en-US" altLang="ko-KR" baseline="0" dirty="0" smtClean="0"/>
+              <a:t>* When? </a:t>
+            </a:r>
+            <a:r>
+              <a:rPr lang="ko-KR" altLang="en-US" baseline="0" dirty="0" smtClean="0"/>
+              <a:t>언제 사용해야 할까</a:t>
+            </a:r>
+            <a:r>
+              <a:rPr lang="en-US" altLang="ko-KR" baseline="0" dirty="0" smtClean="0"/>
+              <a:t>?</a:t>
+            </a:r>
+          </a:p>
+          <a:p>
+            <a:pPr marL="171450" indent="-171450">
+              <a:buFontTx/>
+              <a:buChar char="-"/>
+            </a:pPr>
+            <a:r>
+              <a:rPr lang="ko-KR" altLang="en-US" baseline="0" dirty="0" err="1" smtClean="0"/>
+              <a:t>변경시</a:t>
+            </a:r>
+            <a:r>
+              <a:rPr lang="ko-KR" altLang="en-US" baseline="0" dirty="0" smtClean="0"/>
+              <a:t> 자동으로 </a:t>
+            </a:r>
+            <a:r>
+              <a:rPr lang="en-US" altLang="ko-KR" baseline="0" dirty="0" smtClean="0"/>
+              <a:t>HTML</a:t>
+            </a:r>
+            <a:r>
+              <a:rPr lang="ko-KR" altLang="en-US" baseline="0" dirty="0" smtClean="0"/>
+              <a:t>에 반영되게 만들고 싶은 기능에 </a:t>
+            </a:r>
+            <a:r>
+              <a:rPr lang="en-US" altLang="ko-KR" baseline="0" dirty="0" smtClean="0"/>
+              <a:t>state </a:t>
+            </a:r>
+            <a:r>
+              <a:rPr lang="ko-KR" altLang="en-US" baseline="0" dirty="0" smtClean="0"/>
+              <a:t>사용</a:t>
+            </a:r>
+            <a:r>
+              <a:rPr lang="en-US" altLang="ko-KR" baseline="0" dirty="0" smtClean="0"/>
+              <a:t>.</a:t>
+            </a:r>
+          </a:p>
+          <a:p>
+            <a:pPr marL="171450" indent="-171450">
+              <a:buFontTx/>
+              <a:buChar char="-"/>
+            </a:pPr>
+            <a:r>
+              <a:rPr lang="ko-KR" altLang="en-US" baseline="0" dirty="0" smtClean="0"/>
+              <a:t>자주 변경될 것 같은 </a:t>
+            </a:r>
+            <a:r>
+              <a:rPr lang="en-US" altLang="ko-KR" baseline="0" dirty="0" smtClean="0"/>
+              <a:t>html </a:t>
+            </a:r>
+            <a:r>
+              <a:rPr lang="ko-KR" altLang="en-US" baseline="0" dirty="0" smtClean="0"/>
+              <a:t>요소나 내용</a:t>
+            </a:r>
+            <a:endParaRPr lang="en-US" altLang="ko-KR" baseline="0" dirty="0" smtClean="0"/>
           </a:p>
         </p:txBody>
       </p:sp>
@@ -770,7 +912,84 @@
           <a:bodyPr/>
           <a:lstStyle/>
           <a:p>
-            <a:endParaRPr lang="ko-KR" altLang="en-US" dirty="0"/>
+            <a:pPr marL="171450" indent="-171450">
+              <a:buFontTx/>
+              <a:buChar char="-"/>
+            </a:pPr>
+            <a:r>
+              <a:rPr lang="en-US" altLang="ko-KR" dirty="0" smtClean="0"/>
+              <a:t>props</a:t>
+            </a:r>
+            <a:r>
+              <a:rPr lang="ko-KR" altLang="en-US" dirty="0" smtClean="0"/>
+              <a:t>는 자식입장에서는 수정이 불가능</a:t>
+            </a:r>
+            <a:r>
+              <a:rPr lang="en-US" altLang="ko-KR" dirty="0" smtClean="0"/>
+              <a:t>! </a:t>
+            </a:r>
+            <a:r>
+              <a:rPr lang="ko-KR" altLang="en-US" dirty="0" smtClean="0"/>
+              <a:t>읽기만 가능</a:t>
+            </a:r>
+            <a:r>
+              <a:rPr lang="en-US" altLang="ko-KR" dirty="0" smtClean="0"/>
+              <a:t>!</a:t>
+            </a:r>
+          </a:p>
+          <a:p>
+            <a:pPr marL="171450" indent="-171450">
+              <a:buFontTx/>
+              <a:buChar char="-"/>
+            </a:pPr>
+            <a:r>
+              <a:rPr lang="ko-KR" altLang="en-US" dirty="0" smtClean="0"/>
+              <a:t>변경하려면 최초 유포자 측에서 수정해야함</a:t>
+            </a:r>
+            <a:r>
+              <a:rPr lang="en-US" altLang="ko-KR" dirty="0" smtClean="0"/>
+              <a:t>!</a:t>
+            </a:r>
+          </a:p>
+          <a:p>
+            <a:pPr marL="171450" indent="-171450">
+              <a:buFontTx/>
+              <a:buChar char="-"/>
+            </a:pPr>
+            <a:endParaRPr lang="en-US" altLang="ko-KR" dirty="0" smtClean="0"/>
+          </a:p>
+          <a:p>
+            <a:pPr marL="0" indent="0">
+              <a:buFontTx/>
+              <a:buNone/>
+            </a:pPr>
+            <a:r>
+              <a:rPr lang="en-US" altLang="ko-KR" dirty="0" smtClean="0"/>
+              <a:t>*</a:t>
+            </a:r>
+            <a:r>
+              <a:rPr lang="en-US" altLang="ko-KR" baseline="0" dirty="0" smtClean="0"/>
+              <a:t> state</a:t>
+            </a:r>
+            <a:endParaRPr lang="en-US" altLang="ko-KR" dirty="0" smtClean="0"/>
+          </a:p>
+          <a:p>
+            <a:pPr marL="171450" indent="-171450">
+              <a:buFontTx/>
+              <a:buChar char="-"/>
+            </a:pPr>
+            <a:r>
+              <a:rPr lang="ko-KR" altLang="en-US" dirty="0" smtClean="0"/>
+              <a:t>변수같은 존재</a:t>
+            </a:r>
+            <a:endParaRPr lang="en-US" altLang="ko-KR" dirty="0" smtClean="0"/>
+          </a:p>
+          <a:p>
+            <a:pPr marL="171450" indent="-171450">
+              <a:buFontTx/>
+              <a:buChar char="-"/>
+            </a:pPr>
+            <a:endParaRPr lang="en-US" altLang="ko-KR" dirty="0" smtClean="0"/>
           </a:p>
         </p:txBody>
       </p:sp>
@@ -1128,6 +1347,144 @@
               <a:tabLst/>
               <a:defRPr/>
             </a:pPr>
+            <a:endParaRPr lang="en-US" altLang="ko-KR" dirty="0" smtClean="0"/>
+          </a:p>
+          <a:p>
+            <a:pPr marL="0" marR="0" indent="0" algn="l" defTabSz="914400" rtl="0" eaLnBrk="1" fontAlgn="auto" latinLnBrk="1" hangingPunct="1">
+              <a:lnSpc>
+                <a:spcPct val="100000"/>
+              </a:lnSpc>
+              <a:spcBef>
+                <a:spcPts val="0"/>
+              </a:spcBef>
+              <a:spcAft>
+                <a:spcPts val="0"/>
+              </a:spcAft>
+              <a:buClrTx/>
+              <a:buSzTx/>
+              <a:buFontTx/>
+              <a:buNone/>
+              <a:tabLst/>
+              <a:defRPr/>
+            </a:pPr>
+            <a:r>
+              <a:rPr lang="en-US" altLang="ko-KR" dirty="0" smtClean="0"/>
+              <a:t>**</a:t>
+            </a:r>
+            <a:r>
+              <a:rPr lang="en-US" altLang="ko-KR" baseline="0" dirty="0" smtClean="0"/>
+              <a:t> React 16.3 </a:t>
+            </a:r>
+            <a:r>
+              <a:rPr lang="ko-KR" altLang="en-US" baseline="0" dirty="0" smtClean="0"/>
+              <a:t>이전</a:t>
+            </a:r>
+            <a:endParaRPr lang="en-US" altLang="ko-KR" baseline="0" dirty="0" smtClean="0"/>
+          </a:p>
+          <a:p>
+            <a:pPr marL="0" marR="0" indent="0" algn="l" defTabSz="914400" rtl="0" eaLnBrk="1" fontAlgn="auto" latinLnBrk="1" hangingPunct="1">
+              <a:lnSpc>
+                <a:spcPct val="100000"/>
+              </a:lnSpc>
+              <a:spcBef>
+                <a:spcPts val="0"/>
+              </a:spcBef>
+              <a:spcAft>
+                <a:spcPts val="0"/>
+              </a:spcAft>
+              <a:buClrTx/>
+              <a:buSzTx/>
+              <a:buFontTx/>
+              <a:buNone/>
+              <a:tabLst/>
+              <a:defRPr/>
+            </a:pPr>
+            <a:r>
+              <a:rPr lang="ko-KR" altLang="en-US" baseline="0" dirty="0" smtClean="0"/>
+              <a:t>상태를 초기화하기 위해 주로</a:t>
+            </a:r>
+            <a:r>
+              <a:rPr lang="en-US" altLang="ko-KR" baseline="0" dirty="0" smtClean="0"/>
+              <a:t>‘constructor’ </a:t>
+            </a:r>
+            <a:r>
+              <a:rPr lang="ko-KR" altLang="en-US" baseline="0" dirty="0" smtClean="0"/>
+              <a:t>사용</a:t>
+            </a:r>
+            <a:r>
+              <a:rPr lang="en-US" altLang="ko-KR" baseline="0" dirty="0" smtClean="0"/>
+              <a:t>.</a:t>
+            </a:r>
+          </a:p>
+          <a:p>
+            <a:pPr marL="0" marR="0" indent="0" algn="l" defTabSz="914400" rtl="0" eaLnBrk="1" fontAlgn="auto" latinLnBrk="1" hangingPunct="1">
+              <a:lnSpc>
+                <a:spcPct val="100000"/>
+              </a:lnSpc>
+              <a:spcBef>
+                <a:spcPts val="0"/>
+              </a:spcBef>
+              <a:spcAft>
+                <a:spcPts val="0"/>
+              </a:spcAft>
+              <a:buClrTx/>
+              <a:buSzTx/>
+              <a:buFontTx/>
+              <a:buNone/>
+              <a:tabLst/>
+              <a:defRPr/>
+            </a:pPr>
+            <a:r>
+              <a:rPr lang="ko-KR" altLang="en-US" baseline="0" dirty="0" smtClean="0"/>
+              <a:t>상태 초기화는 </a:t>
+            </a:r>
+            <a:r>
+              <a:rPr lang="en-US" altLang="ko-KR" baseline="0" dirty="0" smtClean="0"/>
+              <a:t>‘</a:t>
+            </a:r>
+            <a:r>
+              <a:rPr lang="en-US" altLang="ko-KR" baseline="0" dirty="0" err="1" smtClean="0"/>
+              <a:t>this.state</a:t>
+            </a:r>
+            <a:r>
+              <a:rPr lang="en-US" altLang="ko-KR" baseline="0" dirty="0" smtClean="0"/>
+              <a:t>’</a:t>
+            </a:r>
+            <a:r>
+              <a:rPr lang="ko-KR" altLang="en-US" baseline="0" dirty="0" smtClean="0"/>
+              <a:t>에</a:t>
+            </a:r>
+            <a:r>
+              <a:rPr lang="en-US" altLang="ko-KR" baseline="0" dirty="0" smtClean="0"/>
+              <a:t> </a:t>
+            </a:r>
+            <a:r>
+              <a:rPr lang="ko-KR" altLang="en-US" baseline="0" dirty="0" smtClean="0"/>
+              <a:t>직접 할당함</a:t>
+            </a:r>
+            <a:r>
+              <a:rPr lang="en-US" altLang="ko-KR" baseline="0" dirty="0" smtClean="0"/>
+              <a:t>.</a:t>
+            </a:r>
+          </a:p>
+          <a:p>
+            <a:pPr marL="0" marR="0" indent="0" algn="l" defTabSz="914400" rtl="0" eaLnBrk="1" fontAlgn="auto" latinLnBrk="1" hangingPunct="1">
+              <a:lnSpc>
+                <a:spcPct val="100000"/>
+              </a:lnSpc>
+              <a:spcBef>
+                <a:spcPts val="0"/>
+              </a:spcBef>
+              <a:spcAft>
+                <a:spcPts val="0"/>
+              </a:spcAft>
+              <a:buClrTx/>
+              <a:buSzTx/>
+              <a:buFontTx/>
+              <a:buNone/>
+              <a:tabLst/>
+              <a:defRPr/>
+            </a:pPr>
             <a:endParaRPr lang="ko-KR" altLang="en-US" dirty="0"/>
           </a:p>
         </p:txBody>
@@ -1212,6 +1569,42 @@
           <a:bodyPr/>
           <a:lstStyle/>
           <a:p>
+            <a:r>
+              <a:rPr lang="ko-KR" altLang="en-US" dirty="0" smtClean="0"/>
+              <a:t>생명주기 메서드가 도입</a:t>
+            </a:r>
+            <a:r>
+              <a:rPr lang="en-US" altLang="ko-KR" dirty="0" smtClean="0"/>
+              <a:t>!</a:t>
+            </a:r>
+          </a:p>
+          <a:p>
+            <a:r>
+              <a:rPr lang="en-US" altLang="ko-KR" dirty="0" smtClean="0"/>
+              <a:t>'state'</a:t>
+            </a:r>
+            <a:r>
+              <a:rPr lang="ko-KR" altLang="en-US" dirty="0" smtClean="0"/>
+              <a:t>를 초기화 하는 방법이 생김</a:t>
+            </a:r>
+            <a:r>
+              <a:rPr lang="en-US" altLang="ko-KR" dirty="0" smtClean="0"/>
+              <a:t>.</a:t>
+            </a:r>
+          </a:p>
+          <a:p>
+            <a:r>
+              <a:rPr lang="en-US" altLang="ko-KR" dirty="0" smtClean="0"/>
+              <a:t>Constructor</a:t>
+            </a:r>
+            <a:r>
+              <a:rPr lang="ko-KR" altLang="en-US" dirty="0" smtClean="0"/>
+              <a:t>가 필요 없어짐</a:t>
+            </a:r>
+            <a:r>
+              <a:rPr lang="en-US" altLang="ko-KR" dirty="0" smtClean="0"/>
+              <a:t>.</a:t>
+            </a:r>
             <a:endParaRPr lang="ko-KR" altLang="en-US" dirty="0"/>
           </a:p>
         </p:txBody>
@@ -1307,6 +1700,90 @@
             <a:spLocks noGrp="1"/>
           </p:cNvSpPr>
           <p:nvPr>
+            <p:ph type="sldNum" sz="quarter" idx="10"/>
+          </p:nvPr>
+        </p:nvSpPr>
+        <p:spPr/>
+        <p:txBody>
+          <a:bodyPr/>
+          <a:lstStyle/>
+          <a:p>
+            <a:fld id="{C09E5BFC-1559-42F1-8940-AB342D56BF02}" type="slidenum">
+              <a:rPr lang="ko-KR" altLang="en-US" smtClean="0"/>
+              <a:t>17</a:t>
+            </a:fld>
+            <a:endParaRPr lang="ko-KR" altLang="en-US"/>
+          </a:p>
+        </p:txBody>
+      </p:sp>
+    </p:spTree>
+    <p:extLst>
+      <p:ext uri="{BB962C8B-B14F-4D97-AF65-F5344CB8AC3E}">
+        <p14:creationId xmlns:p14="http://schemas.microsoft.com/office/powerpoint/2010/main" val="3906120493"/>
+      </p:ext>
+    </p:extLst>
+  </p:cSld>
+  <p:clrMapOvr>
+    <a:masterClrMapping/>
+  </p:clrMapOvr>
+</p:notes>
+</file>
+
+<file path=ppt/notesSlides/notesSlide15.xml><?xml version="1.0" encoding="utf-8"?>
+<p:notes xmlns:a="http://schemas.openxmlformats.org/drawingml/2006/main" xmlns:r="http://schemas.openxmlformats.org/officeDocument/2006/relationships" xmlns:p="http://schemas.openxmlformats.org/presentationml/2006/main">
+  <p:cSld>
+    <p:spTree>
+      <p:nvGrpSpPr>
+        <p:cNvPr id="1" name=""/>
+        <p:cNvGrpSpPr/>
+        <p:nvPr/>
+      </p:nvGrpSpPr>
+      <p:grpSpPr>
+        <a:xfrm>
+          <a:off x="0" y="0"/>
+          <a:ext cx="0" cy="0"/>
+          <a:chOff x="0" y="0"/>
+          <a:chExt cx="0" cy="0"/>
+        </a:xfrm>
+      </p:grpSpPr>
+      <p:sp>
+        <p:nvSpPr>
+          <p:cNvPr id="2" name="슬라이드 이미지 개체 틀 1"/>
+          <p:cNvSpPr>
+            <a:spLocks noGrp="1" noRot="1" noChangeAspect="1"/>
+          </p:cNvSpPr>
+          <p:nvPr>
+            <p:ph type="sldImg"/>
+          </p:nvPr>
+        </p:nvSpPr>
+        <p:spPr/>
+      </p:sp>
+      <p:sp>
+        <p:nvSpPr>
+          <p:cNvPr id="3" name="슬라이드 노트 개체 틀 2"/>
+          <p:cNvSpPr>
+            <a:spLocks noGrp="1"/>
+          </p:cNvSpPr>
+          <p:nvPr>
+            <p:ph type="body" idx="1"/>
+          </p:nvPr>
+        </p:nvSpPr>
+        <p:spPr/>
+        <p:txBody>
+          <a:bodyPr/>
+          <a:lstStyle/>
+          <a:p>
+            <a:endParaRPr lang="ko-KR" altLang="en-US" dirty="0"/>
+          </a:p>
+        </p:txBody>
+      </p:sp>
+      <p:sp>
+        <p:nvSpPr>
+          <p:cNvPr id="4" name="슬라이드 번호 개체 틀 3"/>
+          <p:cNvSpPr>
+            <a:spLocks noGrp="1"/>
+          </p:cNvSpPr>
+          <p:nvPr>
             <p:ph type="sldNum" sz="quarter" idx="5"/>
           </p:nvPr>
         </p:nvSpPr>
@@ -1336,7 +1813,7 @@
 </p:notes>
 </file>
 
-<file path=ppt/notesSlides/notesSlide15.xml><?xml version="1.0" encoding="utf-8"?>
+<file path=ppt/notesSlides/notesSlide16.xml><?xml version="1.0" encoding="utf-8"?>
 <p:notes xmlns:a="http://schemas.openxmlformats.org/drawingml/2006/main" xmlns:r="http://schemas.openxmlformats.org/officeDocument/2006/relationships" xmlns:p="http://schemas.openxmlformats.org/presentationml/2006/main">
   <p:cSld>
     <p:spTree>
@@ -6175,7 +6652,7 @@
           <a:p>
             <a:fld id="{0F78D9C4-20C1-4B15-A116-16DC77AD9A1E}" type="datetime1">
               <a:rPr lang="ko-KR" altLang="en-US" smtClean="0"/>
-              <a:t>2024-08-01</a:t>
+              <a:t>2024-08-04</a:t>
             </a:fld>
             <a:endParaRPr lang="ko-KR" altLang="en-US"/>
           </a:p>
@@ -6518,6 +6995,15 @@
                 <a:latin typeface="+mn-ea"/>
               </a:rPr>
               <a:t>강의 클릭</a:t>
+            </a:r>
+            <a:r>
+              <a:rPr lang="en-US" altLang="ko-KR" dirty="0">
+                <a:solidFill>
+                  <a:srgbClr val="212529"/>
+                </a:solidFill>
+                <a:latin typeface="+mn-ea"/>
+              </a:rPr>
+              <a:t/>
             </a:r>
             <a:br>
               <a:rPr lang="en-US" altLang="ko-KR" dirty="0">
@@ -6759,7 +7245,7 @@
           <a:p>
             <a:fld id="{0F78D9C4-20C1-4B15-A116-16DC77AD9A1E}" type="datetime1">
               <a:rPr lang="ko-KR" altLang="en-US" smtClean="0"/>
-              <a:t>2024-08-01</a:t>
+              <a:t>2024-08-04</a:t>
             </a:fld>
             <a:endParaRPr lang="ko-KR" altLang="en-US"/>
           </a:p>
@@ -7102,6 +7588,15 @@
                 <a:latin typeface="+mn-ea"/>
               </a:rPr>
               <a:t>강의 클릭</a:t>
+            </a:r>
+            <a:r>
+              <a:rPr lang="en-US" altLang="ko-KR" dirty="0">
+                <a:solidFill>
+                  <a:srgbClr val="212529"/>
+                </a:solidFill>
+                <a:latin typeface="+mn-ea"/>
+              </a:rPr>
+              <a:t/>
             </a:r>
             <a:br>
               <a:rPr lang="en-US" altLang="ko-KR" dirty="0">
@@ -7467,7 +7962,7 @@
               <a:t> 자동으로 </a:t>
             </a:r>
             <a:r>
-              <a:rPr lang="ko-KR" altLang="en-US" dirty="0" err="1">
+              <a:rPr lang="ko-KR" altLang="en-US" b="1" dirty="0" err="1">
                 <a:solidFill>
                   <a:schemeClr val="accent1"/>
                 </a:solidFill>
@@ -9403,8 +9898,8 @@
         </p:nvSpPr>
         <p:spPr>
           <a:xfrm>
-            <a:off x="9114283" y="1567890"/>
-            <a:ext cx="1797181" cy="426800"/>
+            <a:off x="9499407" y="1576837"/>
+            <a:ext cx="1710061" cy="426800"/>
           </a:xfrm>
           <a:prstGeom prst="rect">
             <a:avLst/>
@@ -9515,8 +10010,8 @@
         </p:nvSpPr>
         <p:spPr>
           <a:xfrm>
-            <a:off x="7604276" y="3034869"/>
-            <a:ext cx="1053998" cy="360977"/>
+            <a:off x="7839185" y="3621489"/>
+            <a:ext cx="1154208" cy="352063"/>
           </a:xfrm>
           <a:prstGeom prst="rect">
             <a:avLst/>
@@ -9627,7 +10122,7 @@
         </p:nvSpPr>
         <p:spPr>
           <a:xfrm>
-            <a:off x="7601171" y="3363420"/>
+            <a:off x="7839185" y="3973552"/>
             <a:ext cx="3219229" cy="360978"/>
           </a:xfrm>
           <a:prstGeom prst="rect">
@@ -9969,6 +10464,16 @@
                 </a:solidFill>
               </a:rPr>
               <a:t> ]</a:t>
+            </a:r>
+            <a:r>
+              <a:rPr lang="en-US" altLang="ko-KR" sz="2000" dirty="0">
+                <a:solidFill>
+                  <a:schemeClr val="bg1">
+                    <a:lumMod val="50000"/>
+                  </a:schemeClr>
+                </a:solidFill>
+              </a:rPr>
+              <a:t/>
             </a:r>
             <a:br>
               <a:rPr lang="en-US" altLang="ko-KR" sz="2000" dirty="0">
@@ -10360,7 +10865,7 @@
           <a:p>
             <a:fld id="{0F78D9C4-20C1-4B15-A116-16DC77AD9A1E}" type="datetime1">
               <a:rPr lang="ko-KR" altLang="en-US" smtClean="0"/>
-              <a:t>2024-08-01</a:t>
+              <a:t>2024-08-04</a:t>
             </a:fld>
             <a:endParaRPr lang="ko-KR" altLang="en-US"/>
           </a:p>
@@ -10703,6 +11208,15 @@
                 <a:latin typeface="+mn-ea"/>
               </a:rPr>
               <a:t>강의 클릭</a:t>
+            </a:r>
+            <a:r>
+              <a:rPr lang="en-US" altLang="ko-KR" dirty="0">
+                <a:solidFill>
+                  <a:srgbClr val="212529"/>
+                </a:solidFill>
+                <a:latin typeface="+mn-ea"/>
+              </a:rPr>
+              <a:t/>
             </a:r>
             <a:br>
               <a:rPr lang="en-US" altLang="ko-KR" dirty="0">
@@ -11424,7 +11938,7 @@
         </p:spPr>
         <p:txBody>
           <a:bodyPr vert="horz" lIns="91440" tIns="45720" rIns="91440" bIns="45720" rtlCol="0">
-            <a:normAutofit/>
+            <a:normAutofit fontScale="92500"/>
           </a:bodyPr>
           <a:lstStyle>
             <a:lvl1pPr marL="228600" indent="-228600" algn="l" defTabSz="914400" rtl="0" eaLnBrk="1" latinLnBrk="1" hangingPunct="1">
@@ -11670,7 +12184,7 @@
         </p:spPr>
         <p:txBody>
           <a:bodyPr vert="horz" lIns="91440" tIns="45720" rIns="91440" bIns="45720" rtlCol="0">
-            <a:normAutofit/>
+            <a:normAutofit fontScale="92500"/>
           </a:bodyPr>
           <a:lstStyle>
             <a:lvl1pPr marL="228600" indent="-228600" algn="l" defTabSz="914400" rtl="0" eaLnBrk="1" latinLnBrk="1" hangingPunct="1">

--- a/material/[SeSAC_YDP_6] 24_React_Props_State.pptx
+++ b/material/[SeSAC_YDP_6] 24_React_Props_State.pptx
@@ -220,7 +220,7 @@
           <a:p>
             <a:fld id="{2EF3F159-7250-4DD4-91C2-13B35D56E1AF}" type="datetimeFigureOut">
               <a:rPr lang="ko-KR" altLang="en-US" smtClean="0"/>
-              <a:t>2024-08-04</a:t>
+              <a:t>2024-08-05</a:t>
             </a:fld>
             <a:endParaRPr lang="ko-KR" altLang="en-US"/>
           </a:p>
@@ -615,220 +615,7 @@
           <a:bodyPr/>
           <a:lstStyle/>
           <a:p>
-            <a:r>
-              <a:rPr lang="en-US" altLang="ko-KR" dirty="0"/>
-              <a:t>ex. </a:t>
-            </a:r>
-            <a:r>
-              <a:rPr lang="ko-KR" altLang="en-US" dirty="0" err="1"/>
-              <a:t>다크</a:t>
-            </a:r>
-            <a:r>
-              <a:rPr lang="en-US" altLang="ko-KR" dirty="0"/>
-              <a:t>/</a:t>
-            </a:r>
-            <a:r>
-              <a:rPr lang="ko-KR" altLang="en-US" dirty="0"/>
-              <a:t>라이트 모드</a:t>
-            </a:r>
-            <a:endParaRPr lang="en-US" altLang="ko-KR" dirty="0"/>
-          </a:p>
-          <a:p>
-            <a:pPr marL="171450" indent="-171450">
-              <a:buFontTx/>
-              <a:buChar char="-"/>
-            </a:pPr>
-            <a:endParaRPr lang="en-US" altLang="ko-KR" baseline="0" dirty="0" smtClean="0"/>
-          </a:p>
-          <a:p>
-            <a:pPr marL="171450" indent="-171450">
-              <a:buFontTx/>
-              <a:buChar char="-"/>
-            </a:pPr>
-            <a:endParaRPr lang="en-US" altLang="ko-KR" dirty="0" smtClean="0"/>
-          </a:p>
-          <a:p>
-            <a:pPr marL="0" indent="0">
-              <a:buFontTx/>
-              <a:buNone/>
-            </a:pPr>
-            <a:r>
-              <a:rPr lang="en-US" altLang="ko-KR" dirty="0" smtClean="0"/>
-              <a:t>-Why?</a:t>
-            </a:r>
-            <a:r>
-              <a:rPr lang="en-US" altLang="ko-KR" baseline="0" dirty="0" smtClean="0"/>
-              <a:t> State</a:t>
-            </a:r>
-            <a:r>
-              <a:rPr lang="ko-KR" altLang="en-US" baseline="0" dirty="0" smtClean="0"/>
-              <a:t>를 사용해야 하는 이유</a:t>
-            </a:r>
-            <a:r>
-              <a:rPr lang="en-US" altLang="ko-KR" baseline="0" dirty="0" smtClean="0"/>
-              <a:t>?</a:t>
-            </a:r>
-            <a:endParaRPr lang="en-US" altLang="ko-KR" dirty="0" smtClean="0"/>
-          </a:p>
-          <a:p>
-            <a:endParaRPr lang="en-US" altLang="ko-KR" dirty="0"/>
-          </a:p>
-          <a:p>
-            <a:r>
-              <a:rPr lang="en-US" altLang="ko-KR" dirty="0" smtClean="0"/>
-              <a:t>State</a:t>
-            </a:r>
-            <a:r>
-              <a:rPr lang="ko-KR" altLang="en-US" dirty="0" smtClean="0"/>
-              <a:t>는 컴포넌트가 유지하는 데이터</a:t>
-            </a:r>
-            <a:r>
-              <a:rPr lang="en-US" altLang="ko-KR" dirty="0" smtClean="0"/>
-              <a:t>, </a:t>
-            </a:r>
-            <a:r>
-              <a:rPr lang="ko-KR" altLang="en-US" dirty="0" smtClean="0"/>
-              <a:t>변경될 때마다 컴포넌트가 다시 </a:t>
-            </a:r>
-            <a:r>
-              <a:rPr lang="ko-KR" altLang="en-US" dirty="0" err="1" smtClean="0"/>
-              <a:t>재랜더링되어</a:t>
-            </a:r>
-            <a:r>
-              <a:rPr lang="ko-KR" altLang="en-US" dirty="0" smtClean="0"/>
-              <a:t> 사용자에게 최신 상태를 보여줌</a:t>
-            </a:r>
-            <a:r>
-              <a:rPr lang="en-US" altLang="ko-KR" dirty="0" smtClean="0"/>
-              <a:t>.</a:t>
-            </a:r>
-            <a:endParaRPr lang="en-US" altLang="ko-KR" dirty="0"/>
-          </a:p>
-          <a:p>
-            <a:pPr marL="171450" indent="-171450">
-              <a:buFontTx/>
-              <a:buChar char="-"/>
-            </a:pPr>
-            <a:r>
-              <a:rPr lang="ko-KR" altLang="en-US" dirty="0" smtClean="0"/>
-              <a:t>이 </a:t>
-            </a:r>
-            <a:r>
-              <a:rPr lang="ko-KR" altLang="en-US" dirty="0"/>
-              <a:t>점이 </a:t>
-            </a:r>
-            <a:r>
-              <a:rPr lang="ko-KR" altLang="en-US" dirty="0" err="1"/>
-              <a:t>변수랑</a:t>
-            </a:r>
-            <a:r>
-              <a:rPr lang="ko-KR" altLang="en-US" dirty="0"/>
-              <a:t> 다른 것이다</a:t>
-            </a:r>
-            <a:r>
-              <a:rPr lang="en-US" altLang="ko-KR" dirty="0" smtClean="0"/>
-              <a:t>.</a:t>
-            </a:r>
-          </a:p>
-          <a:p>
-            <a:pPr marL="171450" indent="-171450">
-              <a:buFontTx/>
-              <a:buChar char="-"/>
-            </a:pPr>
-            <a:r>
-              <a:rPr lang="en-US" altLang="ko-KR" dirty="0" smtClean="0"/>
-              <a:t>Virtual DOM –</a:t>
-            </a:r>
-            <a:r>
-              <a:rPr lang="en-US" altLang="ko-KR" baseline="0" dirty="0" smtClean="0"/>
-              <a:t> </a:t>
-            </a:r>
-            <a:r>
-              <a:rPr lang="ko-KR" altLang="en-US" baseline="0" dirty="0" smtClean="0"/>
-              <a:t>변한 부분만 바꿔서 적용</a:t>
-            </a:r>
-            <a:r>
-              <a:rPr lang="en-US" altLang="ko-KR" baseline="0" dirty="0" smtClean="0"/>
-              <a:t>.</a:t>
-            </a:r>
-          </a:p>
-          <a:p>
-            <a:pPr marL="171450" indent="-171450">
-              <a:buFontTx/>
-              <a:buChar char="-"/>
-            </a:pPr>
-            <a:endParaRPr lang="en-US" altLang="ko-KR" baseline="0" dirty="0" smtClean="0"/>
-          </a:p>
-          <a:p>
-            <a:pPr marL="0" indent="0">
-              <a:buFontTx/>
-              <a:buNone/>
-            </a:pPr>
-            <a:r>
-              <a:rPr lang="en-US" altLang="ko-KR" baseline="0" dirty="0" smtClean="0"/>
-              <a:t>* When? </a:t>
-            </a:r>
-            <a:r>
-              <a:rPr lang="ko-KR" altLang="en-US" baseline="0" dirty="0" smtClean="0"/>
-              <a:t>언제 사용해야 할까</a:t>
-            </a:r>
-            <a:r>
-              <a:rPr lang="en-US" altLang="ko-KR" baseline="0" dirty="0" smtClean="0"/>
-              <a:t>?</a:t>
-            </a:r>
-          </a:p>
-          <a:p>
-            <a:pPr marL="171450" indent="-171450">
-              <a:buFontTx/>
-              <a:buChar char="-"/>
-            </a:pPr>
-            <a:r>
-              <a:rPr lang="ko-KR" altLang="en-US" baseline="0" dirty="0" err="1" smtClean="0"/>
-              <a:t>변경시</a:t>
-            </a:r>
-            <a:r>
-              <a:rPr lang="ko-KR" altLang="en-US" baseline="0" dirty="0" smtClean="0"/>
-              <a:t> 자동으로 </a:t>
-            </a:r>
-            <a:r>
-              <a:rPr lang="en-US" altLang="ko-KR" baseline="0" dirty="0" smtClean="0"/>
-              <a:t>HTML</a:t>
-            </a:r>
-            <a:r>
-              <a:rPr lang="ko-KR" altLang="en-US" baseline="0" dirty="0" smtClean="0"/>
-              <a:t>에 반영되게 만들고 싶은 기능에 </a:t>
-            </a:r>
-            <a:r>
-              <a:rPr lang="en-US" altLang="ko-KR" baseline="0" dirty="0" smtClean="0"/>
-              <a:t>state </a:t>
-            </a:r>
-            <a:r>
-              <a:rPr lang="ko-KR" altLang="en-US" baseline="0" dirty="0" smtClean="0"/>
-              <a:t>사용</a:t>
-            </a:r>
-            <a:r>
-              <a:rPr lang="en-US" altLang="ko-KR" baseline="0" dirty="0" smtClean="0"/>
-              <a:t>.</a:t>
-            </a:r>
-          </a:p>
-          <a:p>
-            <a:pPr marL="171450" indent="-171450">
-              <a:buFontTx/>
-              <a:buChar char="-"/>
-            </a:pPr>
-            <a:r>
-              <a:rPr lang="ko-KR" altLang="en-US" baseline="0" dirty="0" smtClean="0"/>
-              <a:t>자주 변경될 것 같은 </a:t>
-            </a:r>
-            <a:r>
-              <a:rPr lang="en-US" altLang="ko-KR" baseline="0" dirty="0" smtClean="0"/>
-              <a:t>html </a:t>
-            </a:r>
-            <a:r>
-              <a:rPr lang="ko-KR" altLang="en-US" baseline="0" dirty="0" smtClean="0"/>
-              <a:t>요소나 내용</a:t>
-            </a:r>
-            <a:endParaRPr lang="en-US" altLang="ko-KR" baseline="0" dirty="0" smtClean="0"/>
+            <a:endParaRPr lang="ko-KR" altLang="en-US" dirty="0"/>
           </a:p>
         </p:txBody>
       </p:sp>
@@ -849,7 +636,7 @@
           <a:p>
             <a:fld id="{C09E5BFC-1559-42F1-8940-AB342D56BF02}" type="slidenum">
               <a:rPr lang="ko-KR" altLang="en-US" smtClean="0"/>
-              <a:t>13</a:t>
+              <a:t>12</a:t>
             </a:fld>
             <a:endParaRPr lang="ko-KR" altLang="en-US"/>
           </a:p>
@@ -858,7 +645,7 @@
     </p:spTree>
     <p:extLst>
       <p:ext uri="{BB962C8B-B14F-4D97-AF65-F5344CB8AC3E}">
-        <p14:creationId xmlns:p14="http://schemas.microsoft.com/office/powerpoint/2010/main" val="695242521"/>
+        <p14:creationId xmlns:p14="http://schemas.microsoft.com/office/powerpoint/2010/main" val="3949042368"/>
       </p:ext>
     </p:extLst>
   </p:cSld>
@@ -912,43 +699,92 @@
           <a:bodyPr/>
           <a:lstStyle/>
           <a:p>
+            <a:r>
+              <a:rPr lang="en-US" altLang="ko-KR" dirty="0"/>
+              <a:t>ex. </a:t>
+            </a:r>
+            <a:r>
+              <a:rPr lang="ko-KR" altLang="en-US" dirty="0" err="1"/>
+              <a:t>다크</a:t>
+            </a:r>
+            <a:r>
+              <a:rPr lang="en-US" altLang="ko-KR" dirty="0"/>
+              <a:t>/</a:t>
+            </a:r>
+            <a:r>
+              <a:rPr lang="ko-KR" altLang="en-US" dirty="0"/>
+              <a:t>라이트 모드</a:t>
+            </a:r>
+            <a:endParaRPr lang="en-US" altLang="ko-KR" dirty="0"/>
+          </a:p>
+          <a:p>
             <a:pPr marL="171450" indent="-171450">
               <a:buFontTx/>
               <a:buChar char="-"/>
             </a:pPr>
-            <a:r>
-              <a:rPr lang="en-US" altLang="ko-KR" dirty="0" smtClean="0"/>
-              <a:t>props</a:t>
-            </a:r>
-            <a:r>
-              <a:rPr lang="ko-KR" altLang="en-US" dirty="0" smtClean="0"/>
-              <a:t>는 자식입장에서는 수정이 불가능</a:t>
-            </a:r>
-            <a:r>
-              <a:rPr lang="en-US" altLang="ko-KR" dirty="0" smtClean="0"/>
-              <a:t>! </a:t>
-            </a:r>
-            <a:r>
-              <a:rPr lang="ko-KR" altLang="en-US" dirty="0" smtClean="0"/>
-              <a:t>읽기만 가능</a:t>
-            </a:r>
-            <a:r>
-              <a:rPr lang="en-US" altLang="ko-KR" dirty="0" smtClean="0"/>
-              <a:t>!</a:t>
-            </a:r>
+            <a:endParaRPr lang="en-US" altLang="ko-KR" baseline="0" dirty="0"/>
           </a:p>
           <a:p>
             <a:pPr marL="171450" indent="-171450">
               <a:buFontTx/>
               <a:buChar char="-"/>
             </a:pPr>
-            <a:r>
-              <a:rPr lang="ko-KR" altLang="en-US" dirty="0" smtClean="0"/>
-              <a:t>변경하려면 최초 유포자 측에서 수정해야함</a:t>
-            </a:r>
-            <a:r>
-              <a:rPr lang="en-US" altLang="ko-KR" dirty="0" smtClean="0"/>
-              <a:t>!</a:t>
+            <a:endParaRPr lang="en-US" altLang="ko-KR" dirty="0"/>
+          </a:p>
+          <a:p>
+            <a:pPr marL="0" indent="0">
+              <a:buFontTx/>
+              <a:buNone/>
+            </a:pPr>
+            <a:r>
+              <a:rPr lang="en-US" altLang="ko-KR" dirty="0"/>
+              <a:t>-Why?</a:t>
+            </a:r>
+            <a:r>
+              <a:rPr lang="en-US" altLang="ko-KR" baseline="0" dirty="0"/>
+              <a:t> State</a:t>
+            </a:r>
+            <a:r>
+              <a:rPr lang="ko-KR" altLang="en-US" baseline="0" dirty="0"/>
+              <a:t>를 사용해야 하는 이유</a:t>
+            </a:r>
+            <a:r>
+              <a:rPr lang="en-US" altLang="ko-KR" baseline="0" dirty="0"/>
+              <a:t>?</a:t>
+            </a:r>
+            <a:endParaRPr lang="en-US" altLang="ko-KR" dirty="0"/>
+          </a:p>
+          <a:p>
+            <a:endParaRPr lang="en-US" altLang="ko-KR" dirty="0"/>
+          </a:p>
+          <a:p>
+            <a:r>
+              <a:rPr lang="en-US" altLang="ko-KR" dirty="0"/>
+              <a:t>State</a:t>
+            </a:r>
+            <a:r>
+              <a:rPr lang="ko-KR" altLang="en-US" dirty="0"/>
+              <a:t>는 컴포넌트가 유지하는 데이터</a:t>
+            </a:r>
+            <a:r>
+              <a:rPr lang="en-US" altLang="ko-KR" dirty="0"/>
+              <a:t>, </a:t>
+            </a:r>
+            <a:r>
+              <a:rPr lang="ko-KR" altLang="en-US" dirty="0"/>
+              <a:t>변경될 때마다 컴포넌트가 다시 </a:t>
+            </a:r>
+            <a:r>
+              <a:rPr lang="ko-KR" altLang="en-US" dirty="0" err="1"/>
+              <a:t>재랜더링되어</a:t>
+            </a:r>
+            <a:r>
+              <a:rPr lang="ko-KR" altLang="en-US" dirty="0"/>
+              <a:t> 사용자에게 최신 상태를 보여줌</a:t>
+            </a:r>
+            <a:r>
+              <a:rPr lang="en-US" altLang="ko-KR" dirty="0"/>
+              <a:t>.</a:t>
             </a:r>
           </a:p>
           <a:p>
@@ -956,7 +792,51 @@
               <a:buFontTx/>
               <a:buChar char="-"/>
             </a:pPr>
-            <a:endParaRPr lang="en-US" altLang="ko-KR" dirty="0" smtClean="0"/>
+            <a:r>
+              <a:rPr lang="ko-KR" altLang="en-US" dirty="0"/>
+              <a:t>이 점이 </a:t>
+            </a:r>
+            <a:r>
+              <a:rPr lang="ko-KR" altLang="en-US" dirty="0" err="1"/>
+              <a:t>변수랑</a:t>
+            </a:r>
+            <a:r>
+              <a:rPr lang="ko-KR" altLang="en-US" dirty="0"/>
+              <a:t> 다른 것이다</a:t>
+            </a:r>
+            <a:r>
+              <a:rPr lang="en-US" altLang="ko-KR" dirty="0"/>
+              <a:t>.</a:t>
+            </a:r>
+          </a:p>
+          <a:p>
+            <a:pPr marL="171450" indent="-171450">
+              <a:buFontTx/>
+              <a:buChar char="-"/>
+            </a:pPr>
+            <a:r>
+              <a:rPr lang="en-US" altLang="ko-KR" dirty="0"/>
+              <a:t>Virtual DOM –</a:t>
+            </a:r>
+            <a:r>
+              <a:rPr lang="en-US" altLang="ko-KR" baseline="0" dirty="0"/>
+              <a:t> </a:t>
+            </a:r>
+            <a:r>
+              <a:rPr lang="ko-KR" altLang="en-US" baseline="0" dirty="0"/>
+              <a:t>변한 부분만 바꿔서 적용</a:t>
+            </a:r>
+            <a:r>
+              <a:rPr lang="en-US" altLang="ko-KR" baseline="0" dirty="0"/>
+              <a:t>.</a:t>
+            </a:r>
+          </a:p>
+          <a:p>
+            <a:pPr marL="171450" indent="-171450">
+              <a:buFontTx/>
+              <a:buChar char="-"/>
+            </a:pPr>
+            <a:endParaRPr lang="en-US" altLang="ko-KR" baseline="0" dirty="0"/>
           </a:p>
           <a:p>
             <a:pPr marL="0" indent="0">
@@ -964,14 +844,17 @@
               <a:buNone/>
             </a:pPr>
             <a:r>
-              <a:rPr lang="en-US" altLang="ko-KR" dirty="0" smtClean="0"/>
-              <a:t>*</a:t>
-            </a:r>
-            <a:r>
-              <a:rPr lang="en-US" altLang="ko-KR" baseline="0" dirty="0" smtClean="0"/>
-              <a:t> state</a:t>
-            </a:r>
-            <a:endParaRPr lang="en-US" altLang="ko-KR" dirty="0" smtClean="0"/>
+              <a:rPr lang="en-US" altLang="ko-KR" baseline="0" dirty="0"/>
+              <a:t>* When? </a:t>
+            </a:r>
+            <a:r>
+              <a:rPr lang="ko-KR" altLang="en-US" baseline="0" dirty="0"/>
+              <a:t>언제 사용해야 할까</a:t>
+            </a:r>
+            <a:r>
+              <a:rPr lang="en-US" altLang="ko-KR" baseline="0" dirty="0"/>
+              <a:t>?</a:t>
+            </a:r>
           </a:p>
           <a:p>
             <a:pPr marL="171450" indent="-171450">
@@ -979,17 +862,52 @@
               <a:buChar char="-"/>
             </a:pPr>
             <a:r>
-              <a:rPr lang="ko-KR" altLang="en-US" dirty="0" smtClean="0"/>
-              <a:t>변수같은 존재</a:t>
-            </a:r>
-            <a:endParaRPr lang="en-US" altLang="ko-KR" dirty="0" smtClean="0"/>
+              <a:rPr lang="ko-KR" altLang="en-US" baseline="0" dirty="0" err="1"/>
+              <a:t>변경시</a:t>
+            </a:r>
+            <a:r>
+              <a:rPr lang="ko-KR" altLang="en-US" baseline="0" dirty="0"/>
+              <a:t> 자동으로 </a:t>
+            </a:r>
+            <a:r>
+              <a:rPr lang="en-US" altLang="ko-KR" baseline="0" dirty="0"/>
+              <a:t>HTML</a:t>
+            </a:r>
+            <a:r>
+              <a:rPr lang="ko-KR" altLang="en-US" baseline="0" dirty="0"/>
+              <a:t>에 반영되게 만들고 싶은 기능에 </a:t>
+            </a:r>
+            <a:r>
+              <a:rPr lang="en-US" altLang="ko-KR" baseline="0" dirty="0"/>
+              <a:t>state </a:t>
+            </a:r>
+            <a:r>
+              <a:rPr lang="ko-KR" altLang="en-US" baseline="0" dirty="0"/>
+              <a:t>사용</a:t>
+            </a:r>
+            <a:r>
+              <a:rPr lang="en-US" altLang="ko-KR" baseline="0" dirty="0"/>
+              <a:t>.</a:t>
+            </a:r>
           </a:p>
           <a:p>
             <a:pPr marL="171450" indent="-171450">
               <a:buFontTx/>
               <a:buChar char="-"/>
             </a:pPr>
-            <a:endParaRPr lang="en-US" altLang="ko-KR" dirty="0" smtClean="0"/>
+            <a:r>
+              <a:rPr lang="ko-KR" altLang="en-US" baseline="0" dirty="0"/>
+              <a:t>자주 변경될 것 같은 </a:t>
+            </a:r>
+            <a:r>
+              <a:rPr lang="en-US" altLang="ko-KR" baseline="0" dirty="0"/>
+              <a:t>html </a:t>
+            </a:r>
+            <a:r>
+              <a:rPr lang="ko-KR" altLang="en-US" baseline="0" dirty="0"/>
+              <a:t>요소나 내용</a:t>
+            </a:r>
+            <a:endParaRPr lang="en-US" altLang="ko-KR" baseline="0" dirty="0"/>
           </a:p>
         </p:txBody>
       </p:sp>
@@ -1010,7 +928,7 @@
           <a:p>
             <a:fld id="{C09E5BFC-1559-42F1-8940-AB342D56BF02}" type="slidenum">
               <a:rPr lang="ko-KR" altLang="en-US" smtClean="0"/>
-              <a:t>14</a:t>
+              <a:t>13</a:t>
             </a:fld>
             <a:endParaRPr lang="ko-KR" altLang="en-US"/>
           </a:p>
@@ -1019,7 +937,7 @@
     </p:spTree>
     <p:extLst>
       <p:ext uri="{BB962C8B-B14F-4D97-AF65-F5344CB8AC3E}">
-        <p14:creationId xmlns:p14="http://schemas.microsoft.com/office/powerpoint/2010/main" val="2229234871"/>
+        <p14:creationId xmlns:p14="http://schemas.microsoft.com/office/powerpoint/2010/main" val="695242521"/>
       </p:ext>
     </p:extLst>
   </p:cSld>
@@ -1073,419 +991,84 @@
           <a:bodyPr/>
           <a:lstStyle/>
           <a:p>
-            <a:pPr marL="0" marR="0" indent="0" algn="l" defTabSz="914400" rtl="0" eaLnBrk="1" fontAlgn="auto" latinLnBrk="1" hangingPunct="1">
-              <a:lnSpc>
-                <a:spcPct val="100000"/>
-              </a:lnSpc>
-              <a:spcBef>
-                <a:spcPts val="0"/>
-              </a:spcBef>
-              <a:spcAft>
-                <a:spcPts val="0"/>
-              </a:spcAft>
-              <a:buClrTx/>
-              <a:buSzTx/>
+            <a:pPr marL="171450" indent="-171450">
+              <a:buFontTx/>
+              <a:buChar char="-"/>
+            </a:pPr>
+            <a:r>
+              <a:rPr lang="en-US" altLang="ko-KR" dirty="0"/>
+              <a:t>props</a:t>
+            </a:r>
+            <a:r>
+              <a:rPr lang="ko-KR" altLang="en-US" dirty="0"/>
+              <a:t>는 자식입장에서는 수정이 불가능</a:t>
+            </a:r>
+            <a:r>
+              <a:rPr lang="en-US" altLang="ko-KR" dirty="0"/>
+              <a:t>! </a:t>
+            </a:r>
+            <a:r>
+              <a:rPr lang="ko-KR" altLang="en-US" dirty="0"/>
+              <a:t>읽기만 가능</a:t>
+            </a:r>
+            <a:r>
+              <a:rPr lang="en-US" altLang="ko-KR" dirty="0"/>
+              <a:t>!</a:t>
+            </a:r>
+          </a:p>
+          <a:p>
+            <a:pPr marL="171450" indent="-171450">
+              <a:buFontTx/>
+              <a:buChar char="-"/>
+            </a:pPr>
+            <a:r>
+              <a:rPr lang="ko-KR" altLang="en-US" dirty="0"/>
+              <a:t>변경하려면 최초 유포자 측에서 수정해야함</a:t>
+            </a:r>
+            <a:r>
+              <a:rPr lang="en-US" altLang="ko-KR" dirty="0"/>
+              <a:t>!</a:t>
+            </a:r>
+          </a:p>
+          <a:p>
+            <a:pPr marL="171450" indent="-171450">
+              <a:buFontTx/>
+              <a:buChar char="-"/>
+            </a:pPr>
+            <a:endParaRPr lang="en-US" altLang="ko-KR" dirty="0"/>
+          </a:p>
+          <a:p>
+            <a:pPr marL="0" indent="0">
               <a:buFontTx/>
               <a:buNone/>
-              <a:tabLst/>
-              <a:defRPr/>
             </a:pPr>
             <a:r>
               <a:rPr lang="en-US" altLang="ko-KR" dirty="0"/>
-              <a:t>16.3 </a:t>
-            </a:r>
+              <a:t>*</a:t>
+            </a:r>
+            <a:r>
+              <a:rPr lang="en-US" altLang="ko-KR" baseline="0" dirty="0"/>
+              <a:t> state</a:t>
+            </a:r>
+            <a:endParaRPr lang="en-US" altLang="ko-KR" dirty="0"/>
+          </a:p>
+          <a:p>
+            <a:pPr marL="171450" indent="-171450">
+              <a:buFontTx/>
+              <a:buChar char="-"/>
+            </a:pPr>
             <a:r>
               <a:rPr lang="ko-KR" altLang="en-US" dirty="0"/>
-              <a:t>버전 이전 형태</a:t>
+              <a:t>변수같은 존재</a:t>
             </a:r>
             <a:endParaRPr lang="en-US" altLang="ko-KR" dirty="0"/>
           </a:p>
           <a:p>
-            <a:pPr marL="0" marR="0" indent="0" algn="l" defTabSz="914400" rtl="0" eaLnBrk="1" fontAlgn="auto" latinLnBrk="1" hangingPunct="1">
-              <a:lnSpc>
-                <a:spcPct val="100000"/>
-              </a:lnSpc>
-              <a:spcBef>
-                <a:spcPts val="0"/>
-              </a:spcBef>
-              <a:spcAft>
-                <a:spcPts val="0"/>
-              </a:spcAft>
-              <a:buClrTx/>
-              <a:buSzTx/>
+            <a:pPr marL="171450" indent="-171450">
               <a:buFontTx/>
-              <a:buNone/>
-              <a:tabLst/>
-              <a:defRPr/>
+              <a:buChar char="-"/>
             </a:pPr>
-            <a:r>
-              <a:rPr lang="en-US" altLang="ko-KR" dirty="0"/>
-              <a:t>constructor()</a:t>
-            </a:r>
-            <a:r>
-              <a:rPr lang="en-US" altLang="ko-KR" baseline="0" dirty="0"/>
-              <a:t> : </a:t>
-            </a:r>
-            <a:r>
-              <a:rPr lang="ko-KR" altLang="en-US" baseline="0" dirty="0" err="1"/>
-              <a:t>생성자</a:t>
-            </a:r>
-            <a:r>
-              <a:rPr lang="en-US" altLang="ko-KR" baseline="0" dirty="0"/>
-              <a:t>, state </a:t>
-            </a:r>
-            <a:r>
-              <a:rPr lang="ko-KR" altLang="en-US" baseline="0" dirty="0"/>
-              <a:t>값을 초기화 하거나 메서드를 바인딩 할 때 사용</a:t>
-            </a:r>
-            <a:endParaRPr lang="en-US" altLang="ko-KR" baseline="0" dirty="0"/>
-          </a:p>
-          <a:p>
-            <a:pPr marL="0" marR="0" indent="0" algn="l" defTabSz="914400" rtl="0" eaLnBrk="1" fontAlgn="auto" latinLnBrk="1" hangingPunct="1">
-              <a:lnSpc>
-                <a:spcPct val="100000"/>
-              </a:lnSpc>
-              <a:spcBef>
-                <a:spcPts val="0"/>
-              </a:spcBef>
-              <a:spcAft>
-                <a:spcPts val="0"/>
-              </a:spcAft>
-              <a:buClrTx/>
-              <a:buSzTx/>
-              <a:buFontTx/>
-              <a:buNone/>
-              <a:tabLst/>
-              <a:defRPr/>
-            </a:pPr>
-            <a:r>
-              <a:rPr lang="ko-KR" altLang="en-US" baseline="0" dirty="0"/>
-              <a:t>해당 컴포넌트가 마운트 되기 전 호출된다 </a:t>
-            </a:r>
-            <a:r>
-              <a:rPr lang="en-US" altLang="ko-KR" baseline="0" dirty="0"/>
-              <a:t>(</a:t>
-            </a:r>
-            <a:r>
-              <a:rPr lang="ko-KR" altLang="en-US" baseline="0" dirty="0"/>
-              <a:t>마운트 </a:t>
-            </a:r>
-            <a:r>
-              <a:rPr lang="en-US" altLang="ko-KR" baseline="0" dirty="0"/>
-              <a:t>: DOM </a:t>
-            </a:r>
-            <a:r>
-              <a:rPr lang="ko-KR" altLang="en-US" baseline="0" dirty="0"/>
-              <a:t>객체가 생성되고 브라우저에 나타나는 것을 의미</a:t>
-            </a:r>
-            <a:r>
-              <a:rPr lang="en-US" altLang="ko-KR" baseline="0" dirty="0"/>
-              <a:t>)</a:t>
-            </a:r>
-          </a:p>
-          <a:p>
-            <a:pPr marL="0" marR="0" indent="0" algn="l" defTabSz="914400" rtl="0" eaLnBrk="1" fontAlgn="auto" latinLnBrk="1" hangingPunct="1">
-              <a:lnSpc>
-                <a:spcPct val="100000"/>
-              </a:lnSpc>
-              <a:spcBef>
-                <a:spcPts val="0"/>
-              </a:spcBef>
-              <a:spcAft>
-                <a:spcPts val="0"/>
-              </a:spcAft>
-              <a:buClrTx/>
-              <a:buSzTx/>
-              <a:buFontTx/>
-              <a:buNone/>
-              <a:tabLst/>
-              <a:defRPr/>
-            </a:pPr>
-            <a:r>
-              <a:rPr lang="en-US" altLang="ko-KR" baseline="0" dirty="0"/>
-              <a:t>(Mount, Update, </a:t>
-            </a:r>
-            <a:r>
-              <a:rPr lang="en-US" altLang="ko-KR" baseline="0" dirty="0" err="1"/>
-              <a:t>UnMount</a:t>
-            </a:r>
-            <a:r>
-              <a:rPr lang="en-US" altLang="ko-KR" baseline="0" dirty="0"/>
-              <a:t>) -&gt; </a:t>
-            </a:r>
-            <a:r>
-              <a:rPr lang="ko-KR" altLang="en-US" baseline="0" dirty="0"/>
-              <a:t>추후 라이프 사이클 파트에서 다룰 예정</a:t>
-            </a:r>
-            <a:endParaRPr lang="en-US" altLang="ko-KR" baseline="0" dirty="0"/>
-          </a:p>
-          <a:p>
-            <a:pPr marL="0" marR="0" indent="0" algn="l" defTabSz="914400" rtl="0" eaLnBrk="1" fontAlgn="auto" latinLnBrk="1" hangingPunct="1">
-              <a:lnSpc>
-                <a:spcPct val="100000"/>
-              </a:lnSpc>
-              <a:spcBef>
-                <a:spcPts val="0"/>
-              </a:spcBef>
-              <a:spcAft>
-                <a:spcPts val="0"/>
-              </a:spcAft>
-              <a:buClrTx/>
-              <a:buSzTx/>
-              <a:buFontTx/>
-              <a:buNone/>
-              <a:tabLst/>
-              <a:defRPr/>
-            </a:pPr>
-            <a:r>
-              <a:rPr lang="en-US" altLang="ko-KR" baseline="0" dirty="0"/>
-              <a:t>----</a:t>
-            </a:r>
-          </a:p>
-          <a:p>
-            <a:pPr marL="0" marR="0" indent="0" algn="l" defTabSz="914400" rtl="0" eaLnBrk="1" fontAlgn="auto" latinLnBrk="1" hangingPunct="1">
-              <a:lnSpc>
-                <a:spcPct val="100000"/>
-              </a:lnSpc>
-              <a:spcBef>
-                <a:spcPts val="0"/>
-              </a:spcBef>
-              <a:spcAft>
-                <a:spcPts val="0"/>
-              </a:spcAft>
-              <a:buClrTx/>
-              <a:buSzTx/>
-              <a:buFontTx/>
-              <a:buNone/>
-              <a:tabLst/>
-              <a:defRPr/>
-            </a:pPr>
-            <a:r>
-              <a:rPr lang="en-US" altLang="ko-KR" dirty="0"/>
-              <a:t>super() : </a:t>
-            </a:r>
-            <a:r>
-              <a:rPr lang="ko-KR" altLang="en-US" dirty="0"/>
-              <a:t>부모 클래스 </a:t>
-            </a:r>
-            <a:r>
-              <a:rPr lang="ko-KR" altLang="en-US" dirty="0" err="1"/>
-              <a:t>생성자</a:t>
-            </a:r>
-            <a:r>
-              <a:rPr lang="ko-KR" altLang="en-US" dirty="0"/>
-              <a:t> 가리킴</a:t>
-            </a:r>
-            <a:r>
-              <a:rPr lang="en-US" altLang="ko-KR" dirty="0"/>
-              <a:t>, super(props)</a:t>
-            </a:r>
-            <a:r>
-              <a:rPr lang="ko-KR" altLang="en-US" dirty="0"/>
-              <a:t>를 </a:t>
-            </a:r>
-            <a:r>
-              <a:rPr lang="ko-KR" altLang="en-US" dirty="0" err="1"/>
-              <a:t>선언전까지</a:t>
-            </a:r>
-            <a:r>
-              <a:rPr lang="ko-KR" altLang="en-US" dirty="0"/>
-              <a:t> </a:t>
-            </a:r>
-            <a:r>
-              <a:rPr lang="en-US" altLang="ko-KR" dirty="0"/>
-              <a:t>constructor</a:t>
-            </a:r>
-            <a:r>
-              <a:rPr lang="ko-KR" altLang="en-US" dirty="0"/>
-              <a:t>에서 </a:t>
-            </a:r>
-            <a:r>
-              <a:rPr lang="en-US" altLang="ko-KR" dirty="0"/>
-              <a:t>this</a:t>
-            </a:r>
-            <a:r>
-              <a:rPr lang="en-US" altLang="ko-KR" baseline="0" dirty="0"/>
-              <a:t> </a:t>
-            </a:r>
-            <a:r>
-              <a:rPr lang="ko-KR" altLang="en-US" baseline="0" dirty="0"/>
-              <a:t>키워드를 사용할 수 없다</a:t>
-            </a:r>
-            <a:r>
-              <a:rPr lang="en-US" altLang="ko-KR" baseline="0" dirty="0"/>
-              <a:t>(</a:t>
-            </a:r>
-            <a:r>
-              <a:rPr lang="en-US" altLang="ko-KR" baseline="0" dirty="0" err="1"/>
-              <a:t>js</a:t>
-            </a:r>
-            <a:r>
-              <a:rPr lang="ko-KR" altLang="en-US" baseline="0" dirty="0"/>
-              <a:t>에서</a:t>
-            </a:r>
-            <a:r>
-              <a:rPr lang="en-US" altLang="ko-KR" baseline="0" dirty="0"/>
-              <a:t>)</a:t>
-            </a:r>
-          </a:p>
-          <a:p>
-            <a:pPr marL="0" marR="0" indent="0" algn="l" defTabSz="914400" rtl="0" eaLnBrk="1" fontAlgn="auto" latinLnBrk="1" hangingPunct="1">
-              <a:lnSpc>
-                <a:spcPct val="100000"/>
-              </a:lnSpc>
-              <a:spcBef>
-                <a:spcPts val="0"/>
-              </a:spcBef>
-              <a:spcAft>
-                <a:spcPts val="0"/>
-              </a:spcAft>
-              <a:buClrTx/>
-              <a:buSzTx/>
-              <a:buFontTx/>
-              <a:buNone/>
-              <a:tabLst/>
-              <a:defRPr/>
-            </a:pPr>
-            <a:endParaRPr lang="en-US" altLang="ko-KR" dirty="0" smtClean="0"/>
-          </a:p>
-          <a:p>
-            <a:pPr marL="0" marR="0" indent="0" algn="l" defTabSz="914400" rtl="0" eaLnBrk="1" fontAlgn="auto" latinLnBrk="1" hangingPunct="1">
-              <a:lnSpc>
-                <a:spcPct val="100000"/>
-              </a:lnSpc>
-              <a:spcBef>
-                <a:spcPts val="0"/>
-              </a:spcBef>
-              <a:spcAft>
-                <a:spcPts val="0"/>
-              </a:spcAft>
-              <a:buClrTx/>
-              <a:buSzTx/>
-              <a:buFontTx/>
-              <a:buNone/>
-              <a:tabLst/>
-              <a:defRPr/>
-            </a:pPr>
-            <a:r>
-              <a:rPr lang="en-US" altLang="ko-KR" dirty="0" smtClean="0"/>
-              <a:t>**</a:t>
-            </a:r>
-            <a:r>
-              <a:rPr lang="en-US" altLang="ko-KR" baseline="0" dirty="0" smtClean="0"/>
-              <a:t> React 16.3 </a:t>
-            </a:r>
-            <a:r>
-              <a:rPr lang="ko-KR" altLang="en-US" baseline="0" dirty="0" smtClean="0"/>
-              <a:t>이전</a:t>
-            </a:r>
-            <a:endParaRPr lang="en-US" altLang="ko-KR" baseline="0" dirty="0" smtClean="0"/>
-          </a:p>
-          <a:p>
-            <a:pPr marL="0" marR="0" indent="0" algn="l" defTabSz="914400" rtl="0" eaLnBrk="1" fontAlgn="auto" latinLnBrk="1" hangingPunct="1">
-              <a:lnSpc>
-                <a:spcPct val="100000"/>
-              </a:lnSpc>
-              <a:spcBef>
-                <a:spcPts val="0"/>
-              </a:spcBef>
-              <a:spcAft>
-                <a:spcPts val="0"/>
-              </a:spcAft>
-              <a:buClrTx/>
-              <a:buSzTx/>
-              <a:buFontTx/>
-              <a:buNone/>
-              <a:tabLst/>
-              <a:defRPr/>
-            </a:pPr>
-            <a:r>
-              <a:rPr lang="ko-KR" altLang="en-US" baseline="0" dirty="0" smtClean="0"/>
-              <a:t>상태를 초기화하기 위해 주로</a:t>
-            </a:r>
-            <a:r>
-              <a:rPr lang="en-US" altLang="ko-KR" baseline="0" dirty="0" smtClean="0"/>
-              <a:t>‘constructor’ </a:t>
-            </a:r>
-            <a:r>
-              <a:rPr lang="ko-KR" altLang="en-US" baseline="0" dirty="0" smtClean="0"/>
-              <a:t>사용</a:t>
-            </a:r>
-            <a:r>
-              <a:rPr lang="en-US" altLang="ko-KR" baseline="0" dirty="0" smtClean="0"/>
-              <a:t>.</a:t>
-            </a:r>
-          </a:p>
-          <a:p>
-            <a:pPr marL="0" marR="0" indent="0" algn="l" defTabSz="914400" rtl="0" eaLnBrk="1" fontAlgn="auto" latinLnBrk="1" hangingPunct="1">
-              <a:lnSpc>
-                <a:spcPct val="100000"/>
-              </a:lnSpc>
-              <a:spcBef>
-                <a:spcPts val="0"/>
-              </a:spcBef>
-              <a:spcAft>
-                <a:spcPts val="0"/>
-              </a:spcAft>
-              <a:buClrTx/>
-              <a:buSzTx/>
-              <a:buFontTx/>
-              <a:buNone/>
-              <a:tabLst/>
-              <a:defRPr/>
-            </a:pPr>
-            <a:r>
-              <a:rPr lang="ko-KR" altLang="en-US" baseline="0" dirty="0" smtClean="0"/>
-              <a:t>상태 초기화는 </a:t>
-            </a:r>
-            <a:r>
-              <a:rPr lang="en-US" altLang="ko-KR" baseline="0" dirty="0" smtClean="0"/>
-              <a:t>‘</a:t>
-            </a:r>
-            <a:r>
-              <a:rPr lang="en-US" altLang="ko-KR" baseline="0" dirty="0" err="1" smtClean="0"/>
-              <a:t>this.state</a:t>
-            </a:r>
-            <a:r>
-              <a:rPr lang="en-US" altLang="ko-KR" baseline="0" dirty="0" smtClean="0"/>
-              <a:t>’</a:t>
-            </a:r>
-            <a:r>
-              <a:rPr lang="ko-KR" altLang="en-US" baseline="0" dirty="0" smtClean="0"/>
-              <a:t>에</a:t>
-            </a:r>
-            <a:r>
-              <a:rPr lang="en-US" altLang="ko-KR" baseline="0" dirty="0" smtClean="0"/>
-              <a:t> </a:t>
-            </a:r>
-            <a:r>
-              <a:rPr lang="ko-KR" altLang="en-US" baseline="0" dirty="0" smtClean="0"/>
-              <a:t>직접 할당함</a:t>
-            </a:r>
-            <a:r>
-              <a:rPr lang="en-US" altLang="ko-KR" baseline="0" dirty="0" smtClean="0"/>
-              <a:t>.</a:t>
-            </a:r>
-          </a:p>
-          <a:p>
-            <a:pPr marL="0" marR="0" indent="0" algn="l" defTabSz="914400" rtl="0" eaLnBrk="1" fontAlgn="auto" latinLnBrk="1" hangingPunct="1">
-              <a:lnSpc>
-                <a:spcPct val="100000"/>
-              </a:lnSpc>
-              <a:spcBef>
-                <a:spcPts val="0"/>
-              </a:spcBef>
-              <a:spcAft>
-                <a:spcPts val="0"/>
-              </a:spcAft>
-              <a:buClrTx/>
-              <a:buSzTx/>
-              <a:buFontTx/>
-              <a:buNone/>
-              <a:tabLst/>
-              <a:defRPr/>
-            </a:pPr>
-            <a:endParaRPr lang="ko-KR" altLang="en-US" dirty="0"/>
+            <a:endParaRPr lang="en-US" altLang="ko-KR" dirty="0"/>
           </a:p>
         </p:txBody>
       </p:sp>
@@ -1496,7 +1079,7 @@
             <a:spLocks noGrp="1"/>
           </p:cNvSpPr>
           <p:nvPr>
-            <p:ph type="sldNum" sz="quarter" idx="10"/>
+            <p:ph type="sldNum" sz="quarter" idx="5"/>
           </p:nvPr>
         </p:nvSpPr>
         <p:spPr/>
@@ -1506,7 +1089,7 @@
           <a:p>
             <a:fld id="{C09E5BFC-1559-42F1-8940-AB342D56BF02}" type="slidenum">
               <a:rPr lang="ko-KR" altLang="en-US" smtClean="0"/>
-              <a:t>15</a:t>
+              <a:t>14</a:t>
             </a:fld>
             <a:endParaRPr lang="ko-KR" altLang="en-US"/>
           </a:p>
@@ -1515,7 +1098,7 @@
     </p:spTree>
     <p:extLst>
       <p:ext uri="{BB962C8B-B14F-4D97-AF65-F5344CB8AC3E}">
-        <p14:creationId xmlns:p14="http://schemas.microsoft.com/office/powerpoint/2010/main" val="4203439928"/>
+        <p14:creationId xmlns:p14="http://schemas.microsoft.com/office/powerpoint/2010/main" val="2229234871"/>
       </p:ext>
     </p:extLst>
   </p:cSld>
@@ -1569,42 +1152,418 @@
           <a:bodyPr/>
           <a:lstStyle/>
           <a:p>
-            <a:r>
-              <a:rPr lang="ko-KR" altLang="en-US" dirty="0" smtClean="0"/>
-              <a:t>생명주기 메서드가 도입</a:t>
-            </a:r>
-            <a:r>
-              <a:rPr lang="en-US" altLang="ko-KR" dirty="0" smtClean="0"/>
-              <a:t>!</a:t>
-            </a:r>
-          </a:p>
-          <a:p>
-            <a:r>
-              <a:rPr lang="en-US" altLang="ko-KR" dirty="0" smtClean="0"/>
-              <a:t>'state'</a:t>
-            </a:r>
-            <a:r>
-              <a:rPr lang="ko-KR" altLang="en-US" dirty="0" smtClean="0"/>
-              <a:t>를 초기화 하는 방법이 생김</a:t>
-            </a:r>
-            <a:r>
-              <a:rPr lang="en-US" altLang="ko-KR" dirty="0" smtClean="0"/>
+            <a:pPr marL="0" marR="0" indent="0" algn="l" defTabSz="914400" rtl="0" eaLnBrk="1" fontAlgn="auto" latinLnBrk="1" hangingPunct="1">
+              <a:lnSpc>
+                <a:spcPct val="100000"/>
+              </a:lnSpc>
+              <a:spcBef>
+                <a:spcPts val="0"/>
+              </a:spcBef>
+              <a:spcAft>
+                <a:spcPts val="0"/>
+              </a:spcAft>
+              <a:buClrTx/>
+              <a:buSzTx/>
+              <a:buFontTx/>
+              <a:buNone/>
+              <a:tabLst/>
+              <a:defRPr/>
+            </a:pPr>
+            <a:r>
+              <a:rPr lang="en-US" altLang="ko-KR" dirty="0"/>
+              <a:t>16.3 </a:t>
+            </a:r>
+            <a:r>
+              <a:rPr lang="ko-KR" altLang="en-US" dirty="0"/>
+              <a:t>버전 이전 형태</a:t>
+            </a:r>
+            <a:endParaRPr lang="en-US" altLang="ko-KR" dirty="0"/>
+          </a:p>
+          <a:p>
+            <a:pPr marL="0" marR="0" indent="0" algn="l" defTabSz="914400" rtl="0" eaLnBrk="1" fontAlgn="auto" latinLnBrk="1" hangingPunct="1">
+              <a:lnSpc>
+                <a:spcPct val="100000"/>
+              </a:lnSpc>
+              <a:spcBef>
+                <a:spcPts val="0"/>
+              </a:spcBef>
+              <a:spcAft>
+                <a:spcPts val="0"/>
+              </a:spcAft>
+              <a:buClrTx/>
+              <a:buSzTx/>
+              <a:buFontTx/>
+              <a:buNone/>
+              <a:tabLst/>
+              <a:defRPr/>
+            </a:pPr>
+            <a:r>
+              <a:rPr lang="en-US" altLang="ko-KR" dirty="0"/>
+              <a:t>constructor()</a:t>
+            </a:r>
+            <a:r>
+              <a:rPr lang="en-US" altLang="ko-KR" baseline="0" dirty="0"/>
+              <a:t> : </a:t>
+            </a:r>
+            <a:r>
+              <a:rPr lang="ko-KR" altLang="en-US" baseline="0" dirty="0" err="1"/>
+              <a:t>생성자</a:t>
+            </a:r>
+            <a:r>
+              <a:rPr lang="en-US" altLang="ko-KR" baseline="0" dirty="0"/>
+              <a:t>, state </a:t>
+            </a:r>
+            <a:r>
+              <a:rPr lang="ko-KR" altLang="en-US" baseline="0" dirty="0"/>
+              <a:t>값을 초기화 하거나 메서드를 바인딩 할 때 사용</a:t>
+            </a:r>
+            <a:endParaRPr lang="en-US" altLang="ko-KR" baseline="0" dirty="0"/>
+          </a:p>
+          <a:p>
+            <a:pPr marL="0" marR="0" indent="0" algn="l" defTabSz="914400" rtl="0" eaLnBrk="1" fontAlgn="auto" latinLnBrk="1" hangingPunct="1">
+              <a:lnSpc>
+                <a:spcPct val="100000"/>
+              </a:lnSpc>
+              <a:spcBef>
+                <a:spcPts val="0"/>
+              </a:spcBef>
+              <a:spcAft>
+                <a:spcPts val="0"/>
+              </a:spcAft>
+              <a:buClrTx/>
+              <a:buSzTx/>
+              <a:buFontTx/>
+              <a:buNone/>
+              <a:tabLst/>
+              <a:defRPr/>
+            </a:pPr>
+            <a:r>
+              <a:rPr lang="ko-KR" altLang="en-US" baseline="0" dirty="0"/>
+              <a:t>해당 컴포넌트가 마운트 되기 전 호출된다 </a:t>
+            </a:r>
+            <a:r>
+              <a:rPr lang="en-US" altLang="ko-KR" baseline="0" dirty="0"/>
+              <a:t>(</a:t>
+            </a:r>
+            <a:r>
+              <a:rPr lang="ko-KR" altLang="en-US" baseline="0" dirty="0"/>
+              <a:t>마운트 </a:t>
+            </a:r>
+            <a:r>
+              <a:rPr lang="en-US" altLang="ko-KR" baseline="0" dirty="0"/>
+              <a:t>: DOM </a:t>
+            </a:r>
+            <a:r>
+              <a:rPr lang="ko-KR" altLang="en-US" baseline="0" dirty="0"/>
+              <a:t>객체가 생성되고 브라우저에 나타나는 것을 의미</a:t>
+            </a:r>
+            <a:r>
+              <a:rPr lang="en-US" altLang="ko-KR" baseline="0" dirty="0"/>
+              <a:t>)</a:t>
+            </a:r>
+          </a:p>
+          <a:p>
+            <a:pPr marL="0" marR="0" indent="0" algn="l" defTabSz="914400" rtl="0" eaLnBrk="1" fontAlgn="auto" latinLnBrk="1" hangingPunct="1">
+              <a:lnSpc>
+                <a:spcPct val="100000"/>
+              </a:lnSpc>
+              <a:spcBef>
+                <a:spcPts val="0"/>
+              </a:spcBef>
+              <a:spcAft>
+                <a:spcPts val="0"/>
+              </a:spcAft>
+              <a:buClrTx/>
+              <a:buSzTx/>
+              <a:buFontTx/>
+              <a:buNone/>
+              <a:tabLst/>
+              <a:defRPr/>
+            </a:pPr>
+            <a:r>
+              <a:rPr lang="en-US" altLang="ko-KR" baseline="0" dirty="0"/>
+              <a:t>(Mount, Update, </a:t>
+            </a:r>
+            <a:r>
+              <a:rPr lang="en-US" altLang="ko-KR" baseline="0" dirty="0" err="1"/>
+              <a:t>UnMount</a:t>
+            </a:r>
+            <a:r>
+              <a:rPr lang="en-US" altLang="ko-KR" baseline="0" dirty="0"/>
+              <a:t>) -&gt; </a:t>
+            </a:r>
+            <a:r>
+              <a:rPr lang="ko-KR" altLang="en-US" baseline="0" dirty="0"/>
+              <a:t>추후 라이프 사이클 파트에서 다룰 예정</a:t>
+            </a:r>
+            <a:endParaRPr lang="en-US" altLang="ko-KR" baseline="0" dirty="0"/>
+          </a:p>
+          <a:p>
+            <a:pPr marL="0" marR="0" indent="0" algn="l" defTabSz="914400" rtl="0" eaLnBrk="1" fontAlgn="auto" latinLnBrk="1" hangingPunct="1">
+              <a:lnSpc>
+                <a:spcPct val="100000"/>
+              </a:lnSpc>
+              <a:spcBef>
+                <a:spcPts val="0"/>
+              </a:spcBef>
+              <a:spcAft>
+                <a:spcPts val="0"/>
+              </a:spcAft>
+              <a:buClrTx/>
+              <a:buSzTx/>
+              <a:buFontTx/>
+              <a:buNone/>
+              <a:tabLst/>
+              <a:defRPr/>
+            </a:pPr>
+            <a:r>
+              <a:rPr lang="en-US" altLang="ko-KR" baseline="0" dirty="0"/>
+              <a:t>----</a:t>
+            </a:r>
+          </a:p>
+          <a:p>
+            <a:pPr marL="0" marR="0" indent="0" algn="l" defTabSz="914400" rtl="0" eaLnBrk="1" fontAlgn="auto" latinLnBrk="1" hangingPunct="1">
+              <a:lnSpc>
+                <a:spcPct val="100000"/>
+              </a:lnSpc>
+              <a:spcBef>
+                <a:spcPts val="0"/>
+              </a:spcBef>
+              <a:spcAft>
+                <a:spcPts val="0"/>
+              </a:spcAft>
+              <a:buClrTx/>
+              <a:buSzTx/>
+              <a:buFontTx/>
+              <a:buNone/>
+              <a:tabLst/>
+              <a:defRPr/>
+            </a:pPr>
+            <a:r>
+              <a:rPr lang="en-US" altLang="ko-KR" dirty="0"/>
+              <a:t>super() : </a:t>
+            </a:r>
+            <a:r>
+              <a:rPr lang="ko-KR" altLang="en-US" dirty="0"/>
+              <a:t>부모 클래스 </a:t>
+            </a:r>
+            <a:r>
+              <a:rPr lang="ko-KR" altLang="en-US" dirty="0" err="1"/>
+              <a:t>생성자</a:t>
+            </a:r>
+            <a:r>
+              <a:rPr lang="ko-KR" altLang="en-US" dirty="0"/>
+              <a:t> 가리킴</a:t>
+            </a:r>
+            <a:r>
+              <a:rPr lang="en-US" altLang="ko-KR" dirty="0"/>
+              <a:t>, super(props)</a:t>
+            </a:r>
+            <a:r>
+              <a:rPr lang="ko-KR" altLang="en-US" dirty="0"/>
+              <a:t>를 </a:t>
+            </a:r>
+            <a:r>
+              <a:rPr lang="ko-KR" altLang="en-US" dirty="0" err="1"/>
+              <a:t>선언전까지</a:t>
+            </a:r>
+            <a:r>
+              <a:rPr lang="ko-KR" altLang="en-US" dirty="0"/>
+              <a:t> </a:t>
+            </a:r>
+            <a:r>
+              <a:rPr lang="en-US" altLang="ko-KR" dirty="0"/>
+              <a:t>constructor</a:t>
+            </a:r>
+            <a:r>
+              <a:rPr lang="ko-KR" altLang="en-US" dirty="0"/>
+              <a:t>에서 </a:t>
+            </a:r>
+            <a:r>
+              <a:rPr lang="en-US" altLang="ko-KR" dirty="0"/>
+              <a:t>this</a:t>
+            </a:r>
+            <a:r>
+              <a:rPr lang="en-US" altLang="ko-KR" baseline="0" dirty="0"/>
+              <a:t> </a:t>
+            </a:r>
+            <a:r>
+              <a:rPr lang="ko-KR" altLang="en-US" baseline="0" dirty="0"/>
+              <a:t>키워드를 사용할 수 없다</a:t>
+            </a:r>
+            <a:r>
+              <a:rPr lang="en-US" altLang="ko-KR" baseline="0" dirty="0"/>
+              <a:t>(</a:t>
+            </a:r>
+            <a:r>
+              <a:rPr lang="en-US" altLang="ko-KR" baseline="0" dirty="0" err="1"/>
+              <a:t>js</a:t>
+            </a:r>
+            <a:r>
+              <a:rPr lang="ko-KR" altLang="en-US" baseline="0" dirty="0"/>
+              <a:t>에서</a:t>
+            </a:r>
+            <a:r>
+              <a:rPr lang="en-US" altLang="ko-KR" baseline="0" dirty="0"/>
+              <a:t>)</a:t>
+            </a:r>
+          </a:p>
+          <a:p>
+            <a:pPr marL="0" marR="0" indent="0" algn="l" defTabSz="914400" rtl="0" eaLnBrk="1" fontAlgn="auto" latinLnBrk="1" hangingPunct="1">
+              <a:lnSpc>
+                <a:spcPct val="100000"/>
+              </a:lnSpc>
+              <a:spcBef>
+                <a:spcPts val="0"/>
+              </a:spcBef>
+              <a:spcAft>
+                <a:spcPts val="0"/>
+              </a:spcAft>
+              <a:buClrTx/>
+              <a:buSzTx/>
+              <a:buFontTx/>
+              <a:buNone/>
+              <a:tabLst/>
+              <a:defRPr/>
+            </a:pPr>
+            <a:endParaRPr lang="en-US" altLang="ko-KR" dirty="0"/>
+          </a:p>
+          <a:p>
+            <a:pPr marL="0" marR="0" indent="0" algn="l" defTabSz="914400" rtl="0" eaLnBrk="1" fontAlgn="auto" latinLnBrk="1" hangingPunct="1">
+              <a:lnSpc>
+                <a:spcPct val="100000"/>
+              </a:lnSpc>
+              <a:spcBef>
+                <a:spcPts val="0"/>
+              </a:spcBef>
+              <a:spcAft>
+                <a:spcPts val="0"/>
+              </a:spcAft>
+              <a:buClrTx/>
+              <a:buSzTx/>
+              <a:buFontTx/>
+              <a:buNone/>
+              <a:tabLst/>
+              <a:defRPr/>
+            </a:pPr>
+            <a:r>
+              <a:rPr lang="en-US" altLang="ko-KR" dirty="0"/>
+              <a:t>**</a:t>
+            </a:r>
+            <a:r>
+              <a:rPr lang="en-US" altLang="ko-KR" baseline="0" dirty="0"/>
+              <a:t> React 16.3 </a:t>
+            </a:r>
+            <a:r>
+              <a:rPr lang="ko-KR" altLang="en-US" baseline="0" dirty="0"/>
+              <a:t>이전</a:t>
+            </a:r>
+            <a:endParaRPr lang="en-US" altLang="ko-KR" baseline="0" dirty="0"/>
+          </a:p>
+          <a:p>
+            <a:pPr marL="0" marR="0" indent="0" algn="l" defTabSz="914400" rtl="0" eaLnBrk="1" fontAlgn="auto" latinLnBrk="1" hangingPunct="1">
+              <a:lnSpc>
+                <a:spcPct val="100000"/>
+              </a:lnSpc>
+              <a:spcBef>
+                <a:spcPts val="0"/>
+              </a:spcBef>
+              <a:spcAft>
+                <a:spcPts val="0"/>
+              </a:spcAft>
+              <a:buClrTx/>
+              <a:buSzTx/>
+              <a:buFontTx/>
+              <a:buNone/>
+              <a:tabLst/>
+              <a:defRPr/>
+            </a:pPr>
+            <a:r>
+              <a:rPr lang="ko-KR" altLang="en-US" baseline="0" dirty="0"/>
+              <a:t>상태를 초기화하기 위해 주로</a:t>
+            </a:r>
+            <a:r>
+              <a:rPr lang="en-US" altLang="ko-KR" baseline="0" dirty="0"/>
+              <a:t>‘constructor’ </a:t>
+            </a:r>
+            <a:r>
+              <a:rPr lang="ko-KR" altLang="en-US" baseline="0" dirty="0"/>
+              <a:t>사용</a:t>
+            </a:r>
+            <a:r>
+              <a:rPr lang="en-US" altLang="ko-KR" baseline="0" dirty="0"/>
               <a:t>.</a:t>
             </a:r>
           </a:p>
           <a:p>
-            <a:r>
-              <a:rPr lang="en-US" altLang="ko-KR" dirty="0" smtClean="0"/>
-              <a:t>Constructor</a:t>
-            </a:r>
-            <a:r>
-              <a:rPr lang="ko-KR" altLang="en-US" dirty="0" smtClean="0"/>
-              <a:t>가 필요 없어짐</a:t>
-            </a:r>
-            <a:r>
-              <a:rPr lang="en-US" altLang="ko-KR" dirty="0" smtClean="0"/>
+            <a:pPr marL="0" marR="0" indent="0" algn="l" defTabSz="914400" rtl="0" eaLnBrk="1" fontAlgn="auto" latinLnBrk="1" hangingPunct="1">
+              <a:lnSpc>
+                <a:spcPct val="100000"/>
+              </a:lnSpc>
+              <a:spcBef>
+                <a:spcPts val="0"/>
+              </a:spcBef>
+              <a:spcAft>
+                <a:spcPts val="0"/>
+              </a:spcAft>
+              <a:buClrTx/>
+              <a:buSzTx/>
+              <a:buFontTx/>
+              <a:buNone/>
+              <a:tabLst/>
+              <a:defRPr/>
+            </a:pPr>
+            <a:r>
+              <a:rPr lang="ko-KR" altLang="en-US" baseline="0" dirty="0"/>
+              <a:t>상태 초기화는 </a:t>
+            </a:r>
+            <a:r>
+              <a:rPr lang="en-US" altLang="ko-KR" baseline="0" dirty="0"/>
+              <a:t>‘</a:t>
+            </a:r>
+            <a:r>
+              <a:rPr lang="en-US" altLang="ko-KR" baseline="0" dirty="0" err="1"/>
+              <a:t>this.state</a:t>
+            </a:r>
+            <a:r>
+              <a:rPr lang="en-US" altLang="ko-KR" baseline="0" dirty="0"/>
+              <a:t>’</a:t>
+            </a:r>
+            <a:r>
+              <a:rPr lang="ko-KR" altLang="en-US" baseline="0" dirty="0"/>
+              <a:t>에</a:t>
+            </a:r>
+            <a:r>
+              <a:rPr lang="en-US" altLang="ko-KR" baseline="0" dirty="0"/>
+              <a:t> </a:t>
+            </a:r>
+            <a:r>
+              <a:rPr lang="ko-KR" altLang="en-US" baseline="0" dirty="0"/>
+              <a:t>직접 할당함</a:t>
+            </a:r>
+            <a:r>
+              <a:rPr lang="en-US" altLang="ko-KR" baseline="0" dirty="0"/>
               <a:t>.</a:t>
             </a:r>
+          </a:p>
+          <a:p>
+            <a:pPr marL="0" marR="0" indent="0" algn="l" defTabSz="914400" rtl="0" eaLnBrk="1" fontAlgn="auto" latinLnBrk="1" hangingPunct="1">
+              <a:lnSpc>
+                <a:spcPct val="100000"/>
+              </a:lnSpc>
+              <a:spcBef>
+                <a:spcPts val="0"/>
+              </a:spcBef>
+              <a:spcAft>
+                <a:spcPts val="0"/>
+              </a:spcAft>
+              <a:buClrTx/>
+              <a:buSzTx/>
+              <a:buFontTx/>
+              <a:buNone/>
+              <a:tabLst/>
+              <a:defRPr/>
+            </a:pPr>
             <a:endParaRPr lang="ko-KR" altLang="en-US" dirty="0"/>
           </a:p>
         </p:txBody>
@@ -1626,7 +1585,7 @@
           <a:p>
             <a:fld id="{C09E5BFC-1559-42F1-8940-AB342D56BF02}" type="slidenum">
               <a:rPr lang="ko-KR" altLang="en-US" smtClean="0"/>
-              <a:t>16</a:t>
+              <a:t>15</a:t>
             </a:fld>
             <a:endParaRPr lang="ko-KR" altLang="en-US"/>
           </a:p>
@@ -1635,7 +1594,7 @@
     </p:spTree>
     <p:extLst>
       <p:ext uri="{BB962C8B-B14F-4D97-AF65-F5344CB8AC3E}">
-        <p14:creationId xmlns:p14="http://schemas.microsoft.com/office/powerpoint/2010/main" val="2729950675"/>
+        <p14:creationId xmlns:p14="http://schemas.microsoft.com/office/powerpoint/2010/main" val="4203439928"/>
       </p:ext>
     </p:extLst>
   </p:cSld>
@@ -1689,6 +1648,42 @@
           <a:bodyPr/>
           <a:lstStyle/>
           <a:p>
+            <a:r>
+              <a:rPr lang="ko-KR" altLang="en-US" dirty="0"/>
+              <a:t>생명주기 메서드가 도입</a:t>
+            </a:r>
+            <a:r>
+              <a:rPr lang="en-US" altLang="ko-KR" dirty="0"/>
+              <a:t>!</a:t>
+            </a:r>
+          </a:p>
+          <a:p>
+            <a:r>
+              <a:rPr lang="en-US" altLang="ko-KR" dirty="0"/>
+              <a:t>'state'</a:t>
+            </a:r>
+            <a:r>
+              <a:rPr lang="ko-KR" altLang="en-US" dirty="0"/>
+              <a:t>를 초기화 하는 방법이 생김</a:t>
+            </a:r>
+            <a:r>
+              <a:rPr lang="en-US" altLang="ko-KR" dirty="0"/>
+              <a:t>.</a:t>
+            </a:r>
+          </a:p>
+          <a:p>
+            <a:r>
+              <a:rPr lang="en-US" altLang="ko-KR" dirty="0"/>
+              <a:t>Constructor</a:t>
+            </a:r>
+            <a:r>
+              <a:rPr lang="ko-KR" altLang="en-US" dirty="0"/>
+              <a:t>가 필요 없어짐</a:t>
+            </a:r>
+            <a:r>
+              <a:rPr lang="en-US" altLang="ko-KR" dirty="0"/>
+              <a:t>.</a:t>
+            </a:r>
             <a:endParaRPr lang="ko-KR" altLang="en-US" dirty="0"/>
           </a:p>
         </p:txBody>
@@ -1710,7 +1705,7 @@
           <a:p>
             <a:fld id="{C09E5BFC-1559-42F1-8940-AB342D56BF02}" type="slidenum">
               <a:rPr lang="ko-KR" altLang="en-US" smtClean="0"/>
-              <a:t>17</a:t>
+              <a:t>16</a:t>
             </a:fld>
             <a:endParaRPr lang="ko-KR" altLang="en-US"/>
           </a:p>
@@ -1719,7 +1714,7 @@
     </p:spTree>
     <p:extLst>
       <p:ext uri="{BB962C8B-B14F-4D97-AF65-F5344CB8AC3E}">
-        <p14:creationId xmlns:p14="http://schemas.microsoft.com/office/powerpoint/2010/main" val="3906120493"/>
+        <p14:creationId xmlns:p14="http://schemas.microsoft.com/office/powerpoint/2010/main" val="2729950675"/>
       </p:ext>
     </p:extLst>
   </p:cSld>
@@ -1784,6 +1779,90 @@
             <a:spLocks noGrp="1"/>
           </p:cNvSpPr>
           <p:nvPr>
+            <p:ph type="sldNum" sz="quarter" idx="10"/>
+          </p:nvPr>
+        </p:nvSpPr>
+        <p:spPr/>
+        <p:txBody>
+          <a:bodyPr/>
+          <a:lstStyle/>
+          <a:p>
+            <a:fld id="{C09E5BFC-1559-42F1-8940-AB342D56BF02}" type="slidenum">
+              <a:rPr lang="ko-KR" altLang="en-US" smtClean="0"/>
+              <a:t>17</a:t>
+            </a:fld>
+            <a:endParaRPr lang="ko-KR" altLang="en-US"/>
+          </a:p>
+        </p:txBody>
+      </p:sp>
+    </p:spTree>
+    <p:extLst>
+      <p:ext uri="{BB962C8B-B14F-4D97-AF65-F5344CB8AC3E}">
+        <p14:creationId xmlns:p14="http://schemas.microsoft.com/office/powerpoint/2010/main" val="3906120493"/>
+      </p:ext>
+    </p:extLst>
+  </p:cSld>
+  <p:clrMapOvr>
+    <a:masterClrMapping/>
+  </p:clrMapOvr>
+</p:notes>
+</file>
+
+<file path=ppt/notesSlides/notesSlide16.xml><?xml version="1.0" encoding="utf-8"?>
+<p:notes xmlns:a="http://schemas.openxmlformats.org/drawingml/2006/main" xmlns:r="http://schemas.openxmlformats.org/officeDocument/2006/relationships" xmlns:p="http://schemas.openxmlformats.org/presentationml/2006/main">
+  <p:cSld>
+    <p:spTree>
+      <p:nvGrpSpPr>
+        <p:cNvPr id="1" name=""/>
+        <p:cNvGrpSpPr/>
+        <p:nvPr/>
+      </p:nvGrpSpPr>
+      <p:grpSpPr>
+        <a:xfrm>
+          <a:off x="0" y="0"/>
+          <a:ext cx="0" cy="0"/>
+          <a:chOff x="0" y="0"/>
+          <a:chExt cx="0" cy="0"/>
+        </a:xfrm>
+      </p:grpSpPr>
+      <p:sp>
+        <p:nvSpPr>
+          <p:cNvPr id="2" name="슬라이드 이미지 개체 틀 1"/>
+          <p:cNvSpPr>
+            <a:spLocks noGrp="1" noRot="1" noChangeAspect="1"/>
+          </p:cNvSpPr>
+          <p:nvPr>
+            <p:ph type="sldImg"/>
+          </p:nvPr>
+        </p:nvSpPr>
+        <p:spPr/>
+      </p:sp>
+      <p:sp>
+        <p:nvSpPr>
+          <p:cNvPr id="3" name="슬라이드 노트 개체 틀 2"/>
+          <p:cNvSpPr>
+            <a:spLocks noGrp="1"/>
+          </p:cNvSpPr>
+          <p:nvPr>
+            <p:ph type="body" idx="1"/>
+          </p:nvPr>
+        </p:nvSpPr>
+        <p:spPr/>
+        <p:txBody>
+          <a:bodyPr/>
+          <a:lstStyle/>
+          <a:p>
+            <a:endParaRPr lang="ko-KR" altLang="en-US" dirty="0"/>
+          </a:p>
+        </p:txBody>
+      </p:sp>
+      <p:sp>
+        <p:nvSpPr>
+          <p:cNvPr id="4" name="슬라이드 번호 개체 틀 3"/>
+          <p:cNvSpPr>
+            <a:spLocks noGrp="1"/>
+          </p:cNvSpPr>
+          <p:nvPr>
             <p:ph type="sldNum" sz="quarter" idx="5"/>
           </p:nvPr>
         </p:nvSpPr>
@@ -1813,7 +1892,7 @@
 </p:notes>
 </file>
 
-<file path=ppt/notesSlides/notesSlide16.xml><?xml version="1.0" encoding="utf-8"?>
+<file path=ppt/notesSlides/notesSlide17.xml><?xml version="1.0" encoding="utf-8"?>
 <p:notes xmlns:a="http://schemas.openxmlformats.org/drawingml/2006/main" xmlns:r="http://schemas.openxmlformats.org/officeDocument/2006/relationships" xmlns:p="http://schemas.openxmlformats.org/presentationml/2006/main">
   <p:cSld>
     <p:spTree>
@@ -6652,7 +6731,7 @@
           <a:p>
             <a:fld id="{0F78D9C4-20C1-4B15-A116-16DC77AD9A1E}" type="datetime1">
               <a:rPr lang="ko-KR" altLang="en-US" smtClean="0"/>
-              <a:t>2024-08-04</a:t>
+              <a:t>2024-08-05</a:t>
             </a:fld>
             <a:endParaRPr lang="ko-KR" altLang="en-US"/>
           </a:p>
@@ -6995,15 +7074,6 @@
                 <a:latin typeface="+mn-ea"/>
               </a:rPr>
               <a:t>강의 클릭</a:t>
-            </a:r>
-            <a:r>
-              <a:rPr lang="en-US" altLang="ko-KR" dirty="0">
-                <a:solidFill>
-                  <a:srgbClr val="212529"/>
-                </a:solidFill>
-                <a:latin typeface="+mn-ea"/>
-              </a:rPr>
-              <a:t/>
             </a:r>
             <a:br>
               <a:rPr lang="en-US" altLang="ko-KR" dirty="0">
@@ -7245,7 +7315,7 @@
           <a:p>
             <a:fld id="{0F78D9C4-20C1-4B15-A116-16DC77AD9A1E}" type="datetime1">
               <a:rPr lang="ko-KR" altLang="en-US" smtClean="0"/>
-              <a:t>2024-08-04</a:t>
+              <a:t>2024-08-05</a:t>
             </a:fld>
             <a:endParaRPr lang="ko-KR" altLang="en-US"/>
           </a:p>
@@ -7588,15 +7658,6 @@
                 <a:latin typeface="+mn-ea"/>
               </a:rPr>
               <a:t>강의 클릭</a:t>
-            </a:r>
-            <a:r>
-              <a:rPr lang="en-US" altLang="ko-KR" dirty="0">
-                <a:solidFill>
-                  <a:srgbClr val="212529"/>
-                </a:solidFill>
-                <a:latin typeface="+mn-ea"/>
-              </a:rPr>
-              <a:t/>
             </a:r>
             <a:br>
               <a:rPr lang="en-US" altLang="ko-KR" dirty="0">
@@ -9898,7 +9959,7 @@
         </p:nvSpPr>
         <p:spPr>
           <a:xfrm>
-            <a:off x="9499407" y="1576837"/>
+            <a:off x="9158625" y="1565212"/>
             <a:ext cx="1710061" cy="426800"/>
           </a:xfrm>
           <a:prstGeom prst="rect">
@@ -10010,7 +10071,7 @@
         </p:nvSpPr>
         <p:spPr>
           <a:xfrm>
-            <a:off x="7839185" y="3621489"/>
+            <a:off x="7541819" y="3039326"/>
             <a:ext cx="1154208" cy="352063"/>
           </a:xfrm>
           <a:prstGeom prst="rect">
@@ -10122,7 +10183,7 @@
         </p:nvSpPr>
         <p:spPr>
           <a:xfrm>
-            <a:off x="7839185" y="3973552"/>
+            <a:off x="7549010" y="3365369"/>
             <a:ext cx="3219229" cy="360978"/>
           </a:xfrm>
           <a:prstGeom prst="rect">
@@ -10464,16 +10525,6 @@
                 </a:solidFill>
               </a:rPr>
               <a:t> ]</a:t>
-            </a:r>
-            <a:r>
-              <a:rPr lang="en-US" altLang="ko-KR" sz="2000" dirty="0">
-                <a:solidFill>
-                  <a:schemeClr val="bg1">
-                    <a:lumMod val="50000"/>
-                  </a:schemeClr>
-                </a:solidFill>
-              </a:rPr>
-              <a:t/>
             </a:r>
             <a:br>
               <a:rPr lang="en-US" altLang="ko-KR" sz="2000" dirty="0">
@@ -10865,7 +10916,7 @@
           <a:p>
             <a:fld id="{0F78D9C4-20C1-4B15-A116-16DC77AD9A1E}" type="datetime1">
               <a:rPr lang="ko-KR" altLang="en-US" smtClean="0"/>
-              <a:t>2024-08-04</a:t>
+              <a:t>2024-08-05</a:t>
             </a:fld>
             <a:endParaRPr lang="ko-KR" altLang="en-US"/>
           </a:p>
@@ -11208,15 +11259,6 @@
                 <a:latin typeface="+mn-ea"/>
               </a:rPr>
               <a:t>강의 클릭</a:t>
-            </a:r>
-            <a:r>
-              <a:rPr lang="en-US" altLang="ko-KR" dirty="0">
-                <a:solidFill>
-                  <a:srgbClr val="212529"/>
-                </a:solidFill>
-                <a:latin typeface="+mn-ea"/>
-              </a:rPr>
-              <a:t/>
             </a:r>
             <a:br>
               <a:rPr lang="en-US" altLang="ko-KR" dirty="0">
